--- a/presentation/team05_presentation.pptx
+++ b/presentation/team05_presentation.pptx
@@ -13,10 +13,10 @@
   <p:sldIdLst>
     <p:sldId id="268" r:id="rId5"/>
     <p:sldId id="324" r:id="rId6"/>
-    <p:sldId id="310" r:id="rId7"/>
-    <p:sldId id="261" r:id="rId8"/>
-    <p:sldId id="325" r:id="rId9"/>
-    <p:sldId id="326" r:id="rId10"/>
+    <p:sldId id="332" r:id="rId7"/>
+    <p:sldId id="326" r:id="rId8"/>
+    <p:sldId id="310" r:id="rId9"/>
+    <p:sldId id="261" r:id="rId10"/>
     <p:sldId id="317" r:id="rId11"/>
     <p:sldId id="328" r:id="rId12"/>
     <p:sldId id="329" r:id="rId13"/>
@@ -134,18 +134,30 @@
 </file>
 
 <file path=ppt/diagrams/colors1.xml><?xml version="1.0" encoding="utf-8"?>
-<dgm:colorsDef xmlns:dgm="http://schemas.openxmlformats.org/drawingml/2006/diagram" xmlns:a="http://schemas.openxmlformats.org/drawingml/2006/main" uniqueId="urn:microsoft.com/office/officeart/2005/8/colors/accent0_3">
+<dgm:colorsDef xmlns:dgm="http://schemas.openxmlformats.org/drawingml/2006/diagram" xmlns:a="http://schemas.openxmlformats.org/drawingml/2006/main" uniqueId="urn:microsoft.com/office/officeart/2005/8/colors/accent3_2">
   <dgm:title val=""/>
   <dgm:desc val=""/>
   <dgm:catLst>
-    <dgm:cat type="mainScheme" pri="10300"/>
+    <dgm:cat type="accent3" pri="11200"/>
   </dgm:catLst>
   <dgm:styleLbl name="node0">
     <dgm:fillClrLst meth="repeat">
-      <a:schemeClr val="dk2"/>
+      <a:schemeClr val="accent3"/>
     </dgm:fillClrLst>
     <dgm:linClrLst meth="repeat">
-      <a:schemeClr val="lt2"/>
+      <a:schemeClr val="lt1"/>
+    </dgm:linClrLst>
+    <dgm:effectClrLst/>
+    <dgm:txLinClrLst/>
+    <dgm:txFillClrLst/>
+    <dgm:txEffectClrLst/>
+  </dgm:styleLbl>
+  <dgm:styleLbl name="node1">
+    <dgm:fillClrLst meth="repeat">
+      <a:schemeClr val="accent3"/>
+    </dgm:fillClrLst>
+    <dgm:linClrLst meth="repeat">
+      <a:schemeClr val="lt1"/>
     </dgm:linClrLst>
     <dgm:effectClrLst/>
     <dgm:txLinClrLst/>
@@ -154,22 +166,10 @@
   </dgm:styleLbl>
   <dgm:styleLbl name="alignNode1">
     <dgm:fillClrLst meth="repeat">
-      <a:schemeClr val="dk2"/>
+      <a:schemeClr val="accent3"/>
     </dgm:fillClrLst>
     <dgm:linClrLst meth="repeat">
-      <a:schemeClr val="dk2"/>
-    </dgm:linClrLst>
-    <dgm:effectClrLst/>
-    <dgm:txLinClrLst/>
-    <dgm:txFillClrLst/>
-    <dgm:txEffectClrLst/>
-  </dgm:styleLbl>
-  <dgm:styleLbl name="node1">
-    <dgm:fillClrLst meth="repeat">
-      <a:schemeClr val="dk2"/>
-    </dgm:fillClrLst>
-    <dgm:linClrLst meth="repeat">
-      <a:schemeClr val="lt2"/>
+      <a:schemeClr val="accent3"/>
     </dgm:linClrLst>
     <dgm:effectClrLst/>
     <dgm:txLinClrLst/>
@@ -178,10 +178,10 @@
   </dgm:styleLbl>
   <dgm:styleLbl name="lnNode1">
     <dgm:fillClrLst meth="repeat">
-      <a:schemeClr val="dk2"/>
+      <a:schemeClr val="accent3"/>
     </dgm:fillClrLst>
     <dgm:linClrLst meth="repeat">
-      <a:schemeClr val="lt2"/>
+      <a:schemeClr val="lt1"/>
     </dgm:linClrLst>
     <dgm:effectClrLst/>
     <dgm:txLinClrLst/>
@@ -190,12 +190,12 @@
   </dgm:styleLbl>
   <dgm:styleLbl name="vennNode1">
     <dgm:fillClrLst meth="repeat">
-      <a:schemeClr val="dk2">
+      <a:schemeClr val="accent3">
         <a:alpha val="50000"/>
       </a:schemeClr>
     </dgm:fillClrLst>
     <dgm:linClrLst meth="repeat">
-      <a:schemeClr val="lt2"/>
+      <a:schemeClr val="lt1"/>
     </dgm:linClrLst>
     <dgm:effectClrLst/>
     <dgm:txLinClrLst/>
@@ -204,10 +204,10 @@
   </dgm:styleLbl>
   <dgm:styleLbl name="node2">
     <dgm:fillClrLst meth="repeat">
-      <a:schemeClr val="dk2"/>
+      <a:schemeClr val="accent3"/>
     </dgm:fillClrLst>
     <dgm:linClrLst meth="repeat">
-      <a:schemeClr val="lt2"/>
+      <a:schemeClr val="lt1"/>
     </dgm:linClrLst>
     <dgm:effectClrLst/>
     <dgm:txLinClrLst/>
@@ -216,10 +216,10 @@
   </dgm:styleLbl>
   <dgm:styleLbl name="node3">
     <dgm:fillClrLst meth="repeat">
-      <a:schemeClr val="dk2"/>
+      <a:schemeClr val="accent3"/>
     </dgm:fillClrLst>
     <dgm:linClrLst meth="repeat">
-      <a:schemeClr val="lt2"/>
+      <a:schemeClr val="lt1"/>
     </dgm:linClrLst>
     <dgm:effectClrLst/>
     <dgm:txLinClrLst/>
@@ -228,10 +228,10 @@
   </dgm:styleLbl>
   <dgm:styleLbl name="node4">
     <dgm:fillClrLst meth="repeat">
-      <a:schemeClr val="dk2"/>
+      <a:schemeClr val="accent3"/>
     </dgm:fillClrLst>
     <dgm:linClrLst meth="repeat">
-      <a:schemeClr val="lt2"/>
+      <a:schemeClr val="lt1"/>
     </dgm:linClrLst>
     <dgm:effectClrLst/>
     <dgm:txLinClrLst/>
@@ -240,64 +240,60 @@
   </dgm:styleLbl>
   <dgm:styleLbl name="fgImgPlace1">
     <dgm:fillClrLst meth="repeat">
-      <a:schemeClr val="dk2">
+      <a:schemeClr val="accent3">
         <a:tint val="50000"/>
       </a:schemeClr>
     </dgm:fillClrLst>
     <dgm:linClrLst meth="repeat">
-      <a:schemeClr val="lt2"/>
+      <a:schemeClr val="lt1"/>
     </dgm:linClrLst>
     <dgm:effectClrLst/>
     <dgm:txLinClrLst/>
     <dgm:txFillClrLst meth="repeat">
-      <a:schemeClr val="lt2"/>
+      <a:schemeClr val="lt1"/>
     </dgm:txFillClrLst>
     <dgm:txEffectClrLst/>
   </dgm:styleLbl>
   <dgm:styleLbl name="alignImgPlace1">
     <dgm:fillClrLst meth="repeat">
-      <a:schemeClr val="dk2">
+      <a:schemeClr val="accent3">
         <a:tint val="50000"/>
       </a:schemeClr>
     </dgm:fillClrLst>
     <dgm:linClrLst meth="repeat">
-      <a:schemeClr val="dk2">
-        <a:shade val="80000"/>
-      </a:schemeClr>
+      <a:schemeClr val="lt1"/>
     </dgm:linClrLst>
     <dgm:effectClrLst/>
     <dgm:txLinClrLst/>
     <dgm:txFillClrLst meth="repeat">
-      <a:schemeClr val="lt2"/>
+      <a:schemeClr val="lt1"/>
     </dgm:txFillClrLst>
     <dgm:txEffectClrLst/>
   </dgm:styleLbl>
   <dgm:styleLbl name="bgImgPlace1">
     <dgm:fillClrLst meth="repeat">
-      <a:schemeClr val="dk2">
+      <a:schemeClr val="accent3">
         <a:tint val="50000"/>
       </a:schemeClr>
     </dgm:fillClrLst>
     <dgm:linClrLst meth="repeat">
-      <a:schemeClr val="dk2">
-        <a:shade val="80000"/>
-      </a:schemeClr>
+      <a:schemeClr val="lt1"/>
     </dgm:linClrLst>
     <dgm:effectClrLst/>
     <dgm:txLinClrLst/>
     <dgm:txFillClrLst meth="repeat">
-      <a:schemeClr val="lt2"/>
+      <a:schemeClr val="lt1"/>
     </dgm:txFillClrLst>
     <dgm:txEffectClrLst/>
   </dgm:styleLbl>
   <dgm:styleLbl name="sibTrans2D1">
     <dgm:fillClrLst meth="repeat">
-      <a:schemeClr val="dk2">
+      <a:schemeClr val="accent3">
         <a:tint val="60000"/>
       </a:schemeClr>
     </dgm:fillClrLst>
     <dgm:linClrLst meth="repeat">
-      <a:schemeClr val="dk2">
+      <a:schemeClr val="accent3">
         <a:tint val="60000"/>
       </a:schemeClr>
     </dgm:linClrLst>
@@ -308,12 +304,12 @@
   </dgm:styleLbl>
   <dgm:styleLbl name="fgSibTrans2D1">
     <dgm:fillClrLst meth="repeat">
-      <a:schemeClr val="dk2">
+      <a:schemeClr val="accent3">
         <a:tint val="60000"/>
       </a:schemeClr>
     </dgm:fillClrLst>
     <dgm:linClrLst meth="repeat">
-      <a:schemeClr val="dk2">
+      <a:schemeClr val="accent3">
         <a:tint val="60000"/>
       </a:schemeClr>
     </dgm:linClrLst>
@@ -324,12 +320,12 @@
   </dgm:styleLbl>
   <dgm:styleLbl name="bgSibTrans2D1">
     <dgm:fillClrLst meth="repeat">
-      <a:schemeClr val="dk2">
+      <a:schemeClr val="accent3">
         <a:tint val="60000"/>
       </a:schemeClr>
     </dgm:fillClrLst>
     <dgm:linClrLst meth="repeat">
-      <a:schemeClr val="dk2">
+      <a:schemeClr val="accent3">
         <a:tint val="60000"/>
       </a:schemeClr>
     </dgm:linClrLst>
@@ -340,40 +336,40 @@
   </dgm:styleLbl>
   <dgm:styleLbl name="sibTrans1D1">
     <dgm:fillClrLst meth="repeat">
-      <a:schemeClr val="dk2"/>
+      <a:schemeClr val="accent3"/>
     </dgm:fillClrLst>
     <dgm:linClrLst meth="repeat">
-      <a:schemeClr val="dk2"/>
+      <a:schemeClr val="accent3"/>
     </dgm:linClrLst>
     <dgm:effectClrLst/>
     <dgm:txLinClrLst/>
     <dgm:txFillClrLst meth="repeat">
-      <a:schemeClr val="lt2"/>
+      <a:schemeClr val="tx1"/>
     </dgm:txFillClrLst>
     <dgm:txEffectClrLst/>
   </dgm:styleLbl>
   <dgm:styleLbl name="callout">
     <dgm:fillClrLst meth="repeat">
-      <a:schemeClr val="dk2"/>
+      <a:schemeClr val="accent3"/>
     </dgm:fillClrLst>
     <dgm:linClrLst meth="repeat">
-      <a:schemeClr val="dk2">
+      <a:schemeClr val="accent3">
         <a:tint val="50000"/>
       </a:schemeClr>
     </dgm:linClrLst>
     <dgm:effectClrLst/>
     <dgm:txLinClrLst/>
     <dgm:txFillClrLst meth="repeat">
-      <a:schemeClr val="lt2"/>
+      <a:schemeClr val="tx1"/>
     </dgm:txFillClrLst>
     <dgm:txEffectClrLst/>
   </dgm:styleLbl>
   <dgm:styleLbl name="asst0">
     <dgm:fillClrLst meth="repeat">
-      <a:schemeClr val="dk2"/>
+      <a:schemeClr val="accent3"/>
     </dgm:fillClrLst>
     <dgm:linClrLst meth="repeat">
-      <a:schemeClr val="lt2"/>
+      <a:schemeClr val="lt1"/>
     </dgm:linClrLst>
     <dgm:effectClrLst/>
     <dgm:txLinClrLst/>
@@ -382,10 +378,10 @@
   </dgm:styleLbl>
   <dgm:styleLbl name="asst1">
     <dgm:fillClrLst meth="repeat">
-      <a:schemeClr val="dk2"/>
+      <a:schemeClr val="accent3"/>
     </dgm:fillClrLst>
     <dgm:linClrLst meth="repeat">
-      <a:schemeClr val="lt2"/>
+      <a:schemeClr val="lt1"/>
     </dgm:linClrLst>
     <dgm:effectClrLst/>
     <dgm:txLinClrLst/>
@@ -394,10 +390,10 @@
   </dgm:styleLbl>
   <dgm:styleLbl name="asst2">
     <dgm:fillClrLst meth="repeat">
-      <a:schemeClr val="dk2"/>
+      <a:schemeClr val="accent3"/>
     </dgm:fillClrLst>
     <dgm:linClrLst meth="repeat">
-      <a:schemeClr val="lt2"/>
+      <a:schemeClr val="lt1"/>
     </dgm:linClrLst>
     <dgm:effectClrLst/>
     <dgm:txLinClrLst/>
@@ -406,10 +402,10 @@
   </dgm:styleLbl>
   <dgm:styleLbl name="asst3">
     <dgm:fillClrLst meth="repeat">
-      <a:schemeClr val="dk2"/>
+      <a:schemeClr val="accent3"/>
     </dgm:fillClrLst>
     <dgm:linClrLst meth="repeat">
-      <a:schemeClr val="lt2"/>
+      <a:schemeClr val="lt1"/>
     </dgm:linClrLst>
     <dgm:effectClrLst/>
     <dgm:txLinClrLst/>
@@ -418,10 +414,10 @@
   </dgm:styleLbl>
   <dgm:styleLbl name="asst4">
     <dgm:fillClrLst meth="repeat">
-      <a:schemeClr val="dk2"/>
+      <a:schemeClr val="accent3"/>
     </dgm:fillClrLst>
     <dgm:linClrLst meth="repeat">
-      <a:schemeClr val="lt2"/>
+      <a:schemeClr val="lt1"/>
     </dgm:linClrLst>
     <dgm:effectClrLst/>
     <dgm:txLinClrLst/>
@@ -430,70 +426,70 @@
   </dgm:styleLbl>
   <dgm:styleLbl name="parChTrans2D1">
     <dgm:fillClrLst meth="repeat">
-      <a:schemeClr val="dk2">
+      <a:schemeClr val="accent3">
         <a:tint val="60000"/>
       </a:schemeClr>
     </dgm:fillClrLst>
     <dgm:linClrLst meth="repeat">
-      <a:schemeClr val="dk2">
+      <a:schemeClr val="accent3">
         <a:tint val="60000"/>
       </a:schemeClr>
     </dgm:linClrLst>
     <dgm:effectClrLst/>
     <dgm:txLinClrLst/>
     <dgm:txFillClrLst meth="repeat">
-      <a:schemeClr val="lt2"/>
+      <a:schemeClr val="lt1"/>
     </dgm:txFillClrLst>
     <dgm:txEffectClrLst/>
   </dgm:styleLbl>
   <dgm:styleLbl name="parChTrans2D2">
     <dgm:fillClrLst meth="repeat">
-      <a:schemeClr val="dk2"/>
+      <a:schemeClr val="accent3"/>
     </dgm:fillClrLst>
     <dgm:linClrLst meth="repeat">
-      <a:schemeClr val="dk2"/>
+      <a:schemeClr val="accent3"/>
     </dgm:linClrLst>
     <dgm:effectClrLst/>
     <dgm:txLinClrLst/>
     <dgm:txFillClrLst meth="repeat">
-      <a:schemeClr val="lt2"/>
+      <a:schemeClr val="lt1"/>
     </dgm:txFillClrLst>
     <dgm:txEffectClrLst/>
   </dgm:styleLbl>
   <dgm:styleLbl name="parChTrans2D3">
     <dgm:fillClrLst meth="repeat">
-      <a:schemeClr val="dk2"/>
+      <a:schemeClr val="accent3"/>
     </dgm:fillClrLst>
     <dgm:linClrLst meth="repeat">
-      <a:schemeClr val="dk2"/>
+      <a:schemeClr val="accent3"/>
     </dgm:linClrLst>
     <dgm:effectClrLst/>
     <dgm:txLinClrLst/>
     <dgm:txFillClrLst meth="repeat">
-      <a:schemeClr val="lt2"/>
+      <a:schemeClr val="lt1"/>
     </dgm:txFillClrLst>
     <dgm:txEffectClrLst/>
   </dgm:styleLbl>
   <dgm:styleLbl name="parChTrans2D4">
     <dgm:fillClrLst meth="repeat">
-      <a:schemeClr val="dk2"/>
+      <a:schemeClr val="accent3"/>
     </dgm:fillClrLst>
     <dgm:linClrLst meth="repeat">
-      <a:schemeClr val="dk2"/>
+      <a:schemeClr val="accent3"/>
     </dgm:linClrLst>
     <dgm:effectClrLst/>
     <dgm:txLinClrLst/>
     <dgm:txFillClrLst meth="repeat">
-      <a:schemeClr val="lt2"/>
+      <a:schemeClr val="lt1"/>
     </dgm:txFillClrLst>
     <dgm:txEffectClrLst/>
   </dgm:styleLbl>
   <dgm:styleLbl name="parChTrans1D1">
     <dgm:fillClrLst meth="repeat">
-      <a:schemeClr val="dk2"/>
+      <a:schemeClr val="accent3"/>
     </dgm:fillClrLst>
     <dgm:linClrLst meth="repeat">
-      <a:schemeClr val="dk2">
+      <a:schemeClr val="accent3">
         <a:shade val="60000"/>
       </a:schemeClr>
     </dgm:linClrLst>
@@ -506,10 +502,10 @@
   </dgm:styleLbl>
   <dgm:styleLbl name="parChTrans1D2">
     <dgm:fillClrLst meth="repeat">
-      <a:schemeClr val="dk2"/>
+      <a:schemeClr val="accent3"/>
     </dgm:fillClrLst>
     <dgm:linClrLst meth="repeat">
-      <a:schemeClr val="dk2">
+      <a:schemeClr val="accent3">
         <a:shade val="60000"/>
       </a:schemeClr>
     </dgm:linClrLst>
@@ -522,10 +518,10 @@
   </dgm:styleLbl>
   <dgm:styleLbl name="parChTrans1D3">
     <dgm:fillClrLst meth="repeat">
-      <a:schemeClr val="dk2"/>
+      <a:schemeClr val="accent3"/>
     </dgm:fillClrLst>
     <dgm:linClrLst meth="repeat">
-      <a:schemeClr val="dk2">
+      <a:schemeClr val="accent3">
         <a:shade val="80000"/>
       </a:schemeClr>
     </dgm:linClrLst>
@@ -538,10 +534,10 @@
   </dgm:styleLbl>
   <dgm:styleLbl name="parChTrans1D4">
     <dgm:fillClrLst meth="repeat">
-      <a:schemeClr val="dk2"/>
+      <a:schemeClr val="accent3"/>
     </dgm:fillClrLst>
     <dgm:linClrLst meth="repeat">
-      <a:schemeClr val="dk2">
+      <a:schemeClr val="accent3">
         <a:shade val="80000"/>
       </a:schemeClr>
     </dgm:linClrLst>
@@ -554,12 +550,12 @@
   </dgm:styleLbl>
   <dgm:styleLbl name="fgAcc1">
     <dgm:fillClrLst meth="repeat">
-      <a:schemeClr val="lt2">
+      <a:schemeClr val="lt1">
         <a:alpha val="90000"/>
       </a:schemeClr>
     </dgm:fillClrLst>
     <dgm:linClrLst meth="repeat">
-      <a:schemeClr val="dk2"/>
+      <a:schemeClr val="accent3"/>
     </dgm:linClrLst>
     <dgm:effectClrLst/>
     <dgm:txLinClrLst/>
@@ -570,12 +566,12 @@
   </dgm:styleLbl>
   <dgm:styleLbl name="conFgAcc1">
     <dgm:fillClrLst meth="repeat">
-      <a:schemeClr val="lt2">
+      <a:schemeClr val="lt1">
         <a:alpha val="90000"/>
       </a:schemeClr>
     </dgm:fillClrLst>
     <dgm:linClrLst meth="repeat">
-      <a:schemeClr val="dk2"/>
+      <a:schemeClr val="accent3"/>
     </dgm:linClrLst>
     <dgm:effectClrLst/>
     <dgm:txLinClrLst/>
@@ -586,12 +582,12 @@
   </dgm:styleLbl>
   <dgm:styleLbl name="alignAcc1">
     <dgm:fillClrLst meth="repeat">
-      <a:schemeClr val="lt2">
+      <a:schemeClr val="lt1">
         <a:alpha val="90000"/>
       </a:schemeClr>
     </dgm:fillClrLst>
     <dgm:linClrLst meth="repeat">
-      <a:schemeClr val="dk2"/>
+      <a:schemeClr val="accent3"/>
     </dgm:linClrLst>
     <dgm:effectClrLst/>
     <dgm:txLinClrLst/>
@@ -602,12 +598,12 @@
   </dgm:styleLbl>
   <dgm:styleLbl name="trAlignAcc1">
     <dgm:fillClrLst meth="repeat">
-      <a:schemeClr val="lt2">
+      <a:schemeClr val="lt1">
         <a:alpha val="40000"/>
       </a:schemeClr>
     </dgm:fillClrLst>
     <dgm:linClrLst meth="repeat">
-      <a:schemeClr val="dk2"/>
+      <a:schemeClr val="accent3"/>
     </dgm:linClrLst>
     <dgm:effectClrLst/>
     <dgm:txLinClrLst/>
@@ -618,12 +614,12 @@
   </dgm:styleLbl>
   <dgm:styleLbl name="bgAcc1">
     <dgm:fillClrLst meth="repeat">
-      <a:schemeClr val="lt2">
+      <a:schemeClr val="lt1">
         <a:alpha val="90000"/>
       </a:schemeClr>
     </dgm:fillClrLst>
     <dgm:linClrLst meth="repeat">
-      <a:schemeClr val="dk2"/>
+      <a:schemeClr val="accent3"/>
     </dgm:linClrLst>
     <dgm:effectClrLst/>
     <dgm:txLinClrLst/>
@@ -634,10 +630,10 @@
   </dgm:styleLbl>
   <dgm:styleLbl name="solidFgAcc1">
     <dgm:fillClrLst meth="repeat">
-      <a:schemeClr val="lt2"/>
+      <a:schemeClr val="lt1"/>
     </dgm:fillClrLst>
     <dgm:linClrLst meth="repeat">
-      <a:schemeClr val="dk2"/>
+      <a:schemeClr val="accent3"/>
     </dgm:linClrLst>
     <dgm:effectClrLst/>
     <dgm:txLinClrLst/>
@@ -648,10 +644,10 @@
   </dgm:styleLbl>
   <dgm:styleLbl name="solidAlignAcc1">
     <dgm:fillClrLst meth="repeat">
-      <a:schemeClr val="lt2"/>
+      <a:schemeClr val="lt1"/>
     </dgm:fillClrLst>
     <dgm:linClrLst meth="repeat">
-      <a:schemeClr val="dk2"/>
+      <a:schemeClr val="accent3"/>
     </dgm:linClrLst>
     <dgm:effectClrLst/>
     <dgm:txLinClrLst/>
@@ -662,10 +658,10 @@
   </dgm:styleLbl>
   <dgm:styleLbl name="solidBgAcc1">
     <dgm:fillClrLst meth="repeat">
-      <a:schemeClr val="lt2"/>
+      <a:schemeClr val="lt1"/>
     </dgm:fillClrLst>
     <dgm:linClrLst meth="repeat">
-      <a:schemeClr val="dk2"/>
+      <a:schemeClr val="accent3"/>
     </dgm:linClrLst>
     <dgm:effectClrLst/>
     <dgm:txLinClrLst/>
@@ -676,13 +672,13 @@
   </dgm:styleLbl>
   <dgm:styleLbl name="fgAccFollowNode1">
     <dgm:fillClrLst meth="repeat">
-      <a:schemeClr val="dk2">
+      <a:schemeClr val="accent3">
         <a:alpha val="90000"/>
         <a:tint val="40000"/>
       </a:schemeClr>
     </dgm:fillClrLst>
     <dgm:linClrLst meth="repeat">
-      <a:schemeClr val="dk2">
+      <a:schemeClr val="accent3">
         <a:alpha val="90000"/>
         <a:tint val="40000"/>
       </a:schemeClr>
@@ -696,13 +692,13 @@
   </dgm:styleLbl>
   <dgm:styleLbl name="alignAccFollowNode1">
     <dgm:fillClrLst meth="repeat">
-      <a:schemeClr val="dk2">
+      <a:schemeClr val="accent3">
         <a:alpha val="90000"/>
         <a:tint val="40000"/>
       </a:schemeClr>
     </dgm:fillClrLst>
     <dgm:linClrLst meth="repeat">
-      <a:schemeClr val="dk2">
+      <a:schemeClr val="accent3">
         <a:alpha val="90000"/>
         <a:tint val="40000"/>
       </a:schemeClr>
@@ -716,13 +712,13 @@
   </dgm:styleLbl>
   <dgm:styleLbl name="bgAccFollowNode1">
     <dgm:fillClrLst meth="repeat">
-      <a:schemeClr val="dk2">
+      <a:schemeClr val="accent3">
         <a:alpha val="90000"/>
         <a:tint val="40000"/>
       </a:schemeClr>
     </dgm:fillClrLst>
     <dgm:linClrLst meth="repeat">
-      <a:schemeClr val="dk2">
+      <a:schemeClr val="accent3">
         <a:alpha val="90000"/>
         <a:tint val="40000"/>
       </a:schemeClr>
@@ -736,12 +732,12 @@
   </dgm:styleLbl>
   <dgm:styleLbl name="fgAcc0">
     <dgm:fillClrLst meth="repeat">
-      <a:schemeClr val="lt2">
+      <a:schemeClr val="lt1">
         <a:alpha val="90000"/>
       </a:schemeClr>
     </dgm:fillClrLst>
     <dgm:linClrLst meth="repeat">
-      <a:schemeClr val="dk2"/>
+      <a:schemeClr val="accent3"/>
     </dgm:linClrLst>
     <dgm:effectClrLst/>
     <dgm:txLinClrLst/>
@@ -752,12 +748,12 @@
   </dgm:styleLbl>
   <dgm:styleLbl name="fgAcc2">
     <dgm:fillClrLst meth="repeat">
-      <a:schemeClr val="lt2">
+      <a:schemeClr val="lt1">
         <a:alpha val="90000"/>
       </a:schemeClr>
     </dgm:fillClrLst>
     <dgm:linClrLst meth="repeat">
-      <a:schemeClr val="dk2"/>
+      <a:schemeClr val="accent3"/>
     </dgm:linClrLst>
     <dgm:effectClrLst/>
     <dgm:txLinClrLst/>
@@ -768,12 +764,12 @@
   </dgm:styleLbl>
   <dgm:styleLbl name="fgAcc3">
     <dgm:fillClrLst meth="repeat">
-      <a:schemeClr val="lt2">
+      <a:schemeClr val="lt1">
         <a:alpha val="90000"/>
       </a:schemeClr>
     </dgm:fillClrLst>
     <dgm:linClrLst meth="repeat">
-      <a:schemeClr val="dk2"/>
+      <a:schemeClr val="accent3"/>
     </dgm:linClrLst>
     <dgm:effectClrLst/>
     <dgm:txLinClrLst/>
@@ -784,12 +780,12 @@
   </dgm:styleLbl>
   <dgm:styleLbl name="fgAcc4">
     <dgm:fillClrLst meth="repeat">
-      <a:schemeClr val="lt2">
+      <a:schemeClr val="lt1">
         <a:alpha val="90000"/>
       </a:schemeClr>
     </dgm:fillClrLst>
     <dgm:linClrLst meth="repeat">
-      <a:schemeClr val="dk2"/>
+      <a:schemeClr val="accent3"/>
     </dgm:linClrLst>
     <dgm:effectClrLst/>
     <dgm:txLinClrLst/>
@@ -800,12 +796,12 @@
   </dgm:styleLbl>
   <dgm:styleLbl name="bgShp">
     <dgm:fillClrLst meth="repeat">
-      <a:schemeClr val="dk2">
+      <a:schemeClr val="accent3">
         <a:tint val="40000"/>
       </a:schemeClr>
     </dgm:fillClrLst>
     <dgm:linClrLst meth="repeat">
-      <a:schemeClr val="dk2"/>
+      <a:schemeClr val="accent3"/>
     </dgm:linClrLst>
     <dgm:effectClrLst/>
     <dgm:txLinClrLst/>
@@ -816,12 +812,12 @@
   </dgm:styleLbl>
   <dgm:styleLbl name="dkBgShp">
     <dgm:fillClrLst meth="repeat">
-      <a:schemeClr val="dk2">
+      <a:schemeClr val="accent3">
         <a:shade val="80000"/>
       </a:schemeClr>
     </dgm:fillClrLst>
     <dgm:linClrLst meth="repeat">
-      <a:schemeClr val="dk2"/>
+      <a:schemeClr val="accent3"/>
     </dgm:linClrLst>
     <dgm:effectClrLst/>
     <dgm:txLinClrLst/>
@@ -832,13 +828,13 @@
   </dgm:styleLbl>
   <dgm:styleLbl name="trBgShp">
     <dgm:fillClrLst meth="repeat">
-      <a:schemeClr val="dk2">
+      <a:schemeClr val="accent3">
         <a:tint val="50000"/>
         <a:alpha val="40000"/>
       </a:schemeClr>
     </dgm:fillClrLst>
     <dgm:linClrLst meth="repeat">
-      <a:schemeClr val="dk2"/>
+      <a:schemeClr val="accent3"/>
     </dgm:linClrLst>
     <dgm:effectClrLst/>
     <dgm:txLinClrLst/>
@@ -849,12 +845,12 @@
   </dgm:styleLbl>
   <dgm:styleLbl name="fgShp">
     <dgm:fillClrLst meth="repeat">
-      <a:schemeClr val="dk2">
+      <a:schemeClr val="accent3">
         <a:tint val="60000"/>
       </a:schemeClr>
     </dgm:fillClrLst>
     <dgm:linClrLst meth="repeat">
-      <a:schemeClr val="lt2"/>
+      <a:schemeClr val="lt1"/>
     </dgm:linClrLst>
     <dgm:effectClrLst/>
     <dgm:txLinClrLst/>
@@ -865,7 +861,754 @@
   </dgm:styleLbl>
   <dgm:styleLbl name="revTx">
     <dgm:fillClrLst meth="repeat">
-      <a:schemeClr val="lt2">
+      <a:schemeClr val="lt1">
+        <a:alpha val="0"/>
+      </a:schemeClr>
+    </dgm:fillClrLst>
+    <dgm:linClrLst meth="repeat">
+      <a:schemeClr val="dk1">
+        <a:alpha val="0"/>
+      </a:schemeClr>
+    </dgm:linClrLst>
+    <dgm:effectClrLst/>
+    <dgm:txLinClrLst/>
+    <dgm:txFillClrLst meth="repeat">
+      <a:schemeClr val="tx1"/>
+    </dgm:txFillClrLst>
+    <dgm:txEffectClrLst/>
+  </dgm:styleLbl>
+</dgm:colorsDef>
+</file>
+
+<file path=ppt/diagrams/colors2.xml><?xml version="1.0" encoding="utf-8"?>
+<dgm:colorsDef xmlns:dgm="http://schemas.openxmlformats.org/drawingml/2006/diagram" xmlns:a="http://schemas.openxmlformats.org/drawingml/2006/main" uniqueId="urn:microsoft.com/office/officeart/2005/8/colors/accent3_2">
+  <dgm:title val=""/>
+  <dgm:desc val=""/>
+  <dgm:catLst>
+    <dgm:cat type="accent3" pri="11200"/>
+  </dgm:catLst>
+  <dgm:styleLbl name="node0">
+    <dgm:fillClrLst meth="repeat">
+      <a:schemeClr val="accent3"/>
+    </dgm:fillClrLst>
+    <dgm:linClrLst meth="repeat">
+      <a:schemeClr val="lt1"/>
+    </dgm:linClrLst>
+    <dgm:effectClrLst/>
+    <dgm:txLinClrLst/>
+    <dgm:txFillClrLst/>
+    <dgm:txEffectClrLst/>
+  </dgm:styleLbl>
+  <dgm:styleLbl name="node1">
+    <dgm:fillClrLst meth="repeat">
+      <a:schemeClr val="accent3"/>
+    </dgm:fillClrLst>
+    <dgm:linClrLst meth="repeat">
+      <a:schemeClr val="lt1"/>
+    </dgm:linClrLst>
+    <dgm:effectClrLst/>
+    <dgm:txLinClrLst/>
+    <dgm:txFillClrLst/>
+    <dgm:txEffectClrLst/>
+  </dgm:styleLbl>
+  <dgm:styleLbl name="alignNode1">
+    <dgm:fillClrLst meth="repeat">
+      <a:schemeClr val="accent3"/>
+    </dgm:fillClrLst>
+    <dgm:linClrLst meth="repeat">
+      <a:schemeClr val="accent3"/>
+    </dgm:linClrLst>
+    <dgm:effectClrLst/>
+    <dgm:txLinClrLst/>
+    <dgm:txFillClrLst/>
+    <dgm:txEffectClrLst/>
+  </dgm:styleLbl>
+  <dgm:styleLbl name="lnNode1">
+    <dgm:fillClrLst meth="repeat">
+      <a:schemeClr val="accent3"/>
+    </dgm:fillClrLst>
+    <dgm:linClrLst meth="repeat">
+      <a:schemeClr val="lt1"/>
+    </dgm:linClrLst>
+    <dgm:effectClrLst/>
+    <dgm:txLinClrLst/>
+    <dgm:txFillClrLst/>
+    <dgm:txEffectClrLst/>
+  </dgm:styleLbl>
+  <dgm:styleLbl name="vennNode1">
+    <dgm:fillClrLst meth="repeat">
+      <a:schemeClr val="accent3">
+        <a:alpha val="50000"/>
+      </a:schemeClr>
+    </dgm:fillClrLst>
+    <dgm:linClrLst meth="repeat">
+      <a:schemeClr val="lt1"/>
+    </dgm:linClrLst>
+    <dgm:effectClrLst/>
+    <dgm:txLinClrLst/>
+    <dgm:txFillClrLst/>
+    <dgm:txEffectClrLst/>
+  </dgm:styleLbl>
+  <dgm:styleLbl name="node2">
+    <dgm:fillClrLst meth="repeat">
+      <a:schemeClr val="accent3"/>
+    </dgm:fillClrLst>
+    <dgm:linClrLst meth="repeat">
+      <a:schemeClr val="lt1"/>
+    </dgm:linClrLst>
+    <dgm:effectClrLst/>
+    <dgm:txLinClrLst/>
+    <dgm:txFillClrLst/>
+    <dgm:txEffectClrLst/>
+  </dgm:styleLbl>
+  <dgm:styleLbl name="node3">
+    <dgm:fillClrLst meth="repeat">
+      <a:schemeClr val="accent3"/>
+    </dgm:fillClrLst>
+    <dgm:linClrLst meth="repeat">
+      <a:schemeClr val="lt1"/>
+    </dgm:linClrLst>
+    <dgm:effectClrLst/>
+    <dgm:txLinClrLst/>
+    <dgm:txFillClrLst/>
+    <dgm:txEffectClrLst/>
+  </dgm:styleLbl>
+  <dgm:styleLbl name="node4">
+    <dgm:fillClrLst meth="repeat">
+      <a:schemeClr val="accent3"/>
+    </dgm:fillClrLst>
+    <dgm:linClrLst meth="repeat">
+      <a:schemeClr val="lt1"/>
+    </dgm:linClrLst>
+    <dgm:effectClrLst/>
+    <dgm:txLinClrLst/>
+    <dgm:txFillClrLst/>
+    <dgm:txEffectClrLst/>
+  </dgm:styleLbl>
+  <dgm:styleLbl name="fgImgPlace1">
+    <dgm:fillClrLst meth="repeat">
+      <a:schemeClr val="accent3">
+        <a:tint val="50000"/>
+      </a:schemeClr>
+    </dgm:fillClrLst>
+    <dgm:linClrLst meth="repeat">
+      <a:schemeClr val="lt1"/>
+    </dgm:linClrLst>
+    <dgm:effectClrLst/>
+    <dgm:txLinClrLst/>
+    <dgm:txFillClrLst meth="repeat">
+      <a:schemeClr val="lt1"/>
+    </dgm:txFillClrLst>
+    <dgm:txEffectClrLst/>
+  </dgm:styleLbl>
+  <dgm:styleLbl name="alignImgPlace1">
+    <dgm:fillClrLst meth="repeat">
+      <a:schemeClr val="accent3">
+        <a:tint val="50000"/>
+      </a:schemeClr>
+    </dgm:fillClrLst>
+    <dgm:linClrLst meth="repeat">
+      <a:schemeClr val="lt1"/>
+    </dgm:linClrLst>
+    <dgm:effectClrLst/>
+    <dgm:txLinClrLst/>
+    <dgm:txFillClrLst meth="repeat">
+      <a:schemeClr val="lt1"/>
+    </dgm:txFillClrLst>
+    <dgm:txEffectClrLst/>
+  </dgm:styleLbl>
+  <dgm:styleLbl name="bgImgPlace1">
+    <dgm:fillClrLst meth="repeat">
+      <a:schemeClr val="accent3">
+        <a:tint val="50000"/>
+      </a:schemeClr>
+    </dgm:fillClrLst>
+    <dgm:linClrLst meth="repeat">
+      <a:schemeClr val="lt1"/>
+    </dgm:linClrLst>
+    <dgm:effectClrLst/>
+    <dgm:txLinClrLst/>
+    <dgm:txFillClrLst meth="repeat">
+      <a:schemeClr val="lt1"/>
+    </dgm:txFillClrLst>
+    <dgm:txEffectClrLst/>
+  </dgm:styleLbl>
+  <dgm:styleLbl name="sibTrans2D1">
+    <dgm:fillClrLst meth="repeat">
+      <a:schemeClr val="accent3">
+        <a:tint val="60000"/>
+      </a:schemeClr>
+    </dgm:fillClrLst>
+    <dgm:linClrLst meth="repeat">
+      <a:schemeClr val="accent3">
+        <a:tint val="60000"/>
+      </a:schemeClr>
+    </dgm:linClrLst>
+    <dgm:effectClrLst/>
+    <dgm:txLinClrLst/>
+    <dgm:txFillClrLst/>
+    <dgm:txEffectClrLst/>
+  </dgm:styleLbl>
+  <dgm:styleLbl name="fgSibTrans2D1">
+    <dgm:fillClrLst meth="repeat">
+      <a:schemeClr val="accent3">
+        <a:tint val="60000"/>
+      </a:schemeClr>
+    </dgm:fillClrLst>
+    <dgm:linClrLst meth="repeat">
+      <a:schemeClr val="accent3">
+        <a:tint val="60000"/>
+      </a:schemeClr>
+    </dgm:linClrLst>
+    <dgm:effectClrLst/>
+    <dgm:txLinClrLst/>
+    <dgm:txFillClrLst/>
+    <dgm:txEffectClrLst/>
+  </dgm:styleLbl>
+  <dgm:styleLbl name="bgSibTrans2D1">
+    <dgm:fillClrLst meth="repeat">
+      <a:schemeClr val="accent3">
+        <a:tint val="60000"/>
+      </a:schemeClr>
+    </dgm:fillClrLst>
+    <dgm:linClrLst meth="repeat">
+      <a:schemeClr val="accent3">
+        <a:tint val="60000"/>
+      </a:schemeClr>
+    </dgm:linClrLst>
+    <dgm:effectClrLst/>
+    <dgm:txLinClrLst/>
+    <dgm:txFillClrLst/>
+    <dgm:txEffectClrLst/>
+  </dgm:styleLbl>
+  <dgm:styleLbl name="sibTrans1D1">
+    <dgm:fillClrLst meth="repeat">
+      <a:schemeClr val="accent3"/>
+    </dgm:fillClrLst>
+    <dgm:linClrLst meth="repeat">
+      <a:schemeClr val="accent3"/>
+    </dgm:linClrLst>
+    <dgm:effectClrLst/>
+    <dgm:txLinClrLst/>
+    <dgm:txFillClrLst meth="repeat">
+      <a:schemeClr val="tx1"/>
+    </dgm:txFillClrLst>
+    <dgm:txEffectClrLst/>
+  </dgm:styleLbl>
+  <dgm:styleLbl name="callout">
+    <dgm:fillClrLst meth="repeat">
+      <a:schemeClr val="accent3"/>
+    </dgm:fillClrLst>
+    <dgm:linClrLst meth="repeat">
+      <a:schemeClr val="accent3">
+        <a:tint val="50000"/>
+      </a:schemeClr>
+    </dgm:linClrLst>
+    <dgm:effectClrLst/>
+    <dgm:txLinClrLst/>
+    <dgm:txFillClrLst meth="repeat">
+      <a:schemeClr val="tx1"/>
+    </dgm:txFillClrLst>
+    <dgm:txEffectClrLst/>
+  </dgm:styleLbl>
+  <dgm:styleLbl name="asst0">
+    <dgm:fillClrLst meth="repeat">
+      <a:schemeClr val="accent3"/>
+    </dgm:fillClrLst>
+    <dgm:linClrLst meth="repeat">
+      <a:schemeClr val="lt1"/>
+    </dgm:linClrLst>
+    <dgm:effectClrLst/>
+    <dgm:txLinClrLst/>
+    <dgm:txFillClrLst/>
+    <dgm:txEffectClrLst/>
+  </dgm:styleLbl>
+  <dgm:styleLbl name="asst1">
+    <dgm:fillClrLst meth="repeat">
+      <a:schemeClr val="accent3"/>
+    </dgm:fillClrLst>
+    <dgm:linClrLst meth="repeat">
+      <a:schemeClr val="lt1"/>
+    </dgm:linClrLst>
+    <dgm:effectClrLst/>
+    <dgm:txLinClrLst/>
+    <dgm:txFillClrLst/>
+    <dgm:txEffectClrLst/>
+  </dgm:styleLbl>
+  <dgm:styleLbl name="asst2">
+    <dgm:fillClrLst meth="repeat">
+      <a:schemeClr val="accent3"/>
+    </dgm:fillClrLst>
+    <dgm:linClrLst meth="repeat">
+      <a:schemeClr val="lt1"/>
+    </dgm:linClrLst>
+    <dgm:effectClrLst/>
+    <dgm:txLinClrLst/>
+    <dgm:txFillClrLst/>
+    <dgm:txEffectClrLst/>
+  </dgm:styleLbl>
+  <dgm:styleLbl name="asst3">
+    <dgm:fillClrLst meth="repeat">
+      <a:schemeClr val="accent3"/>
+    </dgm:fillClrLst>
+    <dgm:linClrLst meth="repeat">
+      <a:schemeClr val="lt1"/>
+    </dgm:linClrLst>
+    <dgm:effectClrLst/>
+    <dgm:txLinClrLst/>
+    <dgm:txFillClrLst/>
+    <dgm:txEffectClrLst/>
+  </dgm:styleLbl>
+  <dgm:styleLbl name="asst4">
+    <dgm:fillClrLst meth="repeat">
+      <a:schemeClr val="accent3"/>
+    </dgm:fillClrLst>
+    <dgm:linClrLst meth="repeat">
+      <a:schemeClr val="lt1"/>
+    </dgm:linClrLst>
+    <dgm:effectClrLst/>
+    <dgm:txLinClrLst/>
+    <dgm:txFillClrLst/>
+    <dgm:txEffectClrLst/>
+  </dgm:styleLbl>
+  <dgm:styleLbl name="parChTrans2D1">
+    <dgm:fillClrLst meth="repeat">
+      <a:schemeClr val="accent3">
+        <a:tint val="60000"/>
+      </a:schemeClr>
+    </dgm:fillClrLst>
+    <dgm:linClrLst meth="repeat">
+      <a:schemeClr val="accent3">
+        <a:tint val="60000"/>
+      </a:schemeClr>
+    </dgm:linClrLst>
+    <dgm:effectClrLst/>
+    <dgm:txLinClrLst/>
+    <dgm:txFillClrLst meth="repeat">
+      <a:schemeClr val="lt1"/>
+    </dgm:txFillClrLst>
+    <dgm:txEffectClrLst/>
+  </dgm:styleLbl>
+  <dgm:styleLbl name="parChTrans2D2">
+    <dgm:fillClrLst meth="repeat">
+      <a:schemeClr val="accent3"/>
+    </dgm:fillClrLst>
+    <dgm:linClrLst meth="repeat">
+      <a:schemeClr val="accent3"/>
+    </dgm:linClrLst>
+    <dgm:effectClrLst/>
+    <dgm:txLinClrLst/>
+    <dgm:txFillClrLst meth="repeat">
+      <a:schemeClr val="lt1"/>
+    </dgm:txFillClrLst>
+    <dgm:txEffectClrLst/>
+  </dgm:styleLbl>
+  <dgm:styleLbl name="parChTrans2D3">
+    <dgm:fillClrLst meth="repeat">
+      <a:schemeClr val="accent3"/>
+    </dgm:fillClrLst>
+    <dgm:linClrLst meth="repeat">
+      <a:schemeClr val="accent3"/>
+    </dgm:linClrLst>
+    <dgm:effectClrLst/>
+    <dgm:txLinClrLst/>
+    <dgm:txFillClrLst meth="repeat">
+      <a:schemeClr val="lt1"/>
+    </dgm:txFillClrLst>
+    <dgm:txEffectClrLst/>
+  </dgm:styleLbl>
+  <dgm:styleLbl name="parChTrans2D4">
+    <dgm:fillClrLst meth="repeat">
+      <a:schemeClr val="accent3"/>
+    </dgm:fillClrLst>
+    <dgm:linClrLst meth="repeat">
+      <a:schemeClr val="accent3"/>
+    </dgm:linClrLst>
+    <dgm:effectClrLst/>
+    <dgm:txLinClrLst/>
+    <dgm:txFillClrLst meth="repeat">
+      <a:schemeClr val="lt1"/>
+    </dgm:txFillClrLst>
+    <dgm:txEffectClrLst/>
+  </dgm:styleLbl>
+  <dgm:styleLbl name="parChTrans1D1">
+    <dgm:fillClrLst meth="repeat">
+      <a:schemeClr val="accent3"/>
+    </dgm:fillClrLst>
+    <dgm:linClrLst meth="repeat">
+      <a:schemeClr val="accent3">
+        <a:shade val="60000"/>
+      </a:schemeClr>
+    </dgm:linClrLst>
+    <dgm:effectClrLst/>
+    <dgm:txLinClrLst/>
+    <dgm:txFillClrLst meth="repeat">
+      <a:schemeClr val="tx1"/>
+    </dgm:txFillClrLst>
+    <dgm:txEffectClrLst/>
+  </dgm:styleLbl>
+  <dgm:styleLbl name="parChTrans1D2">
+    <dgm:fillClrLst meth="repeat">
+      <a:schemeClr val="accent3"/>
+    </dgm:fillClrLst>
+    <dgm:linClrLst meth="repeat">
+      <a:schemeClr val="accent3">
+        <a:shade val="60000"/>
+      </a:schemeClr>
+    </dgm:linClrLst>
+    <dgm:effectClrLst/>
+    <dgm:txLinClrLst/>
+    <dgm:txFillClrLst meth="repeat">
+      <a:schemeClr val="tx1"/>
+    </dgm:txFillClrLst>
+    <dgm:txEffectClrLst/>
+  </dgm:styleLbl>
+  <dgm:styleLbl name="parChTrans1D3">
+    <dgm:fillClrLst meth="repeat">
+      <a:schemeClr val="accent3"/>
+    </dgm:fillClrLst>
+    <dgm:linClrLst meth="repeat">
+      <a:schemeClr val="accent3">
+        <a:shade val="80000"/>
+      </a:schemeClr>
+    </dgm:linClrLst>
+    <dgm:effectClrLst/>
+    <dgm:txLinClrLst/>
+    <dgm:txFillClrLst meth="repeat">
+      <a:schemeClr val="tx1"/>
+    </dgm:txFillClrLst>
+    <dgm:txEffectClrLst/>
+  </dgm:styleLbl>
+  <dgm:styleLbl name="parChTrans1D4">
+    <dgm:fillClrLst meth="repeat">
+      <a:schemeClr val="accent3"/>
+    </dgm:fillClrLst>
+    <dgm:linClrLst meth="repeat">
+      <a:schemeClr val="accent3">
+        <a:shade val="80000"/>
+      </a:schemeClr>
+    </dgm:linClrLst>
+    <dgm:effectClrLst/>
+    <dgm:txLinClrLst/>
+    <dgm:txFillClrLst meth="repeat">
+      <a:schemeClr val="tx1"/>
+    </dgm:txFillClrLst>
+    <dgm:txEffectClrLst/>
+  </dgm:styleLbl>
+  <dgm:styleLbl name="fgAcc1">
+    <dgm:fillClrLst meth="repeat">
+      <a:schemeClr val="lt1">
+        <a:alpha val="90000"/>
+      </a:schemeClr>
+    </dgm:fillClrLst>
+    <dgm:linClrLst meth="repeat">
+      <a:schemeClr val="accent3"/>
+    </dgm:linClrLst>
+    <dgm:effectClrLst/>
+    <dgm:txLinClrLst/>
+    <dgm:txFillClrLst meth="repeat">
+      <a:schemeClr val="dk1"/>
+    </dgm:txFillClrLst>
+    <dgm:txEffectClrLst/>
+  </dgm:styleLbl>
+  <dgm:styleLbl name="conFgAcc1">
+    <dgm:fillClrLst meth="repeat">
+      <a:schemeClr val="lt1">
+        <a:alpha val="90000"/>
+      </a:schemeClr>
+    </dgm:fillClrLst>
+    <dgm:linClrLst meth="repeat">
+      <a:schemeClr val="accent3"/>
+    </dgm:linClrLst>
+    <dgm:effectClrLst/>
+    <dgm:txLinClrLst/>
+    <dgm:txFillClrLst meth="repeat">
+      <a:schemeClr val="dk1"/>
+    </dgm:txFillClrLst>
+    <dgm:txEffectClrLst/>
+  </dgm:styleLbl>
+  <dgm:styleLbl name="alignAcc1">
+    <dgm:fillClrLst meth="repeat">
+      <a:schemeClr val="lt1">
+        <a:alpha val="90000"/>
+      </a:schemeClr>
+    </dgm:fillClrLst>
+    <dgm:linClrLst meth="repeat">
+      <a:schemeClr val="accent3"/>
+    </dgm:linClrLst>
+    <dgm:effectClrLst/>
+    <dgm:txLinClrLst/>
+    <dgm:txFillClrLst meth="repeat">
+      <a:schemeClr val="dk1"/>
+    </dgm:txFillClrLst>
+    <dgm:txEffectClrLst/>
+  </dgm:styleLbl>
+  <dgm:styleLbl name="trAlignAcc1">
+    <dgm:fillClrLst meth="repeat">
+      <a:schemeClr val="lt1">
+        <a:alpha val="40000"/>
+      </a:schemeClr>
+    </dgm:fillClrLst>
+    <dgm:linClrLst meth="repeat">
+      <a:schemeClr val="accent3"/>
+    </dgm:linClrLst>
+    <dgm:effectClrLst/>
+    <dgm:txLinClrLst/>
+    <dgm:txFillClrLst meth="repeat">
+      <a:schemeClr val="dk1"/>
+    </dgm:txFillClrLst>
+    <dgm:txEffectClrLst/>
+  </dgm:styleLbl>
+  <dgm:styleLbl name="bgAcc1">
+    <dgm:fillClrLst meth="repeat">
+      <a:schemeClr val="lt1">
+        <a:alpha val="90000"/>
+      </a:schemeClr>
+    </dgm:fillClrLst>
+    <dgm:linClrLst meth="repeat">
+      <a:schemeClr val="accent3"/>
+    </dgm:linClrLst>
+    <dgm:effectClrLst/>
+    <dgm:txLinClrLst/>
+    <dgm:txFillClrLst meth="repeat">
+      <a:schemeClr val="dk1"/>
+    </dgm:txFillClrLst>
+    <dgm:txEffectClrLst/>
+  </dgm:styleLbl>
+  <dgm:styleLbl name="solidFgAcc1">
+    <dgm:fillClrLst meth="repeat">
+      <a:schemeClr val="lt1"/>
+    </dgm:fillClrLst>
+    <dgm:linClrLst meth="repeat">
+      <a:schemeClr val="accent3"/>
+    </dgm:linClrLst>
+    <dgm:effectClrLst/>
+    <dgm:txLinClrLst/>
+    <dgm:txFillClrLst meth="repeat">
+      <a:schemeClr val="dk1"/>
+    </dgm:txFillClrLst>
+    <dgm:txEffectClrLst/>
+  </dgm:styleLbl>
+  <dgm:styleLbl name="solidAlignAcc1">
+    <dgm:fillClrLst meth="repeat">
+      <a:schemeClr val="lt1"/>
+    </dgm:fillClrLst>
+    <dgm:linClrLst meth="repeat">
+      <a:schemeClr val="accent3"/>
+    </dgm:linClrLst>
+    <dgm:effectClrLst/>
+    <dgm:txLinClrLst/>
+    <dgm:txFillClrLst meth="repeat">
+      <a:schemeClr val="dk1"/>
+    </dgm:txFillClrLst>
+    <dgm:txEffectClrLst/>
+  </dgm:styleLbl>
+  <dgm:styleLbl name="solidBgAcc1">
+    <dgm:fillClrLst meth="repeat">
+      <a:schemeClr val="lt1"/>
+    </dgm:fillClrLst>
+    <dgm:linClrLst meth="repeat">
+      <a:schemeClr val="accent3"/>
+    </dgm:linClrLst>
+    <dgm:effectClrLst/>
+    <dgm:txLinClrLst/>
+    <dgm:txFillClrLst meth="repeat">
+      <a:schemeClr val="dk1"/>
+    </dgm:txFillClrLst>
+    <dgm:txEffectClrLst/>
+  </dgm:styleLbl>
+  <dgm:styleLbl name="fgAccFollowNode1">
+    <dgm:fillClrLst meth="repeat">
+      <a:schemeClr val="accent3">
+        <a:alpha val="90000"/>
+        <a:tint val="40000"/>
+      </a:schemeClr>
+    </dgm:fillClrLst>
+    <dgm:linClrLst meth="repeat">
+      <a:schemeClr val="accent3">
+        <a:alpha val="90000"/>
+        <a:tint val="40000"/>
+      </a:schemeClr>
+    </dgm:linClrLst>
+    <dgm:effectClrLst/>
+    <dgm:txLinClrLst/>
+    <dgm:txFillClrLst meth="repeat">
+      <a:schemeClr val="dk1"/>
+    </dgm:txFillClrLst>
+    <dgm:txEffectClrLst/>
+  </dgm:styleLbl>
+  <dgm:styleLbl name="alignAccFollowNode1">
+    <dgm:fillClrLst meth="repeat">
+      <a:schemeClr val="accent3">
+        <a:alpha val="90000"/>
+        <a:tint val="40000"/>
+      </a:schemeClr>
+    </dgm:fillClrLst>
+    <dgm:linClrLst meth="repeat">
+      <a:schemeClr val="accent3">
+        <a:alpha val="90000"/>
+        <a:tint val="40000"/>
+      </a:schemeClr>
+    </dgm:linClrLst>
+    <dgm:effectClrLst/>
+    <dgm:txLinClrLst/>
+    <dgm:txFillClrLst meth="repeat">
+      <a:schemeClr val="dk1"/>
+    </dgm:txFillClrLst>
+    <dgm:txEffectClrLst/>
+  </dgm:styleLbl>
+  <dgm:styleLbl name="bgAccFollowNode1">
+    <dgm:fillClrLst meth="repeat">
+      <a:schemeClr val="accent3">
+        <a:alpha val="90000"/>
+        <a:tint val="40000"/>
+      </a:schemeClr>
+    </dgm:fillClrLst>
+    <dgm:linClrLst meth="repeat">
+      <a:schemeClr val="accent3">
+        <a:alpha val="90000"/>
+        <a:tint val="40000"/>
+      </a:schemeClr>
+    </dgm:linClrLst>
+    <dgm:effectClrLst/>
+    <dgm:txLinClrLst/>
+    <dgm:txFillClrLst meth="repeat">
+      <a:schemeClr val="dk1"/>
+    </dgm:txFillClrLst>
+    <dgm:txEffectClrLst/>
+  </dgm:styleLbl>
+  <dgm:styleLbl name="fgAcc0">
+    <dgm:fillClrLst meth="repeat">
+      <a:schemeClr val="lt1">
+        <a:alpha val="90000"/>
+      </a:schemeClr>
+    </dgm:fillClrLst>
+    <dgm:linClrLst meth="repeat">
+      <a:schemeClr val="accent3"/>
+    </dgm:linClrLst>
+    <dgm:effectClrLst/>
+    <dgm:txLinClrLst/>
+    <dgm:txFillClrLst meth="repeat">
+      <a:schemeClr val="dk1"/>
+    </dgm:txFillClrLst>
+    <dgm:txEffectClrLst/>
+  </dgm:styleLbl>
+  <dgm:styleLbl name="fgAcc2">
+    <dgm:fillClrLst meth="repeat">
+      <a:schemeClr val="lt1">
+        <a:alpha val="90000"/>
+      </a:schemeClr>
+    </dgm:fillClrLst>
+    <dgm:linClrLst meth="repeat">
+      <a:schemeClr val="accent3"/>
+    </dgm:linClrLst>
+    <dgm:effectClrLst/>
+    <dgm:txLinClrLst/>
+    <dgm:txFillClrLst meth="repeat">
+      <a:schemeClr val="dk1"/>
+    </dgm:txFillClrLst>
+    <dgm:txEffectClrLst/>
+  </dgm:styleLbl>
+  <dgm:styleLbl name="fgAcc3">
+    <dgm:fillClrLst meth="repeat">
+      <a:schemeClr val="lt1">
+        <a:alpha val="90000"/>
+      </a:schemeClr>
+    </dgm:fillClrLst>
+    <dgm:linClrLst meth="repeat">
+      <a:schemeClr val="accent3"/>
+    </dgm:linClrLst>
+    <dgm:effectClrLst/>
+    <dgm:txLinClrLst/>
+    <dgm:txFillClrLst meth="repeat">
+      <a:schemeClr val="dk1"/>
+    </dgm:txFillClrLst>
+    <dgm:txEffectClrLst/>
+  </dgm:styleLbl>
+  <dgm:styleLbl name="fgAcc4">
+    <dgm:fillClrLst meth="repeat">
+      <a:schemeClr val="lt1">
+        <a:alpha val="90000"/>
+      </a:schemeClr>
+    </dgm:fillClrLst>
+    <dgm:linClrLst meth="repeat">
+      <a:schemeClr val="accent3"/>
+    </dgm:linClrLst>
+    <dgm:effectClrLst/>
+    <dgm:txLinClrLst/>
+    <dgm:txFillClrLst meth="repeat">
+      <a:schemeClr val="dk1"/>
+    </dgm:txFillClrLst>
+    <dgm:txEffectClrLst/>
+  </dgm:styleLbl>
+  <dgm:styleLbl name="bgShp">
+    <dgm:fillClrLst meth="repeat">
+      <a:schemeClr val="accent3">
+        <a:tint val="40000"/>
+      </a:schemeClr>
+    </dgm:fillClrLst>
+    <dgm:linClrLst meth="repeat">
+      <a:schemeClr val="accent3"/>
+    </dgm:linClrLst>
+    <dgm:effectClrLst/>
+    <dgm:txLinClrLst/>
+    <dgm:txFillClrLst meth="repeat">
+      <a:schemeClr val="dk1"/>
+    </dgm:txFillClrLst>
+    <dgm:txEffectClrLst/>
+  </dgm:styleLbl>
+  <dgm:styleLbl name="dkBgShp">
+    <dgm:fillClrLst meth="repeat">
+      <a:schemeClr val="accent3">
+        <a:shade val="80000"/>
+      </a:schemeClr>
+    </dgm:fillClrLst>
+    <dgm:linClrLst meth="repeat">
+      <a:schemeClr val="accent3"/>
+    </dgm:linClrLst>
+    <dgm:effectClrLst/>
+    <dgm:txLinClrLst/>
+    <dgm:txFillClrLst meth="repeat">
+      <a:schemeClr val="lt1"/>
+    </dgm:txFillClrLst>
+    <dgm:txEffectClrLst/>
+  </dgm:styleLbl>
+  <dgm:styleLbl name="trBgShp">
+    <dgm:fillClrLst meth="repeat">
+      <a:schemeClr val="accent3">
+        <a:tint val="50000"/>
+        <a:alpha val="40000"/>
+      </a:schemeClr>
+    </dgm:fillClrLst>
+    <dgm:linClrLst meth="repeat">
+      <a:schemeClr val="accent3"/>
+    </dgm:linClrLst>
+    <dgm:effectClrLst/>
+    <dgm:txLinClrLst/>
+    <dgm:txFillClrLst meth="repeat">
+      <a:schemeClr val="lt1"/>
+    </dgm:txFillClrLst>
+    <dgm:txEffectClrLst/>
+  </dgm:styleLbl>
+  <dgm:styleLbl name="fgShp">
+    <dgm:fillClrLst meth="repeat">
+      <a:schemeClr val="accent3">
+        <a:tint val="60000"/>
+      </a:schemeClr>
+    </dgm:fillClrLst>
+    <dgm:linClrLst meth="repeat">
+      <a:schemeClr val="lt1"/>
+    </dgm:linClrLst>
+    <dgm:effectClrLst/>
+    <dgm:txLinClrLst/>
+    <dgm:txFillClrLst meth="repeat">
+      <a:schemeClr val="dk1"/>
+    </dgm:txFillClrLst>
+    <dgm:txEffectClrLst/>
+  </dgm:styleLbl>
+  <dgm:styleLbl name="revTx">
+    <dgm:fillClrLst meth="repeat">
+      <a:schemeClr val="lt1">
         <a:alpha val="0"/>
       </a:schemeClr>
     </dgm:fillClrLst>
@@ -888,7 +1631,7 @@
 <dgm:dataModel xmlns:dgm="http://schemas.openxmlformats.org/drawingml/2006/diagram" xmlns:a="http://schemas.openxmlformats.org/drawingml/2006/main">
   <dgm:ptLst>
     <dgm:pt modelId="{A66480AC-C0DE-4E5E-9ECD-9AE37E3FCB79}" type="doc">
-      <dgm:prSet loTypeId="urn:microsoft.com/office/officeart/2016/7/layout/BasicTimeline" loCatId="timeline" qsTypeId="urn:microsoft.com/office/officeart/2005/8/quickstyle/simple1" qsCatId="simple" csTypeId="urn:microsoft.com/office/officeart/2005/8/colors/accent0_3" csCatId="mainScheme" phldr="1"/>
+      <dgm:prSet loTypeId="urn:microsoft.com/office/officeart/2016/7/layout/VerticalDownArrowProcess" loCatId="process" qsTypeId="urn:microsoft.com/office/officeart/2005/8/quickstyle/simple5" qsCatId="simple" csTypeId="urn:microsoft.com/office/officeart/2005/8/colors/accent3_2" csCatId="accent3" phldr="1"/>
       <dgm:spPr/>
       <dgm:t>
         <a:bodyPr/>
@@ -899,20 +1642,20 @@
       </dgm:t>
     </dgm:pt>
     <dgm:pt modelId="{A8C03FBB-4A75-4460-AEA6-DEAEB9C61496}">
-      <dgm:prSet phldrT="[Text]" phldr="0" custT="1"/>
+      <dgm:prSet phldrT="[Text]"/>
       <dgm:spPr/>
       <dgm:t>
         <a:bodyPr/>
         <a:lstStyle/>
         <a:p>
-          <a:pPr algn="ctr">
+          <a:pPr>
             <a:defRPr b="1"/>
           </a:pPr>
           <a:r>
-            <a:rPr lang="en-US" sz="2400" dirty="0">
+            <a:rPr lang="en-US" dirty="0">
               <a:latin typeface="+mn-lt"/>
             </a:rPr>
-            <a:t>Q3</a:t>
+            <a:t>Week 01-03</a:t>
           </a:r>
         </a:p>
       </dgm:t>
@@ -938,6 +1681,38 @@
         <a:bodyPr/>
         <a:lstStyle/>
         <a:p>
+          <a:endParaRPr lang="en-US">
+            <a:latin typeface="+mn-lt"/>
+          </a:endParaRPr>
+        </a:p>
+      </dgm:t>
+    </dgm:pt>
+    <dgm:pt modelId="{5E71F362-34DF-4EEC-92A3-0EFE450E05E4}">
+      <dgm:prSet phldrT="[Text]"/>
+      <dgm:spPr/>
+      <dgm:t>
+        <a:bodyPr/>
+        <a:lstStyle/>
+        <a:p>
+          <a:r>
+            <a:rPr lang="en-US" dirty="0" err="1">
+              <a:latin typeface="+mn-lt"/>
+            </a:rPr>
+            <a:t>GithubSetup</a:t>
+          </a:r>
+          <a:endParaRPr lang="en-US" dirty="0">
+            <a:latin typeface="+mn-lt"/>
+          </a:endParaRPr>
+        </a:p>
+      </dgm:t>
+    </dgm:pt>
+    <dgm:pt modelId="{8E5EE4D1-908E-455C-B8B3-281AD42DEC9A}" type="parTrans" cxnId="{B99CA6C9-28D1-4DDB-B8EC-AED73AD115CA}">
+      <dgm:prSet/>
+      <dgm:spPr/>
+      <dgm:t>
+        <a:bodyPr/>
+        <a:lstStyle/>
+        <a:p>
           <a:pPr algn="ctr"/>
           <a:endParaRPr lang="en-US" sz="2800">
             <a:latin typeface="+mn-lt"/>
@@ -945,19 +1720,494 @@
         </a:p>
       </dgm:t>
     </dgm:pt>
-    <dgm:pt modelId="{5E71F362-34DF-4EEC-92A3-0EFE450E05E4}">
-      <dgm:prSet phldrT="[Text]" phldr="0" custT="1"/>
+    <dgm:pt modelId="{B208B24A-E9FD-40A9-B764-FB7C2B7ED8B9}" type="sibTrans" cxnId="{B99CA6C9-28D1-4DDB-B8EC-AED73AD115CA}">
+      <dgm:prSet/>
+      <dgm:spPr/>
+      <dgm:t>
+        <a:bodyPr/>
+        <a:lstStyle/>
+        <a:p>
+          <a:endParaRPr lang="en-US">
+            <a:latin typeface="+mn-lt"/>
+          </a:endParaRPr>
+        </a:p>
+      </dgm:t>
+    </dgm:pt>
+    <dgm:pt modelId="{91969DED-4CB8-4A14-A50B-3F7B848E46B5}">
+      <dgm:prSet phldrT="[Text]"/>
+      <dgm:spPr/>
+      <dgm:t>
+        <a:bodyPr/>
+        <a:lstStyle/>
+        <a:p>
+          <a:pPr>
+            <a:defRPr b="1"/>
+          </a:pPr>
+          <a:r>
+            <a:rPr lang="en-US" dirty="0">
+              <a:latin typeface="+mn-lt"/>
+            </a:rPr>
+            <a:t>Week 04</a:t>
+          </a:r>
+        </a:p>
+      </dgm:t>
+    </dgm:pt>
+    <dgm:pt modelId="{441CD73D-85E1-42A6-BCF8-362A3247E2F3}" type="parTrans" cxnId="{537F2ED0-8BD0-4AD5-B60D-89B660EDA1AC}">
+      <dgm:prSet/>
       <dgm:spPr/>
       <dgm:t>
         <a:bodyPr/>
         <a:lstStyle/>
         <a:p>
           <a:pPr algn="ctr"/>
+          <a:endParaRPr lang="en-US" sz="2800">
+            <a:latin typeface="+mn-lt"/>
+          </a:endParaRPr>
+        </a:p>
+      </dgm:t>
+    </dgm:pt>
+    <dgm:pt modelId="{81CA8AA2-C0C3-4381-BA8B-413EDD578B83}" type="sibTrans" cxnId="{537F2ED0-8BD0-4AD5-B60D-89B660EDA1AC}">
+      <dgm:prSet/>
+      <dgm:spPr/>
+      <dgm:t>
+        <a:bodyPr/>
+        <a:lstStyle/>
+        <a:p>
+          <a:endParaRPr lang="en-US">
+            <a:latin typeface="+mn-lt"/>
+          </a:endParaRPr>
+        </a:p>
+      </dgm:t>
+    </dgm:pt>
+    <dgm:pt modelId="{8A04F340-E8E1-4146-9905-E7ADCAEAABD7}">
+      <dgm:prSet phldrT="[Text]"/>
+      <dgm:spPr/>
+      <dgm:t>
+        <a:bodyPr/>
+        <a:lstStyle/>
+        <a:p>
           <a:r>
-            <a:rPr lang="en-US" sz="2000" dirty="0">
+            <a:rPr lang="en-US" dirty="0">
               <a:latin typeface="+mn-lt"/>
             </a:rPr>
-            <a:t>Market research</a:t>
+            <a:t>Docker</a:t>
+          </a:r>
+        </a:p>
+      </dgm:t>
+    </dgm:pt>
+    <dgm:pt modelId="{4EBD5EC2-45ED-4ED6-8376-97D155A911AE}" type="parTrans" cxnId="{E636BFFB-0404-4D4B-B3F0-C64FDFD9DDEF}">
+      <dgm:prSet/>
+      <dgm:spPr/>
+      <dgm:t>
+        <a:bodyPr/>
+        <a:lstStyle/>
+        <a:p>
+          <a:pPr algn="ctr"/>
+          <a:endParaRPr lang="en-US" sz="2800">
+            <a:latin typeface="+mn-lt"/>
+          </a:endParaRPr>
+        </a:p>
+      </dgm:t>
+    </dgm:pt>
+    <dgm:pt modelId="{F9CD2A04-6A34-4104-A971-391788B88F55}" type="sibTrans" cxnId="{E636BFFB-0404-4D4B-B3F0-C64FDFD9DDEF}">
+      <dgm:prSet/>
+      <dgm:spPr/>
+      <dgm:t>
+        <a:bodyPr/>
+        <a:lstStyle/>
+        <a:p>
+          <a:endParaRPr lang="en-US">
+            <a:latin typeface="+mn-lt"/>
+          </a:endParaRPr>
+        </a:p>
+      </dgm:t>
+    </dgm:pt>
+    <dgm:pt modelId="{3CC73758-10C1-47F8-AFA7-1A986D4DDD60}">
+      <dgm:prSet phldrT="[Text]"/>
+      <dgm:spPr/>
+      <dgm:t>
+        <a:bodyPr/>
+        <a:lstStyle/>
+        <a:p>
+          <a:pPr>
+            <a:defRPr b="1"/>
+          </a:pPr>
+          <a:r>
+            <a:rPr lang="en-US" dirty="0">
+              <a:latin typeface="+mn-lt"/>
+            </a:rPr>
+            <a:t>Week 05 </a:t>
+          </a:r>
+        </a:p>
+      </dgm:t>
+    </dgm:pt>
+    <dgm:pt modelId="{FF6AE4B6-4A2F-49EE-9316-9AF55E77838B}" type="parTrans" cxnId="{4A69F85D-5C15-48FD-893A-B3050E1BADEB}">
+      <dgm:prSet/>
+      <dgm:spPr/>
+      <dgm:t>
+        <a:bodyPr/>
+        <a:lstStyle/>
+        <a:p>
+          <a:pPr algn="ctr"/>
+          <a:endParaRPr lang="en-US" sz="2800">
+            <a:latin typeface="+mn-lt"/>
+          </a:endParaRPr>
+        </a:p>
+      </dgm:t>
+    </dgm:pt>
+    <dgm:pt modelId="{D8170BBA-6035-4773-8431-FEDD687647FF}" type="sibTrans" cxnId="{4A69F85D-5C15-48FD-893A-B3050E1BADEB}">
+      <dgm:prSet/>
+      <dgm:spPr/>
+      <dgm:t>
+        <a:bodyPr/>
+        <a:lstStyle/>
+        <a:p>
+          <a:endParaRPr lang="en-US">
+            <a:latin typeface="+mn-lt"/>
+          </a:endParaRPr>
+        </a:p>
+      </dgm:t>
+    </dgm:pt>
+    <dgm:pt modelId="{FD9CA14A-483C-4869-B0C1-7C5FB7EEDBCC}">
+      <dgm:prSet phldrT="[Text]"/>
+      <dgm:spPr/>
+      <dgm:t>
+        <a:bodyPr/>
+        <a:lstStyle/>
+        <a:p>
+          <a:r>
+            <a:rPr lang="en-US" dirty="0">
+              <a:latin typeface="+mn-lt"/>
+            </a:rPr>
+            <a:t>Context</a:t>
+          </a:r>
+        </a:p>
+      </dgm:t>
+    </dgm:pt>
+    <dgm:pt modelId="{8182A92F-45BA-4CD1-8E43-0B0810A50FEB}" type="parTrans" cxnId="{5EDA943F-300F-408A-A52E-3D5140FD5C22}">
+      <dgm:prSet/>
+      <dgm:spPr/>
+      <dgm:t>
+        <a:bodyPr/>
+        <a:lstStyle/>
+        <a:p>
+          <a:pPr algn="ctr"/>
+          <a:endParaRPr lang="en-US" sz="2800">
+            <a:latin typeface="+mn-lt"/>
+          </a:endParaRPr>
+        </a:p>
+      </dgm:t>
+    </dgm:pt>
+    <dgm:pt modelId="{914BB93C-EA8A-4B5B-8F06-30DA7C7F4B7B}" type="sibTrans" cxnId="{5EDA943F-300F-408A-A52E-3D5140FD5C22}">
+      <dgm:prSet/>
+      <dgm:spPr/>
+      <dgm:t>
+        <a:bodyPr/>
+        <a:lstStyle/>
+        <a:p>
+          <a:endParaRPr lang="en-US">
+            <a:latin typeface="+mn-lt"/>
+          </a:endParaRPr>
+        </a:p>
+      </dgm:t>
+    </dgm:pt>
+    <dgm:pt modelId="{D2FE027B-4161-41E1-B4D4-02AECB2E3FA0}">
+      <dgm:prSet phldrT="[Text]"/>
+      <dgm:spPr/>
+      <dgm:t>
+        <a:bodyPr/>
+        <a:lstStyle/>
+        <a:p>
+          <a:pPr>
+            <a:defRPr b="1"/>
+          </a:pPr>
+          <a:r>
+            <a:rPr lang="en-US" dirty="0">
+              <a:latin typeface="+mn-lt"/>
+            </a:rPr>
+            <a:t>Week 06</a:t>
+          </a:r>
+        </a:p>
+      </dgm:t>
+    </dgm:pt>
+    <dgm:pt modelId="{88680CFE-3CE0-4842-B3D3-716D3B671238}" type="parTrans" cxnId="{4F4F82A2-02F1-492B-96C1-46C070BEFCE3}">
+      <dgm:prSet/>
+      <dgm:spPr/>
+      <dgm:t>
+        <a:bodyPr/>
+        <a:lstStyle/>
+        <a:p>
+          <a:pPr algn="ctr"/>
+          <a:endParaRPr lang="en-US" sz="2800">
+            <a:latin typeface="+mn-lt"/>
+          </a:endParaRPr>
+        </a:p>
+      </dgm:t>
+    </dgm:pt>
+    <dgm:pt modelId="{4D59E06B-629C-40B5-96D3-423B7A56C945}" type="sibTrans" cxnId="{4F4F82A2-02F1-492B-96C1-46C070BEFCE3}">
+      <dgm:prSet/>
+      <dgm:spPr/>
+      <dgm:t>
+        <a:bodyPr/>
+        <a:lstStyle/>
+        <a:p>
+          <a:endParaRPr lang="en-US">
+            <a:latin typeface="+mn-lt"/>
+          </a:endParaRPr>
+        </a:p>
+      </dgm:t>
+    </dgm:pt>
+    <dgm:pt modelId="{2BE415B7-7185-4956-8487-237B40BC0EE5}">
+      <dgm:prSet phldrT="[Text]"/>
+      <dgm:spPr/>
+      <dgm:t>
+        <a:bodyPr/>
+        <a:lstStyle/>
+        <a:p>
+          <a:r>
+            <a:rPr lang="en-US">
+              <a:latin typeface="+mn-lt"/>
+            </a:rPr>
+            <a:t>Den thimamai?</a:t>
+          </a:r>
+          <a:endParaRPr lang="en-US" dirty="0">
+            <a:latin typeface="+mn-lt"/>
+          </a:endParaRPr>
+        </a:p>
+      </dgm:t>
+    </dgm:pt>
+    <dgm:pt modelId="{A38E847E-0D1D-4F40-9A71-4D5999ADE08B}" type="parTrans" cxnId="{CB32A309-9CA9-4554-941D-519A91A9E733}">
+      <dgm:prSet/>
+      <dgm:spPr/>
+      <dgm:t>
+        <a:bodyPr/>
+        <a:lstStyle/>
+        <a:p>
+          <a:pPr algn="ctr"/>
+          <a:endParaRPr lang="en-US" sz="2800">
+            <a:latin typeface="+mn-lt"/>
+          </a:endParaRPr>
+        </a:p>
+      </dgm:t>
+    </dgm:pt>
+    <dgm:pt modelId="{F0D1C61C-E3F2-49BA-A2D8-C04A81308E5D}" type="sibTrans" cxnId="{CB32A309-9CA9-4554-941D-519A91A9E733}">
+      <dgm:prSet/>
+      <dgm:spPr/>
+      <dgm:t>
+        <a:bodyPr/>
+        <a:lstStyle/>
+        <a:p>
+          <a:endParaRPr lang="en-US">
+            <a:latin typeface="+mn-lt"/>
+          </a:endParaRPr>
+        </a:p>
+      </dgm:t>
+    </dgm:pt>
+    <dgm:pt modelId="{BD7F872A-6940-47EB-BE6C-C4EEAE96E551}" type="pres">
+      <dgm:prSet presAssocID="{A66480AC-C0DE-4E5E-9ECD-9AE37E3FCB79}" presName="Name0" presStyleCnt="0">
+        <dgm:presLayoutVars>
+          <dgm:dir/>
+          <dgm:animLvl val="lvl"/>
+          <dgm:resizeHandles val="exact"/>
+        </dgm:presLayoutVars>
+      </dgm:prSet>
+      <dgm:spPr/>
+    </dgm:pt>
+    <dgm:pt modelId="{2997D26D-0A31-4E94-8887-DAA723AC51C1}" type="pres">
+      <dgm:prSet presAssocID="{D2FE027B-4161-41E1-B4D4-02AECB2E3FA0}" presName="boxAndChildren" presStyleCnt="0"/>
+      <dgm:spPr/>
+    </dgm:pt>
+    <dgm:pt modelId="{1D474872-F0AF-4035-A9E3-43831297AAA1}" type="pres">
+      <dgm:prSet presAssocID="{D2FE027B-4161-41E1-B4D4-02AECB2E3FA0}" presName="parentTextBox" presStyleLbl="alignNode1" presStyleIdx="0" presStyleCnt="4"/>
+      <dgm:spPr/>
+    </dgm:pt>
+    <dgm:pt modelId="{8AEFFAF8-1EE6-4F06-AF7A-19CDC88507B1}" type="pres">
+      <dgm:prSet presAssocID="{D2FE027B-4161-41E1-B4D4-02AECB2E3FA0}" presName="descendantBox" presStyleLbl="bgAccFollowNode1" presStyleIdx="0" presStyleCnt="4"/>
+      <dgm:spPr/>
+    </dgm:pt>
+    <dgm:pt modelId="{A8A02931-86B5-4D5B-AA2B-81D6FC51BB55}" type="pres">
+      <dgm:prSet presAssocID="{D8170BBA-6035-4773-8431-FEDD687647FF}" presName="sp" presStyleCnt="0"/>
+      <dgm:spPr/>
+    </dgm:pt>
+    <dgm:pt modelId="{BAFF05C8-4F45-496D-84B3-4C8A61162693}" type="pres">
+      <dgm:prSet presAssocID="{3CC73758-10C1-47F8-AFA7-1A986D4DDD60}" presName="arrowAndChildren" presStyleCnt="0"/>
+      <dgm:spPr/>
+    </dgm:pt>
+    <dgm:pt modelId="{42603252-6223-4F15-91E3-3CEB2FE995F7}" type="pres">
+      <dgm:prSet presAssocID="{3CC73758-10C1-47F8-AFA7-1A986D4DDD60}" presName="parentTextArrow" presStyleLbl="node1" presStyleIdx="0" presStyleCnt="0"/>
+      <dgm:spPr/>
+    </dgm:pt>
+    <dgm:pt modelId="{30A1F8AA-8662-4DAB-953B-B19BA07E7613}" type="pres">
+      <dgm:prSet presAssocID="{3CC73758-10C1-47F8-AFA7-1A986D4DDD60}" presName="arrow" presStyleLbl="alignNode1" presStyleIdx="1" presStyleCnt="4"/>
+      <dgm:spPr/>
+    </dgm:pt>
+    <dgm:pt modelId="{CA0E1395-E943-4C79-B59A-DF82C49B0E4A}" type="pres">
+      <dgm:prSet presAssocID="{3CC73758-10C1-47F8-AFA7-1A986D4DDD60}" presName="descendantArrow" presStyleLbl="bgAccFollowNode1" presStyleIdx="1" presStyleCnt="4"/>
+      <dgm:spPr/>
+    </dgm:pt>
+    <dgm:pt modelId="{FE7C30DD-872D-4769-9D22-08451975BC38}" type="pres">
+      <dgm:prSet presAssocID="{81CA8AA2-C0C3-4381-BA8B-413EDD578B83}" presName="sp" presStyleCnt="0"/>
+      <dgm:spPr/>
+    </dgm:pt>
+    <dgm:pt modelId="{FBE6A1A6-44DB-4AC0-8333-E8EEAFEA03F8}" type="pres">
+      <dgm:prSet presAssocID="{91969DED-4CB8-4A14-A50B-3F7B848E46B5}" presName="arrowAndChildren" presStyleCnt="0"/>
+      <dgm:spPr/>
+    </dgm:pt>
+    <dgm:pt modelId="{F65806DE-7FA9-4C39-888E-98C791A17C22}" type="pres">
+      <dgm:prSet presAssocID="{91969DED-4CB8-4A14-A50B-3F7B848E46B5}" presName="parentTextArrow" presStyleLbl="node1" presStyleIdx="0" presStyleCnt="0"/>
+      <dgm:spPr/>
+    </dgm:pt>
+    <dgm:pt modelId="{924FA33F-3A8A-4D15-BF99-6DB303C71D0D}" type="pres">
+      <dgm:prSet presAssocID="{91969DED-4CB8-4A14-A50B-3F7B848E46B5}" presName="arrow" presStyleLbl="alignNode1" presStyleIdx="2" presStyleCnt="4"/>
+      <dgm:spPr/>
+    </dgm:pt>
+    <dgm:pt modelId="{4C1798A2-9A40-4D3B-968A-AF764C8A06FF}" type="pres">
+      <dgm:prSet presAssocID="{91969DED-4CB8-4A14-A50B-3F7B848E46B5}" presName="descendantArrow" presStyleLbl="bgAccFollowNode1" presStyleIdx="2" presStyleCnt="4"/>
+      <dgm:spPr/>
+    </dgm:pt>
+    <dgm:pt modelId="{A4571D9F-2CB7-42DD-AE67-38C9B6C6EFD3}" type="pres">
+      <dgm:prSet presAssocID="{67361508-930A-4A23-8CFC-BB56DA645C3C}" presName="sp" presStyleCnt="0"/>
+      <dgm:spPr/>
+    </dgm:pt>
+    <dgm:pt modelId="{CA40B77B-B269-4251-A31C-4048D728C59E}" type="pres">
+      <dgm:prSet presAssocID="{A8C03FBB-4A75-4460-AEA6-DEAEB9C61496}" presName="arrowAndChildren" presStyleCnt="0"/>
+      <dgm:spPr/>
+    </dgm:pt>
+    <dgm:pt modelId="{6813EBFD-78C2-4EE7-8F47-FCB906A691D5}" type="pres">
+      <dgm:prSet presAssocID="{A8C03FBB-4A75-4460-AEA6-DEAEB9C61496}" presName="parentTextArrow" presStyleLbl="node1" presStyleIdx="0" presStyleCnt="0"/>
+      <dgm:spPr/>
+    </dgm:pt>
+    <dgm:pt modelId="{E3771873-D5EC-4BAE-B9C3-3AA3F0CD58A2}" type="pres">
+      <dgm:prSet presAssocID="{A8C03FBB-4A75-4460-AEA6-DEAEB9C61496}" presName="arrow" presStyleLbl="alignNode1" presStyleIdx="3" presStyleCnt="4" custLinFactNeighborY="938"/>
+      <dgm:spPr/>
+    </dgm:pt>
+    <dgm:pt modelId="{262EA726-48DD-4411-9915-2DD7E096AAD1}" type="pres">
+      <dgm:prSet presAssocID="{A8C03FBB-4A75-4460-AEA6-DEAEB9C61496}" presName="descendantArrow" presStyleLbl="bgAccFollowNode1" presStyleIdx="3" presStyleCnt="4"/>
+      <dgm:spPr/>
+    </dgm:pt>
+  </dgm:ptLst>
+  <dgm:cxnLst>
+    <dgm:cxn modelId="{CB32A309-9CA9-4554-941D-519A91A9E733}" srcId="{D2FE027B-4161-41E1-B4D4-02AECB2E3FA0}" destId="{2BE415B7-7185-4956-8487-237B40BC0EE5}" srcOrd="0" destOrd="0" parTransId="{A38E847E-0D1D-4F40-9A71-4D5999ADE08B}" sibTransId="{F0D1C61C-E3F2-49BA-A2D8-C04A81308E5D}"/>
+    <dgm:cxn modelId="{A436B20C-38A8-41F1-AC81-B36EEAAC0923}" type="presOf" srcId="{A8C03FBB-4A75-4460-AEA6-DEAEB9C61496}" destId="{E3771873-D5EC-4BAE-B9C3-3AA3F0CD58A2}" srcOrd="1" destOrd="0" presId="urn:microsoft.com/office/officeart/2016/7/layout/VerticalDownArrowProcess"/>
+    <dgm:cxn modelId="{FDFA9E19-DBCB-4D3B-8C9B-91917707C664}" type="presOf" srcId="{3CC73758-10C1-47F8-AFA7-1A986D4DDD60}" destId="{30A1F8AA-8662-4DAB-953B-B19BA07E7613}" srcOrd="1" destOrd="0" presId="urn:microsoft.com/office/officeart/2016/7/layout/VerticalDownArrowProcess"/>
+    <dgm:cxn modelId="{5EDA943F-300F-408A-A52E-3D5140FD5C22}" srcId="{3CC73758-10C1-47F8-AFA7-1A986D4DDD60}" destId="{FD9CA14A-483C-4869-B0C1-7C5FB7EEDBCC}" srcOrd="0" destOrd="0" parTransId="{8182A92F-45BA-4CD1-8E43-0B0810A50FEB}" sibTransId="{914BB93C-EA8A-4B5B-8F06-30DA7C7F4B7B}"/>
+    <dgm:cxn modelId="{4A69F85D-5C15-48FD-893A-B3050E1BADEB}" srcId="{A66480AC-C0DE-4E5E-9ECD-9AE37E3FCB79}" destId="{3CC73758-10C1-47F8-AFA7-1A986D4DDD60}" srcOrd="2" destOrd="0" parTransId="{FF6AE4B6-4A2F-49EE-9316-9AF55E77838B}" sibTransId="{D8170BBA-6035-4773-8431-FEDD687647FF}"/>
+    <dgm:cxn modelId="{D0B6CC5F-50B4-4D46-9C5E-581FE445D01A}" type="presOf" srcId="{FD9CA14A-483C-4869-B0C1-7C5FB7EEDBCC}" destId="{CA0E1395-E943-4C79-B59A-DF82C49B0E4A}" srcOrd="0" destOrd="0" presId="urn:microsoft.com/office/officeart/2016/7/layout/VerticalDownArrowProcess"/>
+    <dgm:cxn modelId="{D4B85B44-E17D-4B5A-B825-1540EB44F207}" type="presOf" srcId="{91969DED-4CB8-4A14-A50B-3F7B848E46B5}" destId="{F65806DE-7FA9-4C39-888E-98C791A17C22}" srcOrd="0" destOrd="0" presId="urn:microsoft.com/office/officeart/2016/7/layout/VerticalDownArrowProcess"/>
+    <dgm:cxn modelId="{D3D81948-D963-4D1E-AE16-9705EAF510FC}" srcId="{A66480AC-C0DE-4E5E-9ECD-9AE37E3FCB79}" destId="{A8C03FBB-4A75-4460-AEA6-DEAEB9C61496}" srcOrd="0" destOrd="0" parTransId="{4E972F7F-4B1B-47AA-A25B-1FFC561F1C76}" sibTransId="{67361508-930A-4A23-8CFC-BB56DA645C3C}"/>
+    <dgm:cxn modelId="{193F214A-719F-4CD4-9239-B93FFFF4ADCE}" type="presOf" srcId="{2BE415B7-7185-4956-8487-237B40BC0EE5}" destId="{8AEFFAF8-1EE6-4F06-AF7A-19CDC88507B1}" srcOrd="0" destOrd="0" presId="urn:microsoft.com/office/officeart/2016/7/layout/VerticalDownArrowProcess"/>
+    <dgm:cxn modelId="{97F07994-4229-4A9F-B763-DCF857BFBC60}" type="presOf" srcId="{5E71F362-34DF-4EEC-92A3-0EFE450E05E4}" destId="{262EA726-48DD-4411-9915-2DD7E096AAD1}" srcOrd="0" destOrd="0" presId="urn:microsoft.com/office/officeart/2016/7/layout/VerticalDownArrowProcess"/>
+    <dgm:cxn modelId="{1B884C96-6643-4FF0-A2B7-B109E6AB02FF}" type="presOf" srcId="{91969DED-4CB8-4A14-A50B-3F7B848E46B5}" destId="{924FA33F-3A8A-4D15-BF99-6DB303C71D0D}" srcOrd="1" destOrd="0" presId="urn:microsoft.com/office/officeart/2016/7/layout/VerticalDownArrowProcess"/>
+    <dgm:cxn modelId="{4F4F82A2-02F1-492B-96C1-46C070BEFCE3}" srcId="{A66480AC-C0DE-4E5E-9ECD-9AE37E3FCB79}" destId="{D2FE027B-4161-41E1-B4D4-02AECB2E3FA0}" srcOrd="3" destOrd="0" parTransId="{88680CFE-3CE0-4842-B3D3-716D3B671238}" sibTransId="{4D59E06B-629C-40B5-96D3-423B7A56C945}"/>
+    <dgm:cxn modelId="{6B106ABB-04C8-46D5-9C16-F7F040322BC4}" type="presOf" srcId="{A8C03FBB-4A75-4460-AEA6-DEAEB9C61496}" destId="{6813EBFD-78C2-4EE7-8F47-FCB906A691D5}" srcOrd="0" destOrd="0" presId="urn:microsoft.com/office/officeart/2016/7/layout/VerticalDownArrowProcess"/>
+    <dgm:cxn modelId="{A38ECBC1-9FC1-454D-9356-0E17733D6497}" type="presOf" srcId="{8A04F340-E8E1-4146-9905-E7ADCAEAABD7}" destId="{4C1798A2-9A40-4D3B-968A-AF764C8A06FF}" srcOrd="0" destOrd="0" presId="urn:microsoft.com/office/officeart/2016/7/layout/VerticalDownArrowProcess"/>
+    <dgm:cxn modelId="{475B81C4-AE1C-4871-A107-542884D9B942}" type="presOf" srcId="{3CC73758-10C1-47F8-AFA7-1A986D4DDD60}" destId="{42603252-6223-4F15-91E3-3CEB2FE995F7}" srcOrd="0" destOrd="0" presId="urn:microsoft.com/office/officeart/2016/7/layout/VerticalDownArrowProcess"/>
+    <dgm:cxn modelId="{B99CA6C9-28D1-4DDB-B8EC-AED73AD115CA}" srcId="{A8C03FBB-4A75-4460-AEA6-DEAEB9C61496}" destId="{5E71F362-34DF-4EEC-92A3-0EFE450E05E4}" srcOrd="0" destOrd="0" parTransId="{8E5EE4D1-908E-455C-B8B3-281AD42DEC9A}" sibTransId="{B208B24A-E9FD-40A9-B764-FB7C2B7ED8B9}"/>
+    <dgm:cxn modelId="{FC6062CE-2CAF-4DB4-8186-64554E8DEC89}" type="presOf" srcId="{D2FE027B-4161-41E1-B4D4-02AECB2E3FA0}" destId="{1D474872-F0AF-4035-A9E3-43831297AAA1}" srcOrd="0" destOrd="0" presId="urn:microsoft.com/office/officeart/2016/7/layout/VerticalDownArrowProcess"/>
+    <dgm:cxn modelId="{537F2ED0-8BD0-4AD5-B60D-89B660EDA1AC}" srcId="{A66480AC-C0DE-4E5E-9ECD-9AE37E3FCB79}" destId="{91969DED-4CB8-4A14-A50B-3F7B848E46B5}" srcOrd="1" destOrd="0" parTransId="{441CD73D-85E1-42A6-BCF8-362A3247E2F3}" sibTransId="{81CA8AA2-C0C3-4381-BA8B-413EDD578B83}"/>
+    <dgm:cxn modelId="{75DC0BE7-AA90-4326-A3FE-6D48A7FD5107}" type="presOf" srcId="{A66480AC-C0DE-4E5E-9ECD-9AE37E3FCB79}" destId="{BD7F872A-6940-47EB-BE6C-C4EEAE96E551}" srcOrd="0" destOrd="0" presId="urn:microsoft.com/office/officeart/2016/7/layout/VerticalDownArrowProcess"/>
+    <dgm:cxn modelId="{E636BFFB-0404-4D4B-B3F0-C64FDFD9DDEF}" srcId="{91969DED-4CB8-4A14-A50B-3F7B848E46B5}" destId="{8A04F340-E8E1-4146-9905-E7ADCAEAABD7}" srcOrd="0" destOrd="0" parTransId="{4EBD5EC2-45ED-4ED6-8376-97D155A911AE}" sibTransId="{F9CD2A04-6A34-4104-A971-391788B88F55}"/>
+    <dgm:cxn modelId="{ACA54B37-823D-49F9-8834-FAD282C8B1C4}" type="presParOf" srcId="{BD7F872A-6940-47EB-BE6C-C4EEAE96E551}" destId="{2997D26D-0A31-4E94-8887-DAA723AC51C1}" srcOrd="0" destOrd="0" presId="urn:microsoft.com/office/officeart/2016/7/layout/VerticalDownArrowProcess"/>
+    <dgm:cxn modelId="{AAF163F1-4D23-4134-BF44-0D22F910149D}" type="presParOf" srcId="{2997D26D-0A31-4E94-8887-DAA723AC51C1}" destId="{1D474872-F0AF-4035-A9E3-43831297AAA1}" srcOrd="0" destOrd="0" presId="urn:microsoft.com/office/officeart/2016/7/layout/VerticalDownArrowProcess"/>
+    <dgm:cxn modelId="{E8DDE29C-1CD1-429C-85D1-DF027AE09477}" type="presParOf" srcId="{2997D26D-0A31-4E94-8887-DAA723AC51C1}" destId="{8AEFFAF8-1EE6-4F06-AF7A-19CDC88507B1}" srcOrd="1" destOrd="0" presId="urn:microsoft.com/office/officeart/2016/7/layout/VerticalDownArrowProcess"/>
+    <dgm:cxn modelId="{A6AC8E08-34D1-497C-9E3D-F3D5FD6F8544}" type="presParOf" srcId="{BD7F872A-6940-47EB-BE6C-C4EEAE96E551}" destId="{A8A02931-86B5-4D5B-AA2B-81D6FC51BB55}" srcOrd="1" destOrd="0" presId="urn:microsoft.com/office/officeart/2016/7/layout/VerticalDownArrowProcess"/>
+    <dgm:cxn modelId="{0BBEE089-4906-46AD-A7A7-A4E760775751}" type="presParOf" srcId="{BD7F872A-6940-47EB-BE6C-C4EEAE96E551}" destId="{BAFF05C8-4F45-496D-84B3-4C8A61162693}" srcOrd="2" destOrd="0" presId="urn:microsoft.com/office/officeart/2016/7/layout/VerticalDownArrowProcess"/>
+    <dgm:cxn modelId="{3F3D88DF-81AD-4EFD-962B-3C2137199F8B}" type="presParOf" srcId="{BAFF05C8-4F45-496D-84B3-4C8A61162693}" destId="{42603252-6223-4F15-91E3-3CEB2FE995F7}" srcOrd="0" destOrd="0" presId="urn:microsoft.com/office/officeart/2016/7/layout/VerticalDownArrowProcess"/>
+    <dgm:cxn modelId="{3521AD13-71BC-412D-A2AC-4818E4E87DD1}" type="presParOf" srcId="{BAFF05C8-4F45-496D-84B3-4C8A61162693}" destId="{30A1F8AA-8662-4DAB-953B-B19BA07E7613}" srcOrd="1" destOrd="0" presId="urn:microsoft.com/office/officeart/2016/7/layout/VerticalDownArrowProcess"/>
+    <dgm:cxn modelId="{79EC0DFA-358D-4F10-A360-A938E6D4755A}" type="presParOf" srcId="{BAFF05C8-4F45-496D-84B3-4C8A61162693}" destId="{CA0E1395-E943-4C79-B59A-DF82C49B0E4A}" srcOrd="2" destOrd="0" presId="urn:microsoft.com/office/officeart/2016/7/layout/VerticalDownArrowProcess"/>
+    <dgm:cxn modelId="{341AC872-1C1D-4008-9A5D-A29A697A3BA3}" type="presParOf" srcId="{BD7F872A-6940-47EB-BE6C-C4EEAE96E551}" destId="{FE7C30DD-872D-4769-9D22-08451975BC38}" srcOrd="3" destOrd="0" presId="urn:microsoft.com/office/officeart/2016/7/layout/VerticalDownArrowProcess"/>
+    <dgm:cxn modelId="{FCF08E8D-7A2D-4A11-BDCF-3BC13D6B2452}" type="presParOf" srcId="{BD7F872A-6940-47EB-BE6C-C4EEAE96E551}" destId="{FBE6A1A6-44DB-4AC0-8333-E8EEAFEA03F8}" srcOrd="4" destOrd="0" presId="urn:microsoft.com/office/officeart/2016/7/layout/VerticalDownArrowProcess"/>
+    <dgm:cxn modelId="{04021BA3-0ABA-4347-8B63-E899313C5E66}" type="presParOf" srcId="{FBE6A1A6-44DB-4AC0-8333-E8EEAFEA03F8}" destId="{F65806DE-7FA9-4C39-888E-98C791A17C22}" srcOrd="0" destOrd="0" presId="urn:microsoft.com/office/officeart/2016/7/layout/VerticalDownArrowProcess"/>
+    <dgm:cxn modelId="{5D2775CD-E26E-45DA-B8B6-957E52B75383}" type="presParOf" srcId="{FBE6A1A6-44DB-4AC0-8333-E8EEAFEA03F8}" destId="{924FA33F-3A8A-4D15-BF99-6DB303C71D0D}" srcOrd="1" destOrd="0" presId="urn:microsoft.com/office/officeart/2016/7/layout/VerticalDownArrowProcess"/>
+    <dgm:cxn modelId="{EB5C807C-A8B8-416D-925A-6B2678079DCB}" type="presParOf" srcId="{FBE6A1A6-44DB-4AC0-8333-E8EEAFEA03F8}" destId="{4C1798A2-9A40-4D3B-968A-AF764C8A06FF}" srcOrd="2" destOrd="0" presId="urn:microsoft.com/office/officeart/2016/7/layout/VerticalDownArrowProcess"/>
+    <dgm:cxn modelId="{B53D789F-2A2C-478D-9DF1-94CB332578E7}" type="presParOf" srcId="{BD7F872A-6940-47EB-BE6C-C4EEAE96E551}" destId="{A4571D9F-2CB7-42DD-AE67-38C9B6C6EFD3}" srcOrd="5" destOrd="0" presId="urn:microsoft.com/office/officeart/2016/7/layout/VerticalDownArrowProcess"/>
+    <dgm:cxn modelId="{7FD259F6-0423-46A8-857A-9D29D4D7FACF}" type="presParOf" srcId="{BD7F872A-6940-47EB-BE6C-C4EEAE96E551}" destId="{CA40B77B-B269-4251-A31C-4048D728C59E}" srcOrd="6" destOrd="0" presId="urn:microsoft.com/office/officeart/2016/7/layout/VerticalDownArrowProcess"/>
+    <dgm:cxn modelId="{6FF6B12A-645D-4503-98C3-AEC3C9637C24}" type="presParOf" srcId="{CA40B77B-B269-4251-A31C-4048D728C59E}" destId="{6813EBFD-78C2-4EE7-8F47-FCB906A691D5}" srcOrd="0" destOrd="0" presId="urn:microsoft.com/office/officeart/2016/7/layout/VerticalDownArrowProcess"/>
+    <dgm:cxn modelId="{3DE11437-1E24-4BB1-A261-2A430FFBCD19}" type="presParOf" srcId="{CA40B77B-B269-4251-A31C-4048D728C59E}" destId="{E3771873-D5EC-4BAE-B9C3-3AA3F0CD58A2}" srcOrd="1" destOrd="0" presId="urn:microsoft.com/office/officeart/2016/7/layout/VerticalDownArrowProcess"/>
+    <dgm:cxn modelId="{F25A589B-BF66-488E-8D5C-29485892F7CE}" type="presParOf" srcId="{CA40B77B-B269-4251-A31C-4048D728C59E}" destId="{262EA726-48DD-4411-9915-2DD7E096AAD1}" srcOrd="2" destOrd="0" presId="urn:microsoft.com/office/officeart/2016/7/layout/VerticalDownArrowProcess"/>
+  </dgm:cxnLst>
+  <dgm:bg/>
+  <dgm:whole/>
+  <dgm:extLst>
+    <a:ext uri="http://schemas.microsoft.com/office/drawing/2008/diagram">
+      <dsp:dataModelExt xmlns:dsp="http://schemas.microsoft.com/office/drawing/2008/diagram" relId="rId7" minVer="http://schemas.openxmlformats.org/drawingml/2006/diagram"/>
+    </a:ext>
+  </dgm:extLst>
+</dgm:dataModel>
+</file>
+
+<file path=ppt/diagrams/data2.xml><?xml version="1.0" encoding="utf-8"?>
+<dgm:dataModel xmlns:dgm="http://schemas.openxmlformats.org/drawingml/2006/diagram" xmlns:a="http://schemas.openxmlformats.org/drawingml/2006/main">
+  <dgm:ptLst>
+    <dgm:pt modelId="{A66480AC-C0DE-4E5E-9ECD-9AE37E3FCB79}" type="doc">
+      <dgm:prSet loTypeId="urn:microsoft.com/office/officeart/2005/8/layout/hierarchy3" loCatId="hierarchy" qsTypeId="urn:microsoft.com/office/officeart/2005/8/quickstyle/simple2" qsCatId="simple" csTypeId="urn:microsoft.com/office/officeart/2005/8/colors/accent3_2" csCatId="accent3" phldr="1"/>
+      <dgm:spPr/>
+      <dgm:t>
+        <a:bodyPr/>
+        <a:lstStyle/>
+        <a:p>
+          <a:endParaRPr lang="en-US"/>
+        </a:p>
+      </dgm:t>
+    </dgm:pt>
+    <dgm:pt modelId="{A8C03FBB-4A75-4460-AEA6-DEAEB9C61496}">
+      <dgm:prSet phldrT="[Text]"/>
+      <dgm:spPr/>
+      <dgm:t>
+        <a:bodyPr/>
+        <a:lstStyle/>
+        <a:p>
+          <a:pPr>
+            <a:defRPr b="1"/>
+          </a:pPr>
+          <a:r>
+            <a:rPr lang="en-US">
+              <a:latin typeface="+mn-lt"/>
+            </a:rPr>
+            <a:t>Week 07</a:t>
+          </a:r>
+        </a:p>
+      </dgm:t>
+    </dgm:pt>
+    <dgm:pt modelId="{4E972F7F-4B1B-47AA-A25B-1FFC561F1C76}" type="parTrans" cxnId="{D3D81948-D963-4D1E-AE16-9705EAF510FC}">
+      <dgm:prSet/>
+      <dgm:spPr/>
+      <dgm:t>
+        <a:bodyPr/>
+        <a:lstStyle/>
+        <a:p>
+          <a:pPr algn="ctr"/>
+          <a:endParaRPr lang="en-US" sz="2800">
+            <a:latin typeface="+mn-lt"/>
+          </a:endParaRPr>
+        </a:p>
+      </dgm:t>
+    </dgm:pt>
+    <dgm:pt modelId="{67361508-930A-4A23-8CFC-BB56DA645C3C}" type="sibTrans" cxnId="{D3D81948-D963-4D1E-AE16-9705EAF510FC}">
+      <dgm:prSet/>
+      <dgm:spPr/>
+      <dgm:t>
+        <a:bodyPr/>
+        <a:lstStyle/>
+        <a:p>
+          <a:endParaRPr lang="en-US">
+            <a:latin typeface="+mn-lt"/>
+          </a:endParaRPr>
+        </a:p>
+      </dgm:t>
+    </dgm:pt>
+    <dgm:pt modelId="{5E71F362-34DF-4EEC-92A3-0EFE450E05E4}">
+      <dgm:prSet phldrT="[Text]"/>
+      <dgm:spPr/>
+      <dgm:t>
+        <a:bodyPr/>
+        <a:lstStyle/>
+        <a:p>
+          <a:r>
+            <a:rPr lang="en-US">
+              <a:latin typeface="+mn-lt"/>
+            </a:rPr>
+            <a:t>Home Assistant</a:t>
           </a:r>
         </a:p>
       </dgm:t>
@@ -983,28 +2233,27 @@
         <a:bodyPr/>
         <a:lstStyle/>
         <a:p>
-          <a:pPr algn="ctr"/>
-          <a:endParaRPr lang="en-US" sz="2800">
+          <a:endParaRPr lang="en-US">
             <a:latin typeface="+mn-lt"/>
           </a:endParaRPr>
         </a:p>
       </dgm:t>
     </dgm:pt>
     <dgm:pt modelId="{91969DED-4CB8-4A14-A50B-3F7B848E46B5}">
-      <dgm:prSet phldrT="[Text]" phldr="0" custT="1"/>
+      <dgm:prSet phldrT="[Text]"/>
       <dgm:spPr/>
       <dgm:t>
         <a:bodyPr/>
         <a:lstStyle/>
         <a:p>
-          <a:pPr algn="ctr">
+          <a:pPr>
             <a:defRPr b="1"/>
           </a:pPr>
           <a:r>
-            <a:rPr lang="en-US" sz="2400" dirty="0">
+            <a:rPr lang="en-US">
               <a:latin typeface="+mn-lt"/>
             </a:rPr>
-            <a:t>Q4</a:t>
+            <a:t>Week 08</a:t>
           </a:r>
         </a:p>
       </dgm:t>
@@ -1030,26 +2279,24 @@
         <a:bodyPr/>
         <a:lstStyle/>
         <a:p>
-          <a:pPr algn="ctr"/>
-          <a:endParaRPr lang="en-US" sz="2800">
+          <a:endParaRPr lang="en-US">
             <a:latin typeface="+mn-lt"/>
           </a:endParaRPr>
         </a:p>
       </dgm:t>
     </dgm:pt>
     <dgm:pt modelId="{8A04F340-E8E1-4146-9905-E7ADCAEAABD7}">
-      <dgm:prSet phldrT="[Text]" phldr="0" custT="1"/>
+      <dgm:prSet phldrT="[Text]"/>
       <dgm:spPr/>
       <dgm:t>
         <a:bodyPr/>
         <a:lstStyle/>
         <a:p>
-          <a:pPr algn="ctr"/>
           <a:r>
-            <a:rPr lang="en-US" sz="2000" dirty="0">
+            <a:rPr lang="en-US">
               <a:latin typeface="+mn-lt"/>
             </a:rPr>
-            <a:t>Product development</a:t>
+            <a:t>Swagger &amp; AsyncAPI</a:t>
           </a:r>
         </a:p>
       </dgm:t>
@@ -1075,28 +2322,27 @@
         <a:bodyPr/>
         <a:lstStyle/>
         <a:p>
-          <a:pPr algn="ctr"/>
-          <a:endParaRPr lang="en-US" sz="2800">
+          <a:endParaRPr lang="en-US">
             <a:latin typeface="+mn-lt"/>
           </a:endParaRPr>
         </a:p>
       </dgm:t>
     </dgm:pt>
     <dgm:pt modelId="{3CC73758-10C1-47F8-AFA7-1A986D4DDD60}">
-      <dgm:prSet phldrT="[Text]" phldr="0" custT="1"/>
+      <dgm:prSet phldrT="[Text]"/>
       <dgm:spPr/>
       <dgm:t>
         <a:bodyPr/>
         <a:lstStyle/>
         <a:p>
-          <a:pPr algn="ctr">
+          <a:pPr>
             <a:defRPr b="1"/>
           </a:pPr>
           <a:r>
-            <a:rPr lang="en-US" sz="2400" dirty="0">
+            <a:rPr lang="en-US">
               <a:latin typeface="+mn-lt"/>
             </a:rPr>
-            <a:t>Q1</a:t>
+            <a:t>Week 09 </a:t>
           </a:r>
         </a:p>
       </dgm:t>
@@ -1122,37 +2368,24 @@
         <a:bodyPr/>
         <a:lstStyle/>
         <a:p>
-          <a:pPr algn="ctr"/>
-          <a:endParaRPr lang="en-US" sz="2800">
+          <a:endParaRPr lang="en-US">
             <a:latin typeface="+mn-lt"/>
           </a:endParaRPr>
         </a:p>
       </dgm:t>
     </dgm:pt>
     <dgm:pt modelId="{FD9CA14A-483C-4869-B0C1-7C5FB7EEDBCC}">
-      <dgm:prSet phldrT="[Text]" phldr="0" custT="1"/>
+      <dgm:prSet phldrT="[Text]"/>
       <dgm:spPr/>
       <dgm:t>
         <a:bodyPr/>
         <a:lstStyle/>
         <a:p>
-          <a:pPr algn="ctr"/>
           <a:r>
-            <a:rPr lang="en-US" sz="2000" dirty="0">
+            <a:rPr lang="en-US">
               <a:latin typeface="+mn-lt"/>
             </a:rPr>
-            <a:t> User </a:t>
-          </a:r>
-          <a:br>
-            <a:rPr lang="en-US" sz="2000" dirty="0">
-              <a:latin typeface="+mn-lt"/>
-            </a:rPr>
-          </a:br>
-          <a:r>
-            <a:rPr lang="en-US" sz="2000" dirty="0">
-              <a:latin typeface="+mn-lt"/>
-            </a:rPr>
-            <a:t>testing</a:t>
+            <a:t>Virtual Sensors &amp; Edge AI</a:t>
           </a:r>
         </a:p>
       </dgm:t>
@@ -1178,28 +2411,27 @@
         <a:bodyPr/>
         <a:lstStyle/>
         <a:p>
-          <a:pPr algn="ctr"/>
-          <a:endParaRPr lang="en-US" sz="2800">
+          <a:endParaRPr lang="en-US">
             <a:latin typeface="+mn-lt"/>
           </a:endParaRPr>
         </a:p>
       </dgm:t>
     </dgm:pt>
     <dgm:pt modelId="{D2FE027B-4161-41E1-B4D4-02AECB2E3FA0}">
-      <dgm:prSet phldrT="[Text]" phldr="0" custT="1"/>
+      <dgm:prSet phldrT="[Text]"/>
       <dgm:spPr/>
       <dgm:t>
         <a:bodyPr/>
         <a:lstStyle/>
         <a:p>
-          <a:pPr algn="ctr">
+          <a:pPr>
             <a:defRPr b="1"/>
           </a:pPr>
           <a:r>
-            <a:rPr lang="en-US" sz="2400" dirty="0">
+            <a:rPr lang="en-US">
               <a:latin typeface="+mn-lt"/>
             </a:rPr>
-            <a:t>Q2</a:t>
+            <a:t>Week 10</a:t>
           </a:r>
         </a:p>
       </dgm:t>
@@ -1225,26 +2457,24 @@
         <a:bodyPr/>
         <a:lstStyle/>
         <a:p>
-          <a:pPr algn="ctr"/>
-          <a:endParaRPr lang="en-US" sz="2800">
+          <a:endParaRPr lang="en-US">
             <a:latin typeface="+mn-lt"/>
           </a:endParaRPr>
         </a:p>
       </dgm:t>
     </dgm:pt>
     <dgm:pt modelId="{2BE415B7-7185-4956-8487-237B40BC0EE5}">
-      <dgm:prSet phldrT="[Text]" phldr="0" custT="1"/>
+      <dgm:prSet phldrT="[Text]"/>
       <dgm:spPr/>
       <dgm:t>
         <a:bodyPr/>
         <a:lstStyle/>
         <a:p>
-          <a:pPr algn="ctr"/>
           <a:r>
-            <a:rPr lang="en-US" sz="2000" dirty="0">
+            <a:rPr lang="en-US">
               <a:latin typeface="+mn-lt"/>
             </a:rPr>
-            <a:t>Product launch</a:t>
+            <a:t>Node Red</a:t>
           </a:r>
         </a:p>
       </dgm:t>
@@ -1270,363 +2500,207 @@
         <a:bodyPr/>
         <a:lstStyle/>
         <a:p>
-          <a:pPr algn="ctr"/>
-          <a:endParaRPr lang="en-US" sz="2800">
+          <a:endParaRPr lang="en-US">
             <a:latin typeface="+mn-lt"/>
           </a:endParaRPr>
         </a:p>
       </dgm:t>
     </dgm:pt>
-    <dgm:pt modelId="{9FFA803F-EA25-49D8-A073-96E9747E345F}" type="pres">
-      <dgm:prSet presAssocID="{A66480AC-C0DE-4E5E-9ECD-9AE37E3FCB79}" presName="root" presStyleCnt="0">
+    <dgm:pt modelId="{DB498741-8ABA-44C0-8B75-224E0732E773}" type="pres">
+      <dgm:prSet presAssocID="{A66480AC-C0DE-4E5E-9ECD-9AE37E3FCB79}" presName="diagram" presStyleCnt="0">
         <dgm:presLayoutVars>
-          <dgm:chMax/>
-          <dgm:chPref/>
+          <dgm:chPref val="1"/>
+          <dgm:dir/>
+          <dgm:animOne val="branch"/>
           <dgm:animLvl val="lvl"/>
+          <dgm:resizeHandles/>
         </dgm:presLayoutVars>
       </dgm:prSet>
       <dgm:spPr/>
     </dgm:pt>
-    <dgm:pt modelId="{EE0E6265-BE99-48D1-8879-DB5A75D6D78E}" type="pres">
-      <dgm:prSet presAssocID="{A66480AC-C0DE-4E5E-9ECD-9AE37E3FCB79}" presName="divider" presStyleLbl="fgAccFollowNode1" presStyleIdx="0" presStyleCnt="1"/>
-      <dgm:spPr>
-        <a:solidFill>
-          <a:schemeClr val="dk2">
-            <a:alpha val="90000"/>
-            <a:tint val="40000"/>
-            <a:hueOff val="0"/>
-            <a:satOff val="0"/>
-            <a:lumOff val="0"/>
-            <a:alphaOff val="0"/>
-          </a:schemeClr>
-        </a:solidFill>
-        <a:ln w="19050" cap="rnd" cmpd="sng" algn="ctr">
-          <a:solidFill>
-            <a:schemeClr val="dk2">
-              <a:alpha val="90000"/>
-              <a:tint val="40000"/>
-              <a:hueOff val="0"/>
-              <a:satOff val="0"/>
-              <a:lumOff val="0"/>
-              <a:alphaOff val="0"/>
-            </a:schemeClr>
-          </a:solidFill>
-          <a:prstDash val="solid"/>
-          <a:tailEnd type="triangle" w="lg" len="lg"/>
-        </a:ln>
-        <a:effectLst/>
-      </dgm:spPr>
-    </dgm:pt>
-    <dgm:pt modelId="{BDA8F949-88B8-486D-9E41-ABA1463A8926}" type="pres">
-      <dgm:prSet presAssocID="{A66480AC-C0DE-4E5E-9ECD-9AE37E3FCB79}" presName="nodes" presStyleCnt="0">
-        <dgm:presLayoutVars>
-          <dgm:chMax/>
-          <dgm:chPref/>
-          <dgm:animLvl val="lvl"/>
-        </dgm:presLayoutVars>
-      </dgm:prSet>
+    <dgm:pt modelId="{B72A4F70-BD3C-46F7-98C2-4D38C9544852}" type="pres">
+      <dgm:prSet presAssocID="{A8C03FBB-4A75-4460-AEA6-DEAEB9C61496}" presName="root" presStyleCnt="0"/>
       <dgm:spPr/>
     </dgm:pt>
-    <dgm:pt modelId="{A41AEE8D-8763-4311-BB07-B499A93D76EA}" type="pres">
-      <dgm:prSet presAssocID="{A8C03FBB-4A75-4460-AEA6-DEAEB9C61496}" presName="composite" presStyleCnt="0"/>
+    <dgm:pt modelId="{C5B1B32D-5A4A-472D-A5C3-BD7554B7FE03}" type="pres">
+      <dgm:prSet presAssocID="{A8C03FBB-4A75-4460-AEA6-DEAEB9C61496}" presName="rootComposite" presStyleCnt="0"/>
       <dgm:spPr/>
     </dgm:pt>
-    <dgm:pt modelId="{FE5C7F33-9326-49FB-89A3-8A20163AD994}" type="pres">
-      <dgm:prSet presAssocID="{A8C03FBB-4A75-4460-AEA6-DEAEB9C61496}" presName="L1TextContainer" presStyleLbl="revTx" presStyleIdx="0" presStyleCnt="4">
+    <dgm:pt modelId="{EFE8DDA2-F173-425C-9A5C-A8B83BD59F63}" type="pres">
+      <dgm:prSet presAssocID="{A8C03FBB-4A75-4460-AEA6-DEAEB9C61496}" presName="rootText" presStyleLbl="node1" presStyleIdx="0" presStyleCnt="4"/>
+      <dgm:spPr/>
+    </dgm:pt>
+    <dgm:pt modelId="{2EA5E456-59ED-4357-9F64-4AE2D1FF861A}" type="pres">
+      <dgm:prSet presAssocID="{A8C03FBB-4A75-4460-AEA6-DEAEB9C61496}" presName="rootConnector" presStyleLbl="node1" presStyleIdx="0" presStyleCnt="4"/>
+      <dgm:spPr/>
+    </dgm:pt>
+    <dgm:pt modelId="{0120ECD7-3160-4DF3-9E38-C55A086313EC}" type="pres">
+      <dgm:prSet presAssocID="{A8C03FBB-4A75-4460-AEA6-DEAEB9C61496}" presName="childShape" presStyleCnt="0"/>
+      <dgm:spPr/>
+    </dgm:pt>
+    <dgm:pt modelId="{770CD0ED-B74A-4FF3-8567-3C1CD9E355E5}" type="pres">
+      <dgm:prSet presAssocID="{8E5EE4D1-908E-455C-B8B3-281AD42DEC9A}" presName="Name13" presStyleLbl="parChTrans1D2" presStyleIdx="0" presStyleCnt="4"/>
+      <dgm:spPr/>
+    </dgm:pt>
+    <dgm:pt modelId="{B4EE23A0-576C-45B7-ADCC-3908CAF42349}" type="pres">
+      <dgm:prSet presAssocID="{5E71F362-34DF-4EEC-92A3-0EFE450E05E4}" presName="childText" presStyleLbl="bgAcc1" presStyleIdx="0" presStyleCnt="4">
         <dgm:presLayoutVars>
-          <dgm:chMax val="1"/>
-          <dgm:chPref val="1"/>
           <dgm:bulletEnabled val="1"/>
         </dgm:presLayoutVars>
       </dgm:prSet>
       <dgm:spPr/>
     </dgm:pt>
-    <dgm:pt modelId="{C51067AB-548D-47E7-B9DD-C7A4C9600F8C}" type="pres">
-      <dgm:prSet presAssocID="{A8C03FBB-4A75-4460-AEA6-DEAEB9C61496}" presName="L2TextContainerWrapper" presStyleCnt="0">
+    <dgm:pt modelId="{BC4A4326-D09C-4D4A-BB10-FB0CCF4F5B4E}" type="pres">
+      <dgm:prSet presAssocID="{91969DED-4CB8-4A14-A50B-3F7B848E46B5}" presName="root" presStyleCnt="0"/>
+      <dgm:spPr/>
+    </dgm:pt>
+    <dgm:pt modelId="{43BD8E24-9870-44B0-9A0C-7BE2C2F80528}" type="pres">
+      <dgm:prSet presAssocID="{91969DED-4CB8-4A14-A50B-3F7B848E46B5}" presName="rootComposite" presStyleCnt="0"/>
+      <dgm:spPr/>
+    </dgm:pt>
+    <dgm:pt modelId="{B2B85D70-3379-4A3A-BFC7-55B1CFF6135E}" type="pres">
+      <dgm:prSet presAssocID="{91969DED-4CB8-4A14-A50B-3F7B848E46B5}" presName="rootText" presStyleLbl="node1" presStyleIdx="1" presStyleCnt="4"/>
+      <dgm:spPr/>
+    </dgm:pt>
+    <dgm:pt modelId="{60235DB2-CB4A-47E8-9B12-88DA9F02032A}" type="pres">
+      <dgm:prSet presAssocID="{91969DED-4CB8-4A14-A50B-3F7B848E46B5}" presName="rootConnector" presStyleLbl="node1" presStyleIdx="1" presStyleCnt="4"/>
+      <dgm:spPr/>
+    </dgm:pt>
+    <dgm:pt modelId="{5B16DF0D-3C17-4A67-B31F-E76553BBDB3C}" type="pres">
+      <dgm:prSet presAssocID="{91969DED-4CB8-4A14-A50B-3F7B848E46B5}" presName="childShape" presStyleCnt="0"/>
+      <dgm:spPr/>
+    </dgm:pt>
+    <dgm:pt modelId="{15863C0C-CD41-4F42-A67A-503A62AED956}" type="pres">
+      <dgm:prSet presAssocID="{4EBD5EC2-45ED-4ED6-8376-97D155A911AE}" presName="Name13" presStyleLbl="parChTrans1D2" presStyleIdx="1" presStyleCnt="4"/>
+      <dgm:spPr/>
+    </dgm:pt>
+    <dgm:pt modelId="{91F90D3F-5B3C-4417-828E-DB7BBCCCA93D}" type="pres">
+      <dgm:prSet presAssocID="{8A04F340-E8E1-4146-9905-E7ADCAEAABD7}" presName="childText" presStyleLbl="bgAcc1" presStyleIdx="1" presStyleCnt="4">
         <dgm:presLayoutVars>
-          <dgm:chMax val="0"/>
-          <dgm:chPref val="0"/>
           <dgm:bulletEnabled val="1"/>
         </dgm:presLayoutVars>
       </dgm:prSet>
       <dgm:spPr/>
     </dgm:pt>
-    <dgm:pt modelId="{BA29120C-7C6B-4F62-9079-4AD528BC0744}" type="pres">
-      <dgm:prSet presAssocID="{A8C03FBB-4A75-4460-AEA6-DEAEB9C61496}" presName="L2TextContainer" presStyleLbl="bgAcc1" presStyleIdx="0" presStyleCnt="4"/>
+    <dgm:pt modelId="{1674B00B-2531-425F-B623-6C040CF7840F}" type="pres">
+      <dgm:prSet presAssocID="{3CC73758-10C1-47F8-AFA7-1A986D4DDD60}" presName="root" presStyleCnt="0"/>
       <dgm:spPr/>
     </dgm:pt>
-    <dgm:pt modelId="{617B6CDA-9351-44EF-9011-41758FE93851}" type="pres">
-      <dgm:prSet presAssocID="{A8C03FBB-4A75-4460-AEA6-DEAEB9C61496}" presName="FlexibleEmptyPlaceHolder" presStyleCnt="0"/>
+    <dgm:pt modelId="{9C03C986-64FE-4A23-A69C-9CAD2EF54FBD}" type="pres">
+      <dgm:prSet presAssocID="{3CC73758-10C1-47F8-AFA7-1A986D4DDD60}" presName="rootComposite" presStyleCnt="0"/>
       <dgm:spPr/>
     </dgm:pt>
-    <dgm:pt modelId="{A95DB80B-444A-4D69-B205-3A801BB8524A}" type="pres">
-      <dgm:prSet presAssocID="{A8C03FBB-4A75-4460-AEA6-DEAEB9C61496}" presName="ConnectLine" presStyleLbl="sibTrans1D1" presStyleIdx="0" presStyleCnt="4"/>
-      <dgm:spPr>
-        <a:noFill/>
-        <a:ln w="12700" cap="rnd" cmpd="sng" algn="ctr">
-          <a:solidFill>
-            <a:schemeClr val="dk2">
-              <a:hueOff val="0"/>
-              <a:satOff val="0"/>
-              <a:lumOff val="0"/>
-              <a:alphaOff val="0"/>
-            </a:schemeClr>
-          </a:solidFill>
-          <a:prstDash val="dash"/>
-        </a:ln>
-        <a:effectLst/>
-      </dgm:spPr>
-    </dgm:pt>
-    <dgm:pt modelId="{FA19A0AA-8B0B-4AA8-A80D-08CFFDD3F112}" type="pres">
-      <dgm:prSet presAssocID="{A8C03FBB-4A75-4460-AEA6-DEAEB9C61496}" presName="ConnectorPoint" presStyleLbl="alignNode1" presStyleIdx="0" presStyleCnt="4"/>
+    <dgm:pt modelId="{A45A8FE1-97F9-4D32-ACBB-56FC455F3F54}" type="pres">
+      <dgm:prSet presAssocID="{3CC73758-10C1-47F8-AFA7-1A986D4DDD60}" presName="rootText" presStyleLbl="node1" presStyleIdx="2" presStyleCnt="4"/>
       <dgm:spPr/>
     </dgm:pt>
-    <dgm:pt modelId="{C298CC98-EF08-4D23-94A2-F58DEE6D7DE4}" type="pres">
-      <dgm:prSet presAssocID="{A8C03FBB-4A75-4460-AEA6-DEAEB9C61496}" presName="EmptyPlaceHolder" presStyleCnt="0"/>
+    <dgm:pt modelId="{66C01C03-EAEC-4537-B004-F480ABEC743F}" type="pres">
+      <dgm:prSet presAssocID="{3CC73758-10C1-47F8-AFA7-1A986D4DDD60}" presName="rootConnector" presStyleLbl="node1" presStyleIdx="2" presStyleCnt="4"/>
       <dgm:spPr/>
     </dgm:pt>
-    <dgm:pt modelId="{F3D981F8-7433-4E93-99E6-2B447306B973}" type="pres">
-      <dgm:prSet presAssocID="{67361508-930A-4A23-8CFC-BB56DA645C3C}" presName="spaceBetweenRectangles" presStyleCnt="0"/>
+    <dgm:pt modelId="{E298DDAC-D791-4C40-923F-C73250CD98FA}" type="pres">
+      <dgm:prSet presAssocID="{3CC73758-10C1-47F8-AFA7-1A986D4DDD60}" presName="childShape" presStyleCnt="0"/>
       <dgm:spPr/>
     </dgm:pt>
-    <dgm:pt modelId="{7D29DFA7-018B-45C9-AC1C-5CFC82FEE150}" type="pres">
-      <dgm:prSet presAssocID="{91969DED-4CB8-4A14-A50B-3F7B848E46B5}" presName="composite" presStyleCnt="0"/>
+    <dgm:pt modelId="{2AF69084-4F24-4FF0-BE70-B867BB2181BA}" type="pres">
+      <dgm:prSet presAssocID="{8182A92F-45BA-4CD1-8E43-0B0810A50FEB}" presName="Name13" presStyleLbl="parChTrans1D2" presStyleIdx="2" presStyleCnt="4"/>
       <dgm:spPr/>
     </dgm:pt>
-    <dgm:pt modelId="{60D0713D-AF69-4AF8-B071-F65622790886}" type="pres">
-      <dgm:prSet presAssocID="{91969DED-4CB8-4A14-A50B-3F7B848E46B5}" presName="L1TextContainer" presStyleLbl="revTx" presStyleIdx="1" presStyleCnt="4">
+    <dgm:pt modelId="{480DA85B-472C-4207-A635-390AB779F8AA}" type="pres">
+      <dgm:prSet presAssocID="{FD9CA14A-483C-4869-B0C1-7C5FB7EEDBCC}" presName="childText" presStyleLbl="bgAcc1" presStyleIdx="2" presStyleCnt="4">
         <dgm:presLayoutVars>
-          <dgm:chMax val="1"/>
-          <dgm:chPref val="1"/>
           <dgm:bulletEnabled val="1"/>
         </dgm:presLayoutVars>
       </dgm:prSet>
       <dgm:spPr/>
     </dgm:pt>
-    <dgm:pt modelId="{5DAA1547-FEA7-4F69-96D3-0E3A07601B1E}" type="pres">
-      <dgm:prSet presAssocID="{91969DED-4CB8-4A14-A50B-3F7B848E46B5}" presName="L2TextContainerWrapper" presStyleCnt="0">
+    <dgm:pt modelId="{7BBF45BE-5D52-4946-AC1C-9B67D3D39DB1}" type="pres">
+      <dgm:prSet presAssocID="{D2FE027B-4161-41E1-B4D4-02AECB2E3FA0}" presName="root" presStyleCnt="0"/>
+      <dgm:spPr/>
+    </dgm:pt>
+    <dgm:pt modelId="{1747C935-EDA8-4F9D-A002-D8D41523E255}" type="pres">
+      <dgm:prSet presAssocID="{D2FE027B-4161-41E1-B4D4-02AECB2E3FA0}" presName="rootComposite" presStyleCnt="0"/>
+      <dgm:spPr/>
+    </dgm:pt>
+    <dgm:pt modelId="{E272C3A2-C6CE-456E-8739-8CE42DB97611}" type="pres">
+      <dgm:prSet presAssocID="{D2FE027B-4161-41E1-B4D4-02AECB2E3FA0}" presName="rootText" presStyleLbl="node1" presStyleIdx="3" presStyleCnt="4"/>
+      <dgm:spPr/>
+    </dgm:pt>
+    <dgm:pt modelId="{0214D70E-F5CC-430E-BBE1-15FF8210C217}" type="pres">
+      <dgm:prSet presAssocID="{D2FE027B-4161-41E1-B4D4-02AECB2E3FA0}" presName="rootConnector" presStyleLbl="node1" presStyleIdx="3" presStyleCnt="4"/>
+      <dgm:spPr/>
+    </dgm:pt>
+    <dgm:pt modelId="{470BE337-F34A-43D4-8594-2430E2101880}" type="pres">
+      <dgm:prSet presAssocID="{D2FE027B-4161-41E1-B4D4-02AECB2E3FA0}" presName="childShape" presStyleCnt="0"/>
+      <dgm:spPr/>
+    </dgm:pt>
+    <dgm:pt modelId="{31F3111D-A95C-4A21-A541-C019A9B90DB4}" type="pres">
+      <dgm:prSet presAssocID="{A38E847E-0D1D-4F40-9A71-4D5999ADE08B}" presName="Name13" presStyleLbl="parChTrans1D2" presStyleIdx="3" presStyleCnt="4"/>
+      <dgm:spPr/>
+    </dgm:pt>
+    <dgm:pt modelId="{5AC548F6-4633-40AA-AC0B-F3A946DF7357}" type="pres">
+      <dgm:prSet presAssocID="{2BE415B7-7185-4956-8487-237B40BC0EE5}" presName="childText" presStyleLbl="bgAcc1" presStyleIdx="3" presStyleCnt="4">
         <dgm:presLayoutVars>
-          <dgm:chMax val="0"/>
-          <dgm:chPref val="0"/>
           <dgm:bulletEnabled val="1"/>
         </dgm:presLayoutVars>
       </dgm:prSet>
       <dgm:spPr/>
     </dgm:pt>
-    <dgm:pt modelId="{DADAA0C9-3E42-4088-8622-30E9F6EA139A}" type="pres">
-      <dgm:prSet presAssocID="{91969DED-4CB8-4A14-A50B-3F7B848E46B5}" presName="L2TextContainer" presStyleLbl="bgAcc1" presStyleIdx="1" presStyleCnt="4"/>
-      <dgm:spPr/>
-    </dgm:pt>
-    <dgm:pt modelId="{D2E61EE0-F306-43AF-AFF9-74A14B9CF379}" type="pres">
-      <dgm:prSet presAssocID="{91969DED-4CB8-4A14-A50B-3F7B848E46B5}" presName="FlexibleEmptyPlaceHolder" presStyleCnt="0"/>
-      <dgm:spPr/>
-    </dgm:pt>
-    <dgm:pt modelId="{DBD74D6B-057A-432C-9067-BF618C19EB2A}" type="pres">
-      <dgm:prSet presAssocID="{91969DED-4CB8-4A14-A50B-3F7B848E46B5}" presName="ConnectLine" presStyleLbl="sibTrans1D1" presStyleIdx="1" presStyleCnt="4"/>
-      <dgm:spPr>
-        <a:noFill/>
-        <a:ln w="12700" cap="rnd" cmpd="sng" algn="ctr">
-          <a:solidFill>
-            <a:schemeClr val="dk2">
-              <a:hueOff val="0"/>
-              <a:satOff val="0"/>
-              <a:lumOff val="0"/>
-              <a:alphaOff val="0"/>
-            </a:schemeClr>
-          </a:solidFill>
-          <a:prstDash val="dash"/>
-        </a:ln>
-        <a:effectLst/>
-      </dgm:spPr>
-    </dgm:pt>
-    <dgm:pt modelId="{0F979253-FD39-4920-BFCA-78C564B167EA}" type="pres">
-      <dgm:prSet presAssocID="{91969DED-4CB8-4A14-A50B-3F7B848E46B5}" presName="ConnectorPoint" presStyleLbl="alignNode1" presStyleIdx="1" presStyleCnt="4"/>
-      <dgm:spPr/>
-    </dgm:pt>
-    <dgm:pt modelId="{C9B4B298-E04C-4317-856D-E345FE5EC64B}" type="pres">
-      <dgm:prSet presAssocID="{91969DED-4CB8-4A14-A50B-3F7B848E46B5}" presName="EmptyPlaceHolder" presStyleCnt="0"/>
-      <dgm:spPr/>
-    </dgm:pt>
-    <dgm:pt modelId="{9B636147-AF19-40E0-BE7D-3BE8148CC024}" type="pres">
-      <dgm:prSet presAssocID="{81CA8AA2-C0C3-4381-BA8B-413EDD578B83}" presName="spaceBetweenRectangles" presStyleCnt="0"/>
-      <dgm:spPr/>
-    </dgm:pt>
-    <dgm:pt modelId="{76CB18D4-86E2-467C-A2CF-3ED9EFE66BEA}" type="pres">
-      <dgm:prSet presAssocID="{3CC73758-10C1-47F8-AFA7-1A986D4DDD60}" presName="composite" presStyleCnt="0"/>
-      <dgm:spPr/>
-    </dgm:pt>
-    <dgm:pt modelId="{E712D073-0B15-4887-9DCE-A27BCACBC178}" type="pres">
-      <dgm:prSet presAssocID="{3CC73758-10C1-47F8-AFA7-1A986D4DDD60}" presName="L1TextContainer" presStyleLbl="revTx" presStyleIdx="2" presStyleCnt="4">
-        <dgm:presLayoutVars>
-          <dgm:chMax val="1"/>
-          <dgm:chPref val="1"/>
-          <dgm:bulletEnabled val="1"/>
-        </dgm:presLayoutVars>
-      </dgm:prSet>
-      <dgm:spPr/>
-    </dgm:pt>
-    <dgm:pt modelId="{4C57E835-21E8-44E9-8CE3-1E2D478ECB2B}" type="pres">
-      <dgm:prSet presAssocID="{3CC73758-10C1-47F8-AFA7-1A986D4DDD60}" presName="L2TextContainerWrapper" presStyleCnt="0">
-        <dgm:presLayoutVars>
-          <dgm:chMax val="0"/>
-          <dgm:chPref val="0"/>
-          <dgm:bulletEnabled val="1"/>
-        </dgm:presLayoutVars>
-      </dgm:prSet>
-      <dgm:spPr/>
-    </dgm:pt>
-    <dgm:pt modelId="{E0D48281-565D-47A3-9B6C-576231178549}" type="pres">
-      <dgm:prSet presAssocID="{3CC73758-10C1-47F8-AFA7-1A986D4DDD60}" presName="L2TextContainer" presStyleLbl="bgAcc1" presStyleIdx="2" presStyleCnt="4"/>
-      <dgm:spPr/>
-    </dgm:pt>
-    <dgm:pt modelId="{E0365E95-CAD6-4660-956D-E490447A5CB4}" type="pres">
-      <dgm:prSet presAssocID="{3CC73758-10C1-47F8-AFA7-1A986D4DDD60}" presName="FlexibleEmptyPlaceHolder" presStyleCnt="0"/>
-      <dgm:spPr/>
-    </dgm:pt>
-    <dgm:pt modelId="{DCAE8A46-752C-4E82-84CE-E790E1F2918E}" type="pres">
-      <dgm:prSet presAssocID="{3CC73758-10C1-47F8-AFA7-1A986D4DDD60}" presName="ConnectLine" presStyleLbl="sibTrans1D1" presStyleIdx="2" presStyleCnt="4"/>
-      <dgm:spPr>
-        <a:noFill/>
-        <a:ln w="12700" cap="rnd" cmpd="sng" algn="ctr">
-          <a:solidFill>
-            <a:schemeClr val="dk2">
-              <a:hueOff val="0"/>
-              <a:satOff val="0"/>
-              <a:lumOff val="0"/>
-              <a:alphaOff val="0"/>
-            </a:schemeClr>
-          </a:solidFill>
-          <a:prstDash val="dash"/>
-        </a:ln>
-        <a:effectLst/>
-      </dgm:spPr>
-    </dgm:pt>
-    <dgm:pt modelId="{B6459BF8-D2C3-4018-9C28-98667DC203F4}" type="pres">
-      <dgm:prSet presAssocID="{3CC73758-10C1-47F8-AFA7-1A986D4DDD60}" presName="ConnectorPoint" presStyleLbl="alignNode1" presStyleIdx="2" presStyleCnt="4"/>
-      <dgm:spPr/>
-    </dgm:pt>
-    <dgm:pt modelId="{EAB0CCC2-BFF9-432D-BA8E-7ECAF2D92AF2}" type="pres">
-      <dgm:prSet presAssocID="{3CC73758-10C1-47F8-AFA7-1A986D4DDD60}" presName="EmptyPlaceHolder" presStyleCnt="0"/>
-      <dgm:spPr/>
-    </dgm:pt>
-    <dgm:pt modelId="{07073103-04B7-4C74-9AC8-048764100B10}" type="pres">
-      <dgm:prSet presAssocID="{D8170BBA-6035-4773-8431-FEDD687647FF}" presName="spaceBetweenRectangles" presStyleCnt="0"/>
-      <dgm:spPr/>
-    </dgm:pt>
-    <dgm:pt modelId="{C68762A5-E9DF-484F-B385-6C7E07325E98}" type="pres">
-      <dgm:prSet presAssocID="{D2FE027B-4161-41E1-B4D4-02AECB2E3FA0}" presName="composite" presStyleCnt="0"/>
-      <dgm:spPr/>
-    </dgm:pt>
-    <dgm:pt modelId="{F782935D-BBBD-4420-826A-F71C517659B6}" type="pres">
-      <dgm:prSet presAssocID="{D2FE027B-4161-41E1-B4D4-02AECB2E3FA0}" presName="L1TextContainer" presStyleLbl="revTx" presStyleIdx="3" presStyleCnt="4">
-        <dgm:presLayoutVars>
-          <dgm:chMax val="1"/>
-          <dgm:chPref val="1"/>
-          <dgm:bulletEnabled val="1"/>
-        </dgm:presLayoutVars>
-      </dgm:prSet>
-      <dgm:spPr/>
-    </dgm:pt>
-    <dgm:pt modelId="{3C71E446-482E-4CAC-8D42-2D4AC020412B}" type="pres">
-      <dgm:prSet presAssocID="{D2FE027B-4161-41E1-B4D4-02AECB2E3FA0}" presName="L2TextContainerWrapper" presStyleCnt="0">
-        <dgm:presLayoutVars>
-          <dgm:chMax val="0"/>
-          <dgm:chPref val="0"/>
-          <dgm:bulletEnabled val="1"/>
-        </dgm:presLayoutVars>
-      </dgm:prSet>
-      <dgm:spPr/>
-    </dgm:pt>
-    <dgm:pt modelId="{6C3A59BD-6D45-4573-B098-8CB5207F194D}" type="pres">
-      <dgm:prSet presAssocID="{D2FE027B-4161-41E1-B4D4-02AECB2E3FA0}" presName="L2TextContainer" presStyleLbl="bgAcc1" presStyleIdx="3" presStyleCnt="4"/>
-      <dgm:spPr/>
-    </dgm:pt>
-    <dgm:pt modelId="{8EB042C8-D666-4667-A1E4-E0C87151B72F}" type="pres">
-      <dgm:prSet presAssocID="{D2FE027B-4161-41E1-B4D4-02AECB2E3FA0}" presName="FlexibleEmptyPlaceHolder" presStyleCnt="0"/>
-      <dgm:spPr/>
-    </dgm:pt>
-    <dgm:pt modelId="{086FB9B1-82B2-4197-8B33-6E7FF94F8D2E}" type="pres">
-      <dgm:prSet presAssocID="{D2FE027B-4161-41E1-B4D4-02AECB2E3FA0}" presName="ConnectLine" presStyleLbl="sibTrans1D1" presStyleIdx="3" presStyleCnt="4"/>
-      <dgm:spPr>
-        <a:noFill/>
-        <a:ln w="12700" cap="rnd" cmpd="sng" algn="ctr">
-          <a:solidFill>
-            <a:schemeClr val="dk2">
-              <a:hueOff val="0"/>
-              <a:satOff val="0"/>
-              <a:lumOff val="0"/>
-              <a:alphaOff val="0"/>
-            </a:schemeClr>
-          </a:solidFill>
-          <a:prstDash val="dash"/>
-        </a:ln>
-        <a:effectLst/>
-      </dgm:spPr>
-    </dgm:pt>
-    <dgm:pt modelId="{3F359E8B-7C7E-4FD9-B106-36CCBFC731D5}" type="pres">
-      <dgm:prSet presAssocID="{D2FE027B-4161-41E1-B4D4-02AECB2E3FA0}" presName="ConnectorPoint" presStyleLbl="alignNode1" presStyleIdx="3" presStyleCnt="4"/>
-      <dgm:spPr/>
-    </dgm:pt>
-    <dgm:pt modelId="{34434334-A935-4057-946F-93B826088F38}" type="pres">
-      <dgm:prSet presAssocID="{D2FE027B-4161-41E1-B4D4-02AECB2E3FA0}" presName="EmptyPlaceHolder" presStyleCnt="0"/>
-      <dgm:spPr/>
-    </dgm:pt>
   </dgm:ptLst>
   <dgm:cxnLst>
+    <dgm:cxn modelId="{41CD8903-D9AE-410D-9C93-F89E5A99359B}" type="presOf" srcId="{91969DED-4CB8-4A14-A50B-3F7B848E46B5}" destId="{60235DB2-CB4A-47E8-9B12-88DA9F02032A}" srcOrd="1" destOrd="0" presId="urn:microsoft.com/office/officeart/2005/8/layout/hierarchy3"/>
+    <dgm:cxn modelId="{48E5B808-CC14-4745-BAAB-B8653E9E5B58}" type="presOf" srcId="{91969DED-4CB8-4A14-A50B-3F7B848E46B5}" destId="{B2B85D70-3379-4A3A-BFC7-55B1CFF6135E}" srcOrd="0" destOrd="0" presId="urn:microsoft.com/office/officeart/2005/8/layout/hierarchy3"/>
     <dgm:cxn modelId="{CB32A309-9CA9-4554-941D-519A91A9E733}" srcId="{D2FE027B-4161-41E1-B4D4-02AECB2E3FA0}" destId="{2BE415B7-7185-4956-8487-237B40BC0EE5}" srcOrd="0" destOrd="0" parTransId="{A38E847E-0D1D-4F40-9A71-4D5999ADE08B}" sibTransId="{F0D1C61C-E3F2-49BA-A2D8-C04A81308E5D}"/>
-    <dgm:cxn modelId="{64516513-C9B3-4B52-A434-6178ACAB3599}" type="presOf" srcId="{91969DED-4CB8-4A14-A50B-3F7B848E46B5}" destId="{60D0713D-AF69-4AF8-B071-F65622790886}" srcOrd="0" destOrd="0" presId="urn:microsoft.com/office/officeart/2016/7/layout/BasicTimeline"/>
-    <dgm:cxn modelId="{3760A536-08D8-4D45-9A8D-A21E58E17F8A}" type="presOf" srcId="{D2FE027B-4161-41E1-B4D4-02AECB2E3FA0}" destId="{F782935D-BBBD-4420-826A-F71C517659B6}" srcOrd="0" destOrd="0" presId="urn:microsoft.com/office/officeart/2016/7/layout/BasicTimeline"/>
+    <dgm:cxn modelId="{78E7C409-3A1B-4082-90C8-1D47F7E2D12F}" type="presOf" srcId="{A8C03FBB-4A75-4460-AEA6-DEAEB9C61496}" destId="{2EA5E456-59ED-4357-9F64-4AE2D1FF861A}" srcOrd="1" destOrd="0" presId="urn:microsoft.com/office/officeart/2005/8/layout/hierarchy3"/>
+    <dgm:cxn modelId="{BD184C0D-2FFD-4796-AED1-D8D204081C26}" type="presOf" srcId="{FD9CA14A-483C-4869-B0C1-7C5FB7EEDBCC}" destId="{480DA85B-472C-4207-A635-390AB779F8AA}" srcOrd="0" destOrd="0" presId="urn:microsoft.com/office/officeart/2005/8/layout/hierarchy3"/>
+    <dgm:cxn modelId="{7EB98F28-2251-480A-AC59-D5291300D8E3}" type="presOf" srcId="{D2FE027B-4161-41E1-B4D4-02AECB2E3FA0}" destId="{0214D70E-F5CC-430E-BBE1-15FF8210C217}" srcOrd="1" destOrd="0" presId="urn:microsoft.com/office/officeart/2005/8/layout/hierarchy3"/>
+    <dgm:cxn modelId="{669A8E2F-EA40-45BE-8DCF-4687F17DBCDF}" type="presOf" srcId="{D2FE027B-4161-41E1-B4D4-02AECB2E3FA0}" destId="{E272C3A2-C6CE-456E-8739-8CE42DB97611}" srcOrd="0" destOrd="0" presId="urn:microsoft.com/office/officeart/2005/8/layout/hierarchy3"/>
     <dgm:cxn modelId="{5EDA943F-300F-408A-A52E-3D5140FD5C22}" srcId="{3CC73758-10C1-47F8-AFA7-1A986D4DDD60}" destId="{FD9CA14A-483C-4869-B0C1-7C5FB7EEDBCC}" srcOrd="0" destOrd="0" parTransId="{8182A92F-45BA-4CD1-8E43-0B0810A50FEB}" sibTransId="{914BB93C-EA8A-4B5B-8F06-30DA7C7F4B7B}"/>
     <dgm:cxn modelId="{4A69F85D-5C15-48FD-893A-B3050E1BADEB}" srcId="{A66480AC-C0DE-4E5E-9ECD-9AE37E3FCB79}" destId="{3CC73758-10C1-47F8-AFA7-1A986D4DDD60}" srcOrd="2" destOrd="0" parTransId="{FF6AE4B6-4A2F-49EE-9316-9AF55E77838B}" sibTransId="{D8170BBA-6035-4773-8431-FEDD687647FF}"/>
     <dgm:cxn modelId="{D3D81948-D963-4D1E-AE16-9705EAF510FC}" srcId="{A66480AC-C0DE-4E5E-9ECD-9AE37E3FCB79}" destId="{A8C03FBB-4A75-4460-AEA6-DEAEB9C61496}" srcOrd="0" destOrd="0" parTransId="{4E972F7F-4B1B-47AA-A25B-1FFC561F1C76}" sibTransId="{67361508-930A-4A23-8CFC-BB56DA645C3C}"/>
-    <dgm:cxn modelId="{41643976-DEF5-44B7-B9E7-888F3AEFC45F}" type="presOf" srcId="{3CC73758-10C1-47F8-AFA7-1A986D4DDD60}" destId="{E712D073-0B15-4887-9DCE-A27BCACBC178}" srcOrd="0" destOrd="0" presId="urn:microsoft.com/office/officeart/2016/7/layout/BasicTimeline"/>
-    <dgm:cxn modelId="{2D36C892-88AC-490F-8E33-2C73C0E22FF5}" type="presOf" srcId="{2BE415B7-7185-4956-8487-237B40BC0EE5}" destId="{6C3A59BD-6D45-4573-B098-8CB5207F194D}" srcOrd="0" destOrd="0" presId="urn:microsoft.com/office/officeart/2016/7/layout/BasicTimeline"/>
-    <dgm:cxn modelId="{E5C7B693-D4EE-4A4E-97D1-4621CA0D3E91}" type="presOf" srcId="{A8C03FBB-4A75-4460-AEA6-DEAEB9C61496}" destId="{FE5C7F33-9326-49FB-89A3-8A20163AD994}" srcOrd="0" destOrd="0" presId="urn:microsoft.com/office/officeart/2016/7/layout/BasicTimeline"/>
+    <dgm:cxn modelId="{AE3C474D-D647-4DBF-9F55-895922EF08A7}" type="presOf" srcId="{8182A92F-45BA-4CD1-8E43-0B0810A50FEB}" destId="{2AF69084-4F24-4FF0-BE70-B867BB2181BA}" srcOrd="0" destOrd="0" presId="urn:microsoft.com/office/officeart/2005/8/layout/hierarchy3"/>
+    <dgm:cxn modelId="{3BAE0555-E0C1-425B-85FD-DA68B860EA05}" type="presOf" srcId="{8E5EE4D1-908E-455C-B8B3-281AD42DEC9A}" destId="{770CD0ED-B74A-4FF3-8567-3C1CD9E355E5}" srcOrd="0" destOrd="0" presId="urn:microsoft.com/office/officeart/2005/8/layout/hierarchy3"/>
+    <dgm:cxn modelId="{4476097B-F193-4668-B9F7-35450AB1716E}" type="presOf" srcId="{A8C03FBB-4A75-4460-AEA6-DEAEB9C61496}" destId="{EFE8DDA2-F173-425C-9A5C-A8B83BD59F63}" srcOrd="0" destOrd="0" presId="urn:microsoft.com/office/officeart/2005/8/layout/hierarchy3"/>
+    <dgm:cxn modelId="{58DB8986-8030-4D02-A514-61BBC9F4A2A1}" type="presOf" srcId="{8A04F340-E8E1-4146-9905-E7ADCAEAABD7}" destId="{91F90D3F-5B3C-4417-828E-DB7BBCCCA93D}" srcOrd="0" destOrd="0" presId="urn:microsoft.com/office/officeart/2005/8/layout/hierarchy3"/>
+    <dgm:cxn modelId="{397A1C9F-116B-4C03-AA0D-DA39D2F981BD}" type="presOf" srcId="{4EBD5EC2-45ED-4ED6-8376-97D155A911AE}" destId="{15863C0C-CD41-4F42-A67A-503A62AED956}" srcOrd="0" destOrd="0" presId="urn:microsoft.com/office/officeart/2005/8/layout/hierarchy3"/>
     <dgm:cxn modelId="{4F4F82A2-02F1-492B-96C1-46C070BEFCE3}" srcId="{A66480AC-C0DE-4E5E-9ECD-9AE37E3FCB79}" destId="{D2FE027B-4161-41E1-B4D4-02AECB2E3FA0}" srcOrd="3" destOrd="0" parTransId="{88680CFE-3CE0-4842-B3D3-716D3B671238}" sibTransId="{4D59E06B-629C-40B5-96D3-423B7A56C945}"/>
-    <dgm:cxn modelId="{4CE397A6-DB48-4AAE-BCFB-3D992789379D}" type="presOf" srcId="{5E71F362-34DF-4EEC-92A3-0EFE450E05E4}" destId="{BA29120C-7C6B-4F62-9079-4AD528BC0744}" srcOrd="0" destOrd="0" presId="urn:microsoft.com/office/officeart/2016/7/layout/BasicTimeline"/>
+    <dgm:cxn modelId="{1825F9B7-C44D-4DB0-842A-AED757F4449F}" type="presOf" srcId="{3CC73758-10C1-47F8-AFA7-1A986D4DDD60}" destId="{66C01C03-EAEC-4537-B004-F480ABEC743F}" srcOrd="1" destOrd="0" presId="urn:microsoft.com/office/officeart/2005/8/layout/hierarchy3"/>
     <dgm:cxn modelId="{B99CA6C9-28D1-4DDB-B8EC-AED73AD115CA}" srcId="{A8C03FBB-4A75-4460-AEA6-DEAEB9C61496}" destId="{5E71F362-34DF-4EEC-92A3-0EFE450E05E4}" srcOrd="0" destOrd="0" parTransId="{8E5EE4D1-908E-455C-B8B3-281AD42DEC9A}" sibTransId="{B208B24A-E9FD-40A9-B764-FB7C2B7ED8B9}"/>
+    <dgm:cxn modelId="{57AC5FCC-6FFE-41E7-8A2B-F3DD4AD76900}" type="presOf" srcId="{A38E847E-0D1D-4F40-9A71-4D5999ADE08B}" destId="{31F3111D-A95C-4A21-A541-C019A9B90DB4}" srcOrd="0" destOrd="0" presId="urn:microsoft.com/office/officeart/2005/8/layout/hierarchy3"/>
     <dgm:cxn modelId="{537F2ED0-8BD0-4AD5-B60D-89B660EDA1AC}" srcId="{A66480AC-C0DE-4E5E-9ECD-9AE37E3FCB79}" destId="{91969DED-4CB8-4A14-A50B-3F7B848E46B5}" srcOrd="1" destOrd="0" parTransId="{441CD73D-85E1-42A6-BCF8-362A3247E2F3}" sibTransId="{81CA8AA2-C0C3-4381-BA8B-413EDD578B83}"/>
-    <dgm:cxn modelId="{403E30EA-CA23-4A5A-9D22-DF82F93CFF08}" type="presOf" srcId="{A66480AC-C0DE-4E5E-9ECD-9AE37E3FCB79}" destId="{9FFA803F-EA25-49D8-A073-96E9747E345F}" srcOrd="0" destOrd="0" presId="urn:microsoft.com/office/officeart/2016/7/layout/BasicTimeline"/>
-    <dgm:cxn modelId="{252B4FF4-6466-43C7-8436-08B55881B5BC}" type="presOf" srcId="{FD9CA14A-483C-4869-B0C1-7C5FB7EEDBCC}" destId="{E0D48281-565D-47A3-9B6C-576231178549}" srcOrd="0" destOrd="0" presId="urn:microsoft.com/office/officeart/2016/7/layout/BasicTimeline"/>
-    <dgm:cxn modelId="{9488AFF6-9066-454E-B3C3-57C8BC68F549}" type="presOf" srcId="{8A04F340-E8E1-4146-9905-E7ADCAEAABD7}" destId="{DADAA0C9-3E42-4088-8622-30E9F6EA139A}" srcOrd="0" destOrd="0" presId="urn:microsoft.com/office/officeart/2016/7/layout/BasicTimeline"/>
+    <dgm:cxn modelId="{B67BE6DE-579A-4758-AB1E-862E607080D3}" type="presOf" srcId="{A66480AC-C0DE-4E5E-9ECD-9AE37E3FCB79}" destId="{DB498741-8ABA-44C0-8B75-224E0732E773}" srcOrd="0" destOrd="0" presId="urn:microsoft.com/office/officeart/2005/8/layout/hierarchy3"/>
+    <dgm:cxn modelId="{363289EF-AD2D-49F1-80D5-D3DED5C4335A}" type="presOf" srcId="{2BE415B7-7185-4956-8487-237B40BC0EE5}" destId="{5AC548F6-4633-40AA-AC0B-F3A946DF7357}" srcOrd="0" destOrd="0" presId="urn:microsoft.com/office/officeart/2005/8/layout/hierarchy3"/>
+    <dgm:cxn modelId="{955704F5-FF96-4770-8868-B6DA9E97BE39}" type="presOf" srcId="{3CC73758-10C1-47F8-AFA7-1A986D4DDD60}" destId="{A45A8FE1-97F9-4D32-ACBB-56FC455F3F54}" srcOrd="0" destOrd="0" presId="urn:microsoft.com/office/officeart/2005/8/layout/hierarchy3"/>
     <dgm:cxn modelId="{E636BFFB-0404-4D4B-B3F0-C64FDFD9DDEF}" srcId="{91969DED-4CB8-4A14-A50B-3F7B848E46B5}" destId="{8A04F340-E8E1-4146-9905-E7ADCAEAABD7}" srcOrd="0" destOrd="0" parTransId="{4EBD5EC2-45ED-4ED6-8376-97D155A911AE}" sibTransId="{F9CD2A04-6A34-4104-A971-391788B88F55}"/>
-    <dgm:cxn modelId="{9C5E351C-4F83-42C9-8766-363923817116}" type="presParOf" srcId="{9FFA803F-EA25-49D8-A073-96E9747E345F}" destId="{EE0E6265-BE99-48D1-8879-DB5A75D6D78E}" srcOrd="0" destOrd="0" presId="urn:microsoft.com/office/officeart/2016/7/layout/BasicTimeline"/>
-    <dgm:cxn modelId="{F4A239D2-791C-4FA7-8885-B0E1A7FEAC48}" type="presParOf" srcId="{9FFA803F-EA25-49D8-A073-96E9747E345F}" destId="{BDA8F949-88B8-486D-9E41-ABA1463A8926}" srcOrd="1" destOrd="0" presId="urn:microsoft.com/office/officeart/2016/7/layout/BasicTimeline"/>
-    <dgm:cxn modelId="{14D4DBE1-C56F-48BE-A66B-2B0E85E7B755}" type="presParOf" srcId="{BDA8F949-88B8-486D-9E41-ABA1463A8926}" destId="{A41AEE8D-8763-4311-BB07-B499A93D76EA}" srcOrd="0" destOrd="0" presId="urn:microsoft.com/office/officeart/2016/7/layout/BasicTimeline"/>
-    <dgm:cxn modelId="{2868F0B4-2D8C-4E60-A800-D7753FFE1445}" type="presParOf" srcId="{A41AEE8D-8763-4311-BB07-B499A93D76EA}" destId="{FE5C7F33-9326-49FB-89A3-8A20163AD994}" srcOrd="0" destOrd="0" presId="urn:microsoft.com/office/officeart/2016/7/layout/BasicTimeline"/>
-    <dgm:cxn modelId="{6F72394A-7E16-45AE-B5C9-6D1224450F0E}" type="presParOf" srcId="{A41AEE8D-8763-4311-BB07-B499A93D76EA}" destId="{C51067AB-548D-47E7-B9DD-C7A4C9600F8C}" srcOrd="1" destOrd="0" presId="urn:microsoft.com/office/officeart/2016/7/layout/BasicTimeline"/>
-    <dgm:cxn modelId="{2BF023E2-BD82-4543-9797-FF9FAF55B2A5}" type="presParOf" srcId="{C51067AB-548D-47E7-B9DD-C7A4C9600F8C}" destId="{BA29120C-7C6B-4F62-9079-4AD528BC0744}" srcOrd="0" destOrd="0" presId="urn:microsoft.com/office/officeart/2016/7/layout/BasicTimeline"/>
-    <dgm:cxn modelId="{2E1DF8FC-1E3D-407B-8B7F-074787FD4D73}" type="presParOf" srcId="{C51067AB-548D-47E7-B9DD-C7A4C9600F8C}" destId="{617B6CDA-9351-44EF-9011-41758FE93851}" srcOrd="1" destOrd="0" presId="urn:microsoft.com/office/officeart/2016/7/layout/BasicTimeline"/>
-    <dgm:cxn modelId="{4C3C8707-33EB-4053-85D9-0C1CF04E32CD}" type="presParOf" srcId="{A41AEE8D-8763-4311-BB07-B499A93D76EA}" destId="{A95DB80B-444A-4D69-B205-3A801BB8524A}" srcOrd="2" destOrd="0" presId="urn:microsoft.com/office/officeart/2016/7/layout/BasicTimeline"/>
-    <dgm:cxn modelId="{1FE3BD8D-0AF3-46A6-AB51-EDAEC9EB4D89}" type="presParOf" srcId="{A41AEE8D-8763-4311-BB07-B499A93D76EA}" destId="{FA19A0AA-8B0B-4AA8-A80D-08CFFDD3F112}" srcOrd="3" destOrd="0" presId="urn:microsoft.com/office/officeart/2016/7/layout/BasicTimeline"/>
-    <dgm:cxn modelId="{B5FDF500-80BD-45C8-BBEB-575AA1DAADE7}" type="presParOf" srcId="{A41AEE8D-8763-4311-BB07-B499A93D76EA}" destId="{C298CC98-EF08-4D23-94A2-F58DEE6D7DE4}" srcOrd="4" destOrd="0" presId="urn:microsoft.com/office/officeart/2016/7/layout/BasicTimeline"/>
-    <dgm:cxn modelId="{90EDA9D9-5363-433C-811E-5513B52588D1}" type="presParOf" srcId="{BDA8F949-88B8-486D-9E41-ABA1463A8926}" destId="{F3D981F8-7433-4E93-99E6-2B447306B973}" srcOrd="1" destOrd="0" presId="urn:microsoft.com/office/officeart/2016/7/layout/BasicTimeline"/>
-    <dgm:cxn modelId="{7935889E-4736-4C7F-8622-A330C126F16B}" type="presParOf" srcId="{BDA8F949-88B8-486D-9E41-ABA1463A8926}" destId="{7D29DFA7-018B-45C9-AC1C-5CFC82FEE150}" srcOrd="2" destOrd="0" presId="urn:microsoft.com/office/officeart/2016/7/layout/BasicTimeline"/>
-    <dgm:cxn modelId="{EB2658D4-3F40-4748-AE39-624B8E620A96}" type="presParOf" srcId="{7D29DFA7-018B-45C9-AC1C-5CFC82FEE150}" destId="{60D0713D-AF69-4AF8-B071-F65622790886}" srcOrd="0" destOrd="0" presId="urn:microsoft.com/office/officeart/2016/7/layout/BasicTimeline"/>
-    <dgm:cxn modelId="{51E99B0B-8CC3-4BC2-8250-4C73AF5F12E8}" type="presParOf" srcId="{7D29DFA7-018B-45C9-AC1C-5CFC82FEE150}" destId="{5DAA1547-FEA7-4F69-96D3-0E3A07601B1E}" srcOrd="1" destOrd="0" presId="urn:microsoft.com/office/officeart/2016/7/layout/BasicTimeline"/>
-    <dgm:cxn modelId="{9826AAC2-4AE6-4C22-826D-5672547E59BD}" type="presParOf" srcId="{5DAA1547-FEA7-4F69-96D3-0E3A07601B1E}" destId="{DADAA0C9-3E42-4088-8622-30E9F6EA139A}" srcOrd="0" destOrd="0" presId="urn:microsoft.com/office/officeart/2016/7/layout/BasicTimeline"/>
-    <dgm:cxn modelId="{EC270DFB-5C5B-40C9-8196-FC46A9C21D19}" type="presParOf" srcId="{5DAA1547-FEA7-4F69-96D3-0E3A07601B1E}" destId="{D2E61EE0-F306-43AF-AFF9-74A14B9CF379}" srcOrd="1" destOrd="0" presId="urn:microsoft.com/office/officeart/2016/7/layout/BasicTimeline"/>
-    <dgm:cxn modelId="{CB792D24-F02F-48C4-AC1D-366893851161}" type="presParOf" srcId="{7D29DFA7-018B-45C9-AC1C-5CFC82FEE150}" destId="{DBD74D6B-057A-432C-9067-BF618C19EB2A}" srcOrd="2" destOrd="0" presId="urn:microsoft.com/office/officeart/2016/7/layout/BasicTimeline"/>
-    <dgm:cxn modelId="{0B13E8C1-0B1E-425B-8D83-92D34782753B}" type="presParOf" srcId="{7D29DFA7-018B-45C9-AC1C-5CFC82FEE150}" destId="{0F979253-FD39-4920-BFCA-78C564B167EA}" srcOrd="3" destOrd="0" presId="urn:microsoft.com/office/officeart/2016/7/layout/BasicTimeline"/>
-    <dgm:cxn modelId="{6B60A5F4-2BAC-4F3F-A227-CB4F69F166D3}" type="presParOf" srcId="{7D29DFA7-018B-45C9-AC1C-5CFC82FEE150}" destId="{C9B4B298-E04C-4317-856D-E345FE5EC64B}" srcOrd="4" destOrd="0" presId="urn:microsoft.com/office/officeart/2016/7/layout/BasicTimeline"/>
-    <dgm:cxn modelId="{F632D135-41E2-43A9-9B84-8A9C50BA663F}" type="presParOf" srcId="{BDA8F949-88B8-486D-9E41-ABA1463A8926}" destId="{9B636147-AF19-40E0-BE7D-3BE8148CC024}" srcOrd="3" destOrd="0" presId="urn:microsoft.com/office/officeart/2016/7/layout/BasicTimeline"/>
-    <dgm:cxn modelId="{3411521A-E802-4A42-B7EC-D46E6B3B7C96}" type="presParOf" srcId="{BDA8F949-88B8-486D-9E41-ABA1463A8926}" destId="{76CB18D4-86E2-467C-A2CF-3ED9EFE66BEA}" srcOrd="4" destOrd="0" presId="urn:microsoft.com/office/officeart/2016/7/layout/BasicTimeline"/>
-    <dgm:cxn modelId="{88CD890C-B8E8-4CDA-B032-3A9A3F32FD79}" type="presParOf" srcId="{76CB18D4-86E2-467C-A2CF-3ED9EFE66BEA}" destId="{E712D073-0B15-4887-9DCE-A27BCACBC178}" srcOrd="0" destOrd="0" presId="urn:microsoft.com/office/officeart/2016/7/layout/BasicTimeline"/>
-    <dgm:cxn modelId="{AB1754FF-81F0-4ADB-A662-440DA0FBE430}" type="presParOf" srcId="{76CB18D4-86E2-467C-A2CF-3ED9EFE66BEA}" destId="{4C57E835-21E8-44E9-8CE3-1E2D478ECB2B}" srcOrd="1" destOrd="0" presId="urn:microsoft.com/office/officeart/2016/7/layout/BasicTimeline"/>
-    <dgm:cxn modelId="{03EB58B1-E5D1-49BD-8FE7-FF1A8E5CDD51}" type="presParOf" srcId="{4C57E835-21E8-44E9-8CE3-1E2D478ECB2B}" destId="{E0D48281-565D-47A3-9B6C-576231178549}" srcOrd="0" destOrd="0" presId="urn:microsoft.com/office/officeart/2016/7/layout/BasicTimeline"/>
-    <dgm:cxn modelId="{C7D8A92C-6CBF-4FA3-931B-5668E18C280C}" type="presParOf" srcId="{4C57E835-21E8-44E9-8CE3-1E2D478ECB2B}" destId="{E0365E95-CAD6-4660-956D-E490447A5CB4}" srcOrd="1" destOrd="0" presId="urn:microsoft.com/office/officeart/2016/7/layout/BasicTimeline"/>
-    <dgm:cxn modelId="{57009207-8976-4EFD-876A-EF1C91AB599A}" type="presParOf" srcId="{76CB18D4-86E2-467C-A2CF-3ED9EFE66BEA}" destId="{DCAE8A46-752C-4E82-84CE-E790E1F2918E}" srcOrd="2" destOrd="0" presId="urn:microsoft.com/office/officeart/2016/7/layout/BasicTimeline"/>
-    <dgm:cxn modelId="{A5FB4889-2275-4DD2-ADF0-583A5D1AE1ED}" type="presParOf" srcId="{76CB18D4-86E2-467C-A2CF-3ED9EFE66BEA}" destId="{B6459BF8-D2C3-4018-9C28-98667DC203F4}" srcOrd="3" destOrd="0" presId="urn:microsoft.com/office/officeart/2016/7/layout/BasicTimeline"/>
-    <dgm:cxn modelId="{8B3418BE-680A-4C04-AD26-F21B02D832B0}" type="presParOf" srcId="{76CB18D4-86E2-467C-A2CF-3ED9EFE66BEA}" destId="{EAB0CCC2-BFF9-432D-BA8E-7ECAF2D92AF2}" srcOrd="4" destOrd="0" presId="urn:microsoft.com/office/officeart/2016/7/layout/BasicTimeline"/>
-    <dgm:cxn modelId="{A9042F53-7838-4B89-A14A-DC86E7759451}" type="presParOf" srcId="{BDA8F949-88B8-486D-9E41-ABA1463A8926}" destId="{07073103-04B7-4C74-9AC8-048764100B10}" srcOrd="5" destOrd="0" presId="urn:microsoft.com/office/officeart/2016/7/layout/BasicTimeline"/>
-    <dgm:cxn modelId="{5290B18C-985B-476F-80AB-B000D2E28F60}" type="presParOf" srcId="{BDA8F949-88B8-486D-9E41-ABA1463A8926}" destId="{C68762A5-E9DF-484F-B385-6C7E07325E98}" srcOrd="6" destOrd="0" presId="urn:microsoft.com/office/officeart/2016/7/layout/BasicTimeline"/>
-    <dgm:cxn modelId="{819C616E-63F8-4599-9A66-512521E8E9F5}" type="presParOf" srcId="{C68762A5-E9DF-484F-B385-6C7E07325E98}" destId="{F782935D-BBBD-4420-826A-F71C517659B6}" srcOrd="0" destOrd="0" presId="urn:microsoft.com/office/officeart/2016/7/layout/BasicTimeline"/>
-    <dgm:cxn modelId="{8C54E232-1B89-4DC9-8E05-4736E6F4C528}" type="presParOf" srcId="{C68762A5-E9DF-484F-B385-6C7E07325E98}" destId="{3C71E446-482E-4CAC-8D42-2D4AC020412B}" srcOrd="1" destOrd="0" presId="urn:microsoft.com/office/officeart/2016/7/layout/BasicTimeline"/>
-    <dgm:cxn modelId="{BC353777-539A-4864-BB21-346D8C4360C1}" type="presParOf" srcId="{3C71E446-482E-4CAC-8D42-2D4AC020412B}" destId="{6C3A59BD-6D45-4573-B098-8CB5207F194D}" srcOrd="0" destOrd="0" presId="urn:microsoft.com/office/officeart/2016/7/layout/BasicTimeline"/>
-    <dgm:cxn modelId="{53E54228-74E4-4F6A-AAD7-71EB44BEEB36}" type="presParOf" srcId="{3C71E446-482E-4CAC-8D42-2D4AC020412B}" destId="{8EB042C8-D666-4667-A1E4-E0C87151B72F}" srcOrd="1" destOrd="0" presId="urn:microsoft.com/office/officeart/2016/7/layout/BasicTimeline"/>
-    <dgm:cxn modelId="{CD2E3F26-566B-4E8C-9927-C3B42B77551C}" type="presParOf" srcId="{C68762A5-E9DF-484F-B385-6C7E07325E98}" destId="{086FB9B1-82B2-4197-8B33-6E7FF94F8D2E}" srcOrd="2" destOrd="0" presId="urn:microsoft.com/office/officeart/2016/7/layout/BasicTimeline"/>
-    <dgm:cxn modelId="{7571835A-7BAA-40A1-945B-B991B049CBA7}" type="presParOf" srcId="{C68762A5-E9DF-484F-B385-6C7E07325E98}" destId="{3F359E8B-7C7E-4FD9-B106-36CCBFC731D5}" srcOrd="3" destOrd="0" presId="urn:microsoft.com/office/officeart/2016/7/layout/BasicTimeline"/>
-    <dgm:cxn modelId="{7083DB71-225A-4FBD-A8B2-9CBA2B2F1649}" type="presParOf" srcId="{C68762A5-E9DF-484F-B385-6C7E07325E98}" destId="{34434334-A935-4057-946F-93B826088F38}" srcOrd="4" destOrd="0" presId="urn:microsoft.com/office/officeart/2016/7/layout/BasicTimeline"/>
+    <dgm:cxn modelId="{1DD695FF-CEB8-4FC7-82B7-A84D816A4BFD}" type="presOf" srcId="{5E71F362-34DF-4EEC-92A3-0EFE450E05E4}" destId="{B4EE23A0-576C-45B7-ADCC-3908CAF42349}" srcOrd="0" destOrd="0" presId="urn:microsoft.com/office/officeart/2005/8/layout/hierarchy3"/>
+    <dgm:cxn modelId="{FDC80FD8-6C68-46B0-93A8-67CECABCEA4C}" type="presParOf" srcId="{DB498741-8ABA-44C0-8B75-224E0732E773}" destId="{B72A4F70-BD3C-46F7-98C2-4D38C9544852}" srcOrd="0" destOrd="0" presId="urn:microsoft.com/office/officeart/2005/8/layout/hierarchy3"/>
+    <dgm:cxn modelId="{B147BB67-8F1B-4844-9E7D-6457A6AB3466}" type="presParOf" srcId="{B72A4F70-BD3C-46F7-98C2-4D38C9544852}" destId="{C5B1B32D-5A4A-472D-A5C3-BD7554B7FE03}" srcOrd="0" destOrd="0" presId="urn:microsoft.com/office/officeart/2005/8/layout/hierarchy3"/>
+    <dgm:cxn modelId="{18777BC2-8270-45CA-BFC3-BF2B742F8614}" type="presParOf" srcId="{C5B1B32D-5A4A-472D-A5C3-BD7554B7FE03}" destId="{EFE8DDA2-F173-425C-9A5C-A8B83BD59F63}" srcOrd="0" destOrd="0" presId="urn:microsoft.com/office/officeart/2005/8/layout/hierarchy3"/>
+    <dgm:cxn modelId="{D35E8407-3EC0-4329-8338-6B4378BCC912}" type="presParOf" srcId="{C5B1B32D-5A4A-472D-A5C3-BD7554B7FE03}" destId="{2EA5E456-59ED-4357-9F64-4AE2D1FF861A}" srcOrd="1" destOrd="0" presId="urn:microsoft.com/office/officeart/2005/8/layout/hierarchy3"/>
+    <dgm:cxn modelId="{CC381BEC-174A-421F-9957-78B8A003A9AA}" type="presParOf" srcId="{B72A4F70-BD3C-46F7-98C2-4D38C9544852}" destId="{0120ECD7-3160-4DF3-9E38-C55A086313EC}" srcOrd="1" destOrd="0" presId="urn:microsoft.com/office/officeart/2005/8/layout/hierarchy3"/>
+    <dgm:cxn modelId="{85CBC958-A783-412B-A039-860B9EFF6BA6}" type="presParOf" srcId="{0120ECD7-3160-4DF3-9E38-C55A086313EC}" destId="{770CD0ED-B74A-4FF3-8567-3C1CD9E355E5}" srcOrd="0" destOrd="0" presId="urn:microsoft.com/office/officeart/2005/8/layout/hierarchy3"/>
+    <dgm:cxn modelId="{7191520A-537F-43BB-A373-C855C4C33410}" type="presParOf" srcId="{0120ECD7-3160-4DF3-9E38-C55A086313EC}" destId="{B4EE23A0-576C-45B7-ADCC-3908CAF42349}" srcOrd="1" destOrd="0" presId="urn:microsoft.com/office/officeart/2005/8/layout/hierarchy3"/>
+    <dgm:cxn modelId="{763B7860-B276-4FA3-886B-43A8A49EAC01}" type="presParOf" srcId="{DB498741-8ABA-44C0-8B75-224E0732E773}" destId="{BC4A4326-D09C-4D4A-BB10-FB0CCF4F5B4E}" srcOrd="1" destOrd="0" presId="urn:microsoft.com/office/officeart/2005/8/layout/hierarchy3"/>
+    <dgm:cxn modelId="{270A9D25-D85C-4154-8B7C-DEDDE8AFCA6D}" type="presParOf" srcId="{BC4A4326-D09C-4D4A-BB10-FB0CCF4F5B4E}" destId="{43BD8E24-9870-44B0-9A0C-7BE2C2F80528}" srcOrd="0" destOrd="0" presId="urn:microsoft.com/office/officeart/2005/8/layout/hierarchy3"/>
+    <dgm:cxn modelId="{8F408AD8-8E66-4BDA-A0A7-4696653B2D52}" type="presParOf" srcId="{43BD8E24-9870-44B0-9A0C-7BE2C2F80528}" destId="{B2B85D70-3379-4A3A-BFC7-55B1CFF6135E}" srcOrd="0" destOrd="0" presId="urn:microsoft.com/office/officeart/2005/8/layout/hierarchy3"/>
+    <dgm:cxn modelId="{B2A5F75F-68F3-422E-ACD4-57583FE0AF21}" type="presParOf" srcId="{43BD8E24-9870-44B0-9A0C-7BE2C2F80528}" destId="{60235DB2-CB4A-47E8-9B12-88DA9F02032A}" srcOrd="1" destOrd="0" presId="urn:microsoft.com/office/officeart/2005/8/layout/hierarchy3"/>
+    <dgm:cxn modelId="{1593FD9B-4172-4541-81BC-EB6DB583E91F}" type="presParOf" srcId="{BC4A4326-D09C-4D4A-BB10-FB0CCF4F5B4E}" destId="{5B16DF0D-3C17-4A67-B31F-E76553BBDB3C}" srcOrd="1" destOrd="0" presId="urn:microsoft.com/office/officeart/2005/8/layout/hierarchy3"/>
+    <dgm:cxn modelId="{F0B3A5C8-6D90-472C-B23B-424CC115FDFB}" type="presParOf" srcId="{5B16DF0D-3C17-4A67-B31F-E76553BBDB3C}" destId="{15863C0C-CD41-4F42-A67A-503A62AED956}" srcOrd="0" destOrd="0" presId="urn:microsoft.com/office/officeart/2005/8/layout/hierarchy3"/>
+    <dgm:cxn modelId="{76820F39-99E9-4AE8-BC8A-453AE9F8C14E}" type="presParOf" srcId="{5B16DF0D-3C17-4A67-B31F-E76553BBDB3C}" destId="{91F90D3F-5B3C-4417-828E-DB7BBCCCA93D}" srcOrd="1" destOrd="0" presId="urn:microsoft.com/office/officeart/2005/8/layout/hierarchy3"/>
+    <dgm:cxn modelId="{2C187FA5-3FA9-4DA8-8D73-5C49A698A1BE}" type="presParOf" srcId="{DB498741-8ABA-44C0-8B75-224E0732E773}" destId="{1674B00B-2531-425F-B623-6C040CF7840F}" srcOrd="2" destOrd="0" presId="urn:microsoft.com/office/officeart/2005/8/layout/hierarchy3"/>
+    <dgm:cxn modelId="{40DAE319-9418-4FB2-A288-0042B9C19A55}" type="presParOf" srcId="{1674B00B-2531-425F-B623-6C040CF7840F}" destId="{9C03C986-64FE-4A23-A69C-9CAD2EF54FBD}" srcOrd="0" destOrd="0" presId="urn:microsoft.com/office/officeart/2005/8/layout/hierarchy3"/>
+    <dgm:cxn modelId="{D2B033DD-5241-49AD-A04D-D0008230F17F}" type="presParOf" srcId="{9C03C986-64FE-4A23-A69C-9CAD2EF54FBD}" destId="{A45A8FE1-97F9-4D32-ACBB-56FC455F3F54}" srcOrd="0" destOrd="0" presId="urn:microsoft.com/office/officeart/2005/8/layout/hierarchy3"/>
+    <dgm:cxn modelId="{77A749FE-DB37-4A22-9CB5-A436566646E7}" type="presParOf" srcId="{9C03C986-64FE-4A23-A69C-9CAD2EF54FBD}" destId="{66C01C03-EAEC-4537-B004-F480ABEC743F}" srcOrd="1" destOrd="0" presId="urn:microsoft.com/office/officeart/2005/8/layout/hierarchy3"/>
+    <dgm:cxn modelId="{158373F1-A0D0-4E86-9795-BEB6A4621C0B}" type="presParOf" srcId="{1674B00B-2531-425F-B623-6C040CF7840F}" destId="{E298DDAC-D791-4C40-923F-C73250CD98FA}" srcOrd="1" destOrd="0" presId="urn:microsoft.com/office/officeart/2005/8/layout/hierarchy3"/>
+    <dgm:cxn modelId="{A62ADA7B-DE1B-4E52-9E73-877400674A7B}" type="presParOf" srcId="{E298DDAC-D791-4C40-923F-C73250CD98FA}" destId="{2AF69084-4F24-4FF0-BE70-B867BB2181BA}" srcOrd="0" destOrd="0" presId="urn:microsoft.com/office/officeart/2005/8/layout/hierarchy3"/>
+    <dgm:cxn modelId="{B315E6A6-3A5A-45C8-A94A-BC1CF7F03060}" type="presParOf" srcId="{E298DDAC-D791-4C40-923F-C73250CD98FA}" destId="{480DA85B-472C-4207-A635-390AB779F8AA}" srcOrd="1" destOrd="0" presId="urn:microsoft.com/office/officeart/2005/8/layout/hierarchy3"/>
+    <dgm:cxn modelId="{AFAE8711-4E7C-47B7-B2C7-8FFD20269431}" type="presParOf" srcId="{DB498741-8ABA-44C0-8B75-224E0732E773}" destId="{7BBF45BE-5D52-4946-AC1C-9B67D3D39DB1}" srcOrd="3" destOrd="0" presId="urn:microsoft.com/office/officeart/2005/8/layout/hierarchy3"/>
+    <dgm:cxn modelId="{145F7F2F-9E57-46E1-821E-33167BBCF53D}" type="presParOf" srcId="{7BBF45BE-5D52-4946-AC1C-9B67D3D39DB1}" destId="{1747C935-EDA8-4F9D-A002-D8D41523E255}" srcOrd="0" destOrd="0" presId="urn:microsoft.com/office/officeart/2005/8/layout/hierarchy3"/>
+    <dgm:cxn modelId="{FD9F6F6E-4BBD-4820-9680-3C4953B19AF9}" type="presParOf" srcId="{1747C935-EDA8-4F9D-A002-D8D41523E255}" destId="{E272C3A2-C6CE-456E-8739-8CE42DB97611}" srcOrd="0" destOrd="0" presId="urn:microsoft.com/office/officeart/2005/8/layout/hierarchy3"/>
+    <dgm:cxn modelId="{8180FB67-DF82-4D23-91A3-65C827CB049C}" type="presParOf" srcId="{1747C935-EDA8-4F9D-A002-D8D41523E255}" destId="{0214D70E-F5CC-430E-BBE1-15FF8210C217}" srcOrd="1" destOrd="0" presId="urn:microsoft.com/office/officeart/2005/8/layout/hierarchy3"/>
+    <dgm:cxn modelId="{54531977-DED4-42DB-A7FD-D76063B2A411}" type="presParOf" srcId="{7BBF45BE-5D52-4946-AC1C-9B67D3D39DB1}" destId="{470BE337-F34A-43D4-8594-2430E2101880}" srcOrd="1" destOrd="0" presId="urn:microsoft.com/office/officeart/2005/8/layout/hierarchy3"/>
+    <dgm:cxn modelId="{CE5FDEFA-C8AD-4171-97E5-BAC6C547D09B}" type="presParOf" srcId="{470BE337-F34A-43D4-8594-2430E2101880}" destId="{31F3111D-A95C-4A21-A541-C019A9B90DB4}" srcOrd="0" destOrd="0" presId="urn:microsoft.com/office/officeart/2005/8/layout/hierarchy3"/>
+    <dgm:cxn modelId="{3BECF9D8-C5F5-4439-8868-80EC7C2787EE}" type="presParOf" srcId="{470BE337-F34A-43D4-8594-2430E2101880}" destId="{5AC548F6-4633-40AA-AC0B-F3A946DF7357}" srcOrd="1" destOrd="0" presId="urn:microsoft.com/office/officeart/2005/8/layout/hierarchy3"/>
   </dgm:cxnLst>
   <dgm:bg/>
   <dgm:whole/>
@@ -1646,34 +2720,47 @@
       <dsp:cNvGrpSpPr/>
     </dsp:nvGrpSpPr>
     <dsp:grpSpPr/>
-    <dsp:sp modelId="{EE0E6265-BE99-48D1-8879-DB5A75D6D78E}">
+    <dsp:sp modelId="{1D474872-F0AF-4035-A9E3-43831297AAA1}">
       <dsp:nvSpPr>
         <dsp:cNvPr id="0" name=""/>
         <dsp:cNvSpPr/>
       </dsp:nvSpPr>
       <dsp:spPr>
         <a:xfrm>
-          <a:off x="0" y="2002631"/>
-          <a:ext cx="5753100" cy="0"/>
+          <a:off x="0" y="2897158"/>
+          <a:ext cx="1612900" cy="633827"/>
         </a:xfrm>
-        <a:prstGeom prst="line">
+        <a:prstGeom prst="rect">
           <a:avLst/>
         </a:prstGeom>
-        <a:solidFill>
-          <a:schemeClr val="dk2">
-            <a:alpha val="90000"/>
-            <a:tint val="40000"/>
-            <a:hueOff val="0"/>
-            <a:satOff val="0"/>
-            <a:lumOff val="0"/>
-            <a:alphaOff val="0"/>
-          </a:schemeClr>
-        </a:solidFill>
-        <a:ln w="19050" cap="rnd" cmpd="sng" algn="ctr">
+        <a:gradFill rotWithShape="0">
+          <a:gsLst>
+            <a:gs pos="0">
+              <a:schemeClr val="accent3">
+                <a:hueOff val="0"/>
+                <a:satOff val="0"/>
+                <a:lumOff val="0"/>
+                <a:alphaOff val="0"/>
+                <a:tint val="96000"/>
+                <a:lumMod val="100000"/>
+              </a:schemeClr>
+            </a:gs>
+            <a:gs pos="78000">
+              <a:schemeClr val="accent3">
+                <a:hueOff val="0"/>
+                <a:satOff val="0"/>
+                <a:lumOff val="0"/>
+                <a:alphaOff val="0"/>
+                <a:shade val="94000"/>
+                <a:lumMod val="94000"/>
+              </a:schemeClr>
+            </a:gs>
+          </a:gsLst>
+          <a:lin ang="5400000" scaled="0"/>
+        </a:gradFill>
+        <a:ln w="12700" cap="rnd" cmpd="sng" algn="ctr">
           <a:solidFill>
-            <a:schemeClr val="dk2">
-              <a:alpha val="90000"/>
-              <a:tint val="40000"/>
+            <a:schemeClr val="accent3">
               <a:hueOff val="0"/>
               <a:satOff val="0"/>
               <a:lumOff val="0"/>
@@ -1681,61 +2768,45 @@
             </a:schemeClr>
           </a:solidFill>
           <a:prstDash val="solid"/>
-          <a:tailEnd type="triangle" w="lg" len="lg"/>
         </a:ln>
-        <a:effectLst/>
+        <a:effectLst>
+          <a:outerShdw blurRad="50800" dist="38100" dir="5400000" rotWithShape="0">
+            <a:srgbClr val="000000">
+              <a:alpha val="35000"/>
+            </a:srgbClr>
+          </a:outerShdw>
+        </a:effectLst>
+        <a:scene3d>
+          <a:camera prst="orthographicFront">
+            <a:rot lat="0" lon="0" rev="0"/>
+          </a:camera>
+          <a:lightRig rig="threePt" dir="tl"/>
+        </a:scene3d>
+        <a:sp3d prstMaterial="plastic">
+          <a:bevelT w="0" h="0"/>
+        </a:sp3d>
       </dsp:spPr>
       <dsp:style>
-        <a:lnRef idx="2">
+        <a:lnRef idx="1">
           <a:scrgbClr r="0" g="0" b="0"/>
         </a:lnRef>
-        <a:fillRef idx="1">
+        <a:fillRef idx="3">
           <a:scrgbClr r="0" g="0" b="0"/>
         </a:fillRef>
-        <a:effectRef idx="0">
+        <a:effectRef idx="3">
           <a:scrgbClr r="0" g="0" b="0"/>
         </a:effectRef>
-        <a:fontRef idx="minor"/>
-      </dsp:style>
-    </dsp:sp>
-    <dsp:sp modelId="{FE5C7F33-9326-49FB-89A3-8A20163AD994}">
-      <dsp:nvSpPr>
-        <dsp:cNvPr id="0" name=""/>
-        <dsp:cNvSpPr/>
-      </dsp:nvSpPr>
-      <dsp:spPr>
-        <a:xfrm>
-          <a:off x="127618" y="2150825"/>
-          <a:ext cx="1846610" cy="452594"/>
-        </a:xfrm>
-        <a:prstGeom prst="rect">
-          <a:avLst/>
-        </a:prstGeom>
-        <a:noFill/>
-        <a:ln>
-          <a:noFill/>
-        </a:ln>
-        <a:effectLst/>
-      </dsp:spPr>
-      <dsp:style>
-        <a:lnRef idx="0">
-          <a:scrgbClr r="0" g="0" b="0"/>
-        </a:lnRef>
-        <a:fillRef idx="0">
-          <a:scrgbClr r="0" g="0" b="0"/>
-        </a:fillRef>
-        <a:effectRef idx="0">
-          <a:scrgbClr r="0" g="0" b="0"/>
-        </a:effectRef>
-        <a:fontRef idx="minor"/>
+        <a:fontRef idx="minor">
+          <a:schemeClr val="lt1"/>
+        </a:fontRef>
       </dsp:style>
       <dsp:txBody>
-        <a:bodyPr spcFirstLastPara="0" vert="horz" wrap="square" lIns="0" tIns="0" rIns="0" bIns="0" numCol="1" spcCol="1270" anchor="t" anchorCtr="1">
+        <a:bodyPr spcFirstLastPara="0" vert="horz" wrap="square" lIns="114709" tIns="135128" rIns="114709" bIns="135128" numCol="1" spcCol="1270" anchor="ctr" anchorCtr="0">
           <a:noAutofit/>
         </a:bodyPr>
         <a:lstStyle/>
         <a:p>
-          <a:pPr marL="0" lvl="0" indent="0" algn="ctr" defTabSz="1066800">
+          <a:pPr marL="0" lvl="0" indent="0" algn="ctr" defTabSz="844550">
             <a:lnSpc>
               <a:spcPct val="90000"/>
             </a:lnSpc>
@@ -1749,33 +2820,892 @@
             <a:defRPr b="1"/>
           </a:pPr>
           <a:r>
-            <a:rPr lang="en-US" sz="2400" kern="1200" dirty="0">
+            <a:rPr lang="en-US" sz="1900" kern="1200" dirty="0">
               <a:latin typeface="+mn-lt"/>
             </a:rPr>
-            <a:t>Q3</a:t>
+            <a:t>Week 06</a:t>
           </a:r>
         </a:p>
       </dsp:txBody>
       <dsp:txXfrm>
-        <a:off x="127618" y="2150825"/>
-        <a:ext cx="1846610" cy="452594"/>
+        <a:off x="0" y="2897158"/>
+        <a:ext cx="1612900" cy="633827"/>
       </dsp:txXfrm>
     </dsp:sp>
-    <dsp:sp modelId="{BA29120C-7C6B-4F62-9079-4AD528BC0744}">
+    <dsp:sp modelId="{8AEFFAF8-1EE6-4F06-AF7A-19CDC88507B1}">
       <dsp:nvSpPr>
         <dsp:cNvPr id="0" name=""/>
         <dsp:cNvSpPr/>
       </dsp:nvSpPr>
       <dsp:spPr>
         <a:xfrm>
-          <a:off x="1713" y="238626"/>
-          <a:ext cx="2098420" cy="1003005"/>
+          <a:off x="1612899" y="2897158"/>
+          <a:ext cx="4838700" cy="633827"/>
         </a:xfrm>
-        <a:prstGeom prst="roundRect">
+        <a:prstGeom prst="rect">
           <a:avLst/>
         </a:prstGeom>
         <a:solidFill>
-          <a:schemeClr val="lt2">
+          <a:schemeClr val="accent3">
+            <a:alpha val="90000"/>
+            <a:tint val="40000"/>
+            <a:hueOff val="0"/>
+            <a:satOff val="0"/>
+            <a:lumOff val="0"/>
+            <a:alphaOff val="0"/>
+          </a:schemeClr>
+        </a:solidFill>
+        <a:ln w="12700" cap="rnd" cmpd="sng" algn="ctr">
+          <a:solidFill>
+            <a:schemeClr val="accent3">
+              <a:alpha val="90000"/>
+              <a:tint val="40000"/>
+              <a:hueOff val="0"/>
+              <a:satOff val="0"/>
+              <a:lumOff val="0"/>
+              <a:alphaOff val="0"/>
+            </a:schemeClr>
+          </a:solidFill>
+          <a:prstDash val="solid"/>
+        </a:ln>
+        <a:effectLst>
+          <a:outerShdw blurRad="38100" dist="25400" dir="5400000" rotWithShape="0">
+            <a:srgbClr val="000000">
+              <a:alpha val="35000"/>
+            </a:srgbClr>
+          </a:outerShdw>
+        </a:effectLst>
+      </dsp:spPr>
+      <dsp:style>
+        <a:lnRef idx="1">
+          <a:scrgbClr r="0" g="0" b="0"/>
+        </a:lnRef>
+        <a:fillRef idx="1">
+          <a:scrgbClr r="0" g="0" b="0"/>
+        </a:fillRef>
+        <a:effectRef idx="2">
+          <a:scrgbClr r="0" g="0" b="0"/>
+        </a:effectRef>
+        <a:fontRef idx="minor"/>
+      </dsp:style>
+      <dsp:txBody>
+        <a:bodyPr spcFirstLastPara="0" vert="horz" wrap="square" lIns="98152" tIns="203200" rIns="98152" bIns="203200" numCol="1" spcCol="1270" anchor="ctr" anchorCtr="0">
+          <a:noAutofit/>
+        </a:bodyPr>
+        <a:lstStyle/>
+        <a:p>
+          <a:pPr marL="0" lvl="0" indent="0" algn="l" defTabSz="711200">
+            <a:lnSpc>
+              <a:spcPct val="90000"/>
+            </a:lnSpc>
+            <a:spcBef>
+              <a:spcPct val="0"/>
+            </a:spcBef>
+            <a:spcAft>
+              <a:spcPct val="35000"/>
+            </a:spcAft>
+            <a:buNone/>
+          </a:pPr>
+          <a:r>
+            <a:rPr lang="en-US" sz="1600" kern="1200">
+              <a:latin typeface="+mn-lt"/>
+            </a:rPr>
+            <a:t>Den thimamai?</a:t>
+          </a:r>
+          <a:endParaRPr lang="en-US" sz="1600" kern="1200" dirty="0">
+            <a:latin typeface="+mn-lt"/>
+          </a:endParaRPr>
+        </a:p>
+      </dsp:txBody>
+      <dsp:txXfrm>
+        <a:off x="1612899" y="2897158"/>
+        <a:ext cx="4838700" cy="633827"/>
+      </dsp:txXfrm>
+    </dsp:sp>
+    <dsp:sp modelId="{30A1F8AA-8662-4DAB-953B-B19BA07E7613}">
+      <dsp:nvSpPr>
+        <dsp:cNvPr id="0" name=""/>
+        <dsp:cNvSpPr/>
+      </dsp:nvSpPr>
+      <dsp:spPr>
+        <a:xfrm rot="10800000">
+          <a:off x="0" y="1931839"/>
+          <a:ext cx="1612900" cy="974826"/>
+        </a:xfrm>
+        <a:prstGeom prst="upArrowCallout">
+          <a:avLst>
+            <a:gd name="adj1" fmla="val 5000"/>
+            <a:gd name="adj2" fmla="val 10000"/>
+            <a:gd name="adj3" fmla="val 15000"/>
+            <a:gd name="adj4" fmla="val 64977"/>
+          </a:avLst>
+        </a:prstGeom>
+        <a:gradFill rotWithShape="0">
+          <a:gsLst>
+            <a:gs pos="0">
+              <a:schemeClr val="accent3">
+                <a:hueOff val="0"/>
+                <a:satOff val="0"/>
+                <a:lumOff val="0"/>
+                <a:alphaOff val="0"/>
+                <a:tint val="96000"/>
+                <a:lumMod val="100000"/>
+              </a:schemeClr>
+            </a:gs>
+            <a:gs pos="78000">
+              <a:schemeClr val="accent3">
+                <a:hueOff val="0"/>
+                <a:satOff val="0"/>
+                <a:lumOff val="0"/>
+                <a:alphaOff val="0"/>
+                <a:shade val="94000"/>
+                <a:lumMod val="94000"/>
+              </a:schemeClr>
+            </a:gs>
+          </a:gsLst>
+          <a:lin ang="5400000" scaled="0"/>
+        </a:gradFill>
+        <a:ln w="12700" cap="rnd" cmpd="sng" algn="ctr">
+          <a:solidFill>
+            <a:schemeClr val="accent3">
+              <a:hueOff val="0"/>
+              <a:satOff val="0"/>
+              <a:lumOff val="0"/>
+              <a:alphaOff val="0"/>
+            </a:schemeClr>
+          </a:solidFill>
+          <a:prstDash val="solid"/>
+        </a:ln>
+        <a:effectLst>
+          <a:outerShdw blurRad="50800" dist="38100" dir="5400000" rotWithShape="0">
+            <a:srgbClr val="000000">
+              <a:alpha val="35000"/>
+            </a:srgbClr>
+          </a:outerShdw>
+        </a:effectLst>
+        <a:scene3d>
+          <a:camera prst="orthographicFront">
+            <a:rot lat="0" lon="0" rev="0"/>
+          </a:camera>
+          <a:lightRig rig="threePt" dir="tl"/>
+        </a:scene3d>
+        <a:sp3d prstMaterial="plastic">
+          <a:bevelT w="0" h="0"/>
+        </a:sp3d>
+      </dsp:spPr>
+      <dsp:style>
+        <a:lnRef idx="1">
+          <a:scrgbClr r="0" g="0" b="0"/>
+        </a:lnRef>
+        <a:fillRef idx="3">
+          <a:scrgbClr r="0" g="0" b="0"/>
+        </a:fillRef>
+        <a:effectRef idx="3">
+          <a:scrgbClr r="0" g="0" b="0"/>
+        </a:effectRef>
+        <a:fontRef idx="minor">
+          <a:schemeClr val="lt1"/>
+        </a:fontRef>
+      </dsp:style>
+      <dsp:txBody>
+        <a:bodyPr spcFirstLastPara="0" vert="horz" wrap="square" lIns="114709" tIns="135128" rIns="114709" bIns="135128" numCol="1" spcCol="1270" anchor="ctr" anchorCtr="0">
+          <a:noAutofit/>
+        </a:bodyPr>
+        <a:lstStyle/>
+        <a:p>
+          <a:pPr marL="0" lvl="0" indent="0" algn="ctr" defTabSz="844550">
+            <a:lnSpc>
+              <a:spcPct val="90000"/>
+            </a:lnSpc>
+            <a:spcBef>
+              <a:spcPct val="0"/>
+            </a:spcBef>
+            <a:spcAft>
+              <a:spcPct val="35000"/>
+            </a:spcAft>
+            <a:buNone/>
+            <a:defRPr b="1"/>
+          </a:pPr>
+          <a:r>
+            <a:rPr lang="en-US" sz="1900" kern="1200" dirty="0">
+              <a:latin typeface="+mn-lt"/>
+            </a:rPr>
+            <a:t>Week 05 </a:t>
+          </a:r>
+        </a:p>
+      </dsp:txBody>
+      <dsp:txXfrm rot="-10800000">
+        <a:off x="0" y="1931839"/>
+        <a:ext cx="1612900" cy="633637"/>
+      </dsp:txXfrm>
+    </dsp:sp>
+    <dsp:sp modelId="{CA0E1395-E943-4C79-B59A-DF82C49B0E4A}">
+      <dsp:nvSpPr>
+        <dsp:cNvPr id="0" name=""/>
+        <dsp:cNvSpPr/>
+      </dsp:nvSpPr>
+      <dsp:spPr>
+        <a:xfrm>
+          <a:off x="1612899" y="1931839"/>
+          <a:ext cx="4838700" cy="633637"/>
+        </a:xfrm>
+        <a:prstGeom prst="rect">
+          <a:avLst/>
+        </a:prstGeom>
+        <a:solidFill>
+          <a:schemeClr val="accent3">
+            <a:alpha val="90000"/>
+            <a:tint val="40000"/>
+            <a:hueOff val="0"/>
+            <a:satOff val="0"/>
+            <a:lumOff val="0"/>
+            <a:alphaOff val="0"/>
+          </a:schemeClr>
+        </a:solidFill>
+        <a:ln w="12700" cap="rnd" cmpd="sng" algn="ctr">
+          <a:solidFill>
+            <a:schemeClr val="accent3">
+              <a:alpha val="90000"/>
+              <a:tint val="40000"/>
+              <a:hueOff val="0"/>
+              <a:satOff val="0"/>
+              <a:lumOff val="0"/>
+              <a:alphaOff val="0"/>
+            </a:schemeClr>
+          </a:solidFill>
+          <a:prstDash val="solid"/>
+        </a:ln>
+        <a:effectLst>
+          <a:outerShdw blurRad="38100" dist="25400" dir="5400000" rotWithShape="0">
+            <a:srgbClr val="000000">
+              <a:alpha val="35000"/>
+            </a:srgbClr>
+          </a:outerShdw>
+        </a:effectLst>
+      </dsp:spPr>
+      <dsp:style>
+        <a:lnRef idx="1">
+          <a:scrgbClr r="0" g="0" b="0"/>
+        </a:lnRef>
+        <a:fillRef idx="1">
+          <a:scrgbClr r="0" g="0" b="0"/>
+        </a:fillRef>
+        <a:effectRef idx="2">
+          <a:scrgbClr r="0" g="0" b="0"/>
+        </a:effectRef>
+        <a:fontRef idx="minor"/>
+      </dsp:style>
+      <dsp:txBody>
+        <a:bodyPr spcFirstLastPara="0" vert="horz" wrap="square" lIns="98152" tIns="203200" rIns="98152" bIns="203200" numCol="1" spcCol="1270" anchor="ctr" anchorCtr="0">
+          <a:noAutofit/>
+        </a:bodyPr>
+        <a:lstStyle/>
+        <a:p>
+          <a:pPr marL="0" lvl="0" indent="0" algn="l" defTabSz="711200">
+            <a:lnSpc>
+              <a:spcPct val="90000"/>
+            </a:lnSpc>
+            <a:spcBef>
+              <a:spcPct val="0"/>
+            </a:spcBef>
+            <a:spcAft>
+              <a:spcPct val="35000"/>
+            </a:spcAft>
+            <a:buNone/>
+          </a:pPr>
+          <a:r>
+            <a:rPr lang="en-US" sz="1600" kern="1200" dirty="0">
+              <a:latin typeface="+mn-lt"/>
+            </a:rPr>
+            <a:t>Context</a:t>
+          </a:r>
+        </a:p>
+      </dsp:txBody>
+      <dsp:txXfrm>
+        <a:off x="1612899" y="1931839"/>
+        <a:ext cx="4838700" cy="633637"/>
+      </dsp:txXfrm>
+    </dsp:sp>
+    <dsp:sp modelId="{924FA33F-3A8A-4D15-BF99-6DB303C71D0D}">
+      <dsp:nvSpPr>
+        <dsp:cNvPr id="0" name=""/>
+        <dsp:cNvSpPr/>
+      </dsp:nvSpPr>
+      <dsp:spPr>
+        <a:xfrm rot="10800000">
+          <a:off x="0" y="966520"/>
+          <a:ext cx="1612900" cy="974826"/>
+        </a:xfrm>
+        <a:prstGeom prst="upArrowCallout">
+          <a:avLst>
+            <a:gd name="adj1" fmla="val 5000"/>
+            <a:gd name="adj2" fmla="val 10000"/>
+            <a:gd name="adj3" fmla="val 15000"/>
+            <a:gd name="adj4" fmla="val 64977"/>
+          </a:avLst>
+        </a:prstGeom>
+        <a:gradFill rotWithShape="0">
+          <a:gsLst>
+            <a:gs pos="0">
+              <a:schemeClr val="accent3">
+                <a:hueOff val="0"/>
+                <a:satOff val="0"/>
+                <a:lumOff val="0"/>
+                <a:alphaOff val="0"/>
+                <a:tint val="96000"/>
+                <a:lumMod val="100000"/>
+              </a:schemeClr>
+            </a:gs>
+            <a:gs pos="78000">
+              <a:schemeClr val="accent3">
+                <a:hueOff val="0"/>
+                <a:satOff val="0"/>
+                <a:lumOff val="0"/>
+                <a:alphaOff val="0"/>
+                <a:shade val="94000"/>
+                <a:lumMod val="94000"/>
+              </a:schemeClr>
+            </a:gs>
+          </a:gsLst>
+          <a:lin ang="5400000" scaled="0"/>
+        </a:gradFill>
+        <a:ln w="12700" cap="rnd" cmpd="sng" algn="ctr">
+          <a:solidFill>
+            <a:schemeClr val="accent3">
+              <a:hueOff val="0"/>
+              <a:satOff val="0"/>
+              <a:lumOff val="0"/>
+              <a:alphaOff val="0"/>
+            </a:schemeClr>
+          </a:solidFill>
+          <a:prstDash val="solid"/>
+        </a:ln>
+        <a:effectLst>
+          <a:outerShdw blurRad="50800" dist="38100" dir="5400000" rotWithShape="0">
+            <a:srgbClr val="000000">
+              <a:alpha val="35000"/>
+            </a:srgbClr>
+          </a:outerShdw>
+        </a:effectLst>
+        <a:scene3d>
+          <a:camera prst="orthographicFront">
+            <a:rot lat="0" lon="0" rev="0"/>
+          </a:camera>
+          <a:lightRig rig="threePt" dir="tl"/>
+        </a:scene3d>
+        <a:sp3d prstMaterial="plastic">
+          <a:bevelT w="0" h="0"/>
+        </a:sp3d>
+      </dsp:spPr>
+      <dsp:style>
+        <a:lnRef idx="1">
+          <a:scrgbClr r="0" g="0" b="0"/>
+        </a:lnRef>
+        <a:fillRef idx="3">
+          <a:scrgbClr r="0" g="0" b="0"/>
+        </a:fillRef>
+        <a:effectRef idx="3">
+          <a:scrgbClr r="0" g="0" b="0"/>
+        </a:effectRef>
+        <a:fontRef idx="minor">
+          <a:schemeClr val="lt1"/>
+        </a:fontRef>
+      </dsp:style>
+      <dsp:txBody>
+        <a:bodyPr spcFirstLastPara="0" vert="horz" wrap="square" lIns="114709" tIns="135128" rIns="114709" bIns="135128" numCol="1" spcCol="1270" anchor="ctr" anchorCtr="0">
+          <a:noAutofit/>
+        </a:bodyPr>
+        <a:lstStyle/>
+        <a:p>
+          <a:pPr marL="0" lvl="0" indent="0" algn="ctr" defTabSz="844550">
+            <a:lnSpc>
+              <a:spcPct val="90000"/>
+            </a:lnSpc>
+            <a:spcBef>
+              <a:spcPct val="0"/>
+            </a:spcBef>
+            <a:spcAft>
+              <a:spcPct val="35000"/>
+            </a:spcAft>
+            <a:buNone/>
+            <a:defRPr b="1"/>
+          </a:pPr>
+          <a:r>
+            <a:rPr lang="en-US" sz="1900" kern="1200" dirty="0">
+              <a:latin typeface="+mn-lt"/>
+            </a:rPr>
+            <a:t>Week 04</a:t>
+          </a:r>
+        </a:p>
+      </dsp:txBody>
+      <dsp:txXfrm rot="-10800000">
+        <a:off x="0" y="966520"/>
+        <a:ext cx="1612900" cy="633637"/>
+      </dsp:txXfrm>
+    </dsp:sp>
+    <dsp:sp modelId="{4C1798A2-9A40-4D3B-968A-AF764C8A06FF}">
+      <dsp:nvSpPr>
+        <dsp:cNvPr id="0" name=""/>
+        <dsp:cNvSpPr/>
+      </dsp:nvSpPr>
+      <dsp:spPr>
+        <a:xfrm>
+          <a:off x="1612899" y="966520"/>
+          <a:ext cx="4838700" cy="633637"/>
+        </a:xfrm>
+        <a:prstGeom prst="rect">
+          <a:avLst/>
+        </a:prstGeom>
+        <a:solidFill>
+          <a:schemeClr val="accent3">
+            <a:alpha val="90000"/>
+            <a:tint val="40000"/>
+            <a:hueOff val="0"/>
+            <a:satOff val="0"/>
+            <a:lumOff val="0"/>
+            <a:alphaOff val="0"/>
+          </a:schemeClr>
+        </a:solidFill>
+        <a:ln w="12700" cap="rnd" cmpd="sng" algn="ctr">
+          <a:solidFill>
+            <a:schemeClr val="accent3">
+              <a:alpha val="90000"/>
+              <a:tint val="40000"/>
+              <a:hueOff val="0"/>
+              <a:satOff val="0"/>
+              <a:lumOff val="0"/>
+              <a:alphaOff val="0"/>
+            </a:schemeClr>
+          </a:solidFill>
+          <a:prstDash val="solid"/>
+        </a:ln>
+        <a:effectLst>
+          <a:outerShdw blurRad="38100" dist="25400" dir="5400000" rotWithShape="0">
+            <a:srgbClr val="000000">
+              <a:alpha val="35000"/>
+            </a:srgbClr>
+          </a:outerShdw>
+        </a:effectLst>
+      </dsp:spPr>
+      <dsp:style>
+        <a:lnRef idx="1">
+          <a:scrgbClr r="0" g="0" b="0"/>
+        </a:lnRef>
+        <a:fillRef idx="1">
+          <a:scrgbClr r="0" g="0" b="0"/>
+        </a:fillRef>
+        <a:effectRef idx="2">
+          <a:scrgbClr r="0" g="0" b="0"/>
+        </a:effectRef>
+        <a:fontRef idx="minor"/>
+      </dsp:style>
+      <dsp:txBody>
+        <a:bodyPr spcFirstLastPara="0" vert="horz" wrap="square" lIns="98152" tIns="203200" rIns="98152" bIns="203200" numCol="1" spcCol="1270" anchor="ctr" anchorCtr="0">
+          <a:noAutofit/>
+        </a:bodyPr>
+        <a:lstStyle/>
+        <a:p>
+          <a:pPr marL="0" lvl="0" indent="0" algn="l" defTabSz="711200">
+            <a:lnSpc>
+              <a:spcPct val="90000"/>
+            </a:lnSpc>
+            <a:spcBef>
+              <a:spcPct val="0"/>
+            </a:spcBef>
+            <a:spcAft>
+              <a:spcPct val="35000"/>
+            </a:spcAft>
+            <a:buNone/>
+          </a:pPr>
+          <a:r>
+            <a:rPr lang="en-US" sz="1600" kern="1200" dirty="0">
+              <a:latin typeface="+mn-lt"/>
+            </a:rPr>
+            <a:t>Docker</a:t>
+          </a:r>
+        </a:p>
+      </dsp:txBody>
+      <dsp:txXfrm>
+        <a:off x="1612899" y="966520"/>
+        <a:ext cx="4838700" cy="633637"/>
+      </dsp:txXfrm>
+    </dsp:sp>
+    <dsp:sp modelId="{E3771873-D5EC-4BAE-B9C3-3AA3F0CD58A2}">
+      <dsp:nvSpPr>
+        <dsp:cNvPr id="0" name=""/>
+        <dsp:cNvSpPr/>
+      </dsp:nvSpPr>
+      <dsp:spPr>
+        <a:xfrm rot="10800000">
+          <a:off x="0" y="10344"/>
+          <a:ext cx="1612900" cy="974826"/>
+        </a:xfrm>
+        <a:prstGeom prst="upArrowCallout">
+          <a:avLst>
+            <a:gd name="adj1" fmla="val 5000"/>
+            <a:gd name="adj2" fmla="val 10000"/>
+            <a:gd name="adj3" fmla="val 15000"/>
+            <a:gd name="adj4" fmla="val 64977"/>
+          </a:avLst>
+        </a:prstGeom>
+        <a:gradFill rotWithShape="0">
+          <a:gsLst>
+            <a:gs pos="0">
+              <a:schemeClr val="accent3">
+                <a:hueOff val="0"/>
+                <a:satOff val="0"/>
+                <a:lumOff val="0"/>
+                <a:alphaOff val="0"/>
+                <a:tint val="96000"/>
+                <a:lumMod val="100000"/>
+              </a:schemeClr>
+            </a:gs>
+            <a:gs pos="78000">
+              <a:schemeClr val="accent3">
+                <a:hueOff val="0"/>
+                <a:satOff val="0"/>
+                <a:lumOff val="0"/>
+                <a:alphaOff val="0"/>
+                <a:shade val="94000"/>
+                <a:lumMod val="94000"/>
+              </a:schemeClr>
+            </a:gs>
+          </a:gsLst>
+          <a:lin ang="5400000" scaled="0"/>
+        </a:gradFill>
+        <a:ln w="12700" cap="rnd" cmpd="sng" algn="ctr">
+          <a:solidFill>
+            <a:schemeClr val="accent3">
+              <a:hueOff val="0"/>
+              <a:satOff val="0"/>
+              <a:lumOff val="0"/>
+              <a:alphaOff val="0"/>
+            </a:schemeClr>
+          </a:solidFill>
+          <a:prstDash val="solid"/>
+        </a:ln>
+        <a:effectLst>
+          <a:outerShdw blurRad="50800" dist="38100" dir="5400000" rotWithShape="0">
+            <a:srgbClr val="000000">
+              <a:alpha val="35000"/>
+            </a:srgbClr>
+          </a:outerShdw>
+        </a:effectLst>
+        <a:scene3d>
+          <a:camera prst="orthographicFront">
+            <a:rot lat="0" lon="0" rev="0"/>
+          </a:camera>
+          <a:lightRig rig="threePt" dir="tl"/>
+        </a:scene3d>
+        <a:sp3d prstMaterial="plastic">
+          <a:bevelT w="0" h="0"/>
+        </a:sp3d>
+      </dsp:spPr>
+      <dsp:style>
+        <a:lnRef idx="1">
+          <a:scrgbClr r="0" g="0" b="0"/>
+        </a:lnRef>
+        <a:fillRef idx="3">
+          <a:scrgbClr r="0" g="0" b="0"/>
+        </a:fillRef>
+        <a:effectRef idx="3">
+          <a:scrgbClr r="0" g="0" b="0"/>
+        </a:effectRef>
+        <a:fontRef idx="minor">
+          <a:schemeClr val="lt1"/>
+        </a:fontRef>
+      </dsp:style>
+      <dsp:txBody>
+        <a:bodyPr spcFirstLastPara="0" vert="horz" wrap="square" lIns="114709" tIns="135128" rIns="114709" bIns="135128" numCol="1" spcCol="1270" anchor="ctr" anchorCtr="0">
+          <a:noAutofit/>
+        </a:bodyPr>
+        <a:lstStyle/>
+        <a:p>
+          <a:pPr marL="0" lvl="0" indent="0" algn="ctr" defTabSz="844550">
+            <a:lnSpc>
+              <a:spcPct val="90000"/>
+            </a:lnSpc>
+            <a:spcBef>
+              <a:spcPct val="0"/>
+            </a:spcBef>
+            <a:spcAft>
+              <a:spcPct val="35000"/>
+            </a:spcAft>
+            <a:buNone/>
+            <a:defRPr b="1"/>
+          </a:pPr>
+          <a:r>
+            <a:rPr lang="en-US" sz="1900" kern="1200" dirty="0">
+              <a:latin typeface="+mn-lt"/>
+            </a:rPr>
+            <a:t>Week 01-03</a:t>
+          </a:r>
+        </a:p>
+      </dsp:txBody>
+      <dsp:txXfrm rot="-10800000">
+        <a:off x="0" y="10344"/>
+        <a:ext cx="1612900" cy="633637"/>
+      </dsp:txXfrm>
+    </dsp:sp>
+    <dsp:sp modelId="{262EA726-48DD-4411-9915-2DD7E096AAD1}">
+      <dsp:nvSpPr>
+        <dsp:cNvPr id="0" name=""/>
+        <dsp:cNvSpPr/>
+      </dsp:nvSpPr>
+      <dsp:spPr>
+        <a:xfrm>
+          <a:off x="1612899" y="1200"/>
+          <a:ext cx="4838700" cy="633637"/>
+        </a:xfrm>
+        <a:prstGeom prst="rect">
+          <a:avLst/>
+        </a:prstGeom>
+        <a:solidFill>
+          <a:schemeClr val="accent3">
+            <a:alpha val="90000"/>
+            <a:tint val="40000"/>
+            <a:hueOff val="0"/>
+            <a:satOff val="0"/>
+            <a:lumOff val="0"/>
+            <a:alphaOff val="0"/>
+          </a:schemeClr>
+        </a:solidFill>
+        <a:ln w="12700" cap="rnd" cmpd="sng" algn="ctr">
+          <a:solidFill>
+            <a:schemeClr val="accent3">
+              <a:alpha val="90000"/>
+              <a:tint val="40000"/>
+              <a:hueOff val="0"/>
+              <a:satOff val="0"/>
+              <a:lumOff val="0"/>
+              <a:alphaOff val="0"/>
+            </a:schemeClr>
+          </a:solidFill>
+          <a:prstDash val="solid"/>
+        </a:ln>
+        <a:effectLst>
+          <a:outerShdw blurRad="38100" dist="25400" dir="5400000" rotWithShape="0">
+            <a:srgbClr val="000000">
+              <a:alpha val="35000"/>
+            </a:srgbClr>
+          </a:outerShdw>
+        </a:effectLst>
+      </dsp:spPr>
+      <dsp:style>
+        <a:lnRef idx="1">
+          <a:scrgbClr r="0" g="0" b="0"/>
+        </a:lnRef>
+        <a:fillRef idx="1">
+          <a:scrgbClr r="0" g="0" b="0"/>
+        </a:fillRef>
+        <a:effectRef idx="2">
+          <a:scrgbClr r="0" g="0" b="0"/>
+        </a:effectRef>
+        <a:fontRef idx="minor"/>
+      </dsp:style>
+      <dsp:txBody>
+        <a:bodyPr spcFirstLastPara="0" vert="horz" wrap="square" lIns="98152" tIns="203200" rIns="98152" bIns="203200" numCol="1" spcCol="1270" anchor="ctr" anchorCtr="0">
+          <a:noAutofit/>
+        </a:bodyPr>
+        <a:lstStyle/>
+        <a:p>
+          <a:pPr marL="0" lvl="0" indent="0" algn="l" defTabSz="711200">
+            <a:lnSpc>
+              <a:spcPct val="90000"/>
+            </a:lnSpc>
+            <a:spcBef>
+              <a:spcPct val="0"/>
+            </a:spcBef>
+            <a:spcAft>
+              <a:spcPct val="35000"/>
+            </a:spcAft>
+            <a:buNone/>
+          </a:pPr>
+          <a:r>
+            <a:rPr lang="en-US" sz="1600" kern="1200" dirty="0" err="1">
+              <a:latin typeface="+mn-lt"/>
+            </a:rPr>
+            <a:t>GithubSetup</a:t>
+          </a:r>
+          <a:endParaRPr lang="en-US" sz="1600" kern="1200" dirty="0">
+            <a:latin typeface="+mn-lt"/>
+          </a:endParaRPr>
+        </a:p>
+      </dsp:txBody>
+      <dsp:txXfrm>
+        <a:off x="1612899" y="1200"/>
+        <a:ext cx="4838700" cy="633637"/>
+      </dsp:txXfrm>
+    </dsp:sp>
+  </dsp:spTree>
+</dsp:drawing>
+</file>
+
+<file path=ppt/diagrams/drawing2.xml><?xml version="1.0" encoding="utf-8"?>
+<dsp:drawing xmlns:dgm="http://schemas.openxmlformats.org/drawingml/2006/diagram" xmlns:dsp="http://schemas.microsoft.com/office/drawing/2008/diagram" xmlns:a="http://schemas.openxmlformats.org/drawingml/2006/main">
+  <dsp:spTree>
+    <dsp:nvGrpSpPr>
+      <dsp:cNvPr id="0" name=""/>
+      <dsp:cNvGrpSpPr/>
+    </dsp:nvGrpSpPr>
+    <dsp:grpSpPr/>
+    <dsp:sp modelId="{EFE8DDA2-F173-425C-9A5C-A8B83BD59F63}">
+      <dsp:nvSpPr>
+        <dsp:cNvPr id="0" name=""/>
+        <dsp:cNvSpPr/>
+      </dsp:nvSpPr>
+      <dsp:spPr>
+        <a:xfrm>
+          <a:off x="1181" y="1002368"/>
+          <a:ext cx="1357734" cy="678867"/>
+        </a:xfrm>
+        <a:prstGeom prst="roundRect">
+          <a:avLst>
+            <a:gd name="adj" fmla="val 10000"/>
+          </a:avLst>
+        </a:prstGeom>
+        <a:solidFill>
+          <a:schemeClr val="accent3">
+            <a:hueOff val="0"/>
+            <a:satOff val="0"/>
+            <a:lumOff val="0"/>
+            <a:alphaOff val="0"/>
+          </a:schemeClr>
+        </a:solidFill>
+        <a:ln w="25400" cap="rnd" cmpd="sng" algn="ctr">
+          <a:solidFill>
+            <a:schemeClr val="lt1">
+              <a:hueOff val="0"/>
+              <a:satOff val="0"/>
+              <a:lumOff val="0"/>
+              <a:alphaOff val="0"/>
+            </a:schemeClr>
+          </a:solidFill>
+          <a:prstDash val="solid"/>
+        </a:ln>
+        <a:effectLst/>
+      </dsp:spPr>
+      <dsp:style>
+        <a:lnRef idx="3">
+          <a:scrgbClr r="0" g="0" b="0"/>
+        </a:lnRef>
+        <a:fillRef idx="1">
+          <a:scrgbClr r="0" g="0" b="0"/>
+        </a:fillRef>
+        <a:effectRef idx="1">
+          <a:scrgbClr r="0" g="0" b="0"/>
+        </a:effectRef>
+        <a:fontRef idx="minor">
+          <a:schemeClr val="lt1"/>
+        </a:fontRef>
+      </dsp:style>
+      <dsp:txBody>
+        <a:bodyPr spcFirstLastPara="0" vert="horz" wrap="square" lIns="43815" tIns="29210" rIns="43815" bIns="29210" numCol="1" spcCol="1270" anchor="ctr" anchorCtr="0">
+          <a:noAutofit/>
+        </a:bodyPr>
+        <a:lstStyle/>
+        <a:p>
+          <a:pPr marL="0" lvl="0" indent="0" algn="ctr" defTabSz="1022350">
+            <a:lnSpc>
+              <a:spcPct val="90000"/>
+            </a:lnSpc>
+            <a:spcBef>
+              <a:spcPct val="0"/>
+            </a:spcBef>
+            <a:spcAft>
+              <a:spcPct val="35000"/>
+            </a:spcAft>
+            <a:buNone/>
+            <a:defRPr b="1"/>
+          </a:pPr>
+          <a:r>
+            <a:rPr lang="en-US" sz="2300" kern="1200">
+              <a:latin typeface="+mn-lt"/>
+            </a:rPr>
+            <a:t>Week 07</a:t>
+          </a:r>
+        </a:p>
+      </dsp:txBody>
+      <dsp:txXfrm>
+        <a:off x="21064" y="1022251"/>
+        <a:ext cx="1317968" cy="639101"/>
+      </dsp:txXfrm>
+    </dsp:sp>
+    <dsp:sp modelId="{770CD0ED-B74A-4FF3-8567-3C1CD9E355E5}">
+      <dsp:nvSpPr>
+        <dsp:cNvPr id="0" name=""/>
+        <dsp:cNvSpPr/>
+      </dsp:nvSpPr>
+      <dsp:spPr>
+        <a:xfrm>
+          <a:off x="136954" y="1681235"/>
+          <a:ext cx="135773" cy="509150"/>
+        </a:xfrm>
+        <a:custGeom>
+          <a:avLst/>
+          <a:gdLst/>
+          <a:ahLst/>
+          <a:cxnLst/>
+          <a:rect l="0" t="0" r="0" b="0"/>
+          <a:pathLst>
+            <a:path>
+              <a:moveTo>
+                <a:pt x="0" y="0"/>
+              </a:moveTo>
+              <a:lnTo>
+                <a:pt x="0" y="509150"/>
+              </a:lnTo>
+              <a:lnTo>
+                <a:pt x="135773" y="509150"/>
+              </a:lnTo>
+            </a:path>
+          </a:pathLst>
+        </a:custGeom>
+        <a:noFill/>
+        <a:ln w="19050" cap="rnd" cmpd="sng" algn="ctr">
+          <a:solidFill>
+            <a:schemeClr val="accent3">
+              <a:shade val="60000"/>
+              <a:hueOff val="0"/>
+              <a:satOff val="0"/>
+              <a:lumOff val="0"/>
+              <a:alphaOff val="0"/>
+            </a:schemeClr>
+          </a:solidFill>
+          <a:prstDash val="solid"/>
+        </a:ln>
+        <a:effectLst/>
+      </dsp:spPr>
+      <dsp:style>
+        <a:lnRef idx="2">
+          <a:scrgbClr r="0" g="0" b="0"/>
+        </a:lnRef>
+        <a:fillRef idx="0">
+          <a:scrgbClr r="0" g="0" b="0"/>
+        </a:fillRef>
+        <a:effectRef idx="0">
+          <a:scrgbClr r="0" g="0" b="0"/>
+        </a:effectRef>
+        <a:fontRef idx="minor"/>
+      </dsp:style>
+    </dsp:sp>
+    <dsp:sp modelId="{B4EE23A0-576C-45B7-ADCC-3908CAF42349}">
+      <dsp:nvSpPr>
+        <dsp:cNvPr id="0" name=""/>
+        <dsp:cNvSpPr/>
+      </dsp:nvSpPr>
+      <dsp:spPr>
+        <a:xfrm>
+          <a:off x="272728" y="1850951"/>
+          <a:ext cx="1086187" cy="678867"/>
+        </a:xfrm>
+        <a:prstGeom prst="roundRect">
+          <a:avLst>
+            <a:gd name="adj" fmla="val 10000"/>
+          </a:avLst>
+        </a:prstGeom>
+        <a:solidFill>
+          <a:schemeClr val="lt1">
             <a:alpha val="90000"/>
             <a:hueOff val="0"/>
             <a:satOff val="0"/>
@@ -1785,7 +3715,7 @@
         </a:solidFill>
         <a:ln w="19050" cap="rnd" cmpd="sng" algn="ctr">
           <a:solidFill>
-            <a:schemeClr val="dk2">
+            <a:schemeClr val="accent3">
               <a:hueOff val="0"/>
               <a:satOff val="0"/>
               <a:lumOff val="0"/>
@@ -1809,12 +3739,12 @@
         <a:fontRef idx="minor"/>
       </dsp:style>
       <dsp:txBody>
-        <a:bodyPr spcFirstLastPara="0" vert="horz" wrap="square" lIns="177800" tIns="177800" rIns="177800" bIns="177800" numCol="1" spcCol="1270" anchor="ctr" anchorCtr="0">
+        <a:bodyPr spcFirstLastPara="0" vert="horz" wrap="square" lIns="28575" tIns="19050" rIns="28575" bIns="19050" numCol="1" spcCol="1270" anchor="ctr" anchorCtr="0">
           <a:noAutofit/>
         </a:bodyPr>
         <a:lstStyle/>
         <a:p>
-          <a:pPr marL="0" lvl="0" indent="0" algn="ctr" defTabSz="889000">
+          <a:pPr marL="0" lvl="0" indent="0" algn="ctr" defTabSz="666750">
             <a:lnSpc>
               <a:spcPct val="90000"/>
             </a:lnSpc>
@@ -1827,96 +3757,75 @@
             <a:buNone/>
           </a:pPr>
           <a:r>
-            <a:rPr lang="en-US" sz="2000" kern="1200" dirty="0">
+            <a:rPr lang="en-US" sz="1500" kern="1200">
               <a:latin typeface="+mn-lt"/>
             </a:rPr>
-            <a:t>Market research</a:t>
+            <a:t>Home Assistant</a:t>
           </a:r>
         </a:p>
       </dsp:txBody>
       <dsp:txXfrm>
-        <a:off x="50676" y="287589"/>
-        <a:ext cx="2000494" cy="905079"/>
+        <a:off x="292611" y="1870834"/>
+        <a:ext cx="1046421" cy="639101"/>
       </dsp:txXfrm>
     </dsp:sp>
-    <dsp:sp modelId="{A95DB80B-444A-4D69-B205-3A801BB8524A}">
+    <dsp:sp modelId="{B2B85D70-3379-4A3A-BFC7-55B1CFF6135E}">
       <dsp:nvSpPr>
         <dsp:cNvPr id="0" name=""/>
         <dsp:cNvSpPr/>
       </dsp:nvSpPr>
       <dsp:spPr>
         <a:xfrm>
-          <a:off x="1050923" y="1241631"/>
-          <a:ext cx="0" cy="760999"/>
+          <a:off x="1698349" y="1002368"/>
+          <a:ext cx="1357734" cy="678867"/>
         </a:xfrm>
-        <a:prstGeom prst="line">
-          <a:avLst/>
+        <a:prstGeom prst="roundRect">
+          <a:avLst>
+            <a:gd name="adj" fmla="val 10000"/>
+          </a:avLst>
         </a:prstGeom>
-        <a:noFill/>
-        <a:ln w="12700" cap="rnd" cmpd="sng" algn="ctr">
+        <a:solidFill>
+          <a:schemeClr val="accent3">
+            <a:hueOff val="0"/>
+            <a:satOff val="0"/>
+            <a:lumOff val="0"/>
+            <a:alphaOff val="0"/>
+          </a:schemeClr>
+        </a:solidFill>
+        <a:ln w="25400" cap="rnd" cmpd="sng" algn="ctr">
           <a:solidFill>
-            <a:schemeClr val="dk2">
+            <a:schemeClr val="lt1">
               <a:hueOff val="0"/>
               <a:satOff val="0"/>
               <a:lumOff val="0"/>
               <a:alphaOff val="0"/>
             </a:schemeClr>
           </a:solidFill>
-          <a:prstDash val="dash"/>
+          <a:prstDash val="solid"/>
         </a:ln>
         <a:effectLst/>
       </dsp:spPr>
       <dsp:style>
-        <a:lnRef idx="1">
+        <a:lnRef idx="3">
           <a:scrgbClr r="0" g="0" b="0"/>
         </a:lnRef>
-        <a:fillRef idx="0">
+        <a:fillRef idx="1">
           <a:scrgbClr r="0" g="0" b="0"/>
         </a:fillRef>
-        <a:effectRef idx="0">
+        <a:effectRef idx="1">
           <a:scrgbClr r="0" g="0" b="0"/>
         </a:effectRef>
-        <a:fontRef idx="minor"/>
-      </dsp:style>
-    </dsp:sp>
-    <dsp:sp modelId="{60D0713D-AF69-4AF8-B071-F65622790886}">
-      <dsp:nvSpPr>
-        <dsp:cNvPr id="0" name=""/>
-        <dsp:cNvSpPr/>
-      </dsp:nvSpPr>
-      <dsp:spPr>
-        <a:xfrm>
-          <a:off x="1344702" y="1401841"/>
-          <a:ext cx="1846610" cy="452594"/>
-        </a:xfrm>
-        <a:prstGeom prst="rect">
-          <a:avLst/>
-        </a:prstGeom>
-        <a:noFill/>
-        <a:ln>
-          <a:noFill/>
-        </a:ln>
-        <a:effectLst/>
-      </dsp:spPr>
-      <dsp:style>
-        <a:lnRef idx="0">
-          <a:scrgbClr r="0" g="0" b="0"/>
-        </a:lnRef>
-        <a:fillRef idx="0">
-          <a:scrgbClr r="0" g="0" b="0"/>
-        </a:fillRef>
-        <a:effectRef idx="0">
-          <a:scrgbClr r="0" g="0" b="0"/>
-        </a:effectRef>
-        <a:fontRef idx="minor"/>
+        <a:fontRef idx="minor">
+          <a:schemeClr val="lt1"/>
+        </a:fontRef>
       </dsp:style>
       <dsp:txBody>
-        <a:bodyPr spcFirstLastPara="0" vert="horz" wrap="square" lIns="0" tIns="0" rIns="0" bIns="0" numCol="1" spcCol="1270" anchor="b" anchorCtr="1">
+        <a:bodyPr spcFirstLastPara="0" vert="horz" wrap="square" lIns="43815" tIns="29210" rIns="43815" bIns="29210" numCol="1" spcCol="1270" anchor="ctr" anchorCtr="0">
           <a:noAutofit/>
         </a:bodyPr>
         <a:lstStyle/>
         <a:p>
-          <a:pPr marL="0" lvl="0" indent="0" algn="ctr" defTabSz="1066800">
+          <a:pPr marL="0" lvl="0" indent="0" algn="ctr" defTabSz="1022350">
             <a:lnSpc>
               <a:spcPct val="90000"/>
             </a:lnSpc>
@@ -1930,42 +3839,53 @@
             <a:defRPr b="1"/>
           </a:pPr>
           <a:r>
-            <a:rPr lang="en-US" sz="2400" kern="1200" dirty="0">
+            <a:rPr lang="en-US" sz="2300" kern="1200">
               <a:latin typeface="+mn-lt"/>
             </a:rPr>
-            <a:t>Q4</a:t>
+            <a:t>Week 08</a:t>
           </a:r>
         </a:p>
       </dsp:txBody>
       <dsp:txXfrm>
-        <a:off x="1344702" y="1401841"/>
-        <a:ext cx="1846610" cy="452594"/>
+        <a:off x="1718232" y="1022251"/>
+        <a:ext cx="1317968" cy="639101"/>
       </dsp:txXfrm>
     </dsp:sp>
-    <dsp:sp modelId="{FA19A0AA-8B0B-4AA8-A80D-08CFFDD3F112}">
+    <dsp:sp modelId="{15863C0C-CD41-4F42-A67A-503A62AED956}">
       <dsp:nvSpPr>
         <dsp:cNvPr id="0" name=""/>
         <dsp:cNvSpPr/>
       </dsp:nvSpPr>
       <dsp:spPr>
         <a:xfrm>
-          <a:off x="1020884" y="1972591"/>
-          <a:ext cx="60078" cy="60078"/>
+          <a:off x="1834122" y="1681235"/>
+          <a:ext cx="135773" cy="509150"/>
         </a:xfrm>
-        <a:prstGeom prst="ellipse">
+        <a:custGeom>
           <a:avLst/>
-        </a:prstGeom>
-        <a:solidFill>
-          <a:schemeClr val="dk2">
-            <a:hueOff val="0"/>
-            <a:satOff val="0"/>
-            <a:lumOff val="0"/>
-            <a:alphaOff val="0"/>
-          </a:schemeClr>
-        </a:solidFill>
+          <a:gdLst/>
+          <a:ahLst/>
+          <a:cxnLst/>
+          <a:rect l="0" t="0" r="0" b="0"/>
+          <a:pathLst>
+            <a:path>
+              <a:moveTo>
+                <a:pt x="0" y="0"/>
+              </a:moveTo>
+              <a:lnTo>
+                <a:pt x="0" y="509150"/>
+              </a:lnTo>
+              <a:lnTo>
+                <a:pt x="135773" y="509150"/>
+              </a:lnTo>
+            </a:path>
+          </a:pathLst>
+        </a:custGeom>
+        <a:noFill/>
         <a:ln w="19050" cap="rnd" cmpd="sng" algn="ctr">
           <a:solidFill>
-            <a:schemeClr val="dk2">
+            <a:schemeClr val="accent3">
+              <a:shade val="60000"/>
               <a:hueOff val="0"/>
               <a:satOff val="0"/>
               <a:lumOff val="0"/>
@@ -1980,32 +3900,32 @@
         <a:lnRef idx="2">
           <a:scrgbClr r="0" g="0" b="0"/>
         </a:lnRef>
-        <a:fillRef idx="1">
+        <a:fillRef idx="0">
           <a:scrgbClr r="0" g="0" b="0"/>
         </a:fillRef>
         <a:effectRef idx="0">
           <a:scrgbClr r="0" g="0" b="0"/>
         </a:effectRef>
-        <a:fontRef idx="minor">
-          <a:schemeClr val="lt1"/>
-        </a:fontRef>
+        <a:fontRef idx="minor"/>
       </dsp:style>
     </dsp:sp>
-    <dsp:sp modelId="{DADAA0C9-3E42-4088-8622-30E9F6EA139A}">
+    <dsp:sp modelId="{91F90D3F-5B3C-4417-828E-DB7BBCCCA93D}">
       <dsp:nvSpPr>
         <dsp:cNvPr id="0" name=""/>
         <dsp:cNvSpPr/>
       </dsp:nvSpPr>
       <dsp:spPr>
         <a:xfrm>
-          <a:off x="1218797" y="2763630"/>
-          <a:ext cx="2098420" cy="1003005"/>
+          <a:off x="1969895" y="1850951"/>
+          <a:ext cx="1086187" cy="678867"/>
         </a:xfrm>
         <a:prstGeom prst="roundRect">
-          <a:avLst/>
+          <a:avLst>
+            <a:gd name="adj" fmla="val 10000"/>
+          </a:avLst>
         </a:prstGeom>
         <a:solidFill>
-          <a:schemeClr val="lt2">
+          <a:schemeClr val="lt1">
             <a:alpha val="90000"/>
             <a:hueOff val="0"/>
             <a:satOff val="0"/>
@@ -2015,7 +3935,7 @@
         </a:solidFill>
         <a:ln w="19050" cap="rnd" cmpd="sng" algn="ctr">
           <a:solidFill>
-            <a:schemeClr val="dk2">
+            <a:schemeClr val="accent3">
               <a:hueOff val="0"/>
               <a:satOff val="0"/>
               <a:lumOff val="0"/>
@@ -2039,12 +3959,12 @@
         <a:fontRef idx="minor"/>
       </dsp:style>
       <dsp:txBody>
-        <a:bodyPr spcFirstLastPara="0" vert="horz" wrap="square" lIns="177800" tIns="177800" rIns="177800" bIns="177800" numCol="1" spcCol="1270" anchor="ctr" anchorCtr="0">
+        <a:bodyPr spcFirstLastPara="0" vert="horz" wrap="square" lIns="28575" tIns="19050" rIns="28575" bIns="19050" numCol="1" spcCol="1270" anchor="ctr" anchorCtr="0">
           <a:noAutofit/>
         </a:bodyPr>
         <a:lstStyle/>
         <a:p>
-          <a:pPr marL="0" lvl="0" indent="0" algn="ctr" defTabSz="889000">
+          <a:pPr marL="0" lvl="0" indent="0" algn="ctr" defTabSz="666750">
             <a:lnSpc>
               <a:spcPct val="90000"/>
             </a:lnSpc>
@@ -2057,96 +3977,75 @@
             <a:buNone/>
           </a:pPr>
           <a:r>
-            <a:rPr lang="en-US" sz="2000" kern="1200" dirty="0">
+            <a:rPr lang="en-US" sz="1500" kern="1200">
               <a:latin typeface="+mn-lt"/>
             </a:rPr>
-            <a:t>Product development</a:t>
+            <a:t>Swagger &amp; AsyncAPI</a:t>
           </a:r>
         </a:p>
       </dsp:txBody>
       <dsp:txXfrm>
-        <a:off x="1267760" y="2812593"/>
-        <a:ext cx="2000494" cy="905079"/>
+        <a:off x="1989778" y="1870834"/>
+        <a:ext cx="1046421" cy="639101"/>
       </dsp:txXfrm>
     </dsp:sp>
-    <dsp:sp modelId="{DBD74D6B-057A-432C-9067-BF618C19EB2A}">
+    <dsp:sp modelId="{A45A8FE1-97F9-4D32-ACBB-56FC455F3F54}">
       <dsp:nvSpPr>
         <dsp:cNvPr id="0" name=""/>
         <dsp:cNvSpPr/>
       </dsp:nvSpPr>
       <dsp:spPr>
         <a:xfrm>
-          <a:off x="2268007" y="2002630"/>
-          <a:ext cx="0" cy="760999"/>
+          <a:off x="3395516" y="1002368"/>
+          <a:ext cx="1357734" cy="678867"/>
         </a:xfrm>
-        <a:prstGeom prst="line">
-          <a:avLst/>
+        <a:prstGeom prst="roundRect">
+          <a:avLst>
+            <a:gd name="adj" fmla="val 10000"/>
+          </a:avLst>
         </a:prstGeom>
-        <a:noFill/>
-        <a:ln w="12700" cap="rnd" cmpd="sng" algn="ctr">
+        <a:solidFill>
+          <a:schemeClr val="accent3">
+            <a:hueOff val="0"/>
+            <a:satOff val="0"/>
+            <a:lumOff val="0"/>
+            <a:alphaOff val="0"/>
+          </a:schemeClr>
+        </a:solidFill>
+        <a:ln w="25400" cap="rnd" cmpd="sng" algn="ctr">
           <a:solidFill>
-            <a:schemeClr val="dk2">
+            <a:schemeClr val="lt1">
               <a:hueOff val="0"/>
               <a:satOff val="0"/>
               <a:lumOff val="0"/>
               <a:alphaOff val="0"/>
             </a:schemeClr>
           </a:solidFill>
-          <a:prstDash val="dash"/>
+          <a:prstDash val="solid"/>
         </a:ln>
         <a:effectLst/>
       </dsp:spPr>
       <dsp:style>
-        <a:lnRef idx="1">
+        <a:lnRef idx="3">
           <a:scrgbClr r="0" g="0" b="0"/>
         </a:lnRef>
-        <a:fillRef idx="0">
+        <a:fillRef idx="1">
           <a:scrgbClr r="0" g="0" b="0"/>
         </a:fillRef>
-        <a:effectRef idx="0">
+        <a:effectRef idx="1">
           <a:scrgbClr r="0" g="0" b="0"/>
         </a:effectRef>
-        <a:fontRef idx="minor"/>
-      </dsp:style>
-    </dsp:sp>
-    <dsp:sp modelId="{E712D073-0B15-4887-9DCE-A27BCACBC178}">
-      <dsp:nvSpPr>
-        <dsp:cNvPr id="0" name=""/>
-        <dsp:cNvSpPr/>
-      </dsp:nvSpPr>
-      <dsp:spPr>
-        <a:xfrm>
-          <a:off x="2561786" y="2150825"/>
-          <a:ext cx="1846610" cy="452594"/>
-        </a:xfrm>
-        <a:prstGeom prst="rect">
-          <a:avLst/>
-        </a:prstGeom>
-        <a:noFill/>
-        <a:ln>
-          <a:noFill/>
-        </a:ln>
-        <a:effectLst/>
-      </dsp:spPr>
-      <dsp:style>
-        <a:lnRef idx="0">
-          <a:scrgbClr r="0" g="0" b="0"/>
-        </a:lnRef>
-        <a:fillRef idx="0">
-          <a:scrgbClr r="0" g="0" b="0"/>
-        </a:fillRef>
-        <a:effectRef idx="0">
-          <a:scrgbClr r="0" g="0" b="0"/>
-        </a:effectRef>
-        <a:fontRef idx="minor"/>
+        <a:fontRef idx="minor">
+          <a:schemeClr val="lt1"/>
+        </a:fontRef>
       </dsp:style>
       <dsp:txBody>
-        <a:bodyPr spcFirstLastPara="0" vert="horz" wrap="square" lIns="0" tIns="0" rIns="0" bIns="0" numCol="1" spcCol="1270" anchor="t" anchorCtr="1">
+        <a:bodyPr spcFirstLastPara="0" vert="horz" wrap="square" lIns="43815" tIns="29210" rIns="43815" bIns="29210" numCol="1" spcCol="1270" anchor="ctr" anchorCtr="0">
           <a:noAutofit/>
         </a:bodyPr>
         <a:lstStyle/>
         <a:p>
-          <a:pPr marL="0" lvl="0" indent="0" algn="ctr" defTabSz="1066800">
+          <a:pPr marL="0" lvl="0" indent="0" algn="ctr" defTabSz="1022350">
             <a:lnSpc>
               <a:spcPct val="90000"/>
             </a:lnSpc>
@@ -2160,42 +4059,53 @@
             <a:defRPr b="1"/>
           </a:pPr>
           <a:r>
-            <a:rPr lang="en-US" sz="2400" kern="1200" dirty="0">
+            <a:rPr lang="en-US" sz="2300" kern="1200">
               <a:latin typeface="+mn-lt"/>
             </a:rPr>
-            <a:t>Q1</a:t>
+            <a:t>Week 09 </a:t>
           </a:r>
         </a:p>
       </dsp:txBody>
       <dsp:txXfrm>
-        <a:off x="2561786" y="2150825"/>
-        <a:ext cx="1846610" cy="452594"/>
+        <a:off x="3415399" y="1022251"/>
+        <a:ext cx="1317968" cy="639101"/>
       </dsp:txXfrm>
     </dsp:sp>
-    <dsp:sp modelId="{0F979253-FD39-4920-BFCA-78C564B167EA}">
+    <dsp:sp modelId="{2AF69084-4F24-4FF0-BE70-B867BB2181BA}">
       <dsp:nvSpPr>
         <dsp:cNvPr id="0" name=""/>
         <dsp:cNvSpPr/>
       </dsp:nvSpPr>
       <dsp:spPr>
         <a:xfrm>
-          <a:off x="2237968" y="1972591"/>
-          <a:ext cx="60078" cy="60078"/>
+          <a:off x="3531290" y="1681235"/>
+          <a:ext cx="135773" cy="509150"/>
         </a:xfrm>
-        <a:prstGeom prst="ellipse">
+        <a:custGeom>
           <a:avLst/>
-        </a:prstGeom>
-        <a:solidFill>
-          <a:schemeClr val="dk2">
-            <a:hueOff val="0"/>
-            <a:satOff val="0"/>
-            <a:lumOff val="0"/>
-            <a:alphaOff val="0"/>
-          </a:schemeClr>
-        </a:solidFill>
+          <a:gdLst/>
+          <a:ahLst/>
+          <a:cxnLst/>
+          <a:rect l="0" t="0" r="0" b="0"/>
+          <a:pathLst>
+            <a:path>
+              <a:moveTo>
+                <a:pt x="0" y="0"/>
+              </a:moveTo>
+              <a:lnTo>
+                <a:pt x="0" y="509150"/>
+              </a:lnTo>
+              <a:lnTo>
+                <a:pt x="135773" y="509150"/>
+              </a:lnTo>
+            </a:path>
+          </a:pathLst>
+        </a:custGeom>
+        <a:noFill/>
         <a:ln w="19050" cap="rnd" cmpd="sng" algn="ctr">
           <a:solidFill>
-            <a:schemeClr val="dk2">
+            <a:schemeClr val="accent3">
+              <a:shade val="60000"/>
               <a:hueOff val="0"/>
               <a:satOff val="0"/>
               <a:lumOff val="0"/>
@@ -2210,32 +4120,32 @@
         <a:lnRef idx="2">
           <a:scrgbClr r="0" g="0" b="0"/>
         </a:lnRef>
-        <a:fillRef idx="1">
+        <a:fillRef idx="0">
           <a:scrgbClr r="0" g="0" b="0"/>
         </a:fillRef>
         <a:effectRef idx="0">
           <a:scrgbClr r="0" g="0" b="0"/>
         </a:effectRef>
-        <a:fontRef idx="minor">
-          <a:schemeClr val="lt1"/>
-        </a:fontRef>
+        <a:fontRef idx="minor"/>
       </dsp:style>
     </dsp:sp>
-    <dsp:sp modelId="{E0D48281-565D-47A3-9B6C-576231178549}">
+    <dsp:sp modelId="{480DA85B-472C-4207-A635-390AB779F8AA}">
       <dsp:nvSpPr>
         <dsp:cNvPr id="0" name=""/>
         <dsp:cNvSpPr/>
       </dsp:nvSpPr>
       <dsp:spPr>
         <a:xfrm>
-          <a:off x="2435881" y="238626"/>
-          <a:ext cx="2098420" cy="1003005"/>
+          <a:off x="3667063" y="1850951"/>
+          <a:ext cx="1086187" cy="678867"/>
         </a:xfrm>
         <a:prstGeom prst="roundRect">
-          <a:avLst/>
+          <a:avLst>
+            <a:gd name="adj" fmla="val 10000"/>
+          </a:avLst>
         </a:prstGeom>
         <a:solidFill>
-          <a:schemeClr val="lt2">
+          <a:schemeClr val="lt1">
             <a:alpha val="90000"/>
             <a:hueOff val="0"/>
             <a:satOff val="0"/>
@@ -2245,7 +4155,7 @@
         </a:solidFill>
         <a:ln w="19050" cap="rnd" cmpd="sng" algn="ctr">
           <a:solidFill>
-            <a:schemeClr val="dk2">
+            <a:schemeClr val="accent3">
               <a:hueOff val="0"/>
               <a:satOff val="0"/>
               <a:lumOff val="0"/>
@@ -2269,12 +4179,12 @@
         <a:fontRef idx="minor"/>
       </dsp:style>
       <dsp:txBody>
-        <a:bodyPr spcFirstLastPara="0" vert="horz" wrap="square" lIns="177800" tIns="177800" rIns="177800" bIns="177800" numCol="1" spcCol="1270" anchor="ctr" anchorCtr="0">
+        <a:bodyPr spcFirstLastPara="0" vert="horz" wrap="square" lIns="28575" tIns="19050" rIns="28575" bIns="19050" numCol="1" spcCol="1270" anchor="ctr" anchorCtr="0">
           <a:noAutofit/>
         </a:bodyPr>
         <a:lstStyle/>
         <a:p>
-          <a:pPr marL="0" lvl="0" indent="0" algn="ctr" defTabSz="889000">
+          <a:pPr marL="0" lvl="0" indent="0" algn="ctr" defTabSz="666750">
             <a:lnSpc>
               <a:spcPct val="90000"/>
             </a:lnSpc>
@@ -2287,107 +4197,75 @@
             <a:buNone/>
           </a:pPr>
           <a:r>
-            <a:rPr lang="en-US" sz="2000" kern="1200" dirty="0">
+            <a:rPr lang="en-US" sz="1500" kern="1200">
               <a:latin typeface="+mn-lt"/>
             </a:rPr>
-            <a:t> User </a:t>
-          </a:r>
-          <a:br>
-            <a:rPr lang="en-US" sz="2000" kern="1200" dirty="0">
-              <a:latin typeface="+mn-lt"/>
-            </a:rPr>
-          </a:br>
-          <a:r>
-            <a:rPr lang="en-US" sz="2000" kern="1200" dirty="0">
-              <a:latin typeface="+mn-lt"/>
-            </a:rPr>
-            <a:t>testing</a:t>
+            <a:t>Virtual Sensors &amp; Edge AI</a:t>
           </a:r>
         </a:p>
       </dsp:txBody>
       <dsp:txXfrm>
-        <a:off x="2484844" y="287589"/>
-        <a:ext cx="2000494" cy="905079"/>
+        <a:off x="3686946" y="1870834"/>
+        <a:ext cx="1046421" cy="639101"/>
       </dsp:txXfrm>
     </dsp:sp>
-    <dsp:sp modelId="{DCAE8A46-752C-4E82-84CE-E790E1F2918E}">
+    <dsp:sp modelId="{E272C3A2-C6CE-456E-8739-8CE42DB97611}">
       <dsp:nvSpPr>
         <dsp:cNvPr id="0" name=""/>
         <dsp:cNvSpPr/>
       </dsp:nvSpPr>
       <dsp:spPr>
         <a:xfrm>
-          <a:off x="3485092" y="1241631"/>
-          <a:ext cx="0" cy="760999"/>
+          <a:off x="5092684" y="1002368"/>
+          <a:ext cx="1357734" cy="678867"/>
         </a:xfrm>
-        <a:prstGeom prst="line">
-          <a:avLst/>
+        <a:prstGeom prst="roundRect">
+          <a:avLst>
+            <a:gd name="adj" fmla="val 10000"/>
+          </a:avLst>
         </a:prstGeom>
-        <a:noFill/>
-        <a:ln w="12700" cap="rnd" cmpd="sng" algn="ctr">
+        <a:solidFill>
+          <a:schemeClr val="accent3">
+            <a:hueOff val="0"/>
+            <a:satOff val="0"/>
+            <a:lumOff val="0"/>
+            <a:alphaOff val="0"/>
+          </a:schemeClr>
+        </a:solidFill>
+        <a:ln w="25400" cap="rnd" cmpd="sng" algn="ctr">
           <a:solidFill>
-            <a:schemeClr val="dk2">
+            <a:schemeClr val="lt1">
               <a:hueOff val="0"/>
               <a:satOff val="0"/>
               <a:lumOff val="0"/>
               <a:alphaOff val="0"/>
             </a:schemeClr>
           </a:solidFill>
-          <a:prstDash val="dash"/>
+          <a:prstDash val="solid"/>
         </a:ln>
         <a:effectLst/>
       </dsp:spPr>
       <dsp:style>
-        <a:lnRef idx="1">
+        <a:lnRef idx="3">
           <a:scrgbClr r="0" g="0" b="0"/>
         </a:lnRef>
-        <a:fillRef idx="0">
+        <a:fillRef idx="1">
           <a:scrgbClr r="0" g="0" b="0"/>
         </a:fillRef>
-        <a:effectRef idx="0">
+        <a:effectRef idx="1">
           <a:scrgbClr r="0" g="0" b="0"/>
         </a:effectRef>
-        <a:fontRef idx="minor"/>
-      </dsp:style>
-    </dsp:sp>
-    <dsp:sp modelId="{F782935D-BBBD-4420-826A-F71C517659B6}">
-      <dsp:nvSpPr>
-        <dsp:cNvPr id="0" name=""/>
-        <dsp:cNvSpPr/>
-      </dsp:nvSpPr>
-      <dsp:spPr>
-        <a:xfrm>
-          <a:off x="3778870" y="1401841"/>
-          <a:ext cx="1846610" cy="452594"/>
-        </a:xfrm>
-        <a:prstGeom prst="rect">
-          <a:avLst/>
-        </a:prstGeom>
-        <a:noFill/>
-        <a:ln>
-          <a:noFill/>
-        </a:ln>
-        <a:effectLst/>
-      </dsp:spPr>
-      <dsp:style>
-        <a:lnRef idx="0">
-          <a:scrgbClr r="0" g="0" b="0"/>
-        </a:lnRef>
-        <a:fillRef idx="0">
-          <a:scrgbClr r="0" g="0" b="0"/>
-        </a:fillRef>
-        <a:effectRef idx="0">
-          <a:scrgbClr r="0" g="0" b="0"/>
-        </a:effectRef>
-        <a:fontRef idx="minor"/>
+        <a:fontRef idx="minor">
+          <a:schemeClr val="lt1"/>
+        </a:fontRef>
       </dsp:style>
       <dsp:txBody>
-        <a:bodyPr spcFirstLastPara="0" vert="horz" wrap="square" lIns="0" tIns="0" rIns="0" bIns="0" numCol="1" spcCol="1270" anchor="b" anchorCtr="1">
+        <a:bodyPr spcFirstLastPara="0" vert="horz" wrap="square" lIns="43815" tIns="29210" rIns="43815" bIns="29210" numCol="1" spcCol="1270" anchor="ctr" anchorCtr="0">
           <a:noAutofit/>
         </a:bodyPr>
         <a:lstStyle/>
         <a:p>
-          <a:pPr marL="0" lvl="0" indent="0" algn="ctr" defTabSz="1066800">
+          <a:pPr marL="0" lvl="0" indent="0" algn="ctr" defTabSz="1022350">
             <a:lnSpc>
               <a:spcPct val="90000"/>
             </a:lnSpc>
@@ -2401,42 +4279,53 @@
             <a:defRPr b="1"/>
           </a:pPr>
           <a:r>
-            <a:rPr lang="en-US" sz="2400" kern="1200" dirty="0">
+            <a:rPr lang="en-US" sz="2300" kern="1200">
               <a:latin typeface="+mn-lt"/>
             </a:rPr>
-            <a:t>Q2</a:t>
+            <a:t>Week 10</a:t>
           </a:r>
         </a:p>
       </dsp:txBody>
       <dsp:txXfrm>
-        <a:off x="3778870" y="1401841"/>
-        <a:ext cx="1846610" cy="452594"/>
+        <a:off x="5112567" y="1022251"/>
+        <a:ext cx="1317968" cy="639101"/>
       </dsp:txXfrm>
     </dsp:sp>
-    <dsp:sp modelId="{B6459BF8-D2C3-4018-9C28-98667DC203F4}">
+    <dsp:sp modelId="{31F3111D-A95C-4A21-A541-C019A9B90DB4}">
       <dsp:nvSpPr>
         <dsp:cNvPr id="0" name=""/>
         <dsp:cNvSpPr/>
       </dsp:nvSpPr>
       <dsp:spPr>
         <a:xfrm>
-          <a:off x="3455052" y="1972591"/>
-          <a:ext cx="60078" cy="60078"/>
+          <a:off x="5228457" y="1681235"/>
+          <a:ext cx="135773" cy="509150"/>
         </a:xfrm>
-        <a:prstGeom prst="ellipse">
+        <a:custGeom>
           <a:avLst/>
-        </a:prstGeom>
-        <a:solidFill>
-          <a:schemeClr val="dk2">
-            <a:hueOff val="0"/>
-            <a:satOff val="0"/>
-            <a:lumOff val="0"/>
-            <a:alphaOff val="0"/>
-          </a:schemeClr>
-        </a:solidFill>
+          <a:gdLst/>
+          <a:ahLst/>
+          <a:cxnLst/>
+          <a:rect l="0" t="0" r="0" b="0"/>
+          <a:pathLst>
+            <a:path>
+              <a:moveTo>
+                <a:pt x="0" y="0"/>
+              </a:moveTo>
+              <a:lnTo>
+                <a:pt x="0" y="509150"/>
+              </a:lnTo>
+              <a:lnTo>
+                <a:pt x="135773" y="509150"/>
+              </a:lnTo>
+            </a:path>
+          </a:pathLst>
+        </a:custGeom>
+        <a:noFill/>
         <a:ln w="19050" cap="rnd" cmpd="sng" algn="ctr">
           <a:solidFill>
-            <a:schemeClr val="dk2">
+            <a:schemeClr val="accent3">
+              <a:shade val="60000"/>
               <a:hueOff val="0"/>
               <a:satOff val="0"/>
               <a:lumOff val="0"/>
@@ -2451,32 +4340,32 @@
         <a:lnRef idx="2">
           <a:scrgbClr r="0" g="0" b="0"/>
         </a:lnRef>
-        <a:fillRef idx="1">
+        <a:fillRef idx="0">
           <a:scrgbClr r="0" g="0" b="0"/>
         </a:fillRef>
         <a:effectRef idx="0">
           <a:scrgbClr r="0" g="0" b="0"/>
         </a:effectRef>
-        <a:fontRef idx="minor">
-          <a:schemeClr val="lt1"/>
-        </a:fontRef>
+        <a:fontRef idx="minor"/>
       </dsp:style>
     </dsp:sp>
-    <dsp:sp modelId="{6C3A59BD-6D45-4573-B098-8CB5207F194D}">
+    <dsp:sp modelId="{5AC548F6-4633-40AA-AC0B-F3A946DF7357}">
       <dsp:nvSpPr>
         <dsp:cNvPr id="0" name=""/>
         <dsp:cNvSpPr/>
       </dsp:nvSpPr>
       <dsp:spPr>
         <a:xfrm>
-          <a:off x="3652965" y="2763630"/>
-          <a:ext cx="2098420" cy="1003005"/>
+          <a:off x="5364231" y="1850951"/>
+          <a:ext cx="1086187" cy="678867"/>
         </a:xfrm>
         <a:prstGeom prst="roundRect">
-          <a:avLst/>
+          <a:avLst>
+            <a:gd name="adj" fmla="val 10000"/>
+          </a:avLst>
         </a:prstGeom>
         <a:solidFill>
-          <a:schemeClr val="lt2">
+          <a:schemeClr val="lt1">
             <a:alpha val="90000"/>
             <a:hueOff val="0"/>
             <a:satOff val="0"/>
@@ -2486,7 +4375,7 @@
         </a:solidFill>
         <a:ln w="19050" cap="rnd" cmpd="sng" algn="ctr">
           <a:solidFill>
-            <a:schemeClr val="dk2">
+            <a:schemeClr val="accent3">
               <a:hueOff val="0"/>
               <a:satOff val="0"/>
               <a:lumOff val="0"/>
@@ -2510,12 +4399,12 @@
         <a:fontRef idx="minor"/>
       </dsp:style>
       <dsp:txBody>
-        <a:bodyPr spcFirstLastPara="0" vert="horz" wrap="square" lIns="177800" tIns="177800" rIns="177800" bIns="177800" numCol="1" spcCol="1270" anchor="ctr" anchorCtr="0">
+        <a:bodyPr spcFirstLastPara="0" vert="horz" wrap="square" lIns="28575" tIns="19050" rIns="28575" bIns="19050" numCol="1" spcCol="1270" anchor="ctr" anchorCtr="0">
           <a:noAutofit/>
         </a:bodyPr>
         <a:lstStyle/>
         <a:p>
-          <a:pPr marL="0" lvl="0" indent="0" algn="ctr" defTabSz="889000">
+          <a:pPr marL="0" lvl="0" indent="0" algn="ctr" defTabSz="666750">
             <a:lnSpc>
               <a:spcPct val="90000"/>
             </a:lnSpc>
@@ -2528,136 +4417,46 @@
             <a:buNone/>
           </a:pPr>
           <a:r>
-            <a:rPr lang="en-US" sz="2000" kern="1200" dirty="0">
+            <a:rPr lang="en-US" sz="1500" kern="1200">
               <a:latin typeface="+mn-lt"/>
             </a:rPr>
-            <a:t>Product launch</a:t>
+            <a:t>Node Red</a:t>
           </a:r>
         </a:p>
       </dsp:txBody>
       <dsp:txXfrm>
-        <a:off x="3701928" y="2812593"/>
-        <a:ext cx="2000494" cy="905079"/>
+        <a:off x="5384114" y="1870834"/>
+        <a:ext cx="1046421" cy="639101"/>
       </dsp:txXfrm>
-    </dsp:sp>
-    <dsp:sp modelId="{086FB9B1-82B2-4197-8B33-6E7FF94F8D2E}">
-      <dsp:nvSpPr>
-        <dsp:cNvPr id="0" name=""/>
-        <dsp:cNvSpPr/>
-      </dsp:nvSpPr>
-      <dsp:spPr>
-        <a:xfrm>
-          <a:off x="4702176" y="2002630"/>
-          <a:ext cx="0" cy="760999"/>
-        </a:xfrm>
-        <a:prstGeom prst="line">
-          <a:avLst/>
-        </a:prstGeom>
-        <a:noFill/>
-        <a:ln w="12700" cap="rnd" cmpd="sng" algn="ctr">
-          <a:solidFill>
-            <a:schemeClr val="dk2">
-              <a:hueOff val="0"/>
-              <a:satOff val="0"/>
-              <a:lumOff val="0"/>
-              <a:alphaOff val="0"/>
-            </a:schemeClr>
-          </a:solidFill>
-          <a:prstDash val="dash"/>
-        </a:ln>
-        <a:effectLst/>
-      </dsp:spPr>
-      <dsp:style>
-        <a:lnRef idx="1">
-          <a:scrgbClr r="0" g="0" b="0"/>
-        </a:lnRef>
-        <a:fillRef idx="0">
-          <a:scrgbClr r="0" g="0" b="0"/>
-        </a:fillRef>
-        <a:effectRef idx="0">
-          <a:scrgbClr r="0" g="0" b="0"/>
-        </a:effectRef>
-        <a:fontRef idx="minor"/>
-      </dsp:style>
-    </dsp:sp>
-    <dsp:sp modelId="{3F359E8B-7C7E-4FD9-B106-36CCBFC731D5}">
-      <dsp:nvSpPr>
-        <dsp:cNvPr id="0" name=""/>
-        <dsp:cNvSpPr/>
-      </dsp:nvSpPr>
-      <dsp:spPr>
-        <a:xfrm>
-          <a:off x="4672136" y="1972591"/>
-          <a:ext cx="60078" cy="60078"/>
-        </a:xfrm>
-        <a:prstGeom prst="ellipse">
-          <a:avLst/>
-        </a:prstGeom>
-        <a:solidFill>
-          <a:schemeClr val="dk2">
-            <a:hueOff val="0"/>
-            <a:satOff val="0"/>
-            <a:lumOff val="0"/>
-            <a:alphaOff val="0"/>
-          </a:schemeClr>
-        </a:solidFill>
-        <a:ln w="19050" cap="rnd" cmpd="sng" algn="ctr">
-          <a:solidFill>
-            <a:schemeClr val="dk2">
-              <a:hueOff val="0"/>
-              <a:satOff val="0"/>
-              <a:lumOff val="0"/>
-              <a:alphaOff val="0"/>
-            </a:schemeClr>
-          </a:solidFill>
-          <a:prstDash val="solid"/>
-        </a:ln>
-        <a:effectLst/>
-      </dsp:spPr>
-      <dsp:style>
-        <a:lnRef idx="2">
-          <a:scrgbClr r="0" g="0" b="0"/>
-        </a:lnRef>
-        <a:fillRef idx="1">
-          <a:scrgbClr r="0" g="0" b="0"/>
-        </a:fillRef>
-        <a:effectRef idx="0">
-          <a:scrgbClr r="0" g="0" b="0"/>
-        </a:effectRef>
-        <a:fontRef idx="minor">
-          <a:schemeClr val="lt1"/>
-        </a:fontRef>
-      </dsp:style>
     </dsp:sp>
   </dsp:spTree>
 </dsp:drawing>
 </file>
 
 <file path=ppt/diagrams/layout1.xml><?xml version="1.0" encoding="utf-8"?>
-<dgm:layoutDef xmlns:dgm="http://schemas.openxmlformats.org/drawingml/2006/diagram" xmlns:a="http://schemas.openxmlformats.org/drawingml/2006/main" uniqueId="urn:microsoft.com/office/officeart/2016/7/layout/BasicTimeline">
-  <dgm:title val="Basic Timeline"/>
-  <dgm:desc val="Use to show a list of events in chronological order. The rounded rectangular shape contains the description while the date is shown below on the time line. It's the perfect SmartArt for displaying large amount of text with a medium date format."/>
+<dgm:layoutDef xmlns:dgm="http://schemas.openxmlformats.org/drawingml/2006/diagram" xmlns:a="http://schemas.openxmlformats.org/drawingml/2006/main" uniqueId="urn:microsoft.com/office/officeart/2016/7/layout/VerticalDownArrowProcess">
+  <dgm:title val="Vertical Down Arrow Process"/>
+  <dgm:desc val="Use to show a progression; a timeline; sequential steps in a task, process, or workflow; or to emphasize movement or direction. Level 1 text appears inside an arrow shape while Level 2 text appears below the arrow shapes."/>
   <dgm:catLst>
-    <dgm:cat type="timeline" pri="500"/>
-    <dgm:cat type="process" pri="600"/>
+    <dgm:cat type="process" pri="500"/>
   </dgm:catLst>
   <dgm:sampData>
     <dgm:dataModel>
       <dgm:ptLst>
         <dgm:pt modelId="0" type="doc"/>
-        <dgm:pt modelId="10">
+        <dgm:pt modelId="1">
           <dgm:prSet phldr="1"/>
         </dgm:pt>
         <dgm:pt modelId="11">
           <dgm:prSet phldr="1"/>
         </dgm:pt>
-        <dgm:pt modelId="20">
+        <dgm:pt modelId="2">
           <dgm:prSet phldr="1"/>
         </dgm:pt>
         <dgm:pt modelId="21">
           <dgm:prSet phldr="1"/>
         </dgm:pt>
-        <dgm:pt modelId="30">
+        <dgm:pt modelId="3">
           <dgm:prSet phldr="1"/>
         </dgm:pt>
         <dgm:pt modelId="31">
@@ -2665,12 +4464,12 @@
         </dgm:pt>
       </dgm:ptLst>
       <dgm:cxnLst>
-        <dgm:cxn modelId="40" srcId="0" destId="10" srcOrd="0" destOrd="0"/>
-        <dgm:cxn modelId="12" srcId="10" destId="11" srcOrd="0" destOrd="0"/>
-        <dgm:cxn modelId="50" srcId="0" destId="20" srcOrd="1" destOrd="0"/>
-        <dgm:cxn modelId="22" srcId="20" destId="21" srcOrd="0" destOrd="0"/>
-        <dgm:cxn modelId="60" srcId="0" destId="30" srcOrd="1" destOrd="0"/>
-        <dgm:cxn modelId="32" srcId="30" destId="31" srcOrd="0" destOrd="0"/>
+        <dgm:cxn modelId="4" srcId="0" destId="1" srcOrd="0" destOrd="0"/>
+        <dgm:cxn modelId="5" srcId="0" destId="2" srcOrd="1" destOrd="0"/>
+        <dgm:cxn modelId="6" srcId="0" destId="3" srcOrd="2" destOrd="0"/>
+        <dgm:cxn modelId="13" srcId="1" destId="11" srcOrd="0" destOrd="0"/>
+        <dgm:cxn modelId="23" srcId="2" destId="21" srcOrd="0" destOrd="0"/>
+        <dgm:cxn modelId="33" srcId="3" destId="31" srcOrd="0" destOrd="0"/>
       </dgm:cxnLst>
       <dgm:bg/>
       <dgm:whole/>
@@ -2680,16 +4479,16 @@
     <dgm:dataModel>
       <dgm:ptLst>
         <dgm:pt modelId="0" type="doc"/>
-        <dgm:pt modelId="10">
-          <dgm:prSet phldr="1"/>
-        </dgm:pt>
-        <dgm:pt modelId="20">
-          <dgm:prSet phldr="1"/>
-        </dgm:pt>
+        <dgm:pt modelId="1"/>
+        <dgm:pt modelId="11"/>
+        <dgm:pt modelId="2"/>
+        <dgm:pt modelId="21"/>
       </dgm:ptLst>
       <dgm:cxnLst>
-        <dgm:cxn modelId="60" srcId="0" destId="10" srcOrd="0" destOrd="0"/>
-        <dgm:cxn modelId="70" srcId="0" destId="20" srcOrd="1" destOrd="0"/>
+        <dgm:cxn modelId="4" srcId="0" destId="1" srcOrd="0" destOrd="0"/>
+        <dgm:cxn modelId="5" srcId="0" destId="2" srcOrd="1" destOrd="0"/>
+        <dgm:cxn modelId="13" srcId="1" destId="11" srcOrd="0" destOrd="0"/>
+        <dgm:cxn modelId="23" srcId="2" destId="21" srcOrd="0" destOrd="0"/>
       </dgm:cxnLst>
       <dgm:bg/>
       <dgm:whole/>
@@ -2699,357 +4498,506 @@
     <dgm:dataModel>
       <dgm:ptLst>
         <dgm:pt modelId="0" type="doc"/>
-        <dgm:pt modelId="10">
-          <dgm:prSet phldr="1"/>
-        </dgm:pt>
-        <dgm:pt modelId="20">
-          <dgm:prSet phldr="1"/>
-        </dgm:pt>
-        <dgm:pt modelId="30">
-          <dgm:prSet phldr="1"/>
-        </dgm:pt>
-        <dgm:pt modelId="40">
-          <dgm:prSet phldr="1"/>
-        </dgm:pt>
+        <dgm:pt modelId="1"/>
+        <dgm:pt modelId="11"/>
+        <dgm:pt modelId="2"/>
+        <dgm:pt modelId="21"/>
+        <dgm:pt modelId="3"/>
+        <dgm:pt modelId="31"/>
+        <dgm:pt modelId="4"/>
+        <dgm:pt modelId="41"/>
       </dgm:ptLst>
       <dgm:cxnLst>
-        <dgm:cxn modelId="60" srcId="0" destId="10" srcOrd="0" destOrd="0"/>
-        <dgm:cxn modelId="70" srcId="0" destId="20" srcOrd="1" destOrd="0"/>
-        <dgm:cxn modelId="80" srcId="0" destId="30" srcOrd="2" destOrd="0"/>
-        <dgm:cxn modelId="90" srcId="0" destId="40" srcOrd="3" destOrd="0"/>
+        <dgm:cxn modelId="5" srcId="0" destId="1" srcOrd="0" destOrd="0"/>
+        <dgm:cxn modelId="6" srcId="0" destId="2" srcOrd="1" destOrd="0"/>
+        <dgm:cxn modelId="7" srcId="0" destId="3" srcOrd="2" destOrd="0"/>
+        <dgm:cxn modelId="8" srcId="0" destId="4" srcOrd="3" destOrd="0"/>
+        <dgm:cxn modelId="13" srcId="1" destId="11" srcOrd="0" destOrd="0"/>
+        <dgm:cxn modelId="23" srcId="2" destId="21" srcOrd="0" destOrd="0"/>
+        <dgm:cxn modelId="33" srcId="3" destId="31" srcOrd="0" destOrd="0"/>
+        <dgm:cxn modelId="43" srcId="4" destId="41" srcOrd="0" destOrd="0"/>
       </dgm:cxnLst>
       <dgm:bg/>
       <dgm:whole/>
     </dgm:dataModel>
   </dgm:clrData>
-  <dgm:layoutNode name="root">
+  <dgm:layoutNode name="Name0">
     <dgm:varLst>
-      <dgm:chMax/>
-      <dgm:chPref/>
+      <dgm:dir/>
       <dgm:animLvl val="lvl"/>
+      <dgm:resizeHandles val="exact"/>
     </dgm:varLst>
-    <dgm:alg type="composite"/>
+    <dgm:alg type="lin">
+      <dgm:param type="linDir" val="fromB"/>
+    </dgm:alg>
     <dgm:shape xmlns:r="http://schemas.openxmlformats.org/officeDocument/2006/relationships" r:blip="">
       <dgm:adjLst/>
     </dgm:shape>
+    <dgm:presOf/>
     <dgm:constrLst>
-      <dgm:constr type="w" for="ch" forName="divider" refType="w"/>
-      <dgm:constr type="h" for="ch" forName="divider"/>
-      <dgm:constr type="ctrY" for="ch" forName="divider" refType="h" fact="0.5"/>
-      <dgm:constr type="l" for="ch" forName="divider"/>
-      <dgm:constr type="w" for="ch" forName="nodes" refType="w"/>
-      <dgm:constr type="h" for="ch" forName="nodes" refType="h"/>
+      <dgm:constr type="h" for="ch" forName="boxAndChildren" refType="h"/>
+      <dgm:constr type="h" for="ch" forName="arrowAndChildren" refType="h" refFor="ch" refForName="boxAndChildren" op="equ" fact="1.538"/>
+      <dgm:constr type="w" for="ch" forName="arrowAndChildren" refType="w"/>
+      <dgm:constr type="w" for="ch" forName="boxAndChildren" refType="w"/>
+      <dgm:constr type="h" for="ch" forName="sp" refType="h" fact="-0.015"/>
+      <dgm:constr type="primFontSz" for="des" forName="parentTextBox" val="36"/>
+      <dgm:constr type="primFontSz" for="des" forName="parentTextArrow" refType="primFontSz" refFor="des" refForName="parentTextBox" op="equ"/>
+      <dgm:constr type="primFontSz" for="des" forName="descendantArrow" val="24"/>
+      <dgm:constr type="primFontSz" for="des" forName="descendantArrow" refType="primFontSz" refFor="des" refForName="parentTextArrow" op="lte"/>
+      <dgm:constr type="primFontSz" for="des" forName="descendantBox" refType="primFontSz" refFor="des" refForName="parentTextArrow" op="lte"/>
+      <dgm:constr type="primFontSz" for="des" forName="descendantBox" refType="primFontSz" refFor="des" refForName="parentTextBox" op="lte"/>
+      <dgm:constr type="primFontSz" for="des" forName="descendantArrow" refType="primFontSz" refFor="des" refForName="parentTextBox" op="lte"/>
+      <dgm:constr type="primFontSz" for="des" forName="descendantBox" refType="primFontSz" refFor="des" refForName="descendantArrow" op="equ"/>
     </dgm:constrLst>
-    <dgm:layoutNode name="divider" styleLbl="fgAccFollowNode1">
-      <dgm:alg type="sp"/>
-      <dgm:choose name="ArrowShape">
-        <dgm:if name="ArrowShapeLTR" func="var" arg="dir" op="equ" val="norm">
-          <dgm:shape xmlns:r="http://schemas.openxmlformats.org/officeDocument/2006/relationships" type="line" r:blip="" zOrderOff="-1">
-            <dgm:adjLst/>
-            <dgm:extLst>
-              <a:ext uri="{B698B0E9-8C71-41B9-8309-B3DCBF30829C}">
-                <dgm1612:spPr xmlns:dgm1612="http://schemas.microsoft.com/office/drawing/2016/12/diagram">
-                  <a:ln>
-                    <a:tailEnd type="triangle" w="lg" len="lg"/>
-                  </a:ln>
-                </dgm1612:spPr>
-              </a:ext>
-            </dgm:extLst>
-          </dgm:shape>
-        </dgm:if>
-        <dgm:else name="ArrowShapeRTL">
-          <dgm:shape xmlns:r="http://schemas.openxmlformats.org/officeDocument/2006/relationships" type="line" r:blip="" zOrderOff="-1">
-            <dgm:adjLst/>
-            <dgm:extLst>
-              <a:ext uri="{B698B0E9-8C71-41B9-8309-B3DCBF30829C}">
-                <dgm1612:spPr xmlns:dgm1612="http://schemas.microsoft.com/office/drawing/2016/12/diagram">
-                  <a:ln>
-                    <a:headEnd type="triangle" w="lg" len="lg"/>
-                  </a:ln>
-                </dgm1612:spPr>
-              </a:ext>
-            </dgm:extLst>
-          </dgm:shape>
-        </dgm:else>
-      </dgm:choose>
-      <dgm:presOf/>
-      <dgm:constrLst/>
-      <dgm:ruleLst/>
-    </dgm:layoutNode>
-    <dgm:layoutNode name="nodes">
-      <dgm:varLst>
-        <dgm:chMax/>
-        <dgm:chPref/>
-        <dgm:animLvl val="lvl"/>
-      </dgm:varLst>
-      <dgm:choose name="Name1">
-        <dgm:if name="Name2" func="var" arg="dir" op="equ" val="norm">
-          <dgm:alg type="lin"/>
-        </dgm:if>
-        <dgm:else name="Name3">
-          <dgm:alg type="lin">
-            <dgm:param type="linDir" val="fromR"/>
-          </dgm:alg>
-        </dgm:else>
-      </dgm:choose>
-      <dgm:presOf/>
-      <dgm:shape xmlns:r="http://schemas.openxmlformats.org/officeDocument/2006/relationships" r:blip="">
-        <dgm:adjLst/>
-      </dgm:shape>
-      <dgm:choose name="constrBasedOnChildrenCount">
-        <dgm:if name="constrForTwoChildren" axis="ch" ptType="node" func="cnt" op="lte" val="2">
-          <dgm:constrLst>
-            <dgm:constr type="primFontSz" for="des" forName="L1TextContainer" val="20"/>
-            <dgm:constr type="primFontSz" for="des" forName="L2TextContainer" refType="primFontSz" refFor="des" refForName="L1TextContainer" op="equ" fact="0.85"/>
-            <dgm:constr type="w" for="ch" forName="composite" refType="w"/>
-            <dgm:constr type="h" for="ch" forName="composite" refType="h"/>
-            <dgm:constr type="w" for="ch" forName="spaceBetweenRectangles" refType="w" refFor="ch" refForName="composite" fact="0.16"/>
-            <dgm:constr type="w" for="ch" ptType="sibTrans" op="equ"/>
-            <dgm:constr type="primFontSz" for="des" forName="L1TextContainer" op="equ"/>
-            <dgm:constr type="primFontSz" for="des" forName="L2TextContainer" op="equ"/>
-          </dgm:constrLst>
-        </dgm:if>
-        <dgm:else name="constrForRest">
-          <dgm:constrLst>
-            <dgm:constr type="primFontSz" for="des" forName="L1TextContainer" val="20"/>
-            <dgm:constr type="primFontSz" for="des" forName="L2TextContainer" refType="primFontSz" refFor="des" refForName="L1TextContainer" op="equ" fact="0.85"/>
-            <dgm:constr type="w" for="ch" forName="composite" refType="w"/>
-            <dgm:constr type="h" for="ch" forName="composite" refType="h"/>
-            <dgm:constr type="w" for="ch" forName="spaceBetweenRectangles" refType="w" refFor="ch" refForName="composite" fact="-0.42"/>
-            <dgm:constr type="w" for="ch" ptType="sibTrans" op="equ"/>
-            <dgm:constr type="primFontSz" for="des" forName="L1TextContainer" op="equ"/>
-            <dgm:constr type="primFontSz" for="des" forName="L2TextContainer" op="equ"/>
-          </dgm:constrLst>
-        </dgm:else>
-      </dgm:choose>
-      <dgm:forEach name="nodesForEach" axis="ch" ptType="node">
-        <dgm:layoutNode name="composite">
-          <dgm:alg type="composite"/>
-          <dgm:shape xmlns:r="http://schemas.openxmlformats.org/officeDocument/2006/relationships" r:blip="">
-            <dgm:adjLst/>
-          </dgm:shape>
-          <dgm:choose name="CaseForPlacingNodesAboveAndBelowDivider">
-            <dgm:if name="CaseForPlacingNodeAboveDivider" axis="self" ptType="node" func="posOdd" op="equ" val="1">
-              <dgm:constrLst>
-                <dgm:constr type="w" for="ch" forName="L1TextContainer" refType="w" fact="0.88"/>
-                <dgm:constr type="l" for="ch" forName="L1TextContainer" refType="w" fact="0.06"/>
-                <dgm:constr type="t" for="ch" forName="L1TextContainer" refType="h" fact="0.537"/>
-                <dgm:constr type="h" for="ch" forName="L1TextContainer" refType="h" fact="0.113"/>
-                <dgm:constr type="w" for="ch" forName="L2TextContainerWrapper" refType="w"/>
-                <dgm:constr type="h" for="ch" forName="L2TextContainerWrapper" refType="h" fact="0.31"/>
-                <dgm:constr type="b" for="ch" forName="L2TextContainerWrapper" refType="h" fact="0.31"/>
-                <dgm:constr type="w" for="ch" forName="ConnectLine"/>
-                <dgm:constr type="l" for="ch" forName="ConnectLine" refType="w" fact="0.5"/>
-                <dgm:constr type="h" for="ch" forName="ConnectLine" refType="h" fact="0.19"/>
-                <dgm:constr type="t" for="ch" forName="ConnectLine" refType="h" fact="0.31"/>
-                <dgm:constr type="w" for="ch" forName="ConnectorPoint" refType="h" fact="0.015"/>
-                <dgm:constr type="h" for="ch" forName="ConnectorPoint" refType="h" fact="0.015"/>
-                <dgm:constr type="ctrX" for="ch" forName="ConnectorPoint" refType="w" fact="0.5"/>
-                <dgm:constr type="ctrY" for="ch" forName="ConnectorPoint" refType="h" fact="0.5"/>
-                <dgm:constr type="w" for="ch" forName="EmptyPlaceHolder" refType="w"/>
-                <dgm:constr type="t" for="ch" forName="EmptyPlaceHolder" refType="h" fact="0.65"/>
-                <dgm:constr type="h" for="ch" forName="EmptyPlaceHolder" refType="h" fact="0.35"/>
-              </dgm:constrLst>
-            </dgm:if>
-            <dgm:else name="CaseForPlacingNodeBelowDivider">
-              <dgm:constrLst>
-                <dgm:constr type="w" for="ch" forName="L1TextContainer" refType="w" fact="0.88"/>
-                <dgm:constr type="l" for="ch" forName="L1TextContainer" refType="w" fact="0.06"/>
-                <dgm:constr type="t" for="ch" forName="L1TextContainer" refType="h" fact="0.35"/>
-                <dgm:constr type="h" for="ch" forName="L1TextContainer" refType="h" fact="0.113"/>
-                <dgm:constr type="w" for="ch" forName="L2TextContainerWrapper" refType="w"/>
-                <dgm:constr type="h" for="ch" forName="L2TextContainerWrapper" refType="h" fact="0.31"/>
-                <dgm:constr type="t" for="ch" forName="L2TextContainerWrapper" refType="h" fact="0.69"/>
-                <dgm:constr type="w" for="ch" forName="ConnectLine"/>
-                <dgm:constr type="l" for="ch" forName="ConnectLine" refType="w" fact="0.5"/>
-                <dgm:constr type="h" for="ch" forName="ConnectLine" refType="h" fact="0.19"/>
-                <dgm:constr type="t" for="ch" forName="ConnectLine" refType="h" fact="0.5"/>
-                <dgm:constr type="w" for="ch" forName="ConnectorPoint" refType="h" fact="0.015"/>
-                <dgm:constr type="h" for="ch" forName="ConnectorPoint" refType="h" fact="0.015"/>
-                <dgm:constr type="ctrX" for="ch" forName="ConnectorPoint" refType="w" fact="0.5"/>
-                <dgm:constr type="ctrY" for="ch" forName="ConnectorPoint" refType="h" fact="0.5"/>
-                <dgm:constr type="w" for="ch" forName="EmptyPlaceHolder" refType="w"/>
-                <dgm:constr type="h" for="ch" forName="EmptyPlaceHolder" refType="h" fact="0.35"/>
-                <dgm:constr type="t" for="ch" forName="EmptyPlaceHolder" refType="h" fact="0"/>
-              </dgm:constrLst>
-            </dgm:else>
-          </dgm:choose>
-          <dgm:layoutNode name="L1TextContainer" styleLbl="revTx">
-            <dgm:varLst>
-              <dgm:chMax val="1"/>
-              <dgm:chPref val="1"/>
-              <dgm:bulletEnabled val="1"/>
-            </dgm:varLst>
-            <dgm:choose name="casesForTxtDirLogic">
-              <dgm:if name="Name78" axis="self" ptType="node" func="posOdd" op="equ" val="1">
-                <dgm:alg type="tx">
-                  <dgm:param type="txAnchorHorz" val="ctr"/>
-                  <dgm:param type="txAnchorVert" val="t"/>
-                  <dgm:param type="parTxLTRAlign" val="ctr"/>
-                  <dgm:param type="parTxRTLAlign" val="ctr"/>
-                </dgm:alg>
-              </dgm:if>
-              <dgm:else name="Name89">
-                <dgm:alg type="tx">
-                  <dgm:param type="txAnchorHorz" val="ctr"/>
-                  <dgm:param type="txAnchorVert" val="b"/>
-                  <dgm:param type="parTxLTRAlign" val="ctr"/>
-                  <dgm:param type="parTxRTLAlign" val="ctr"/>
-                </dgm:alg>
-              </dgm:else>
-            </dgm:choose>
-            <dgm:shape xmlns:r="http://schemas.openxmlformats.org/officeDocument/2006/relationships" type="rect" r:blip="">
+    <dgm:ruleLst/>
+    <dgm:forEach name="Name1" axis="ch" ptType="node" st="-1" step="-1">
+      <dgm:choose name="Name2">
+        <dgm:if name="Name3" axis="self" ptType="node" func="revPos" op="equ" val="1">
+          <dgm:layoutNode name="boxAndChildren">
+            <dgm:alg type="composite"/>
+            <dgm:shape xmlns:r="http://schemas.openxmlformats.org/officeDocument/2006/relationships" r:blip="">
               <dgm:adjLst/>
             </dgm:shape>
-            <dgm:presOf axis="self"/>
+            <dgm:presOf/>
             <dgm:constrLst>
-              <dgm:constr type="lMarg"/>
-              <dgm:constr type="rMarg"/>
-              <dgm:constr type="tMarg"/>
-              <dgm:constr type="bMarg"/>
+              <dgm:constr type="w" for="ch" forName="parentTextBox" refType="w" fact="0.25"/>
+              <dgm:constr type="h" for="ch" forName="parentTextBox" refType="h"/>
+              <dgm:constr type="t" for="ch" forName="parentTextBox"/>
+              <dgm:constr type="w" for="ch" forName="descendantBox" refType="w" fact="0.75"/>
+              <dgm:constr type="l" for="ch" forName="descendantBox" refType="w" fact="0.25"/>
+              <dgm:constr type="b" for="ch" forName="descendantBox" refType="h"/>
+              <dgm:constr type="h" for="ch" forName="descendantBox" refType="h"/>
             </dgm:constrLst>
-            <dgm:ruleLst>
-              <dgm:rule type="primFontSz" val="14" fact="NaN" max="NaN"/>
-            </dgm:ruleLst>
+            <dgm:ruleLst/>
+            <dgm:layoutNode name="parentTextBox" styleLbl="alignNode1">
+              <dgm:alg type="tx"/>
+              <dgm:shape xmlns:r="http://schemas.openxmlformats.org/officeDocument/2006/relationships" type="rect" r:blip="">
+                <dgm:adjLst/>
+              </dgm:shape>
+              <dgm:presOf axis="self"/>
+              <dgm:constrLst>
+                <dgm:constr type="primFontSz" refType="h" op="lte" fact="0.5"/>
+                <dgm:constr type="lMarg" refType="w" fact="0.2016"/>
+                <dgm:constr type="rMarg" refType="w" fact="0.2016"/>
+              </dgm:constrLst>
+              <dgm:ruleLst>
+                <dgm:rule type="primFontSz" val="13" fact="NaN" max="NaN"/>
+              </dgm:ruleLst>
+            </dgm:layoutNode>
+            <dgm:layoutNode name="descendantBox" styleLbl="bgAccFollowNode1">
+              <dgm:alg type="tx">
+                <dgm:param type="stBulletLvl" val="0"/>
+                <dgm:param type="parTxLTRAlign" val="l"/>
+              </dgm:alg>
+              <dgm:shape xmlns:r="http://schemas.openxmlformats.org/officeDocument/2006/relationships" type="rect" r:blip="">
+                <dgm:adjLst/>
+              </dgm:shape>
+              <dgm:presOf/>
+              <dgm:constrLst>
+                <dgm:constr type="tMarg" refType="primFontSz"/>
+                <dgm:constr type="bMarg" refType="primFontSz"/>
+                <dgm:constr type="lMarg" refType="w" fact="0.0575"/>
+                <dgm:constr type="rMarg" refType="w" fact="0.0575"/>
+              </dgm:constrLst>
+              <dgm:presOf axis="des" ptType="node"/>
+              <dgm:ruleLst>
+                <dgm:rule type="primFontSz" val="11" fact="NaN" max="NaN"/>
+              </dgm:ruleLst>
+            </dgm:layoutNode>
           </dgm:layoutNode>
-          <dgm:layoutNode name="L2TextContainerWrapper">
-            <dgm:varLst>
-              <dgm:chMax val="0"/>
-              <dgm:chPref val="0"/>
-              <dgm:bulletEnabled val="1"/>
-            </dgm:varLst>
+        </dgm:if>
+        <dgm:else name="Name17">
+          <dgm:layoutNode name="arrowAndChildren">
             <dgm:alg type="composite"/>
-            <dgm:choose name="L2TextContainerConstr">
-              <dgm:if name="CaseForPlacingL2TextContaineAboveDivider" axis="self" ptType="node" func="posOdd" op="equ" val="1">
-                <dgm:constrLst>
-                  <dgm:constr type="h" for="ch" forName="L2TextContainer" refType="h" fact="0.55"/>
-                  <dgm:constr type="b" for="ch" forName="L2TextContainer" refType="h"/>
-                  <dgm:constr type="h" for="ch" forName="FlexibleEmptyPlaceHolder" refType="h" fact="0.45"/>
-                </dgm:constrLst>
-              </dgm:if>
-              <dgm:else name="CaseForPlacingL2TextContaineBelowDivider">
-                <dgm:constrLst>
-                  <dgm:constr type="h" for="ch" forName="L2TextContainer" refType="h" fact="0.55"/>
-                  <dgm:constr type="h" for="ch" forName="FlexibleEmptyPlaceHolder" refType="h" fact="0.45"/>
-                  <dgm:constr type="b" for="ch" forName="FlexibleEmptyPlaceHolder" refType="h"/>
-                </dgm:constrLst>
-              </dgm:else>
-            </dgm:choose>
-            <dgm:layoutNode name="L2TextContainer" styleLbl="bgAcc1">
-              <dgm:choose name="L2TextContainerAlgo">
-                <dgm:if name="L2TextContainerAlgoLTR" func="var" arg="dir" op="equ" val="norm">
-                  <dgm:alg type="tx">
-                    <dgm:param type="txAnchorVert" val="mid"/>
-                    <dgm:param type="parTxRTLAlign" val="l"/>
-                    <dgm:param type="parTxLTRAlign" val="l"/>
-                    <dgm:param type="txAnchorVertCh" val="mid"/>
-                    <dgm:param type="shpTxRTLAlignCh" val="l"/>
-                    <dgm:param type="shpTxLTRAlignCh" val="l"/>
-                  </dgm:alg>
+            <dgm:shape xmlns:r="http://schemas.openxmlformats.org/officeDocument/2006/relationships" r:blip="">
+              <dgm:adjLst/>
+            </dgm:shape>
+            <dgm:presOf/>
+            <dgm:constrLst>
+              <dgm:constr type="w" for="ch" forName="parentTextArrow" refType="w" fact="0.25"/>
+              <dgm:constr type="t" for="ch" forName="parentTextArrow"/>
+              <dgm:constr type="h" for="ch" forName="parentTextArrow" refType="h" fact="0.65"/>
+              <dgm:constr type="w" for="ch" forName="arrow" refType="w" fact="0.25"/>
+              <dgm:constr type="h" for="ch" forName="arrow" refType="h"/>
+              <dgm:constr type="l" for="ch" forName="descendantArrow" refType="w" fact="0.25"/>
+              <dgm:constr type="w" for="ch" forName="descendantArrow" refType="w" fact="0.75"/>
+              <dgm:constr type="b" for="ch" forName="descendantArrow" refType="h" fact="0.65"/>
+              <dgm:constr type="h" for="ch" forName="descendantArrow" refType="h" fact="0.65"/>
+            </dgm:constrLst>
+            <dgm:ruleLst/>
+            <dgm:layoutNode name="parentTextArrow">
+              <dgm:alg type="tx"/>
+              <dgm:choose name="Name21">
+                <dgm:if name="Name22" axis="ch" ptType="node" func="cnt" op="gte" val="1">
+                  <dgm:shape xmlns:r="http://schemas.openxmlformats.org/officeDocument/2006/relationships" type="rect" r:blip="" zOrderOff="1" hideGeom="1">
+                    <dgm:adjLst/>
+                  </dgm:shape>
                 </dgm:if>
-                <dgm:else name="L2TextContainerAlgoRTL">
-                  <dgm:alg type="tx">
-                    <dgm:param type="txAnchorVert" val="mid"/>
-                    <dgm:param type="parTxRTLAlign" val="r"/>
-                    <dgm:param type="parTxLTRAlign" val="r"/>
-                    <dgm:param type="txAnchorVertCh" val="mid"/>
-                    <dgm:param type="shpTxRTLAlignCh" val="r"/>
-                    <dgm:param type="shpTxLTRAlignCh" val="r"/>
-                  </dgm:alg>
+                <dgm:else name="Name23">
+                  <dgm:shape xmlns:r="http://schemas.openxmlformats.org/officeDocument/2006/relationships" rot="180" type="upArrowCallout" r:blip="">
+                    <dgm:adjLst/>
+                  </dgm:shape>
                 </dgm:else>
               </dgm:choose>
-              <dgm:shape xmlns:r="http://schemas.openxmlformats.org/officeDocument/2006/relationships" type="roundRect" r:blip="">
+              <dgm:presOf axis="self"/>
+              <dgm:constrLst>
+                <dgm:constr type="primFontSz" refType="h" op="lte" fact="0.5"/>
+                <dgm:constr type="lMarg" refType="w" fact="0.2016"/>
+                <dgm:constr type="rMarg" refType="w" fact="0.2016"/>
+              </dgm:constrLst>
+              <dgm:ruleLst>
+                <dgm:rule type="primFontSz" val="13" fact="NaN" max="NaN"/>
+              </dgm:ruleLst>
+            </dgm:layoutNode>
+            <dgm:layoutNode name="arrow" styleLbl="alignNode1">
+              <dgm:alg type="sp"/>
+              <dgm:shape xmlns:r="http://schemas.openxmlformats.org/officeDocument/2006/relationships" rot="180" type="upArrowCallout" r:blip="">
+                <dgm:adjLst>
+                  <dgm:adj idx="1" val="0.05"/>
+                  <dgm:adj idx="2" val="0.1"/>
+                  <dgm:adj idx="3" val="0.15"/>
+                </dgm:adjLst>
+              </dgm:shape>
+              <dgm:presOf axis="self"/>
+              <dgm:constrLst/>
+              <dgm:ruleLst/>
+            </dgm:layoutNode>
+            <dgm:layoutNode name="descendantArrow" styleLbl="bgAccFollowNode1">
+              <dgm:alg type="tx">
+                <dgm:param type="stBulletLvl" val="0"/>
+                <dgm:param type="parTxLTRAlign" val="l"/>
+              </dgm:alg>
+              <dgm:shape xmlns:r="http://schemas.openxmlformats.org/officeDocument/2006/relationships" type="rect" r:blip="">
                 <dgm:adjLst/>
               </dgm:shape>
               <dgm:presOf axis="des" ptType="node"/>
               <dgm:constrLst>
-                <dgm:constr type="primFontSz" val="17"/>
-                <dgm:constr type="lMarg" refType="primFontSz" fact="0.7"/>
-                <dgm:constr type="rMarg" refType="primFontSz" fact="0.7"/>
-                <dgm:constr type="tMarg" refType="primFontSz" fact="0.7"/>
-                <dgm:constr type="bMarg" refType="primFontSz" fact="0.7"/>
+                <dgm:constr type="tMarg" refType="primFontSz"/>
+                <dgm:constr type="bMarg" refType="primFontSz"/>
+                <dgm:constr type="lMarg" refType="w" fact="0.0575"/>
+                <dgm:constr type="rMarg" refType="w" fact="0.0575"/>
               </dgm:constrLst>
               <dgm:ruleLst>
-                <dgm:rule type="primFontSz" val="12" fact="NaN" max="NaN"/>
-                <dgm:rule type="secFontSz" val="10" fact="NaN" max="NaN"/>
-                <dgm:rule type="h" val="INF" fact="NaN" max="NaN"/>
+                <dgm:rule type="primFontSz" val="11" fact="NaN" max="NaN"/>
               </dgm:ruleLst>
             </dgm:layoutNode>
-            <dgm:layoutNode name="FlexibleEmptyPlaceHolder">
-              <dgm:alg type="sp"/>
-              <dgm:shape xmlns:r="http://schemas.openxmlformats.org/officeDocument/2006/relationships" r:blip="">
-                <dgm:adjLst/>
-              </dgm:shape>
-              <dgm:presOf/>
-              <dgm:constrLst/>
-            </dgm:layoutNode>
           </dgm:layoutNode>
-          <dgm:layoutNode name="ConnectLine" styleLbl="sibTrans1D1" moveWith="L2TextContainer">
-            <dgm:alg type="sp"/>
-            <dgm:shape xmlns:r="http://schemas.openxmlformats.org/officeDocument/2006/relationships" type="line" r:blip="">
-              <dgm:adjLst/>
-              <dgm:extLst>
-                <a:ext uri="{B698B0E9-8C71-41B9-8309-B3DCBF30829C}">
-                  <dgm1612:spPr xmlns:dgm1612="http://schemas.microsoft.com/office/drawing/2016/12/diagram">
-                    <a:ln>
-                      <a:prstDash val="dash"/>
-                    </a:ln>
-                  </dgm1612:spPr>
-                </a:ext>
-              </dgm:extLst>
-            </dgm:shape>
-            <dgm:presOf/>
-            <dgm:constrLst/>
-          </dgm:layoutNode>
-          <dgm:layoutNode name="ConnectorPoint" styleLbl="alignNode1" moveWith="L2TextContainer">
-            <dgm:alg type="sp"/>
-            <dgm:shape xmlns:r="http://schemas.openxmlformats.org/officeDocument/2006/relationships" type="ellipse" r:blip="" zOrderOff="1">
-              <dgm:adjLst/>
-            </dgm:shape>
-            <dgm:presOf/>
-            <dgm:constrLst/>
-          </dgm:layoutNode>
-          <dgm:layoutNode name="EmptyPlaceHolder">
-            <dgm:alg type="sp"/>
+        </dgm:else>
+      </dgm:choose>
+      <dgm:forEach name="Name31" axis="precedSib" ptType="sibTrans" st="-1" cnt="1">
+        <dgm:layoutNode name="sp">
+          <dgm:alg type="sp"/>
+          <dgm:shape xmlns:r="http://schemas.openxmlformats.org/officeDocument/2006/relationships" r:blip="">
+            <dgm:adjLst/>
+          </dgm:shape>
+          <dgm:presOf axis="self"/>
+          <dgm:constrLst/>
+          <dgm:ruleLst/>
+        </dgm:layoutNode>
+      </dgm:forEach>
+    </dgm:forEach>
+  </dgm:layoutNode>
+</dgm:layoutDef>
+</file>
+
+<file path=ppt/diagrams/layout2.xml><?xml version="1.0" encoding="utf-8"?>
+<dgm:layoutDef xmlns:dgm="http://schemas.openxmlformats.org/drawingml/2006/diagram" xmlns:a="http://schemas.openxmlformats.org/drawingml/2006/main" uniqueId="urn:microsoft.com/office/officeart/2005/8/layout/hierarchy3">
+  <dgm:title val=""/>
+  <dgm:desc val=""/>
+  <dgm:catLst>
+    <dgm:cat type="hierarchy" pri="7000"/>
+    <dgm:cat type="list" pri="23000"/>
+    <dgm:cat type="relationship" pri="15000"/>
+    <dgm:cat type="convert" pri="7000"/>
+  </dgm:catLst>
+  <dgm:sampData>
+    <dgm:dataModel>
+      <dgm:ptLst>
+        <dgm:pt modelId="0" type="doc"/>
+        <dgm:pt modelId="1">
+          <dgm:prSet phldr="1"/>
+        </dgm:pt>
+        <dgm:pt modelId="11">
+          <dgm:prSet phldr="1"/>
+        </dgm:pt>
+        <dgm:pt modelId="12">
+          <dgm:prSet phldr="1"/>
+        </dgm:pt>
+        <dgm:pt modelId="2">
+          <dgm:prSet phldr="1"/>
+        </dgm:pt>
+        <dgm:pt modelId="21">
+          <dgm:prSet phldr="1"/>
+        </dgm:pt>
+        <dgm:pt modelId="22">
+          <dgm:prSet phldr="1"/>
+        </dgm:pt>
+      </dgm:ptLst>
+      <dgm:cxnLst>
+        <dgm:cxn modelId="4" srcId="0" destId="1" srcOrd="0" destOrd="0"/>
+        <dgm:cxn modelId="5" srcId="1" destId="11" srcOrd="0" destOrd="0"/>
+        <dgm:cxn modelId="6" srcId="1" destId="12" srcOrd="1" destOrd="0"/>
+        <dgm:cxn modelId="7" srcId="0" destId="2" srcOrd="1" destOrd="0"/>
+        <dgm:cxn modelId="8" srcId="2" destId="21" srcOrd="0" destOrd="0"/>
+        <dgm:cxn modelId="9" srcId="2" destId="22" srcOrd="1" destOrd="0"/>
+      </dgm:cxnLst>
+      <dgm:bg/>
+      <dgm:whole/>
+    </dgm:dataModel>
+  </dgm:sampData>
+  <dgm:styleData>
+    <dgm:dataModel>
+      <dgm:ptLst>
+        <dgm:pt modelId="0" type="doc"/>
+        <dgm:pt modelId="1"/>
+        <dgm:pt modelId="11"/>
+        <dgm:pt modelId="2"/>
+        <dgm:pt modelId="21"/>
+      </dgm:ptLst>
+      <dgm:cxnLst>
+        <dgm:cxn modelId="4" srcId="0" destId="1" srcOrd="0" destOrd="0"/>
+        <dgm:cxn modelId="5" srcId="0" destId="2" srcOrd="1" destOrd="0"/>
+        <dgm:cxn modelId="13" srcId="1" destId="11" srcOrd="0" destOrd="0"/>
+        <dgm:cxn modelId="23" srcId="2" destId="21" srcOrd="0" destOrd="0"/>
+      </dgm:cxnLst>
+      <dgm:bg/>
+      <dgm:whole/>
+    </dgm:dataModel>
+  </dgm:styleData>
+  <dgm:clrData>
+    <dgm:dataModel>
+      <dgm:ptLst>
+        <dgm:pt modelId="0" type="doc"/>
+        <dgm:pt modelId="1"/>
+        <dgm:pt modelId="11"/>
+        <dgm:pt modelId="2"/>
+        <dgm:pt modelId="21"/>
+        <dgm:pt modelId="3"/>
+        <dgm:pt modelId="31"/>
+        <dgm:pt modelId="4"/>
+        <dgm:pt modelId="41"/>
+      </dgm:ptLst>
+      <dgm:cxnLst>
+        <dgm:cxn modelId="5" srcId="0" destId="1" srcOrd="0" destOrd="0"/>
+        <dgm:cxn modelId="6" srcId="0" destId="2" srcOrd="1" destOrd="0"/>
+        <dgm:cxn modelId="7" srcId="0" destId="3" srcOrd="2" destOrd="0"/>
+        <dgm:cxn modelId="8" srcId="0" destId="4" srcOrd="3" destOrd="0"/>
+        <dgm:cxn modelId="13" srcId="1" destId="11" srcOrd="0" destOrd="0"/>
+        <dgm:cxn modelId="23" srcId="2" destId="21" srcOrd="0" destOrd="0"/>
+        <dgm:cxn modelId="33" srcId="3" destId="31" srcOrd="0" destOrd="0"/>
+        <dgm:cxn modelId="43" srcId="4" destId="41" srcOrd="0" destOrd="0"/>
+      </dgm:cxnLst>
+      <dgm:bg/>
+      <dgm:whole/>
+    </dgm:dataModel>
+  </dgm:clrData>
+  <dgm:layoutNode name="diagram">
+    <dgm:varLst>
+      <dgm:chPref val="1"/>
+      <dgm:dir/>
+      <dgm:animOne val="branch"/>
+      <dgm:animLvl val="lvl"/>
+      <dgm:resizeHandles/>
+    </dgm:varLst>
+    <dgm:choose name="Name0">
+      <dgm:if name="Name1" func="var" arg="dir" op="equ" val="norm">
+        <dgm:alg type="hierChild">
+          <dgm:param type="linDir" val="fromL"/>
+        </dgm:alg>
+      </dgm:if>
+      <dgm:else name="Name2">
+        <dgm:alg type="hierChild">
+          <dgm:param type="linDir" val="fromR"/>
+        </dgm:alg>
+      </dgm:else>
+    </dgm:choose>
+    <dgm:shape xmlns:r="http://schemas.openxmlformats.org/officeDocument/2006/relationships" r:blip="">
+      <dgm:adjLst/>
+    </dgm:shape>
+    <dgm:presOf/>
+    <dgm:constrLst>
+      <dgm:constr type="primFontSz" for="des" forName="rootText" op="equ" val="65"/>
+      <dgm:constr type="primFontSz" for="des" forName="childText" op="equ" val="65"/>
+      <dgm:constr type="w" for="des" forName="rootComposite" refType="w"/>
+      <dgm:constr type="h" for="des" forName="rootComposite" refType="w" fact="0.5"/>
+      <dgm:constr type="w" for="des" forName="childText" refType="w" refFor="des" refForName="rootComposite" fact="0.8"/>
+      <dgm:constr type="h" for="des" forName="childText" refType="h" refFor="des" refForName="rootComposite"/>
+      <dgm:constr type="sibSp" refType="w" refFor="des" refForName="rootComposite" fact="0.25"/>
+      <dgm:constr type="sibSp" for="des" forName="childShape" refType="h" refFor="des" refForName="childText" fact="0.25"/>
+      <dgm:constr type="sp" for="des" forName="root" refType="h" refFor="des" refForName="childText" fact="0.25"/>
+    </dgm:constrLst>
+    <dgm:ruleLst/>
+    <dgm:forEach name="Name3" axis="ch">
+      <dgm:forEach name="Name4" axis="self" ptType="node" cnt="1">
+        <dgm:layoutNode name="root">
+          <dgm:choose name="Name5">
+            <dgm:if name="Name6" func="var" arg="dir" op="equ" val="norm">
+              <dgm:alg type="hierRoot">
+                <dgm:param type="hierAlign" val="tL"/>
+              </dgm:alg>
+            </dgm:if>
+            <dgm:else name="Name7">
+              <dgm:alg type="hierRoot">
+                <dgm:param type="hierAlign" val="tR"/>
+              </dgm:alg>
+            </dgm:else>
+          </dgm:choose>
+          <dgm:shape xmlns:r="http://schemas.openxmlformats.org/officeDocument/2006/relationships" r:blip="">
+            <dgm:adjLst/>
+          </dgm:shape>
+          <dgm:presOf/>
+          <dgm:constrLst>
+            <dgm:constr type="alignOff" val="0.2"/>
+          </dgm:constrLst>
+          <dgm:ruleLst/>
+          <dgm:layoutNode name="rootComposite">
+            <dgm:alg type="composite"/>
             <dgm:shape xmlns:r="http://schemas.openxmlformats.org/officeDocument/2006/relationships" r:blip="">
               <dgm:adjLst/>
             </dgm:shape>
-            <dgm:presOf/>
-            <dgm:constrLst/>
+            <dgm:presOf axis="self" ptType="node" cnt="1"/>
+            <dgm:choose name="Name8">
+              <dgm:if name="Name9" func="var" arg="dir" op="equ" val="norm">
+                <dgm:constrLst>
+                  <dgm:constr type="l" for="ch" forName="rootText"/>
+                  <dgm:constr type="t" for="ch" forName="rootText"/>
+                  <dgm:constr type="w" for="ch" forName="rootText" refType="w"/>
+                  <dgm:constr type="h" for="ch" forName="rootText" refType="h"/>
+                  <dgm:constr type="l" for="ch" forName="rootConnector"/>
+                  <dgm:constr type="t" for="ch" forName="rootConnector"/>
+                  <dgm:constr type="w" for="ch" forName="rootConnector" refType="w" refFor="ch" refForName="rootText" fact="0.2"/>
+                  <dgm:constr type="h" for="ch" forName="rootConnector" refType="h" refFor="ch" refForName="rootText"/>
+                </dgm:constrLst>
+              </dgm:if>
+              <dgm:else name="Name10">
+                <dgm:constrLst>
+                  <dgm:constr type="l" for="ch" forName="rootText"/>
+                  <dgm:constr type="t" for="ch" forName="rootText"/>
+                  <dgm:constr type="w" for="ch" forName="rootText" refType="w"/>
+                  <dgm:constr type="h" for="ch" forName="rootText" refType="h"/>
+                  <dgm:constr type="r" for="ch" forName="rootConnector" refType="w"/>
+                  <dgm:constr type="t" for="ch" forName="rootConnector"/>
+                  <dgm:constr type="w" for="ch" forName="rootConnector" refType="w" refFor="ch" refForName="rootText" fact="0.2"/>
+                  <dgm:constr type="h" for="ch" forName="rootConnector" refType="h" refFor="ch" refForName="rootText"/>
+                </dgm:constrLst>
+              </dgm:else>
+            </dgm:choose>
+            <dgm:ruleLst/>
+            <dgm:layoutNode name="rootText" styleLbl="node1">
+              <dgm:alg type="tx"/>
+              <dgm:shape xmlns:r="http://schemas.openxmlformats.org/officeDocument/2006/relationships" type="roundRect" r:blip="">
+                <dgm:adjLst>
+                  <dgm:adj idx="1" val="0.1"/>
+                </dgm:adjLst>
+              </dgm:shape>
+              <dgm:presOf axis="self" ptType="node" cnt="1"/>
+              <dgm:constrLst>
+                <dgm:constr type="tMarg" refType="primFontSz" fact="0.1"/>
+                <dgm:constr type="bMarg" refType="primFontSz" fact="0.1"/>
+                <dgm:constr type="lMarg" refType="primFontSz" fact="0.15"/>
+                <dgm:constr type="rMarg" refType="primFontSz" fact="0.15"/>
+              </dgm:constrLst>
+              <dgm:ruleLst>
+                <dgm:rule type="primFontSz" val="5" fact="NaN" max="NaN"/>
+              </dgm:ruleLst>
+            </dgm:layoutNode>
+            <dgm:layoutNode name="rootConnector" moveWith="rootText">
+              <dgm:alg type="sp"/>
+              <dgm:shape xmlns:r="http://schemas.openxmlformats.org/officeDocument/2006/relationships" type="roundRect" r:blip="" hideGeom="1">
+                <dgm:adjLst>
+                  <dgm:adj idx="1" val="0.1"/>
+                </dgm:adjLst>
+              </dgm:shape>
+              <dgm:presOf axis="self" ptType="node" cnt="1"/>
+              <dgm:constrLst/>
+              <dgm:ruleLst/>
+            </dgm:layoutNode>
           </dgm:layoutNode>
-        </dgm:layoutNode>
-        <dgm:forEach name="Name28" axis="followSib" ptType="sibTrans" cnt="1">
-          <dgm:layoutNode name="spaceBetweenRectangles">
-            <dgm:alg type="sp"/>
+          <dgm:layoutNode name="childShape">
+            <dgm:alg type="hierChild">
+              <dgm:param type="chAlign" val="l"/>
+              <dgm:param type="linDir" val="fromT"/>
+            </dgm:alg>
             <dgm:shape xmlns:r="http://schemas.openxmlformats.org/officeDocument/2006/relationships" r:blip="">
               <dgm:adjLst/>
             </dgm:shape>
             <dgm:presOf/>
             <dgm:constrLst/>
             <dgm:ruleLst/>
+            <dgm:forEach name="Name11" axis="ch">
+              <dgm:forEach name="Name12" axis="self" ptType="parTrans" cnt="1">
+                <dgm:layoutNode name="Name13">
+                  <dgm:choose name="Name14">
+                    <dgm:if name="Name15" func="var" arg="dir" op="equ" val="norm">
+                      <dgm:alg type="conn">
+                        <dgm:param type="dim" val="1D"/>
+                        <dgm:param type="endSty" val="noArr"/>
+                        <dgm:param type="connRout" val="bend"/>
+                        <dgm:param type="srcNode" val="rootConnector"/>
+                        <dgm:param type="begPts" val="bCtr"/>
+                        <dgm:param type="endPts" val="midL"/>
+                      </dgm:alg>
+                    </dgm:if>
+                    <dgm:else name="Name16">
+                      <dgm:alg type="conn">
+                        <dgm:param type="dim" val="1D"/>
+                        <dgm:param type="endSty" val="noArr"/>
+                        <dgm:param type="connRout" val="bend"/>
+                        <dgm:param type="srcNode" val="rootConnector"/>
+                        <dgm:param type="begPts" val="bCtr"/>
+                        <dgm:param type="endPts" val="midR"/>
+                      </dgm:alg>
+                    </dgm:else>
+                  </dgm:choose>
+                  <dgm:shape xmlns:r="http://schemas.openxmlformats.org/officeDocument/2006/relationships" type="conn" r:blip="">
+                    <dgm:adjLst/>
+                  </dgm:shape>
+                  <dgm:presOf axis="self"/>
+                  <dgm:constrLst>
+                    <dgm:constr type="begPad"/>
+                    <dgm:constr type="endPad"/>
+                  </dgm:constrLst>
+                  <dgm:ruleLst/>
+                </dgm:layoutNode>
+              </dgm:forEach>
+              <dgm:forEach name="Name17" axis="self" ptType="node">
+                <dgm:layoutNode name="childText" styleLbl="bgAcc1">
+                  <dgm:varLst>
+                    <dgm:bulletEnabled val="1"/>
+                  </dgm:varLst>
+                  <dgm:alg type="tx"/>
+                  <dgm:shape xmlns:r="http://schemas.openxmlformats.org/officeDocument/2006/relationships" type="roundRect" r:blip="">
+                    <dgm:adjLst>
+                      <dgm:adj idx="1" val="0.1"/>
+                    </dgm:adjLst>
+                  </dgm:shape>
+                  <dgm:presOf axis="self desOrSelf" ptType="node node" st="1 1" cnt="1 0"/>
+                  <dgm:constrLst>
+                    <dgm:constr type="tMarg" refType="primFontSz" fact="0.1"/>
+                    <dgm:constr type="bMarg" refType="primFontSz" fact="0.1"/>
+                    <dgm:constr type="lMarg" refType="primFontSz" fact="0.15"/>
+                    <dgm:constr type="rMarg" refType="primFontSz" fact="0.15"/>
+                  </dgm:constrLst>
+                  <dgm:ruleLst>
+                    <dgm:rule type="primFontSz" val="5" fact="NaN" max="NaN"/>
+                  </dgm:ruleLst>
+                </dgm:layoutNode>
+              </dgm:forEach>
+            </dgm:forEach>
           </dgm:layoutNode>
-        </dgm:forEach>
+        </dgm:layoutNode>
       </dgm:forEach>
-    </dgm:layoutNode>
+    </dgm:forEach>
   </dgm:layoutNode>
-  <dgm:extLst>
-    <a:ext uri="{68A01E43-0DF5-4B5B-8FA6-DAF915123BFB}">
-      <dgm1612:lstStyle xmlns:dgm1612="http://schemas.microsoft.com/office/drawing/2016/12/diagram">
-        <a:lvl1pPr>
-          <a:defRPr b="1"/>
-        </a:lvl1pPr>
-      </dgm1612:lstStyle>
-    </a:ext>
-  </dgm:extLst>
 </dgm:layoutDef>
 </file>
 
 <file path=ppt/diagrams/quickStyle1.xml><?xml version="1.0" encoding="utf-8"?>
-<dgm:styleDef xmlns:dgm="http://schemas.openxmlformats.org/drawingml/2006/diagram" xmlns:a="http://schemas.openxmlformats.org/drawingml/2006/main" uniqueId="urn:microsoft.com/office/officeart/2005/8/quickstyle/simple1">
+<dgm:styleDef xmlns:dgm="http://schemas.openxmlformats.org/drawingml/2006/diagram" xmlns:a="http://schemas.openxmlformats.org/drawingml/2006/main" uniqueId="urn:microsoft.com/office/officeart/2005/8/quickstyle/simple5">
   <dgm:title val=""/>
   <dgm:desc val=""/>
   <dgm:catLst>
-    <dgm:cat type="simple" pri="10100"/>
+    <dgm:cat type="simple" pri="10500"/>
   </dgm:catLst>
   <dgm:scene3d>
     <a:camera prst="orthographicFront"/>
@@ -3063,13 +5011,13 @@
     <dgm:sp3d/>
     <dgm:txPr/>
     <dgm:style>
-      <a:lnRef idx="2">
+      <a:lnRef idx="0">
         <a:scrgbClr r="0" g="0" b="0"/>
       </a:lnRef>
-      <a:fillRef idx="1">
+      <a:fillRef idx="3">
         <a:scrgbClr r="0" g="0" b="0"/>
       </a:fillRef>
-      <a:effectRef idx="0">
+      <a:effectRef idx="3">
         <a:scrgbClr r="0" g="0" b="0"/>
       </a:effectRef>
       <a:fontRef idx="minor">
@@ -3085,13 +5033,13 @@
     <dgm:sp3d/>
     <dgm:txPr/>
     <dgm:style>
-      <a:lnRef idx="2">
+      <a:lnRef idx="0">
         <a:scrgbClr r="0" g="0" b="0"/>
       </a:lnRef>
-      <a:fillRef idx="1">
+      <a:fillRef idx="3">
         <a:scrgbClr r="0" g="0" b="0"/>
       </a:fillRef>
-      <a:effectRef idx="0">
+      <a:effectRef idx="3">
         <a:scrgbClr r="0" g="0" b="0"/>
       </a:effectRef>
       <a:fontRef idx="minor">
@@ -3107,7 +5055,1041 @@
     <dgm:sp3d/>
     <dgm:txPr/>
     <dgm:style>
+      <a:lnRef idx="0">
+        <a:scrgbClr r="0" g="0" b="0"/>
+      </a:lnRef>
+      <a:fillRef idx="3">
+        <a:scrgbClr r="0" g="0" b="0"/>
+      </a:fillRef>
+      <a:effectRef idx="3">
+        <a:scrgbClr r="0" g="0" b="0"/>
+      </a:effectRef>
+      <a:fontRef idx="minor">
+        <a:schemeClr val="tx1"/>
+      </a:fontRef>
+    </dgm:style>
+  </dgm:styleLbl>
+  <dgm:styleLbl name="alignNode1">
+    <dgm:scene3d>
+      <a:camera prst="orthographicFront"/>
+      <a:lightRig rig="threePt" dir="t"/>
+    </dgm:scene3d>
+    <dgm:sp3d/>
+    <dgm:txPr/>
+    <dgm:style>
+      <a:lnRef idx="1">
+        <a:scrgbClr r="0" g="0" b="0"/>
+      </a:lnRef>
+      <a:fillRef idx="3">
+        <a:scrgbClr r="0" g="0" b="0"/>
+      </a:fillRef>
+      <a:effectRef idx="3">
+        <a:scrgbClr r="0" g="0" b="0"/>
+      </a:effectRef>
+      <a:fontRef idx="minor">
+        <a:schemeClr val="lt1"/>
+      </a:fontRef>
+    </dgm:style>
+  </dgm:styleLbl>
+  <dgm:styleLbl name="node1">
+    <dgm:scene3d>
+      <a:camera prst="orthographicFront"/>
+      <a:lightRig rig="threePt" dir="t"/>
+    </dgm:scene3d>
+    <dgm:sp3d/>
+    <dgm:txPr/>
+    <dgm:style>
+      <a:lnRef idx="0">
+        <a:scrgbClr r="0" g="0" b="0"/>
+      </a:lnRef>
+      <a:fillRef idx="3">
+        <a:scrgbClr r="0" g="0" b="0"/>
+      </a:fillRef>
+      <a:effectRef idx="3">
+        <a:scrgbClr r="0" g="0" b="0"/>
+      </a:effectRef>
+      <a:fontRef idx="minor">
+        <a:schemeClr val="lt1"/>
+      </a:fontRef>
+    </dgm:style>
+  </dgm:styleLbl>
+  <dgm:styleLbl name="node2">
+    <dgm:scene3d>
+      <a:camera prst="orthographicFront"/>
+      <a:lightRig rig="threePt" dir="t"/>
+    </dgm:scene3d>
+    <dgm:sp3d/>
+    <dgm:txPr/>
+    <dgm:style>
+      <a:lnRef idx="0">
+        <a:scrgbClr r="0" g="0" b="0"/>
+      </a:lnRef>
+      <a:fillRef idx="3">
+        <a:scrgbClr r="0" g="0" b="0"/>
+      </a:fillRef>
+      <a:effectRef idx="3">
+        <a:scrgbClr r="0" g="0" b="0"/>
+      </a:effectRef>
+      <a:fontRef idx="minor">
+        <a:schemeClr val="lt1"/>
+      </a:fontRef>
+    </dgm:style>
+  </dgm:styleLbl>
+  <dgm:styleLbl name="node3">
+    <dgm:scene3d>
+      <a:camera prst="orthographicFront"/>
+      <a:lightRig rig="threePt" dir="t"/>
+    </dgm:scene3d>
+    <dgm:sp3d/>
+    <dgm:txPr/>
+    <dgm:style>
+      <a:lnRef idx="0">
+        <a:scrgbClr r="0" g="0" b="0"/>
+      </a:lnRef>
+      <a:fillRef idx="3">
+        <a:scrgbClr r="0" g="0" b="0"/>
+      </a:fillRef>
+      <a:effectRef idx="3">
+        <a:scrgbClr r="0" g="0" b="0"/>
+      </a:effectRef>
+      <a:fontRef idx="minor">
+        <a:schemeClr val="lt1"/>
+      </a:fontRef>
+    </dgm:style>
+  </dgm:styleLbl>
+  <dgm:styleLbl name="node4">
+    <dgm:scene3d>
+      <a:camera prst="orthographicFront"/>
+      <a:lightRig rig="threePt" dir="t"/>
+    </dgm:scene3d>
+    <dgm:sp3d/>
+    <dgm:txPr/>
+    <dgm:style>
+      <a:lnRef idx="0">
+        <a:scrgbClr r="0" g="0" b="0"/>
+      </a:lnRef>
+      <a:fillRef idx="3">
+        <a:scrgbClr r="0" g="0" b="0"/>
+      </a:fillRef>
+      <a:effectRef idx="3">
+        <a:scrgbClr r="0" g="0" b="0"/>
+      </a:effectRef>
+      <a:fontRef idx="minor">
+        <a:schemeClr val="lt1"/>
+      </a:fontRef>
+    </dgm:style>
+  </dgm:styleLbl>
+  <dgm:styleLbl name="fgImgPlace1">
+    <dgm:scene3d>
+      <a:camera prst="orthographicFront"/>
+      <a:lightRig rig="threePt" dir="t"/>
+    </dgm:scene3d>
+    <dgm:sp3d/>
+    <dgm:txPr/>
+    <dgm:style>
+      <a:lnRef idx="0">
+        <a:scrgbClr r="0" g="0" b="0"/>
+      </a:lnRef>
+      <a:fillRef idx="1">
+        <a:scrgbClr r="0" g="0" b="0"/>
+      </a:fillRef>
+      <a:effectRef idx="3">
+        <a:scrgbClr r="0" g="0" b="0"/>
+      </a:effectRef>
+      <a:fontRef idx="minor"/>
+    </dgm:style>
+  </dgm:styleLbl>
+  <dgm:styleLbl name="alignImgPlace1">
+    <dgm:scene3d>
+      <a:camera prst="orthographicFront"/>
+      <a:lightRig rig="threePt" dir="t"/>
+    </dgm:scene3d>
+    <dgm:sp3d/>
+    <dgm:txPr/>
+    <dgm:style>
+      <a:lnRef idx="0">
+        <a:scrgbClr r="0" g="0" b="0"/>
+      </a:lnRef>
+      <a:fillRef idx="1">
+        <a:scrgbClr r="0" g="0" b="0"/>
+      </a:fillRef>
+      <a:effectRef idx="3">
+        <a:scrgbClr r="0" g="0" b="0"/>
+      </a:effectRef>
+      <a:fontRef idx="minor"/>
+    </dgm:style>
+  </dgm:styleLbl>
+  <dgm:styleLbl name="bgImgPlace1">
+    <dgm:scene3d>
+      <a:camera prst="orthographicFront"/>
+      <a:lightRig rig="threePt" dir="t"/>
+    </dgm:scene3d>
+    <dgm:sp3d/>
+    <dgm:txPr/>
+    <dgm:style>
+      <a:lnRef idx="0">
+        <a:scrgbClr r="0" g="0" b="0"/>
+      </a:lnRef>
+      <a:fillRef idx="1">
+        <a:scrgbClr r="0" g="0" b="0"/>
+      </a:fillRef>
+      <a:effectRef idx="3">
+        <a:scrgbClr r="0" g="0" b="0"/>
+      </a:effectRef>
+      <a:fontRef idx="minor"/>
+    </dgm:style>
+  </dgm:styleLbl>
+  <dgm:styleLbl name="sibTrans2D1">
+    <dgm:scene3d>
+      <a:camera prst="orthographicFront"/>
+      <a:lightRig rig="threePt" dir="t"/>
+    </dgm:scene3d>
+    <dgm:sp3d/>
+    <dgm:txPr/>
+    <dgm:style>
+      <a:lnRef idx="0">
+        <a:scrgbClr r="0" g="0" b="0"/>
+      </a:lnRef>
+      <a:fillRef idx="3">
+        <a:scrgbClr r="0" g="0" b="0"/>
+      </a:fillRef>
+      <a:effectRef idx="3">
+        <a:scrgbClr r="0" g="0" b="0"/>
+      </a:effectRef>
+      <a:fontRef idx="minor">
+        <a:schemeClr val="lt1"/>
+      </a:fontRef>
+    </dgm:style>
+  </dgm:styleLbl>
+  <dgm:styleLbl name="fgSibTrans2D1">
+    <dgm:scene3d>
+      <a:camera prst="orthographicFront"/>
+      <a:lightRig rig="threePt" dir="t"/>
+    </dgm:scene3d>
+    <dgm:sp3d/>
+    <dgm:txPr/>
+    <dgm:style>
+      <a:lnRef idx="0">
+        <a:scrgbClr r="0" g="0" b="0"/>
+      </a:lnRef>
+      <a:fillRef idx="3">
+        <a:scrgbClr r="0" g="0" b="0"/>
+      </a:fillRef>
+      <a:effectRef idx="3">
+        <a:scrgbClr r="0" g="0" b="0"/>
+      </a:effectRef>
+      <a:fontRef idx="minor">
+        <a:schemeClr val="lt1"/>
+      </a:fontRef>
+    </dgm:style>
+  </dgm:styleLbl>
+  <dgm:styleLbl name="bgSibTrans2D1">
+    <dgm:scene3d>
+      <a:camera prst="orthographicFront"/>
+      <a:lightRig rig="threePt" dir="t"/>
+    </dgm:scene3d>
+    <dgm:sp3d/>
+    <dgm:txPr/>
+    <dgm:style>
+      <a:lnRef idx="0">
+        <a:scrgbClr r="0" g="0" b="0"/>
+      </a:lnRef>
+      <a:fillRef idx="3">
+        <a:scrgbClr r="0" g="0" b="0"/>
+      </a:fillRef>
+      <a:effectRef idx="3">
+        <a:scrgbClr r="0" g="0" b="0"/>
+      </a:effectRef>
+      <a:fontRef idx="minor">
+        <a:schemeClr val="lt1"/>
+      </a:fontRef>
+    </dgm:style>
+  </dgm:styleLbl>
+  <dgm:styleLbl name="sibTrans1D1">
+    <dgm:scene3d>
+      <a:camera prst="orthographicFront"/>
+      <a:lightRig rig="threePt" dir="t"/>
+    </dgm:scene3d>
+    <dgm:sp3d/>
+    <dgm:txPr/>
+    <dgm:style>
+      <a:lnRef idx="1">
+        <a:scrgbClr r="0" g="0" b="0"/>
+      </a:lnRef>
+      <a:fillRef idx="0">
+        <a:scrgbClr r="0" g="0" b="0"/>
+      </a:fillRef>
+      <a:effectRef idx="0">
+        <a:scrgbClr r="0" g="0" b="0"/>
+      </a:effectRef>
+      <a:fontRef idx="minor"/>
+    </dgm:style>
+  </dgm:styleLbl>
+  <dgm:styleLbl name="callout">
+    <dgm:scene3d>
+      <a:camera prst="orthographicFront"/>
+      <a:lightRig rig="threePt" dir="t"/>
+    </dgm:scene3d>
+    <dgm:sp3d/>
+    <dgm:txPr/>
+    <dgm:style>
+      <a:lnRef idx="1">
+        <a:scrgbClr r="0" g="0" b="0"/>
+      </a:lnRef>
+      <a:fillRef idx="0">
+        <a:scrgbClr r="0" g="0" b="0"/>
+      </a:fillRef>
+      <a:effectRef idx="1">
+        <a:scrgbClr r="0" g="0" b="0"/>
+      </a:effectRef>
+      <a:fontRef idx="minor"/>
+    </dgm:style>
+  </dgm:styleLbl>
+  <dgm:styleLbl name="asst0">
+    <dgm:scene3d>
+      <a:camera prst="orthographicFront"/>
+      <a:lightRig rig="threePt" dir="t"/>
+    </dgm:scene3d>
+    <dgm:sp3d/>
+    <dgm:txPr/>
+    <dgm:style>
+      <a:lnRef idx="0">
+        <a:scrgbClr r="0" g="0" b="0"/>
+      </a:lnRef>
+      <a:fillRef idx="3">
+        <a:scrgbClr r="0" g="0" b="0"/>
+      </a:fillRef>
+      <a:effectRef idx="3">
+        <a:scrgbClr r="0" g="0" b="0"/>
+      </a:effectRef>
+      <a:fontRef idx="minor">
+        <a:schemeClr val="lt1"/>
+      </a:fontRef>
+    </dgm:style>
+  </dgm:styleLbl>
+  <dgm:styleLbl name="asst1">
+    <dgm:scene3d>
+      <a:camera prst="orthographicFront"/>
+      <a:lightRig rig="threePt" dir="t"/>
+    </dgm:scene3d>
+    <dgm:sp3d/>
+    <dgm:txPr/>
+    <dgm:style>
+      <a:lnRef idx="0">
+        <a:scrgbClr r="0" g="0" b="0"/>
+      </a:lnRef>
+      <a:fillRef idx="3">
+        <a:scrgbClr r="0" g="0" b="0"/>
+      </a:fillRef>
+      <a:effectRef idx="3">
+        <a:scrgbClr r="0" g="0" b="0"/>
+      </a:effectRef>
+      <a:fontRef idx="minor">
+        <a:schemeClr val="lt1"/>
+      </a:fontRef>
+    </dgm:style>
+  </dgm:styleLbl>
+  <dgm:styleLbl name="asst2">
+    <dgm:scene3d>
+      <a:camera prst="orthographicFront"/>
+      <a:lightRig rig="threePt" dir="t"/>
+    </dgm:scene3d>
+    <dgm:sp3d/>
+    <dgm:txPr/>
+    <dgm:style>
+      <a:lnRef idx="0">
+        <a:scrgbClr r="0" g="0" b="0"/>
+      </a:lnRef>
+      <a:fillRef idx="3">
+        <a:scrgbClr r="0" g="0" b="0"/>
+      </a:fillRef>
+      <a:effectRef idx="3">
+        <a:scrgbClr r="0" g="0" b="0"/>
+      </a:effectRef>
+      <a:fontRef idx="minor">
+        <a:schemeClr val="lt1"/>
+      </a:fontRef>
+    </dgm:style>
+  </dgm:styleLbl>
+  <dgm:styleLbl name="asst3">
+    <dgm:scene3d>
+      <a:camera prst="orthographicFront"/>
+      <a:lightRig rig="threePt" dir="t"/>
+    </dgm:scene3d>
+    <dgm:sp3d/>
+    <dgm:txPr/>
+    <dgm:style>
+      <a:lnRef idx="0">
+        <a:scrgbClr r="0" g="0" b="0"/>
+      </a:lnRef>
+      <a:fillRef idx="3">
+        <a:scrgbClr r="0" g="0" b="0"/>
+      </a:fillRef>
+      <a:effectRef idx="3">
+        <a:scrgbClr r="0" g="0" b="0"/>
+      </a:effectRef>
+      <a:fontRef idx="minor">
+        <a:schemeClr val="lt1"/>
+      </a:fontRef>
+    </dgm:style>
+  </dgm:styleLbl>
+  <dgm:styleLbl name="asst4">
+    <dgm:scene3d>
+      <a:camera prst="orthographicFront"/>
+      <a:lightRig rig="threePt" dir="t"/>
+    </dgm:scene3d>
+    <dgm:sp3d/>
+    <dgm:txPr/>
+    <dgm:style>
+      <a:lnRef idx="0">
+        <a:scrgbClr r="0" g="0" b="0"/>
+      </a:lnRef>
+      <a:fillRef idx="3">
+        <a:scrgbClr r="0" g="0" b="0"/>
+      </a:fillRef>
+      <a:effectRef idx="3">
+        <a:scrgbClr r="0" g="0" b="0"/>
+      </a:effectRef>
+      <a:fontRef idx="minor">
+        <a:schemeClr val="lt1"/>
+      </a:fontRef>
+    </dgm:style>
+  </dgm:styleLbl>
+  <dgm:styleLbl name="parChTrans2D1">
+    <dgm:scene3d>
+      <a:camera prst="orthographicFront"/>
+      <a:lightRig rig="threePt" dir="t"/>
+    </dgm:scene3d>
+    <dgm:sp3d/>
+    <dgm:txPr/>
+    <dgm:style>
+      <a:lnRef idx="0">
+        <a:scrgbClr r="0" g="0" b="0"/>
+      </a:lnRef>
+      <a:fillRef idx="3">
+        <a:scrgbClr r="0" g="0" b="0"/>
+      </a:fillRef>
+      <a:effectRef idx="3">
+        <a:scrgbClr r="0" g="0" b="0"/>
+      </a:effectRef>
+      <a:fontRef idx="minor">
+        <a:schemeClr val="lt1"/>
+      </a:fontRef>
+    </dgm:style>
+  </dgm:styleLbl>
+  <dgm:styleLbl name="parChTrans2D2">
+    <dgm:scene3d>
+      <a:camera prst="orthographicFront"/>
+      <a:lightRig rig="threePt" dir="t"/>
+    </dgm:scene3d>
+    <dgm:sp3d/>
+    <dgm:txPr/>
+    <dgm:style>
+      <a:lnRef idx="0">
+        <a:scrgbClr r="0" g="0" b="0"/>
+      </a:lnRef>
+      <a:fillRef idx="3">
+        <a:scrgbClr r="0" g="0" b="0"/>
+      </a:fillRef>
+      <a:effectRef idx="3">
+        <a:scrgbClr r="0" g="0" b="0"/>
+      </a:effectRef>
+      <a:fontRef idx="minor">
+        <a:schemeClr val="lt1"/>
+      </a:fontRef>
+    </dgm:style>
+  </dgm:styleLbl>
+  <dgm:styleLbl name="parChTrans2D3">
+    <dgm:scene3d>
+      <a:camera prst="orthographicFront"/>
+      <a:lightRig rig="threePt" dir="t"/>
+    </dgm:scene3d>
+    <dgm:sp3d/>
+    <dgm:txPr/>
+    <dgm:style>
+      <a:lnRef idx="0">
+        <a:scrgbClr r="0" g="0" b="0"/>
+      </a:lnRef>
+      <a:fillRef idx="3">
+        <a:scrgbClr r="0" g="0" b="0"/>
+      </a:fillRef>
+      <a:effectRef idx="3">
+        <a:scrgbClr r="0" g="0" b="0"/>
+      </a:effectRef>
+      <a:fontRef idx="minor">
+        <a:schemeClr val="lt1"/>
+      </a:fontRef>
+    </dgm:style>
+  </dgm:styleLbl>
+  <dgm:styleLbl name="parChTrans2D4">
+    <dgm:scene3d>
+      <a:camera prst="orthographicFront"/>
+      <a:lightRig rig="threePt" dir="t"/>
+    </dgm:scene3d>
+    <dgm:sp3d/>
+    <dgm:txPr/>
+    <dgm:style>
+      <a:lnRef idx="0">
+        <a:scrgbClr r="0" g="0" b="0"/>
+      </a:lnRef>
+      <a:fillRef idx="3">
+        <a:scrgbClr r="0" g="0" b="0"/>
+      </a:fillRef>
+      <a:effectRef idx="3">
+        <a:scrgbClr r="0" g="0" b="0"/>
+      </a:effectRef>
+      <a:fontRef idx="minor">
+        <a:schemeClr val="lt1"/>
+      </a:fontRef>
+    </dgm:style>
+  </dgm:styleLbl>
+  <dgm:styleLbl name="parChTrans1D1">
+    <dgm:scene3d>
+      <a:camera prst="orthographicFront"/>
+      <a:lightRig rig="threePt" dir="t"/>
+    </dgm:scene3d>
+    <dgm:sp3d/>
+    <dgm:txPr/>
+    <dgm:style>
       <a:lnRef idx="2">
+        <a:scrgbClr r="0" g="0" b="0"/>
+      </a:lnRef>
+      <a:fillRef idx="0">
+        <a:scrgbClr r="0" g="0" b="0"/>
+      </a:fillRef>
+      <a:effectRef idx="0">
+        <a:scrgbClr r="0" g="0" b="0"/>
+      </a:effectRef>
+      <a:fontRef idx="minor"/>
+    </dgm:style>
+  </dgm:styleLbl>
+  <dgm:styleLbl name="parChTrans1D2">
+    <dgm:scene3d>
+      <a:camera prst="orthographicFront"/>
+      <a:lightRig rig="threePt" dir="t"/>
+    </dgm:scene3d>
+    <dgm:sp3d/>
+    <dgm:txPr/>
+    <dgm:style>
+      <a:lnRef idx="2">
+        <a:scrgbClr r="0" g="0" b="0"/>
+      </a:lnRef>
+      <a:fillRef idx="0">
+        <a:scrgbClr r="0" g="0" b="0"/>
+      </a:fillRef>
+      <a:effectRef idx="0">
+        <a:scrgbClr r="0" g="0" b="0"/>
+      </a:effectRef>
+      <a:fontRef idx="minor"/>
+    </dgm:style>
+  </dgm:styleLbl>
+  <dgm:styleLbl name="parChTrans1D3">
+    <dgm:scene3d>
+      <a:camera prst="orthographicFront"/>
+      <a:lightRig rig="threePt" dir="t"/>
+    </dgm:scene3d>
+    <dgm:sp3d/>
+    <dgm:txPr/>
+    <dgm:style>
+      <a:lnRef idx="2">
+        <a:scrgbClr r="0" g="0" b="0"/>
+      </a:lnRef>
+      <a:fillRef idx="0">
+        <a:scrgbClr r="0" g="0" b="0"/>
+      </a:fillRef>
+      <a:effectRef idx="0">
+        <a:scrgbClr r="0" g="0" b="0"/>
+      </a:effectRef>
+      <a:fontRef idx="minor"/>
+    </dgm:style>
+  </dgm:styleLbl>
+  <dgm:styleLbl name="parChTrans1D4">
+    <dgm:scene3d>
+      <a:camera prst="orthographicFront"/>
+      <a:lightRig rig="threePt" dir="t"/>
+    </dgm:scene3d>
+    <dgm:sp3d/>
+    <dgm:txPr/>
+    <dgm:style>
+      <a:lnRef idx="2">
+        <a:scrgbClr r="0" g="0" b="0"/>
+      </a:lnRef>
+      <a:fillRef idx="0">
+        <a:scrgbClr r="0" g="0" b="0"/>
+      </a:fillRef>
+      <a:effectRef idx="0">
+        <a:scrgbClr r="0" g="0" b="0"/>
+      </a:effectRef>
+      <a:fontRef idx="minor"/>
+    </dgm:style>
+  </dgm:styleLbl>
+  <dgm:styleLbl name="fgAcc1">
+    <dgm:scene3d>
+      <a:camera prst="orthographicFront"/>
+      <a:lightRig rig="threePt" dir="t"/>
+    </dgm:scene3d>
+    <dgm:sp3d/>
+    <dgm:txPr/>
+    <dgm:style>
+      <a:lnRef idx="1">
+        <a:scrgbClr r="0" g="0" b="0"/>
+      </a:lnRef>
+      <a:fillRef idx="1">
+        <a:scrgbClr r="0" g="0" b="0"/>
+      </a:fillRef>
+      <a:effectRef idx="2">
+        <a:scrgbClr r="0" g="0" b="0"/>
+      </a:effectRef>
+      <a:fontRef idx="minor"/>
+    </dgm:style>
+  </dgm:styleLbl>
+  <dgm:styleLbl name="conFgAcc1">
+    <dgm:scene3d>
+      <a:camera prst="orthographicFront"/>
+      <a:lightRig rig="threePt" dir="t"/>
+    </dgm:scene3d>
+    <dgm:sp3d/>
+    <dgm:txPr/>
+    <dgm:style>
+      <a:lnRef idx="1">
+        <a:scrgbClr r="0" g="0" b="0"/>
+      </a:lnRef>
+      <a:fillRef idx="1">
+        <a:scrgbClr r="0" g="0" b="0"/>
+      </a:fillRef>
+      <a:effectRef idx="2">
+        <a:scrgbClr r="0" g="0" b="0"/>
+      </a:effectRef>
+      <a:fontRef idx="minor"/>
+    </dgm:style>
+  </dgm:styleLbl>
+  <dgm:styleLbl name="alignAcc1">
+    <dgm:scene3d>
+      <a:camera prst="orthographicFront"/>
+      <a:lightRig rig="threePt" dir="t"/>
+    </dgm:scene3d>
+    <dgm:sp3d/>
+    <dgm:txPr/>
+    <dgm:style>
+      <a:lnRef idx="1">
+        <a:scrgbClr r="0" g="0" b="0"/>
+      </a:lnRef>
+      <a:fillRef idx="1">
+        <a:scrgbClr r="0" g="0" b="0"/>
+      </a:fillRef>
+      <a:effectRef idx="2">
+        <a:scrgbClr r="0" g="0" b="0"/>
+      </a:effectRef>
+      <a:fontRef idx="minor"/>
+    </dgm:style>
+  </dgm:styleLbl>
+  <dgm:styleLbl name="trAlignAcc1">
+    <dgm:scene3d>
+      <a:camera prst="orthographicFront"/>
+      <a:lightRig rig="threePt" dir="t"/>
+    </dgm:scene3d>
+    <dgm:sp3d/>
+    <dgm:txPr/>
+    <dgm:style>
+      <a:lnRef idx="1">
+        <a:scrgbClr r="0" g="0" b="0"/>
+      </a:lnRef>
+      <a:fillRef idx="1">
+        <a:scrgbClr r="0" g="0" b="0"/>
+      </a:fillRef>
+      <a:effectRef idx="0">
+        <a:scrgbClr r="0" g="0" b="0"/>
+      </a:effectRef>
+      <a:fontRef idx="minor"/>
+    </dgm:style>
+  </dgm:styleLbl>
+  <dgm:styleLbl name="bgAcc1">
+    <dgm:scene3d>
+      <a:camera prst="orthographicFront"/>
+      <a:lightRig rig="threePt" dir="t"/>
+    </dgm:scene3d>
+    <dgm:sp3d/>
+    <dgm:txPr/>
+    <dgm:style>
+      <a:lnRef idx="1">
+        <a:scrgbClr r="0" g="0" b="0"/>
+      </a:lnRef>
+      <a:fillRef idx="1">
+        <a:scrgbClr r="0" g="0" b="0"/>
+      </a:fillRef>
+      <a:effectRef idx="2">
+        <a:scrgbClr r="0" g="0" b="0"/>
+      </a:effectRef>
+      <a:fontRef idx="minor"/>
+    </dgm:style>
+  </dgm:styleLbl>
+  <dgm:styleLbl name="solidFgAcc1">
+    <dgm:scene3d>
+      <a:camera prst="orthographicFront"/>
+      <a:lightRig rig="threePt" dir="t"/>
+    </dgm:scene3d>
+    <dgm:sp3d/>
+    <dgm:txPr/>
+    <dgm:style>
+      <a:lnRef idx="1">
+        <a:scrgbClr r="0" g="0" b="0"/>
+      </a:lnRef>
+      <a:fillRef idx="1">
+        <a:scrgbClr r="0" g="0" b="0"/>
+      </a:fillRef>
+      <a:effectRef idx="2">
+        <a:scrgbClr r="0" g="0" b="0"/>
+      </a:effectRef>
+      <a:fontRef idx="minor"/>
+    </dgm:style>
+  </dgm:styleLbl>
+  <dgm:styleLbl name="solidAlignAcc1">
+    <dgm:scene3d>
+      <a:camera prst="orthographicFront"/>
+      <a:lightRig rig="threePt" dir="t"/>
+    </dgm:scene3d>
+    <dgm:sp3d/>
+    <dgm:txPr/>
+    <dgm:style>
+      <a:lnRef idx="1">
+        <a:scrgbClr r="0" g="0" b="0"/>
+      </a:lnRef>
+      <a:fillRef idx="1">
+        <a:scrgbClr r="0" g="0" b="0"/>
+      </a:fillRef>
+      <a:effectRef idx="3">
+        <a:scrgbClr r="0" g="0" b="0"/>
+      </a:effectRef>
+      <a:fontRef idx="minor"/>
+    </dgm:style>
+  </dgm:styleLbl>
+  <dgm:styleLbl name="solidBgAcc1">
+    <dgm:scene3d>
+      <a:camera prst="orthographicFront"/>
+      <a:lightRig rig="threePt" dir="t"/>
+    </dgm:scene3d>
+    <dgm:sp3d/>
+    <dgm:txPr/>
+    <dgm:style>
+      <a:lnRef idx="1">
+        <a:scrgbClr r="0" g="0" b="0"/>
+      </a:lnRef>
+      <a:fillRef idx="1">
+        <a:scrgbClr r="0" g="0" b="0"/>
+      </a:fillRef>
+      <a:effectRef idx="3">
+        <a:scrgbClr r="0" g="0" b="0"/>
+      </a:effectRef>
+      <a:fontRef idx="minor"/>
+    </dgm:style>
+  </dgm:styleLbl>
+  <dgm:styleLbl name="fgAccFollowNode1">
+    <dgm:scene3d>
+      <a:camera prst="orthographicFront"/>
+      <a:lightRig rig="threePt" dir="t"/>
+    </dgm:scene3d>
+    <dgm:sp3d/>
+    <dgm:txPr/>
+    <dgm:style>
+      <a:lnRef idx="1">
+        <a:scrgbClr r="0" g="0" b="0"/>
+      </a:lnRef>
+      <a:fillRef idx="1">
+        <a:scrgbClr r="0" g="0" b="0"/>
+      </a:fillRef>
+      <a:effectRef idx="2">
+        <a:scrgbClr r="0" g="0" b="0"/>
+      </a:effectRef>
+      <a:fontRef idx="minor"/>
+    </dgm:style>
+  </dgm:styleLbl>
+  <dgm:styleLbl name="alignAccFollowNode1">
+    <dgm:scene3d>
+      <a:camera prst="orthographicFront"/>
+      <a:lightRig rig="threePt" dir="t"/>
+    </dgm:scene3d>
+    <dgm:sp3d/>
+    <dgm:txPr/>
+    <dgm:style>
+      <a:lnRef idx="1">
+        <a:scrgbClr r="0" g="0" b="0"/>
+      </a:lnRef>
+      <a:fillRef idx="1">
+        <a:scrgbClr r="0" g="0" b="0"/>
+      </a:fillRef>
+      <a:effectRef idx="2">
+        <a:scrgbClr r="0" g="0" b="0"/>
+      </a:effectRef>
+      <a:fontRef idx="minor"/>
+    </dgm:style>
+  </dgm:styleLbl>
+  <dgm:styleLbl name="bgAccFollowNode1">
+    <dgm:scene3d>
+      <a:camera prst="orthographicFront"/>
+      <a:lightRig rig="threePt" dir="t"/>
+    </dgm:scene3d>
+    <dgm:sp3d/>
+    <dgm:txPr/>
+    <dgm:style>
+      <a:lnRef idx="1">
+        <a:scrgbClr r="0" g="0" b="0"/>
+      </a:lnRef>
+      <a:fillRef idx="1">
+        <a:scrgbClr r="0" g="0" b="0"/>
+      </a:fillRef>
+      <a:effectRef idx="2">
+        <a:scrgbClr r="0" g="0" b="0"/>
+      </a:effectRef>
+      <a:fontRef idx="minor"/>
+    </dgm:style>
+  </dgm:styleLbl>
+  <dgm:styleLbl name="fgAcc0">
+    <dgm:scene3d>
+      <a:camera prst="orthographicFront"/>
+      <a:lightRig rig="threePt" dir="t"/>
+    </dgm:scene3d>
+    <dgm:sp3d/>
+    <dgm:txPr/>
+    <dgm:style>
+      <a:lnRef idx="1">
+        <a:scrgbClr r="0" g="0" b="0"/>
+      </a:lnRef>
+      <a:fillRef idx="1">
+        <a:scrgbClr r="0" g="0" b="0"/>
+      </a:fillRef>
+      <a:effectRef idx="2">
+        <a:scrgbClr r="0" g="0" b="0"/>
+      </a:effectRef>
+      <a:fontRef idx="minor"/>
+    </dgm:style>
+  </dgm:styleLbl>
+  <dgm:styleLbl name="fgAcc2">
+    <dgm:scene3d>
+      <a:camera prst="orthographicFront"/>
+      <a:lightRig rig="threePt" dir="t"/>
+    </dgm:scene3d>
+    <dgm:sp3d/>
+    <dgm:txPr/>
+    <dgm:style>
+      <a:lnRef idx="1">
+        <a:scrgbClr r="0" g="0" b="0"/>
+      </a:lnRef>
+      <a:fillRef idx="1">
+        <a:scrgbClr r="0" g="0" b="0"/>
+      </a:fillRef>
+      <a:effectRef idx="2">
+        <a:scrgbClr r="0" g="0" b="0"/>
+      </a:effectRef>
+      <a:fontRef idx="minor"/>
+    </dgm:style>
+  </dgm:styleLbl>
+  <dgm:styleLbl name="fgAcc3">
+    <dgm:scene3d>
+      <a:camera prst="orthographicFront"/>
+      <a:lightRig rig="threePt" dir="t"/>
+    </dgm:scene3d>
+    <dgm:sp3d/>
+    <dgm:txPr/>
+    <dgm:style>
+      <a:lnRef idx="1">
+        <a:scrgbClr r="0" g="0" b="0"/>
+      </a:lnRef>
+      <a:fillRef idx="1">
+        <a:scrgbClr r="0" g="0" b="0"/>
+      </a:fillRef>
+      <a:effectRef idx="2">
+        <a:scrgbClr r="0" g="0" b="0"/>
+      </a:effectRef>
+      <a:fontRef idx="minor"/>
+    </dgm:style>
+  </dgm:styleLbl>
+  <dgm:styleLbl name="fgAcc4">
+    <dgm:scene3d>
+      <a:camera prst="orthographicFront"/>
+      <a:lightRig rig="threePt" dir="t"/>
+    </dgm:scene3d>
+    <dgm:sp3d/>
+    <dgm:txPr/>
+    <dgm:style>
+      <a:lnRef idx="1">
+        <a:scrgbClr r="0" g="0" b="0"/>
+      </a:lnRef>
+      <a:fillRef idx="1">
+        <a:scrgbClr r="0" g="0" b="0"/>
+      </a:fillRef>
+      <a:effectRef idx="2">
+        <a:scrgbClr r="0" g="0" b="0"/>
+      </a:effectRef>
+      <a:fontRef idx="minor"/>
+    </dgm:style>
+  </dgm:styleLbl>
+  <dgm:styleLbl name="bgShp">
+    <dgm:scene3d>
+      <a:camera prst="orthographicFront"/>
+      <a:lightRig rig="threePt" dir="t"/>
+    </dgm:scene3d>
+    <dgm:sp3d/>
+    <dgm:txPr/>
+    <dgm:style>
+      <a:lnRef idx="0">
+        <a:scrgbClr r="0" g="0" b="0"/>
+      </a:lnRef>
+      <a:fillRef idx="1">
+        <a:scrgbClr r="0" g="0" b="0"/>
+      </a:fillRef>
+      <a:effectRef idx="2">
+        <a:scrgbClr r="0" g="0" b="0"/>
+      </a:effectRef>
+      <a:fontRef idx="minor"/>
+    </dgm:style>
+  </dgm:styleLbl>
+  <dgm:styleLbl name="dkBgShp">
+    <dgm:scene3d>
+      <a:camera prst="orthographicFront"/>
+      <a:lightRig rig="threePt" dir="t"/>
+    </dgm:scene3d>
+    <dgm:sp3d/>
+    <dgm:txPr/>
+    <dgm:style>
+      <a:lnRef idx="0">
+        <a:scrgbClr r="0" g="0" b="0"/>
+      </a:lnRef>
+      <a:fillRef idx="1">
+        <a:scrgbClr r="0" g="0" b="0"/>
+      </a:fillRef>
+      <a:effectRef idx="3">
+        <a:scrgbClr r="0" g="0" b="0"/>
+      </a:effectRef>
+      <a:fontRef idx="minor"/>
+    </dgm:style>
+  </dgm:styleLbl>
+  <dgm:styleLbl name="trBgShp">
+    <dgm:scene3d>
+      <a:camera prst="orthographicFront"/>
+      <a:lightRig rig="threePt" dir="t"/>
+    </dgm:scene3d>
+    <dgm:sp3d/>
+    <dgm:txPr/>
+    <dgm:style>
+      <a:lnRef idx="0">
+        <a:scrgbClr r="0" g="0" b="0"/>
+      </a:lnRef>
+      <a:fillRef idx="1">
+        <a:scrgbClr r="0" g="0" b="0"/>
+      </a:fillRef>
+      <a:effectRef idx="0">
+        <a:scrgbClr r="0" g="0" b="0"/>
+      </a:effectRef>
+      <a:fontRef idx="minor"/>
+    </dgm:style>
+  </dgm:styleLbl>
+  <dgm:styleLbl name="fgShp">
+    <dgm:scene3d>
+      <a:camera prst="orthographicFront"/>
+      <a:lightRig rig="threePt" dir="t"/>
+    </dgm:scene3d>
+    <dgm:sp3d/>
+    <dgm:txPr/>
+    <dgm:style>
+      <a:lnRef idx="0">
+        <a:scrgbClr r="0" g="0" b="0"/>
+      </a:lnRef>
+      <a:fillRef idx="3">
+        <a:scrgbClr r="0" g="0" b="0"/>
+      </a:fillRef>
+      <a:effectRef idx="3">
+        <a:scrgbClr r="0" g="0" b="0"/>
+      </a:effectRef>
+      <a:fontRef idx="minor"/>
+    </dgm:style>
+  </dgm:styleLbl>
+  <dgm:styleLbl name="revTx">
+    <dgm:scene3d>
+      <a:camera prst="orthographicFront"/>
+      <a:lightRig rig="threePt" dir="t"/>
+    </dgm:scene3d>
+    <dgm:sp3d/>
+    <dgm:txPr/>
+    <dgm:style>
+      <a:lnRef idx="0">
+        <a:scrgbClr r="0" g="0" b="0"/>
+      </a:lnRef>
+      <a:fillRef idx="0">
+        <a:scrgbClr r="0" g="0" b="0"/>
+      </a:fillRef>
+      <a:effectRef idx="0">
+        <a:scrgbClr r="0" g="0" b="0"/>
+      </a:effectRef>
+      <a:fontRef idx="minor"/>
+    </dgm:style>
+  </dgm:styleLbl>
+</dgm:styleDef>
+</file>
+
+<file path=ppt/diagrams/quickStyle2.xml><?xml version="1.0" encoding="utf-8"?>
+<dgm:styleDef xmlns:dgm="http://schemas.openxmlformats.org/drawingml/2006/diagram" xmlns:a="http://schemas.openxmlformats.org/drawingml/2006/main" uniqueId="urn:microsoft.com/office/officeart/2005/8/quickstyle/simple2">
+  <dgm:title val=""/>
+  <dgm:desc val=""/>
+  <dgm:catLst>
+    <dgm:cat type="simple" pri="10200"/>
+  </dgm:catLst>
+  <dgm:scene3d>
+    <a:camera prst="orthographicFront"/>
+    <a:lightRig rig="threePt" dir="t"/>
+  </dgm:scene3d>
+  <dgm:styleLbl name="node0">
+    <dgm:scene3d>
+      <a:camera prst="orthographicFront"/>
+      <a:lightRig rig="threePt" dir="t"/>
+    </dgm:scene3d>
+    <dgm:sp3d/>
+    <dgm:txPr/>
+    <dgm:style>
+      <a:lnRef idx="3">
+        <a:scrgbClr r="0" g="0" b="0"/>
+      </a:lnRef>
+      <a:fillRef idx="1">
+        <a:scrgbClr r="0" g="0" b="0"/>
+      </a:fillRef>
+      <a:effectRef idx="1">
+        <a:scrgbClr r="0" g="0" b="0"/>
+      </a:effectRef>
+      <a:fontRef idx="minor">
+        <a:schemeClr val="lt1"/>
+      </a:fontRef>
+    </dgm:style>
+  </dgm:styleLbl>
+  <dgm:styleLbl name="lnNode1">
+    <dgm:scene3d>
+      <a:camera prst="orthographicFront"/>
+      <a:lightRig rig="threePt" dir="t"/>
+    </dgm:scene3d>
+    <dgm:sp3d/>
+    <dgm:txPr/>
+    <dgm:style>
+      <a:lnRef idx="3">
+        <a:scrgbClr r="0" g="0" b="0"/>
+      </a:lnRef>
+      <a:fillRef idx="1">
+        <a:scrgbClr r="0" g="0" b="0"/>
+      </a:fillRef>
+      <a:effectRef idx="1">
+        <a:scrgbClr r="0" g="0" b="0"/>
+      </a:effectRef>
+      <a:fontRef idx="minor">
+        <a:schemeClr val="lt1"/>
+      </a:fontRef>
+    </dgm:style>
+  </dgm:styleLbl>
+  <dgm:styleLbl name="vennNode1">
+    <dgm:scene3d>
+      <a:camera prst="orthographicFront"/>
+      <a:lightRig rig="threePt" dir="t"/>
+    </dgm:scene3d>
+    <dgm:sp3d/>
+    <dgm:txPr/>
+    <dgm:style>
+      <a:lnRef idx="3">
         <a:scrgbClr r="0" g="0" b="0"/>
       </a:lnRef>
       <a:fillRef idx="1">
@@ -3135,7 +6117,7 @@
       <a:fillRef idx="1">
         <a:scrgbClr r="0" g="0" b="0"/>
       </a:fillRef>
-      <a:effectRef idx="0">
+      <a:effectRef idx="1">
         <a:scrgbClr r="0" g="0" b="0"/>
       </a:effectRef>
       <a:fontRef idx="minor">
@@ -3151,13 +6133,13 @@
     <dgm:sp3d/>
     <dgm:txPr/>
     <dgm:style>
-      <a:lnRef idx="2">
+      <a:lnRef idx="3">
         <a:scrgbClr r="0" g="0" b="0"/>
       </a:lnRef>
       <a:fillRef idx="1">
         <a:scrgbClr r="0" g="0" b="0"/>
       </a:fillRef>
-      <a:effectRef idx="0">
+      <a:effectRef idx="1">
         <a:scrgbClr r="0" g="0" b="0"/>
       </a:effectRef>
       <a:fontRef idx="minor">
@@ -3173,13 +6155,13 @@
     <dgm:sp3d/>
     <dgm:txPr/>
     <dgm:style>
-      <a:lnRef idx="2">
+      <a:lnRef idx="3">
         <a:scrgbClr r="0" g="0" b="0"/>
       </a:lnRef>
       <a:fillRef idx="1">
         <a:scrgbClr r="0" g="0" b="0"/>
       </a:fillRef>
-      <a:effectRef idx="0">
+      <a:effectRef idx="1">
         <a:scrgbClr r="0" g="0" b="0"/>
       </a:effectRef>
       <a:fontRef idx="minor">
@@ -3195,13 +6177,13 @@
     <dgm:sp3d/>
     <dgm:txPr/>
     <dgm:style>
-      <a:lnRef idx="2">
+      <a:lnRef idx="3">
         <a:scrgbClr r="0" g="0" b="0"/>
       </a:lnRef>
       <a:fillRef idx="1">
         <a:scrgbClr r="0" g="0" b="0"/>
       </a:fillRef>
-      <a:effectRef idx="0">
+      <a:effectRef idx="1">
         <a:scrgbClr r="0" g="0" b="0"/>
       </a:effectRef>
       <a:fontRef idx="minor">
@@ -3217,13 +6199,13 @@
     <dgm:sp3d/>
     <dgm:txPr/>
     <dgm:style>
-      <a:lnRef idx="2">
+      <a:lnRef idx="3">
         <a:scrgbClr r="0" g="0" b="0"/>
       </a:lnRef>
       <a:fillRef idx="1">
         <a:scrgbClr r="0" g="0" b="0"/>
       </a:fillRef>
-      <a:effectRef idx="0">
+      <a:effectRef idx="1">
         <a:scrgbClr r="0" g="0" b="0"/>
       </a:effectRef>
       <a:fontRef idx="minor">
@@ -3239,13 +6221,13 @@
     <dgm:sp3d/>
     <dgm:txPr/>
     <dgm:style>
-      <a:lnRef idx="2">
+      <a:lnRef idx="3">
         <a:scrgbClr r="0" g="0" b="0"/>
       </a:lnRef>
       <a:fillRef idx="1">
         <a:scrgbClr r="0" g="0" b="0"/>
       </a:fillRef>
-      <a:effectRef idx="0">
+      <a:effectRef idx="1">
         <a:scrgbClr r="0" g="0" b="0"/>
       </a:effectRef>
       <a:fontRef idx="minor"/>
@@ -3259,13 +6241,13 @@
     <dgm:sp3d/>
     <dgm:txPr/>
     <dgm:style>
-      <a:lnRef idx="2">
+      <a:lnRef idx="3">
         <a:scrgbClr r="0" g="0" b="0"/>
       </a:lnRef>
       <a:fillRef idx="1">
         <a:scrgbClr r="0" g="0" b="0"/>
       </a:fillRef>
-      <a:effectRef idx="0">
+      <a:effectRef idx="1">
         <a:scrgbClr r="0" g="0" b="0"/>
       </a:effectRef>
       <a:fontRef idx="minor"/>
@@ -3279,13 +6261,13 @@
     <dgm:sp3d/>
     <dgm:txPr/>
     <dgm:style>
-      <a:lnRef idx="2">
+      <a:lnRef idx="3">
         <a:scrgbClr r="0" g="0" b="0"/>
       </a:lnRef>
       <a:fillRef idx="1">
         <a:scrgbClr r="0" g="0" b="0"/>
       </a:fillRef>
-      <a:effectRef idx="0">
+      <a:effectRef idx="1">
         <a:scrgbClr r="0" g="0" b="0"/>
       </a:effectRef>
       <a:fontRef idx="minor"/>
@@ -3305,7 +6287,7 @@
       <a:fillRef idx="1">
         <a:scrgbClr r="0" g="0" b="0"/>
       </a:fillRef>
-      <a:effectRef idx="0">
+      <a:effectRef idx="1">
         <a:scrgbClr r="0" g="0" b="0"/>
       </a:effectRef>
       <a:fontRef idx="minor">
@@ -3327,7 +6309,7 @@
       <a:fillRef idx="1">
         <a:scrgbClr r="0" g="0" b="0"/>
       </a:fillRef>
-      <a:effectRef idx="0">
+      <a:effectRef idx="1">
         <a:scrgbClr r="0" g="0" b="0"/>
       </a:effectRef>
       <a:fontRef idx="minor">
@@ -3349,7 +6331,7 @@
       <a:fillRef idx="1">
         <a:scrgbClr r="0" g="0" b="0"/>
       </a:fillRef>
-      <a:effectRef idx="0">
+      <a:effectRef idx="1">
         <a:scrgbClr r="0" g="0" b="0"/>
       </a:effectRef>
       <a:fontRef idx="minor">
@@ -3391,7 +6373,7 @@
       <a:fillRef idx="1">
         <a:scrgbClr r="0" g="0" b="0"/>
       </a:fillRef>
-      <a:effectRef idx="0">
+      <a:effectRef idx="1">
         <a:scrgbClr r="0" g="0" b="0"/>
       </a:effectRef>
       <a:fontRef idx="minor"/>
@@ -3405,13 +6387,13 @@
     <dgm:sp3d/>
     <dgm:txPr/>
     <dgm:style>
-      <a:lnRef idx="2">
+      <a:lnRef idx="3">
         <a:scrgbClr r="0" g="0" b="0"/>
       </a:lnRef>
       <a:fillRef idx="1">
         <a:scrgbClr r="0" g="0" b="0"/>
       </a:fillRef>
-      <a:effectRef idx="0">
+      <a:effectRef idx="1">
         <a:scrgbClr r="0" g="0" b="0"/>
       </a:effectRef>
       <a:fontRef idx="minor">
@@ -3427,13 +6409,13 @@
     <dgm:sp3d/>
     <dgm:txPr/>
     <dgm:style>
-      <a:lnRef idx="2">
+      <a:lnRef idx="3">
         <a:scrgbClr r="0" g="0" b="0"/>
       </a:lnRef>
       <a:fillRef idx="1">
         <a:scrgbClr r="0" g="0" b="0"/>
       </a:fillRef>
-      <a:effectRef idx="0">
+      <a:effectRef idx="1">
         <a:scrgbClr r="0" g="0" b="0"/>
       </a:effectRef>
       <a:fontRef idx="minor">
@@ -3449,13 +6431,13 @@
     <dgm:sp3d/>
     <dgm:txPr/>
     <dgm:style>
-      <a:lnRef idx="2">
+      <a:lnRef idx="3">
         <a:scrgbClr r="0" g="0" b="0"/>
       </a:lnRef>
       <a:fillRef idx="1">
         <a:scrgbClr r="0" g="0" b="0"/>
       </a:fillRef>
-      <a:effectRef idx="0">
+      <a:effectRef idx="1">
         <a:scrgbClr r="0" g="0" b="0"/>
       </a:effectRef>
       <a:fontRef idx="minor">
@@ -3471,13 +6453,13 @@
     <dgm:sp3d/>
     <dgm:txPr/>
     <dgm:style>
-      <a:lnRef idx="2">
+      <a:lnRef idx="3">
         <a:scrgbClr r="0" g="0" b="0"/>
       </a:lnRef>
       <a:fillRef idx="1">
         <a:scrgbClr r="0" g="0" b="0"/>
       </a:fillRef>
-      <a:effectRef idx="0">
+      <a:effectRef idx="1">
         <a:scrgbClr r="0" g="0" b="0"/>
       </a:effectRef>
       <a:fontRef idx="minor">
@@ -3493,13 +6475,13 @@
     <dgm:sp3d/>
     <dgm:txPr/>
     <dgm:style>
-      <a:lnRef idx="2">
+      <a:lnRef idx="3">
         <a:scrgbClr r="0" g="0" b="0"/>
       </a:lnRef>
       <a:fillRef idx="1">
         <a:scrgbClr r="0" g="0" b="0"/>
       </a:fillRef>
-      <a:effectRef idx="0">
+      <a:effectRef idx="1">
         <a:scrgbClr r="0" g="0" b="0"/>
       </a:effectRef>
       <a:fontRef idx="minor">
@@ -3515,13 +6497,13 @@
     <dgm:sp3d/>
     <dgm:txPr/>
     <dgm:style>
-      <a:lnRef idx="2">
+      <a:lnRef idx="3">
         <a:scrgbClr r="0" g="0" b="0"/>
       </a:lnRef>
       <a:fillRef idx="1">
         <a:scrgbClr r="0" g="0" b="0"/>
       </a:fillRef>
-      <a:effectRef idx="0">
+      <a:effectRef idx="1">
         <a:scrgbClr r="0" g="0" b="0"/>
       </a:effectRef>
       <a:fontRef idx="minor">
@@ -3537,13 +6519,13 @@
     <dgm:sp3d/>
     <dgm:txPr/>
     <dgm:style>
-      <a:lnRef idx="2">
+      <a:lnRef idx="3">
         <a:scrgbClr r="0" g="0" b="0"/>
       </a:lnRef>
       <a:fillRef idx="1">
         <a:scrgbClr r="0" g="0" b="0"/>
       </a:fillRef>
-      <a:effectRef idx="0">
+      <a:effectRef idx="1">
         <a:scrgbClr r="0" g="0" b="0"/>
       </a:effectRef>
       <a:fontRef idx="minor">
@@ -3559,13 +6541,13 @@
     <dgm:sp3d/>
     <dgm:txPr/>
     <dgm:style>
-      <a:lnRef idx="2">
+      <a:lnRef idx="3">
         <a:scrgbClr r="0" g="0" b="0"/>
       </a:lnRef>
       <a:fillRef idx="1">
         <a:scrgbClr r="0" g="0" b="0"/>
       </a:fillRef>
-      <a:effectRef idx="0">
+      <a:effectRef idx="1">
         <a:scrgbClr r="0" g="0" b="0"/>
       </a:effectRef>
       <a:fontRef idx="minor">
@@ -3581,13 +6563,13 @@
     <dgm:sp3d/>
     <dgm:txPr/>
     <dgm:style>
-      <a:lnRef idx="2">
+      <a:lnRef idx="3">
         <a:scrgbClr r="0" g="0" b="0"/>
       </a:lnRef>
       <a:fillRef idx="1">
         <a:scrgbClr r="0" g="0" b="0"/>
       </a:fillRef>
-      <a:effectRef idx="0">
+      <a:effectRef idx="1">
         <a:scrgbClr r="0" g="0" b="0"/>
       </a:effectRef>
       <a:fontRef idx="minor">
@@ -4043,13 +7025,13 @@
     <dgm:sp3d/>
     <dgm:txPr/>
     <dgm:style>
-      <a:lnRef idx="2">
+      <a:lnRef idx="3">
         <a:scrgbClr r="0" g="0" b="0"/>
       </a:lnRef>
       <a:fillRef idx="1">
         <a:scrgbClr r="0" g="0" b="0"/>
       </a:fillRef>
-      <a:effectRef idx="0">
+      <a:effectRef idx="1">
         <a:scrgbClr r="0" g="0" b="0"/>
       </a:effectRef>
       <a:fontRef idx="minor"/>
@@ -4172,7 +7154,7 @@
           <a:p>
             <a:fld id="{29AD50C4-F1A5-A448-9E63-11D939CA9B7B}" type="datetimeFigureOut">
               <a:rPr lang="en-US" smtClean="0"/>
-              <a:t>5/21/2026</a:t>
+              <a:t>5/29/2026</a:t>
             </a:fld>
             <a:endParaRPr lang="en-US" dirty="0"/>
           </a:p>
@@ -4349,7 +7331,7 @@
           <a:p>
             <a:fld id="{3AD818D7-DF4E-4C59-9BBA-548250DAC33A}" type="datetimeFigureOut">
               <a:rPr lang="en-US" smtClean="0"/>
-              <a:t>5/21/2026</a:t>
+              <a:t>5/29/2026</a:t>
             </a:fld>
             <a:endParaRPr lang="en-US" dirty="0"/>
           </a:p>
@@ -5125,7 +8107,13 @@
   <p:cSld>
     <p:spTree>
       <p:nvGrpSpPr>
-        <p:cNvPr id="1" name=""/>
+        <p:cNvPr id="1" name="">
+          <a:extLst>
+            <a:ext uri="{FF2B5EF4-FFF2-40B4-BE49-F238E27FC236}">
+              <a16:creationId xmlns:a16="http://schemas.microsoft.com/office/drawing/2014/main" id="{8040BA3B-7A37-E36D-143F-495E59525CA8}"/>
+            </a:ext>
+          </a:extLst>
+        </p:cNvPr>
         <p:cNvGrpSpPr/>
         <p:nvPr/>
       </p:nvGrpSpPr>
@@ -5139,7 +8127,13 @@
       </p:grpSpPr>
       <p:sp>
         <p:nvSpPr>
-          <p:cNvPr id="2" name="Slide Image Placeholder 1"/>
+          <p:cNvPr id="2" name="Slide Image Placeholder 1">
+            <a:extLst>
+              <a:ext uri="{FF2B5EF4-FFF2-40B4-BE49-F238E27FC236}">
+                <a16:creationId xmlns:a16="http://schemas.microsoft.com/office/drawing/2014/main" id="{398B6210-891F-A822-C5E7-C6031C5F24B3}"/>
+              </a:ext>
+            </a:extLst>
+          </p:cNvPr>
           <p:cNvSpPr>
             <a:spLocks noGrp="1" noRot="1" noChangeAspect="1"/>
           </p:cNvSpPr>
@@ -5151,7 +8145,13 @@
       </p:sp>
       <p:sp>
         <p:nvSpPr>
-          <p:cNvPr id="3" name="Notes Placeholder 2"/>
+          <p:cNvPr id="3" name="Notes Placeholder 2">
+            <a:extLst>
+              <a:ext uri="{FF2B5EF4-FFF2-40B4-BE49-F238E27FC236}">
+                <a16:creationId xmlns:a16="http://schemas.microsoft.com/office/drawing/2014/main" id="{51492223-B64C-A8AB-D061-7FB3A76BBCDB}"/>
+              </a:ext>
+            </a:extLst>
+          </p:cNvPr>
           <p:cNvSpPr>
             <a:spLocks noGrp="1"/>
           </p:cNvSpPr>
@@ -5170,7 +8170,13 @@
       </p:sp>
       <p:sp>
         <p:nvSpPr>
-          <p:cNvPr id="4" name="Slide Number Placeholder 3"/>
+          <p:cNvPr id="4" name="Slide Number Placeholder 3">
+            <a:extLst>
+              <a:ext uri="{FF2B5EF4-FFF2-40B4-BE49-F238E27FC236}">
+                <a16:creationId xmlns:a16="http://schemas.microsoft.com/office/drawing/2014/main" id="{9BAE89A6-4F0E-26D2-B320-611275E2449E}"/>
+              </a:ext>
+            </a:extLst>
+          </p:cNvPr>
           <p:cNvSpPr>
             <a:spLocks noGrp="1"/>
           </p:cNvSpPr>
@@ -5194,7 +8200,7 @@
     </p:spTree>
     <p:extLst>
       <p:ext uri="{BB962C8B-B14F-4D97-AF65-F5344CB8AC3E}">
-        <p14:creationId xmlns:p14="http://schemas.microsoft.com/office/powerpoint/2010/main" val="509189956"/>
+        <p14:creationId xmlns:p14="http://schemas.microsoft.com/office/powerpoint/2010/main" val="379587409"/>
       </p:ext>
     </p:extLst>
   </p:cSld>
@@ -5278,7 +8284,7 @@
     </p:spTree>
     <p:extLst>
       <p:ext uri="{BB962C8B-B14F-4D97-AF65-F5344CB8AC3E}">
-        <p14:creationId xmlns:p14="http://schemas.microsoft.com/office/powerpoint/2010/main" val="3157934865"/>
+        <p14:creationId xmlns:p14="http://schemas.microsoft.com/office/powerpoint/2010/main" val="626382367"/>
       </p:ext>
     </p:extLst>
   </p:cSld>
@@ -5362,7 +8368,7 @@
     </p:spTree>
     <p:extLst>
       <p:ext uri="{BB962C8B-B14F-4D97-AF65-F5344CB8AC3E}">
-        <p14:creationId xmlns:p14="http://schemas.microsoft.com/office/powerpoint/2010/main" val="4198010920"/>
+        <p14:creationId xmlns:p14="http://schemas.microsoft.com/office/powerpoint/2010/main" val="509189956"/>
       </p:ext>
     </p:extLst>
   </p:cSld>
@@ -5446,7 +8452,7 @@
     </p:spTree>
     <p:extLst>
       <p:ext uri="{BB962C8B-B14F-4D97-AF65-F5344CB8AC3E}">
-        <p14:creationId xmlns:p14="http://schemas.microsoft.com/office/powerpoint/2010/main" val="626382367"/>
+        <p14:creationId xmlns:p14="http://schemas.microsoft.com/office/powerpoint/2010/main" val="3157934865"/>
       </p:ext>
     </p:extLst>
   </p:cSld>
@@ -6470,7 +9476,7 @@
             <a:fld id="{88FD4BCE-35F6-425E-BEE7-07902E8BBFFC}" type="datetimeFigureOut">
               <a:rPr lang="en-US" smtClean="0"/>
               <a:pPr/>
-              <a:t>5/21/2026</a:t>
+              <a:t>5/29/2026</a:t>
             </a:fld>
             <a:endParaRPr lang="en-US" dirty="0"/>
           </a:p>
@@ -8013,7 +11019,7 @@
             <a:fld id="{88FD4BCE-35F6-425E-BEE7-07902E8BBFFC}" type="datetimeFigureOut">
               <a:rPr lang="en-US" smtClean="0"/>
               <a:pPr/>
-              <a:t>5/21/2026</a:t>
+              <a:t>5/29/2026</a:t>
             </a:fld>
             <a:endParaRPr lang="en-US" dirty="0"/>
           </a:p>
@@ -8958,7 +11964,7 @@
             <a:fld id="{88FD4BCE-35F6-425E-BEE7-07902E8BBFFC}" type="datetimeFigureOut">
               <a:rPr lang="en-US" smtClean="0"/>
               <a:pPr/>
-              <a:t>5/21/2026</a:t>
+              <a:t>5/29/2026</a:t>
             </a:fld>
             <a:endParaRPr lang="en-US" dirty="0"/>
           </a:p>
@@ -10509,7 +13515,7 @@
             <a:fld id="{88FD4BCE-35F6-425E-BEE7-07902E8BBFFC}" type="datetimeFigureOut">
               <a:rPr lang="en-US" smtClean="0"/>
               <a:pPr/>
-              <a:t>5/21/2026</a:t>
+              <a:t>5/29/2026</a:t>
             </a:fld>
             <a:endParaRPr lang="en-US" dirty="0"/>
           </a:p>
@@ -12139,7 +15145,7 @@
             <a:fld id="{88FD4BCE-35F6-425E-BEE7-07902E8BBFFC}" type="datetimeFigureOut">
               <a:rPr lang="en-US" smtClean="0"/>
               <a:pPr/>
-              <a:t>5/21/2026</a:t>
+              <a:t>5/29/2026</a:t>
             </a:fld>
             <a:endParaRPr lang="en-US" dirty="0"/>
           </a:p>
@@ -12599,7 +15605,7 @@
             <a:fld id="{88FD4BCE-35F6-425E-BEE7-07902E8BBFFC}" type="datetimeFigureOut">
               <a:rPr lang="en-US" smtClean="0"/>
               <a:pPr/>
-              <a:t>5/21/2026</a:t>
+              <a:t>5/29/2026</a:t>
             </a:fld>
             <a:endParaRPr lang="en-US" dirty="0"/>
           </a:p>
@@ -13085,7 +16091,7 @@
             <a:fld id="{88FD4BCE-35F6-425E-BEE7-07902E8BBFFC}" type="datetimeFigureOut">
               <a:rPr lang="en-US" smtClean="0"/>
               <a:pPr/>
-              <a:t>5/21/2026</a:t>
+              <a:t>5/29/2026</a:t>
             </a:fld>
             <a:endParaRPr lang="en-US" dirty="0"/>
           </a:p>
@@ -13426,7 +16432,7 @@
             <a:fld id="{88FD4BCE-35F6-425E-BEE7-07902E8BBFFC}" type="datetimeFigureOut">
               <a:rPr lang="en-US" smtClean="0"/>
               <a:pPr/>
-              <a:t>5/21/2026</a:t>
+              <a:t>5/29/2026</a:t>
             </a:fld>
             <a:endParaRPr lang="en-US" dirty="0"/>
           </a:p>
@@ -13883,7 +16889,7 @@
             <a:fld id="{88FD4BCE-35F6-425E-BEE7-07902E8BBFFC}" type="datetimeFigureOut">
               <a:rPr lang="en-US" smtClean="0"/>
               <a:pPr/>
-              <a:t>5/21/2026</a:t>
+              <a:t>5/29/2026</a:t>
             </a:fld>
             <a:endParaRPr lang="en-US" dirty="0"/>
           </a:p>
@@ -15482,7 +18488,7 @@
           <a:p>
             <a:r>
               <a:rPr lang="en-US" dirty="0"/>
-              <a:t>Containerized Pipeline </a:t>
+              <a:t>Containerized Services </a:t>
             </a:r>
           </a:p>
           <a:p>
@@ -15529,6 +18535,282 @@
   <p:cSld>
     <p:spTree>
       <p:nvGrpSpPr>
+        <p:cNvPr id="1" name="">
+          <a:extLst>
+            <a:ext uri="{FF2B5EF4-FFF2-40B4-BE49-F238E27FC236}">
+              <a16:creationId xmlns:a16="http://schemas.microsoft.com/office/drawing/2014/main" id="{FCF1050D-4353-FEB2-3444-3C6B524BB900}"/>
+            </a:ext>
+          </a:extLst>
+        </p:cNvPr>
+        <p:cNvGrpSpPr/>
+        <p:nvPr/>
+      </p:nvGrpSpPr>
+      <p:grpSpPr>
+        <a:xfrm>
+          <a:off x="0" y="0"/>
+          <a:ext cx="0" cy="0"/>
+          <a:chOff x="0" y="0"/>
+          <a:chExt cx="0" cy="0"/>
+        </a:xfrm>
+      </p:grpSpPr>
+      <p:sp>
+        <p:nvSpPr>
+          <p:cNvPr id="3" name="Title 2">
+            <a:extLst>
+              <a:ext uri="{FF2B5EF4-FFF2-40B4-BE49-F238E27FC236}">
+                <a16:creationId xmlns:a16="http://schemas.microsoft.com/office/drawing/2014/main" id="{A15DAAA4-D3BA-E178-5FA6-013F6A9A3CEB}"/>
+              </a:ext>
+            </a:extLst>
+          </p:cNvPr>
+          <p:cNvSpPr>
+            <a:spLocks noGrp="1"/>
+          </p:cNvSpPr>
+          <p:nvPr>
+            <p:ph type="title"/>
+          </p:nvPr>
+        </p:nvSpPr>
+        <p:spPr>
+          <a:xfrm>
+            <a:off x="677334" y="694945"/>
+            <a:ext cx="10058400" cy="1280160"/>
+          </a:xfrm>
+        </p:spPr>
+        <p:txBody>
+          <a:bodyPr anchor="t">
+            <a:normAutofit/>
+          </a:bodyPr>
+          <a:lstStyle/>
+          <a:p>
+            <a:r>
+              <a:rPr lang="el-GR" dirty="0"/>
+              <a:t>Εξέλιξη της Εργασίας</a:t>
+            </a:r>
+            <a:endParaRPr lang="en-US" dirty="0"/>
+          </a:p>
+        </p:txBody>
+      </p:sp>
+      <p:sp>
+        <p:nvSpPr>
+          <p:cNvPr id="16" name="Content Placeholder 2">
+            <a:extLst>
+              <a:ext uri="{FF2B5EF4-FFF2-40B4-BE49-F238E27FC236}">
+                <a16:creationId xmlns:a16="http://schemas.microsoft.com/office/drawing/2014/main" id="{D594BB63-89F8-24E0-1360-CA666FE737A5}"/>
+              </a:ext>
+            </a:extLst>
+          </p:cNvPr>
+          <p:cNvSpPr>
+            <a:spLocks noGrp="1"/>
+          </p:cNvSpPr>
+          <p:nvPr>
+            <p:ph sz="quarter" idx="13"/>
+          </p:nvPr>
+        </p:nvSpPr>
+        <p:spPr>
+          <a:xfrm>
+            <a:off x="686741" y="2140864"/>
+            <a:ext cx="3797114" cy="3494753"/>
+          </a:xfrm>
+        </p:spPr>
+        <p:txBody>
+          <a:bodyPr/>
+          <a:lstStyle/>
+          <a:p>
+            <a:r>
+              <a:rPr lang="el-GR" dirty="0"/>
+              <a:t>Μέχρι την </a:t>
+            </a:r>
+            <a:r>
+              <a:rPr lang="el-GR"/>
+              <a:t>6</a:t>
+            </a:r>
+            <a:r>
+              <a:rPr lang="el-GR" baseline="30000"/>
+              <a:t>η</a:t>
+            </a:r>
+            <a:r>
+              <a:rPr lang="el-GR"/>
+              <a:t> εβδομάδα</a:t>
+            </a:r>
+            <a:endParaRPr lang="en-US" dirty="0"/>
+          </a:p>
+        </p:txBody>
+      </p:sp>
+      <p:graphicFrame>
+        <p:nvGraphicFramePr>
+          <p:cNvPr id="6" name="Content Placeholder 5" descr="A timeline of the product launch">
+            <a:extLst>
+              <a:ext uri="{FF2B5EF4-FFF2-40B4-BE49-F238E27FC236}">
+                <a16:creationId xmlns:a16="http://schemas.microsoft.com/office/drawing/2014/main" id="{8707BF5A-7DC6-DD80-4BFD-4C419D9054CB}"/>
+              </a:ext>
+            </a:extLst>
+          </p:cNvPr>
+          <p:cNvGraphicFramePr>
+            <a:graphicFrameLocks noGrp="1"/>
+          </p:cNvGraphicFramePr>
+          <p:nvPr>
+            <p:ph type="tbl" sz="quarter" idx="14"/>
+            <p:extLst>
+              <p:ext uri="{D42A27DB-BD31-4B8C-83A1-F6EECF244321}">
+                <p14:modId xmlns:p14="http://schemas.microsoft.com/office/powerpoint/2010/main" val="3814229525"/>
+              </p:ext>
+            </p:extLst>
+          </p:nvPr>
+        </p:nvGraphicFramePr>
+        <p:xfrm>
+          <a:off x="5054600" y="2103438"/>
+          <a:ext cx="6451600" cy="3532187"/>
+        </p:xfrm>
+        <a:graphic>
+          <a:graphicData uri="http://schemas.openxmlformats.org/drawingml/2006/diagram">
+            <dgm:relIds xmlns:dgm="http://schemas.openxmlformats.org/drawingml/2006/diagram" xmlns:r="http://schemas.openxmlformats.org/officeDocument/2006/relationships" r:dm="rId3" r:lo="rId4" r:qs="rId5" r:cs="rId6"/>
+          </a:graphicData>
+        </a:graphic>
+      </p:graphicFrame>
+    </p:spTree>
+    <p:extLst>
+      <p:ext uri="{BB962C8B-B14F-4D97-AF65-F5344CB8AC3E}">
+        <p14:creationId xmlns:p14="http://schemas.microsoft.com/office/powerpoint/2010/main" val="2218167997"/>
+      </p:ext>
+    </p:extLst>
+  </p:cSld>
+  <p:clrMapOvr>
+    <a:masterClrMapping/>
+  </p:clrMapOvr>
+</p:sld>
+</file>
+
+<file path=ppt/slides/slide4.xml><?xml version="1.0" encoding="utf-8"?>
+<p:sld xmlns:a="http://schemas.openxmlformats.org/drawingml/2006/main" xmlns:r="http://schemas.openxmlformats.org/officeDocument/2006/relationships" xmlns:p="http://schemas.openxmlformats.org/presentationml/2006/main">
+  <p:cSld>
+    <p:spTree>
+      <p:nvGrpSpPr>
+        <p:cNvPr id="1" name=""/>
+        <p:cNvGrpSpPr/>
+        <p:nvPr/>
+      </p:nvGrpSpPr>
+      <p:grpSpPr>
+        <a:xfrm>
+          <a:off x="0" y="0"/>
+          <a:ext cx="0" cy="0"/>
+          <a:chOff x="0" y="0"/>
+          <a:chExt cx="0" cy="0"/>
+        </a:xfrm>
+      </p:grpSpPr>
+      <p:sp>
+        <p:nvSpPr>
+          <p:cNvPr id="3" name="Title 2">
+            <a:extLst>
+              <a:ext uri="{FF2B5EF4-FFF2-40B4-BE49-F238E27FC236}">
+                <a16:creationId xmlns:a16="http://schemas.microsoft.com/office/drawing/2014/main" id="{6BAF86FF-CB02-675F-64AB-ECCB58C19040}"/>
+              </a:ext>
+            </a:extLst>
+          </p:cNvPr>
+          <p:cNvSpPr>
+            <a:spLocks noGrp="1"/>
+          </p:cNvSpPr>
+          <p:nvPr>
+            <p:ph type="title"/>
+          </p:nvPr>
+        </p:nvSpPr>
+        <p:spPr>
+          <a:xfrm>
+            <a:off x="677334" y="694945"/>
+            <a:ext cx="10058400" cy="1280160"/>
+          </a:xfrm>
+        </p:spPr>
+        <p:txBody>
+          <a:bodyPr anchor="t">
+            <a:normAutofit/>
+          </a:bodyPr>
+          <a:lstStyle/>
+          <a:p>
+            <a:r>
+              <a:rPr lang="el-GR" dirty="0"/>
+              <a:t>Επέκταση από ενδιάμεση παρουσίαση</a:t>
+            </a:r>
+            <a:endParaRPr lang="en-US" dirty="0"/>
+          </a:p>
+        </p:txBody>
+      </p:sp>
+      <p:sp>
+        <p:nvSpPr>
+          <p:cNvPr id="11" name="Content Placeholder 2">
+            <a:extLst>
+              <a:ext uri="{FF2B5EF4-FFF2-40B4-BE49-F238E27FC236}">
+                <a16:creationId xmlns:a16="http://schemas.microsoft.com/office/drawing/2014/main" id="{CE87A190-17B0-C31A-B357-1E27FDB0AF08}"/>
+              </a:ext>
+            </a:extLst>
+          </p:cNvPr>
+          <p:cNvSpPr>
+            <a:spLocks noGrp="1"/>
+          </p:cNvSpPr>
+          <p:nvPr>
+            <p:ph sz="quarter" idx="13"/>
+          </p:nvPr>
+        </p:nvSpPr>
+        <p:spPr>
+          <a:xfrm>
+            <a:off x="686741" y="2140864"/>
+            <a:ext cx="3797114" cy="3494753"/>
+          </a:xfrm>
+        </p:spPr>
+        <p:txBody>
+          <a:bodyPr/>
+          <a:lstStyle/>
+          <a:p>
+            <a:endParaRPr lang="en-US"/>
+          </a:p>
+        </p:txBody>
+      </p:sp>
+      <p:graphicFrame>
+        <p:nvGraphicFramePr>
+          <p:cNvPr id="6" name="Content Placeholder 5" descr="A timeline of the product launch">
+            <a:extLst>
+              <a:ext uri="{FF2B5EF4-FFF2-40B4-BE49-F238E27FC236}">
+                <a16:creationId xmlns:a16="http://schemas.microsoft.com/office/drawing/2014/main" id="{8327A36D-380B-3DEE-7048-3146D87FC20F}"/>
+              </a:ext>
+            </a:extLst>
+          </p:cNvPr>
+          <p:cNvGraphicFramePr>
+            <a:graphicFrameLocks noGrp="1"/>
+          </p:cNvGraphicFramePr>
+          <p:nvPr>
+            <p:ph type="tbl" sz="quarter" idx="14"/>
+            <p:extLst>
+              <p:ext uri="{D42A27DB-BD31-4B8C-83A1-F6EECF244321}">
+                <p14:modId xmlns:p14="http://schemas.microsoft.com/office/powerpoint/2010/main" val="442940936"/>
+              </p:ext>
+            </p:extLst>
+          </p:nvPr>
+        </p:nvGraphicFramePr>
+        <p:xfrm>
+          <a:off x="5054600" y="2103438"/>
+          <a:ext cx="6451600" cy="3532187"/>
+        </p:xfrm>
+        <a:graphic>
+          <a:graphicData uri="http://schemas.openxmlformats.org/drawingml/2006/diagram">
+            <dgm:relIds xmlns:dgm="http://schemas.openxmlformats.org/drawingml/2006/diagram" xmlns:r="http://schemas.openxmlformats.org/officeDocument/2006/relationships" r:dm="rId3" r:lo="rId4" r:qs="rId5" r:cs="rId6"/>
+          </a:graphicData>
+        </a:graphic>
+      </p:graphicFrame>
+    </p:spTree>
+    <p:extLst>
+      <p:ext uri="{BB962C8B-B14F-4D97-AF65-F5344CB8AC3E}">
+        <p14:creationId xmlns:p14="http://schemas.microsoft.com/office/powerpoint/2010/main" val="3960220965"/>
+      </p:ext>
+    </p:extLst>
+  </p:cSld>
+  <p:clrMapOvr>
+    <a:masterClrMapping/>
+  </p:clrMapOvr>
+</p:sld>
+</file>
+
+<file path=ppt/slides/slide5.xml><?xml version="1.0" encoding="utf-8"?>
+<p:sld xmlns:a="http://schemas.openxmlformats.org/drawingml/2006/main" xmlns:r="http://schemas.openxmlformats.org/officeDocument/2006/relationships" xmlns:p="http://schemas.openxmlformats.org/presentationml/2006/main">
+  <p:cSld>
+    <p:spTree>
+      <p:nvGrpSpPr>
         <p:cNvPr id="1" name=""/>
         <p:cNvGrpSpPr/>
         <p:nvPr/>
@@ -15568,7 +18850,7 @@
           <a:lstStyle/>
           <a:p>
             <a:r>
-              <a:rPr lang="en-US" sz="6000" dirty="0"/>
+              <a:rPr lang="en-US" sz="4400" dirty="0"/>
               <a:t>Containerized Pipeline and MQTT Communication</a:t>
             </a:r>
           </a:p>
@@ -15602,10 +18884,7 @@
           </a:bodyPr>
           <a:lstStyle/>
           <a:p>
-            <a:r>
-              <a:rPr lang="en-US" dirty="0"/>
-              <a:t>Navigating the future</a:t>
-            </a:r>
+            <a:endParaRPr lang="en-US" dirty="0"/>
           </a:p>
         </p:txBody>
       </p:sp>
@@ -15622,7 +18901,7 @@
 </p:sld>
 </file>
 
-<file path=ppt/slides/slide4.xml><?xml version="1.0" encoding="utf-8"?>
+<file path=ppt/slides/slide6.xml><?xml version="1.0" encoding="utf-8"?>
 <p:sld xmlns:a="http://schemas.openxmlformats.org/drawingml/2006/main" xmlns:r="http://schemas.openxmlformats.org/officeDocument/2006/relationships" xmlns:p="http://schemas.openxmlformats.org/presentationml/2006/main">
   <p:cSld>
     <p:spTree>
@@ -15712,314 +18991,6 @@
     <p:extLst>
       <p:ext uri="{BB962C8B-B14F-4D97-AF65-F5344CB8AC3E}">
         <p14:creationId xmlns:p14="http://schemas.microsoft.com/office/powerpoint/2010/main" val="3666674671"/>
-      </p:ext>
-    </p:extLst>
-  </p:cSld>
-  <p:clrMapOvr>
-    <a:masterClrMapping/>
-  </p:clrMapOvr>
-</p:sld>
-</file>
-
-<file path=ppt/slides/slide5.xml><?xml version="1.0" encoding="utf-8"?>
-<p:sld xmlns:a="http://schemas.openxmlformats.org/drawingml/2006/main" xmlns:r="http://schemas.openxmlformats.org/officeDocument/2006/relationships" xmlns:p="http://schemas.openxmlformats.org/presentationml/2006/main">
-  <p:cSld>
-    <p:spTree>
-      <p:nvGrpSpPr>
-        <p:cNvPr id="1" name=""/>
-        <p:cNvGrpSpPr/>
-        <p:nvPr/>
-      </p:nvGrpSpPr>
-      <p:grpSpPr>
-        <a:xfrm>
-          <a:off x="0" y="0"/>
-          <a:ext cx="0" cy="0"/>
-          <a:chOff x="0" y="0"/>
-          <a:chExt cx="0" cy="0"/>
-        </a:xfrm>
-      </p:grpSpPr>
-      <p:sp>
-        <p:nvSpPr>
-          <p:cNvPr id="2" name="Title 1">
-            <a:extLst>
-              <a:ext uri="{FF2B5EF4-FFF2-40B4-BE49-F238E27FC236}">
-                <a16:creationId xmlns:a16="http://schemas.microsoft.com/office/drawing/2014/main" id="{0EFDD6A8-6FA8-F972-AAD2-741B9BF2C81A}"/>
-              </a:ext>
-            </a:extLst>
-          </p:cNvPr>
-          <p:cNvSpPr>
-            <a:spLocks noGrp="1"/>
-          </p:cNvSpPr>
-          <p:nvPr>
-            <p:ph type="ctrTitle"/>
-          </p:nvPr>
-        </p:nvSpPr>
-        <p:spPr>
-          <a:xfrm>
-            <a:off x="2283137" y="400925"/>
-            <a:ext cx="8913947" cy="4061745"/>
-          </a:xfrm>
-        </p:spPr>
-        <p:txBody>
-          <a:bodyPr anchor="b" anchorCtr="0"/>
-          <a:lstStyle/>
-          <a:p>
-            <a:r>
-              <a:rPr lang="en-US" dirty="0"/>
-              <a:t>Market Expansion</a:t>
-            </a:r>
-          </a:p>
-        </p:txBody>
-      </p:sp>
-      <p:sp>
-        <p:nvSpPr>
-          <p:cNvPr id="3" name="Subtitle 2">
-            <a:extLst>
-              <a:ext uri="{FF2B5EF4-FFF2-40B4-BE49-F238E27FC236}">
-                <a16:creationId xmlns:a16="http://schemas.microsoft.com/office/drawing/2014/main" id="{CEEC6127-908D-01C6-5422-BC2838C6323F}"/>
-              </a:ext>
-            </a:extLst>
-          </p:cNvPr>
-          <p:cNvSpPr>
-            <a:spLocks noGrp="1"/>
-          </p:cNvSpPr>
-          <p:nvPr>
-            <p:ph type="subTitle" idx="1"/>
-          </p:nvPr>
-        </p:nvSpPr>
-        <p:spPr>
-          <a:xfrm>
-            <a:off x="2283140" y="4519311"/>
-            <a:ext cx="8913949" cy="1657202"/>
-          </a:xfrm>
-        </p:spPr>
-        <p:txBody>
-          <a:bodyPr anchor="t" anchorCtr="0">
-            <a:normAutofit/>
-          </a:bodyPr>
-          <a:lstStyle/>
-          <a:p>
-            <a:r>
-              <a:rPr lang="en-US" dirty="0"/>
-              <a:t>Unlocking new horizons</a:t>
-            </a:r>
-          </a:p>
-        </p:txBody>
-      </p:sp>
-      <p:pic>
-        <p:nvPicPr>
-          <p:cNvPr id="22" name="Picture Placeholder 21" descr="A person typing on a computer">
-            <a:extLst>
-              <a:ext uri="{FF2B5EF4-FFF2-40B4-BE49-F238E27FC236}">
-                <a16:creationId xmlns:a16="http://schemas.microsoft.com/office/drawing/2014/main" id="{BB5EA285-56AA-74C5-2380-BA7A6930FA7F}"/>
-              </a:ext>
-            </a:extLst>
-          </p:cNvPr>
-          <p:cNvPicPr>
-            <a:picLocks noGrp="1" noChangeAspect="1"/>
-          </p:cNvPicPr>
-          <p:nvPr>
-            <p:ph type="pic" sz="quarter" idx="10"/>
-          </p:nvPr>
-        </p:nvPicPr>
-        <p:blipFill>
-          <a:blip r:embed="rId3">
-            <a:duotone>
-              <a:schemeClr val="accent1">
-                <a:shade val="45000"/>
-                <a:satMod val="135000"/>
-              </a:schemeClr>
-              <a:prstClr val="white"/>
-            </a:duotone>
-          </a:blip>
-          <a:srcRect l="41445" r="41445"/>
-          <a:stretch/>
-        </p:blipFill>
-        <p:spPr>
-          <a:xfrm>
-            <a:off x="2" y="972878"/>
-            <a:ext cx="1264455" cy="4926287"/>
-          </a:xfrm>
-        </p:spPr>
-      </p:pic>
-    </p:spTree>
-    <p:extLst>
-      <p:ext uri="{BB962C8B-B14F-4D97-AF65-F5344CB8AC3E}">
-        <p14:creationId xmlns:p14="http://schemas.microsoft.com/office/powerpoint/2010/main" val="3317929717"/>
-      </p:ext>
-    </p:extLst>
-  </p:cSld>
-  <p:clrMapOvr>
-    <a:masterClrMapping/>
-  </p:clrMapOvr>
-</p:sld>
-</file>
-
-<file path=ppt/slides/slide6.xml><?xml version="1.0" encoding="utf-8"?>
-<p:sld xmlns:a="http://schemas.openxmlformats.org/drawingml/2006/main" xmlns:r="http://schemas.openxmlformats.org/officeDocument/2006/relationships" xmlns:p="http://schemas.openxmlformats.org/presentationml/2006/main">
-  <p:cSld>
-    <p:spTree>
-      <p:nvGrpSpPr>
-        <p:cNvPr id="1" name=""/>
-        <p:cNvGrpSpPr/>
-        <p:nvPr/>
-      </p:nvGrpSpPr>
-      <p:grpSpPr>
-        <a:xfrm>
-          <a:off x="0" y="0"/>
-          <a:ext cx="0" cy="0"/>
-          <a:chOff x="0" y="0"/>
-          <a:chExt cx="0" cy="0"/>
-        </a:xfrm>
-      </p:grpSpPr>
-      <p:sp>
-        <p:nvSpPr>
-          <p:cNvPr id="3" name="Title 2">
-            <a:extLst>
-              <a:ext uri="{FF2B5EF4-FFF2-40B4-BE49-F238E27FC236}">
-                <a16:creationId xmlns:a16="http://schemas.microsoft.com/office/drawing/2014/main" id="{6BAF86FF-CB02-675F-64AB-ECCB58C19040}"/>
-              </a:ext>
-            </a:extLst>
-          </p:cNvPr>
-          <p:cNvSpPr>
-            <a:spLocks noGrp="1"/>
-          </p:cNvSpPr>
-          <p:nvPr>
-            <p:ph type="title"/>
-          </p:nvPr>
-        </p:nvSpPr>
-        <p:spPr>
-          <a:xfrm>
-            <a:off x="677334" y="694944"/>
-            <a:ext cx="3931919" cy="2763442"/>
-          </a:xfrm>
-        </p:spPr>
-        <p:txBody>
-          <a:bodyPr/>
-          <a:lstStyle/>
-          <a:p>
-            <a:r>
-              <a:rPr lang="en-US" dirty="0"/>
-              <a:t>Product launch</a:t>
-            </a:r>
-          </a:p>
-        </p:txBody>
-      </p:sp>
-      <p:sp>
-        <p:nvSpPr>
-          <p:cNvPr id="5" name="Subtitle 4">
-            <a:extLst>
-              <a:ext uri="{FF2B5EF4-FFF2-40B4-BE49-F238E27FC236}">
-                <a16:creationId xmlns:a16="http://schemas.microsoft.com/office/drawing/2014/main" id="{2944C77A-F0DD-CB80-032E-5BD0B24FED0C}"/>
-              </a:ext>
-            </a:extLst>
-          </p:cNvPr>
-          <p:cNvSpPr>
-            <a:spLocks noGrp="1"/>
-          </p:cNvSpPr>
-          <p:nvPr>
-            <p:ph type="subTitle" idx="12"/>
-          </p:nvPr>
-        </p:nvSpPr>
-        <p:spPr>
-          <a:xfrm>
-            <a:off x="5753101" y="694944"/>
-            <a:ext cx="4805362" cy="1211575"/>
-          </a:xfrm>
-        </p:spPr>
-        <p:txBody>
-          <a:bodyPr/>
-          <a:lstStyle/>
-          <a:p>
-            <a:r>
-              <a:rPr lang="en-US" dirty="0"/>
-              <a:t>Product launch timeline</a:t>
-            </a:r>
-          </a:p>
-        </p:txBody>
-      </p:sp>
-      <p:sp>
-        <p:nvSpPr>
-          <p:cNvPr id="2" name="Content Placeholder 1">
-            <a:extLst>
-              <a:ext uri="{FF2B5EF4-FFF2-40B4-BE49-F238E27FC236}">
-                <a16:creationId xmlns:a16="http://schemas.microsoft.com/office/drawing/2014/main" id="{DA01336A-D65B-D2B1-839C-062AC3C4AC42}"/>
-              </a:ext>
-            </a:extLst>
-          </p:cNvPr>
-          <p:cNvSpPr>
-            <a:spLocks noGrp="1"/>
-          </p:cNvSpPr>
-          <p:nvPr>
-            <p:ph idx="14"/>
-          </p:nvPr>
-        </p:nvSpPr>
-        <p:spPr>
-          <a:xfrm>
-            <a:off x="677333" y="3607903"/>
-            <a:ext cx="3931920" cy="2572122"/>
-          </a:xfrm>
-        </p:spPr>
-        <p:txBody>
-          <a:bodyPr>
-            <a:normAutofit/>
-          </a:bodyPr>
-          <a:lstStyle/>
-          <a:p>
-            <a:r>
-              <a:rPr lang="en-US" dirty="0"/>
-              <a:t>Currently gearing up for a ground-breaking launch </a:t>
-            </a:r>
-          </a:p>
-          <a:p>
-            <a:r>
-              <a:rPr lang="en-US" dirty="0"/>
-              <a:t>Our new offerings will captivate the market</a:t>
-            </a:r>
-          </a:p>
-          <a:p>
-            <a:r>
-              <a:rPr lang="en-US" dirty="0"/>
-              <a:t>Our marketing campaign will generate anticipation</a:t>
-            </a:r>
-          </a:p>
-        </p:txBody>
-      </p:sp>
-      <p:graphicFrame>
-        <p:nvGraphicFramePr>
-          <p:cNvPr id="6" name="Content Placeholder 5" descr="A timeline of the product launch">
-            <a:extLst>
-              <a:ext uri="{FF2B5EF4-FFF2-40B4-BE49-F238E27FC236}">
-                <a16:creationId xmlns:a16="http://schemas.microsoft.com/office/drawing/2014/main" id="{8327A36D-380B-3DEE-7048-3146D87FC20F}"/>
-              </a:ext>
-            </a:extLst>
-          </p:cNvPr>
-          <p:cNvGraphicFramePr>
-            <a:graphicFrameLocks noGrp="1"/>
-          </p:cNvGraphicFramePr>
-          <p:nvPr>
-            <p:ph idx="1"/>
-            <p:extLst>
-              <p:ext uri="{D42A27DB-BD31-4B8C-83A1-F6EECF244321}">
-                <p14:modId xmlns:p14="http://schemas.microsoft.com/office/powerpoint/2010/main" val="667011556"/>
-              </p:ext>
-            </p:extLst>
-          </p:nvPr>
-        </p:nvGraphicFramePr>
-        <p:xfrm>
-          <a:off x="5753100" y="2157413"/>
-          <a:ext cx="5753100" cy="4005262"/>
-        </p:xfrm>
-        <a:graphic>
-          <a:graphicData uri="http://schemas.openxmlformats.org/drawingml/2006/diagram">
-            <dgm:relIds xmlns:dgm="http://schemas.openxmlformats.org/drawingml/2006/diagram" xmlns:r="http://schemas.openxmlformats.org/officeDocument/2006/relationships" r:dm="rId3" r:lo="rId4" r:qs="rId5" r:cs="rId6"/>
-          </a:graphicData>
-        </a:graphic>
-      </p:graphicFrame>
-    </p:spTree>
-    <p:extLst>
-      <p:ext uri="{BB962C8B-B14F-4D97-AF65-F5344CB8AC3E}">
-        <p14:creationId xmlns:p14="http://schemas.microsoft.com/office/powerpoint/2010/main" val="3960220965"/>
       </p:ext>
     </p:extLst>
   </p:cSld>
@@ -17728,6 +20699,26 @@
 </file>
 
 <file path=customXml/item1.xml><?xml version="1.0" encoding="utf-8"?>
+<p:properties xmlns:p="http://schemas.microsoft.com/office/2006/metadata/properties" xmlns:xsi="http://www.w3.org/2001/XMLSchema-instance" xmlns:pc="http://schemas.microsoft.com/office/infopath/2007/PartnerControls">
+  <documentManagement>
+    <_ip_UnifiedCompliancePolicyUIAction xmlns="http://schemas.microsoft.com/sharepoint/v3" xsi:nil="true"/>
+    <Image xmlns="71af3243-3dd4-4a8d-8c0d-dd76da1f02a5">
+      <Url xsi:nil="true"/>
+      <Description xsi:nil="true"/>
+    </Image>
+    <Status xmlns="71af3243-3dd4-4a8d-8c0d-dd76da1f02a5">Not started</Status>
+    <Background xmlns="71af3243-3dd4-4a8d-8c0d-dd76da1f02a5">false</Background>
+    <_ip_UnifiedCompliancePolicyProperties xmlns="http://schemas.microsoft.com/sharepoint/v3" xsi:nil="true"/>
+    <ImageTagsTaxHTField xmlns="71af3243-3dd4-4a8d-8c0d-dd76da1f02a5">
+      <Terms xmlns="http://schemas.microsoft.com/office/infopath/2007/PartnerControls"/>
+    </ImageTagsTaxHTField>
+    <TaxCatchAll xmlns="230e9df3-be65-4c73-a93b-d1236ebd677e" xsi:nil="true"/>
+    <MediaServiceKeyPoints xmlns="71af3243-3dd4-4a8d-8c0d-dd76da1f02a5" xsi:nil="true"/>
+  </documentManagement>
+</p:properties>
+</file>
+
+<file path=customXml/item2.xml><?xml version="1.0" encoding="utf-8"?>
 <ct:contentTypeSchema xmlns:ct="http://schemas.microsoft.com/office/2006/metadata/contentType" xmlns:ma="http://schemas.microsoft.com/office/2006/metadata/properties/metaAttributes" ct:_="" ma:_="" ma:contentTypeName="Document" ma:contentTypeID="0x01010079F111ED35F8CC479449609E8A0923A6" ma:contentTypeVersion="28" ma:contentTypeDescription="Create a new document." ma:contentTypeScope="" ma:versionID="60f5a4f2d2b0abadcf532d48ebf9cb71">
   <xsd:schema xmlns:xsd="http://www.w3.org/2001/XMLSchema" xmlns:xs="http://www.w3.org/2001/XMLSchema" xmlns:p="http://schemas.microsoft.com/office/2006/metadata/properties" xmlns:ns1="http://schemas.microsoft.com/sharepoint/v3" xmlns:ns2="71af3243-3dd4-4a8d-8c0d-dd76da1f02a5" xmlns:ns3="16c05727-aa75-4e4a-9b5f-8a80a1165891" xmlns:ns4="230e9df3-be65-4c73-a93b-d1236ebd677e" targetNamespace="http://schemas.microsoft.com/office/2006/metadata/properties" ma:root="true" ma:fieldsID="7dd78129e6a1811f84807ad11c651531" ns1:_="" ns2:_="" ns3:_="" ns4:_="">
     <xsd:import namespace="http://schemas.microsoft.com/sharepoint/v3"/>
@@ -18039,26 +21030,6 @@
 </ct:contentTypeSchema>
 </file>
 
-<file path=customXml/item2.xml><?xml version="1.0" encoding="utf-8"?>
-<p:properties xmlns:p="http://schemas.microsoft.com/office/2006/metadata/properties" xmlns:xsi="http://www.w3.org/2001/XMLSchema-instance" xmlns:pc="http://schemas.microsoft.com/office/infopath/2007/PartnerControls">
-  <documentManagement>
-    <_ip_UnifiedCompliancePolicyUIAction xmlns="http://schemas.microsoft.com/sharepoint/v3" xsi:nil="true"/>
-    <Image xmlns="71af3243-3dd4-4a8d-8c0d-dd76da1f02a5">
-      <Url xsi:nil="true"/>
-      <Description xsi:nil="true"/>
-    </Image>
-    <Status xmlns="71af3243-3dd4-4a8d-8c0d-dd76da1f02a5">Not started</Status>
-    <Background xmlns="71af3243-3dd4-4a8d-8c0d-dd76da1f02a5">false</Background>
-    <_ip_UnifiedCompliancePolicyProperties xmlns="http://schemas.microsoft.com/sharepoint/v3" xsi:nil="true"/>
-    <ImageTagsTaxHTField xmlns="71af3243-3dd4-4a8d-8c0d-dd76da1f02a5">
-      <Terms xmlns="http://schemas.microsoft.com/office/infopath/2007/PartnerControls"/>
-    </ImageTagsTaxHTField>
-    <TaxCatchAll xmlns="230e9df3-be65-4c73-a93b-d1236ebd677e" xsi:nil="true"/>
-    <MediaServiceKeyPoints xmlns="71af3243-3dd4-4a8d-8c0d-dd76da1f02a5" xsi:nil="true"/>
-  </documentManagement>
-</p:properties>
-</file>
-
 <file path=customXml/item3.xml><?xml version="1.0" encoding="utf-8"?>
 <?mso-contentType ?>
 <FormTemplates xmlns="http://schemas.microsoft.com/sharepoint/v3/contenttype/forms">
@@ -18069,6 +21040,18 @@
 </file>
 
 <file path=customXml/itemProps1.xml><?xml version="1.0" encoding="utf-8"?>
+<ds:datastoreItem xmlns:ds="http://schemas.openxmlformats.org/officeDocument/2006/customXml" ds:itemID="{E9E9A08A-3D48-4730-8B6D-01A15F4E9B00}">
+  <ds:schemaRefs>
+    <ds:schemaRef ds:uri="http://schemas.microsoft.com/office/2006/metadata/properties"/>
+    <ds:schemaRef ds:uri="http://schemas.microsoft.com/office/infopath/2007/PartnerControls"/>
+    <ds:schemaRef ds:uri="http://schemas.microsoft.com/sharepoint/v3"/>
+    <ds:schemaRef ds:uri="71af3243-3dd4-4a8d-8c0d-dd76da1f02a5"/>
+    <ds:schemaRef ds:uri="230e9df3-be65-4c73-a93b-d1236ebd677e"/>
+  </ds:schemaRefs>
+</ds:datastoreItem>
+</file>
+
+<file path=customXml/itemProps2.xml><?xml version="1.0" encoding="utf-8"?>
 <ds:datastoreItem xmlns:ds="http://schemas.openxmlformats.org/officeDocument/2006/customXml" ds:itemID="{DA0F62E9-537D-4B86-A5A3-DCAED002D6F5}">
   <ds:schemaRefs>
     <ds:schemaRef ds:uri="http://schemas.microsoft.com/office/2006/metadata/contentType"/>
@@ -18089,18 +21072,6 @@
 </ds:datastoreItem>
 </file>
 
-<file path=customXml/itemProps2.xml><?xml version="1.0" encoding="utf-8"?>
-<ds:datastoreItem xmlns:ds="http://schemas.openxmlformats.org/officeDocument/2006/customXml" ds:itemID="{E9E9A08A-3D48-4730-8B6D-01A15F4E9B00}">
-  <ds:schemaRefs>
-    <ds:schemaRef ds:uri="http://schemas.microsoft.com/office/2006/metadata/properties"/>
-    <ds:schemaRef ds:uri="http://schemas.microsoft.com/office/infopath/2007/PartnerControls"/>
-    <ds:schemaRef ds:uri="http://schemas.microsoft.com/sharepoint/v3"/>
-    <ds:schemaRef ds:uri="71af3243-3dd4-4a8d-8c0d-dd76da1f02a5"/>
-    <ds:schemaRef ds:uri="230e9df3-be65-4c73-a93b-d1236ebd677e"/>
-  </ds:schemaRefs>
-</ds:datastoreItem>
-</file>
-
 <file path=customXml/itemProps3.xml><?xml version="1.0" encoding="utf-8"?>
 <ds:datastoreItem xmlns:ds="http://schemas.openxmlformats.org/officeDocument/2006/customXml" ds:itemID="{060367E2-A4EF-4F83-9408-21F92ABD6937}">
   <ds:schemaRefs>

--- a/presentation/team05_presentation.pptx
+++ b/presentation/team05_presentation.pptx
@@ -5,18 +5,19 @@
     <p:sldMasterId id="2147483648" r:id="rId4"/>
   </p:sldMasterIdLst>
   <p:notesMasterIdLst>
-    <p:notesMasterId r:id="rId11"/>
+    <p:notesMasterId r:id="rId12"/>
   </p:notesMasterIdLst>
   <p:handoutMasterIdLst>
-    <p:handoutMasterId r:id="rId12"/>
+    <p:handoutMasterId r:id="rId13"/>
   </p:handoutMasterIdLst>
   <p:sldIdLst>
     <p:sldId id="268" r:id="rId5"/>
     <p:sldId id="324" r:id="rId6"/>
-    <p:sldId id="334" r:id="rId7"/>
-    <p:sldId id="335" r:id="rId8"/>
+    <p:sldId id="335" r:id="rId7"/>
+    <p:sldId id="334" r:id="rId8"/>
     <p:sldId id="336" r:id="rId9"/>
     <p:sldId id="333" r:id="rId10"/>
+    <p:sldId id="337" r:id="rId11"/>
   </p:sldIdLst>
   <p:sldSz cx="12192000" cy="6858000"/>
   <p:notesSz cx="6858000" cy="9144000"/>
@@ -1084,7 +1085,7 @@
         <a:lstStyle/>
         <a:p>
           <a:r>
-            <a:rPr lang="en-US"/>
+            <a:rPr lang="en-US" dirty="0"/>
             <a:t>Virtual Sensors, Home Assistant and Low Code Platforms</a:t>
           </a:r>
         </a:p>
@@ -1656,7 +1657,7 @@
             <a:buNone/>
           </a:pPr>
           <a:r>
-            <a:rPr lang="en-US" sz="2200" kern="1200"/>
+            <a:rPr lang="en-US" sz="2200" kern="1200" dirty="0"/>
             <a:t>Virtual Sensors, Home Assistant and Low Code Platforms</a:t>
           </a:r>
         </a:p>
@@ -4340,7 +4341,7 @@
           <a:p>
             <a:fld id="{29AD50C4-F1A5-A448-9E63-11D939CA9B7B}" type="datetimeFigureOut">
               <a:rPr lang="en-US" smtClean="0"/>
-              <a:t>5/29/2026</a:t>
+              <a:t>5/30/2026</a:t>
             </a:fld>
             <a:endParaRPr lang="en-US" dirty="0"/>
           </a:p>
@@ -4517,7 +4518,7 @@
           <a:p>
             <a:fld id="{3AD818D7-DF4E-4C59-9BBA-548250DAC33A}" type="datetimeFigureOut">
               <a:rPr lang="en-US" smtClean="0"/>
-              <a:t>5/29/2026</a:t>
+              <a:t>5/30/2026</a:t>
             </a:fld>
             <a:endParaRPr lang="en-US" dirty="0"/>
           </a:p>
@@ -5017,7 +5018,7 @@
           <a:p>
             <a:fld id="{9C900A82-9926-4DBA-8BA5-A22EEB8ACF8E}" type="slidenum">
               <a:rPr lang="en-US" smtClean="0"/>
-              <a:t>4</a:t>
+              <a:t>3</a:t>
             </a:fld>
             <a:endParaRPr lang="en-US" dirty="0"/>
           </a:p>
@@ -5798,7 +5799,7 @@
             <a:fld id="{88FD4BCE-35F6-425E-BEE7-07902E8BBFFC}" type="datetimeFigureOut">
               <a:rPr lang="en-US" smtClean="0"/>
               <a:pPr/>
-              <a:t>5/29/2026</a:t>
+              <a:t>5/30/2026</a:t>
             </a:fld>
             <a:endParaRPr lang="en-US" dirty="0"/>
           </a:p>
@@ -7341,7 +7342,7 @@
             <a:fld id="{88FD4BCE-35F6-425E-BEE7-07902E8BBFFC}" type="datetimeFigureOut">
               <a:rPr lang="en-US" smtClean="0"/>
               <a:pPr/>
-              <a:t>5/29/2026</a:t>
+              <a:t>5/30/2026</a:t>
             </a:fld>
             <a:endParaRPr lang="en-US" dirty="0"/>
           </a:p>
@@ -8286,7 +8287,7 @@
             <a:fld id="{88FD4BCE-35F6-425E-BEE7-07902E8BBFFC}" type="datetimeFigureOut">
               <a:rPr lang="en-US" smtClean="0"/>
               <a:pPr/>
-              <a:t>5/29/2026</a:t>
+              <a:t>5/30/2026</a:t>
             </a:fld>
             <a:endParaRPr lang="en-US" dirty="0"/>
           </a:p>
@@ -9837,7 +9838,7 @@
             <a:fld id="{88FD4BCE-35F6-425E-BEE7-07902E8BBFFC}" type="datetimeFigureOut">
               <a:rPr lang="en-US" smtClean="0"/>
               <a:pPr/>
-              <a:t>5/29/2026</a:t>
+              <a:t>5/30/2026</a:t>
             </a:fld>
             <a:endParaRPr lang="en-US" dirty="0"/>
           </a:p>
@@ -11467,7 +11468,7 @@
             <a:fld id="{88FD4BCE-35F6-425E-BEE7-07902E8BBFFC}" type="datetimeFigureOut">
               <a:rPr lang="en-US" smtClean="0"/>
               <a:pPr/>
-              <a:t>5/29/2026</a:t>
+              <a:t>5/30/2026</a:t>
             </a:fld>
             <a:endParaRPr lang="en-US" dirty="0"/>
           </a:p>
@@ -11927,7 +11928,7 @@
             <a:fld id="{88FD4BCE-35F6-425E-BEE7-07902E8BBFFC}" type="datetimeFigureOut">
               <a:rPr lang="en-US" smtClean="0"/>
               <a:pPr/>
-              <a:t>5/29/2026</a:t>
+              <a:t>5/30/2026</a:t>
             </a:fld>
             <a:endParaRPr lang="en-US" dirty="0"/>
           </a:p>
@@ -12413,7 +12414,7 @@
             <a:fld id="{88FD4BCE-35F6-425E-BEE7-07902E8BBFFC}" type="datetimeFigureOut">
               <a:rPr lang="en-US" smtClean="0"/>
               <a:pPr/>
-              <a:t>5/29/2026</a:t>
+              <a:t>5/30/2026</a:t>
             </a:fld>
             <a:endParaRPr lang="en-US" dirty="0"/>
           </a:p>
@@ -12754,7 +12755,7 @@
             <a:fld id="{88FD4BCE-35F6-425E-BEE7-07902E8BBFFC}" type="datetimeFigureOut">
               <a:rPr lang="en-US" smtClean="0"/>
               <a:pPr/>
-              <a:t>5/29/2026</a:t>
+              <a:t>5/30/2026</a:t>
             </a:fld>
             <a:endParaRPr lang="en-US" dirty="0"/>
           </a:p>
@@ -13211,7 +13212,7 @@
             <a:fld id="{88FD4BCE-35F6-425E-BEE7-07902E8BBFFC}" type="datetimeFigureOut">
               <a:rPr lang="en-US" smtClean="0"/>
               <a:pPr/>
-              <a:t>5/29/2026</a:t>
+              <a:t>5/30/2026</a:t>
             </a:fld>
             <a:endParaRPr lang="en-US" dirty="0"/>
           </a:p>
@@ -13977,7 +13978,7 @@
           <p:cNvPr id="2" name="Title 1">
             <a:extLst>
               <a:ext uri="{FF2B5EF4-FFF2-40B4-BE49-F238E27FC236}">
-                <a16:creationId xmlns:a16="http://schemas.microsoft.com/office/drawing/2014/main" id="{20F09E6D-CAC4-AADE-7270-4CFA1434E312}"/>
+                <a16:creationId xmlns:a16="http://schemas.microsoft.com/office/drawing/2014/main" id="{651ACB93-9078-0B9B-1D6B-10C5875730D6}"/>
               </a:ext>
             </a:extLst>
           </p:cNvPr>
@@ -13995,71 +13996,602 @@
           <a:p>
             <a:r>
               <a:rPr lang="en-US" dirty="0"/>
-              <a:t>MQTT Connections</a:t>
+              <a:t>Containerized Services</a:t>
             </a:r>
             <a:endParaRPr lang="en-GB" dirty="0"/>
           </a:p>
         </p:txBody>
       </p:sp>
+      <p:pic>
+        <p:nvPicPr>
+          <p:cNvPr id="1036" name="Picture 12">
+            <a:extLst>
+              <a:ext uri="{FF2B5EF4-FFF2-40B4-BE49-F238E27FC236}">
+                <a16:creationId xmlns:a16="http://schemas.microsoft.com/office/drawing/2014/main" id="{E786C696-602B-4AA9-9247-3E0EE6B702FC}"/>
+              </a:ext>
+            </a:extLst>
+          </p:cNvPr>
+          <p:cNvPicPr>
+            <a:picLocks noChangeAspect="1" noChangeArrowheads="1"/>
+          </p:cNvPicPr>
+          <p:nvPr/>
+        </p:nvPicPr>
+        <p:blipFill>
+          <a:blip r:embed="rId3">
+            <a:extLst>
+              <a:ext uri="{28A0092B-C50C-407E-A947-70E740481C1C}">
+                <a14:useLocalDpi xmlns:a14="http://schemas.microsoft.com/office/drawing/2010/main" val="0"/>
+              </a:ext>
+            </a:extLst>
+          </a:blip>
+          <a:srcRect/>
+          <a:stretch>
+            <a:fillRect/>
+          </a:stretch>
+        </p:blipFill>
+        <p:spPr bwMode="auto">
+          <a:xfrm>
+            <a:off x="6566722" y="1751358"/>
+            <a:ext cx="4169012" cy="3818155"/>
+          </a:xfrm>
+          <a:prstGeom prst="rect">
+            <a:avLst/>
+          </a:prstGeom>
+          <a:noFill/>
+          <a:extLst>
+            <a:ext uri="{909E8E84-426E-40DD-AFC4-6F175D3DCCD1}">
+              <a14:hiddenFill xmlns:a14="http://schemas.microsoft.com/office/drawing/2010/main">
+                <a:solidFill>
+                  <a:srgbClr val="FFFFFF"/>
+                </a:solidFill>
+              </a14:hiddenFill>
+            </a:ext>
+          </a:extLst>
+        </p:spPr>
+      </p:pic>
       <p:sp>
         <p:nvSpPr>
-          <p:cNvPr id="3" name="Table Placeholder 2">
+          <p:cNvPr id="7" name="Rectangle 4">
             <a:extLst>
               <a:ext uri="{FF2B5EF4-FFF2-40B4-BE49-F238E27FC236}">
-                <a16:creationId xmlns:a16="http://schemas.microsoft.com/office/drawing/2014/main" id="{1F0BA178-F5E6-F3BD-89F1-845155DEE6BE}"/>
+                <a16:creationId xmlns:a16="http://schemas.microsoft.com/office/drawing/2014/main" id="{2B113798-B773-125A-6028-BB1B30AE5BF3}"/>
               </a:ext>
             </a:extLst>
           </p:cNvPr>
           <p:cNvSpPr>
-            <a:spLocks noGrp="1"/>
+            <a:spLocks noChangeArrowheads="1"/>
           </p:cNvSpPr>
-          <p:nvPr>
-            <p:ph type="tbl" sz="quarter" idx="12"/>
-          </p:nvPr>
+          <p:nvPr/>
         </p:nvSpPr>
-        <p:spPr/>
-        <p:txBody>
-          <a:bodyPr/>
-          <a:lstStyle/>
-          <a:p>
-            <a:endParaRPr lang="en-GB"/>
-          </a:p>
-        </p:txBody>
-      </p:sp>
-      <p:pic>
-        <p:nvPicPr>
-          <p:cNvPr id="5" name="Picture 4">
-            <a:extLst>
-              <a:ext uri="{FF2B5EF4-FFF2-40B4-BE49-F238E27FC236}">
-                <a16:creationId xmlns:a16="http://schemas.microsoft.com/office/drawing/2014/main" id="{F62867E7-4934-2A83-9F5E-7CB2E69E71AA}"/>
-              </a:ext>
-            </a:extLst>
-          </p:cNvPr>
-          <p:cNvPicPr>
-            <a:picLocks noChangeAspect="1"/>
-          </p:cNvPicPr>
-          <p:nvPr/>
-        </p:nvPicPr>
-        <p:blipFill>
-          <a:blip r:embed="rId2"/>
-          <a:stretch>
-            <a:fillRect/>
-          </a:stretch>
-        </p:blipFill>
-        <p:spPr>
+        <p:spPr bwMode="auto">
           <a:xfrm>
-            <a:off x="1367491" y="2103438"/>
-            <a:ext cx="9368243" cy="3702050"/>
+            <a:off x="1006715" y="1650507"/>
+            <a:ext cx="4699819" cy="3323987"/>
           </a:xfrm>
           <a:prstGeom prst="rect">
             <a:avLst/>
           </a:prstGeom>
+          <a:noFill/>
+          <a:ln>
+            <a:noFill/>
+          </a:ln>
+          <a:effectLst/>
+          <a:extLst>
+            <a:ext uri="{909E8E84-426E-40DD-AFC4-6F175D3DCCD1}">
+              <a14:hiddenFill xmlns:a14="http://schemas.microsoft.com/office/drawing/2010/main">
+                <a:solidFill>
+                  <a:schemeClr val="accent1"/>
+                </a:solidFill>
+              </a14:hiddenFill>
+            </a:ext>
+            <a:ext uri="{91240B29-F687-4F45-9708-019B960494DF}">
+              <a14:hiddenLine xmlns:a14="http://schemas.microsoft.com/office/drawing/2010/main" w="9525">
+                <a:solidFill>
+                  <a:schemeClr val="tx1"/>
+                </a:solidFill>
+                <a:miter lim="800000"/>
+                <a:headEnd/>
+                <a:tailEnd/>
+              </a14:hiddenLine>
+            </a:ext>
+            <a:ext uri="{AF507438-7753-43E0-B8FC-AC1667EBCBE1}">
+              <a14:hiddenEffects xmlns:a14="http://schemas.microsoft.com/office/drawing/2010/main">
+                <a:effectLst>
+                  <a:outerShdw dist="35921" dir="2700000" algn="ctr" rotWithShape="0">
+                    <a:schemeClr val="bg2"/>
+                  </a:outerShdw>
+                </a:effectLst>
+              </a14:hiddenEffects>
+            </a:ext>
+          </a:extLst>
         </p:spPr>
-      </p:pic>
+        <p:txBody>
+          <a:bodyPr vert="horz" wrap="square" lIns="91440" tIns="45720" rIns="91440" bIns="45720" numCol="1" anchor="ctr" anchorCtr="0" compatLnSpc="1">
+            <a:prstTxWarp prst="textNoShape">
+              <a:avLst/>
+            </a:prstTxWarp>
+            <a:spAutoFit/>
+          </a:bodyPr>
+          <a:lstStyle/>
+          <a:p>
+            <a:pPr marL="0" marR="0" lvl="0" indent="0" algn="l" defTabSz="914400" rtl="0" eaLnBrk="0" fontAlgn="base" latinLnBrk="0" hangingPunct="0">
+              <a:lnSpc>
+                <a:spcPct val="100000"/>
+              </a:lnSpc>
+              <a:spcBef>
+                <a:spcPct val="0"/>
+              </a:spcBef>
+              <a:spcAft>
+                <a:spcPct val="0"/>
+              </a:spcAft>
+              <a:buClrTx/>
+              <a:buSzTx/>
+              <a:tabLst/>
+            </a:pPr>
+            <a:endParaRPr kumimoji="0" lang="en-US" altLang="el-GR" sz="1400" b="1" i="0" u="none" strike="noStrike" cap="none" normalizeH="0" baseline="0" dirty="0">
+              <a:ln>
+                <a:noFill/>
+              </a:ln>
+              <a:solidFill>
+                <a:schemeClr val="tx1"/>
+              </a:solidFill>
+              <a:effectLst/>
+              <a:latin typeface="Times New Roman" panose="02020603050405020304" pitchFamily="18" charset="0"/>
+              <a:cs typeface="Times New Roman" panose="02020603050405020304" pitchFamily="18" charset="0"/>
+            </a:endParaRPr>
+          </a:p>
+          <a:p>
+            <a:pPr marL="0" marR="0" lvl="0" indent="0" algn="l" defTabSz="914400" rtl="0" eaLnBrk="0" fontAlgn="base" latinLnBrk="0" hangingPunct="0">
+              <a:lnSpc>
+                <a:spcPct val="100000"/>
+              </a:lnSpc>
+              <a:spcBef>
+                <a:spcPct val="0"/>
+              </a:spcBef>
+              <a:spcAft>
+                <a:spcPct val="0"/>
+              </a:spcAft>
+              <a:buClrTx/>
+              <a:buSzTx/>
+              <a:buFontTx/>
+              <a:buChar char="•"/>
+              <a:tabLst/>
+            </a:pPr>
+            <a:endParaRPr lang="en-US" altLang="el-GR" sz="1400" b="1" dirty="0">
+              <a:latin typeface="Times New Roman" panose="02020603050405020304" pitchFamily="18" charset="0"/>
+              <a:cs typeface="Times New Roman" panose="02020603050405020304" pitchFamily="18" charset="0"/>
+            </a:endParaRPr>
+          </a:p>
+          <a:p>
+            <a:pPr marL="0" marR="0" lvl="0" indent="0" algn="l" defTabSz="914400" rtl="0" eaLnBrk="0" fontAlgn="base" latinLnBrk="0" hangingPunct="0">
+              <a:lnSpc>
+                <a:spcPct val="100000"/>
+              </a:lnSpc>
+              <a:spcBef>
+                <a:spcPct val="0"/>
+              </a:spcBef>
+              <a:spcAft>
+                <a:spcPct val="0"/>
+              </a:spcAft>
+              <a:buClrTx/>
+              <a:buSzTx/>
+              <a:buFontTx/>
+              <a:buChar char="•"/>
+              <a:tabLst/>
+            </a:pPr>
+            <a:r>
+              <a:rPr kumimoji="0" lang="el-GR" altLang="el-GR" sz="1400" b="1" i="0" u="none" strike="noStrike" cap="none" normalizeH="0" baseline="0" dirty="0">
+                <a:ln>
+                  <a:noFill/>
+                </a:ln>
+                <a:solidFill>
+                  <a:schemeClr val="tx1"/>
+                </a:solidFill>
+                <a:effectLst/>
+                <a:cs typeface="Times New Roman" panose="02020603050405020304" pitchFamily="18" charset="0"/>
+              </a:rPr>
+              <a:t>Υιοθέτηση αρχιτεκτονικής υποδοχέων (</a:t>
+            </a:r>
+            <a:r>
+              <a:rPr kumimoji="0" lang="el-GR" altLang="el-GR" sz="1400" b="1" i="0" u="none" strike="noStrike" cap="none" normalizeH="0" baseline="0" dirty="0" err="1">
+                <a:ln>
+                  <a:noFill/>
+                </a:ln>
+                <a:solidFill>
+                  <a:schemeClr val="tx1"/>
+                </a:solidFill>
+                <a:effectLst/>
+                <a:cs typeface="Times New Roman" panose="02020603050405020304" pitchFamily="18" charset="0"/>
+              </a:rPr>
+              <a:t>Containerization</a:t>
+            </a:r>
+            <a:r>
+              <a:rPr kumimoji="0" lang="el-GR" altLang="el-GR" sz="1400" b="1" i="0" u="none" strike="noStrike" cap="none" normalizeH="0" baseline="0" dirty="0">
+                <a:ln>
+                  <a:noFill/>
+                </a:ln>
+                <a:solidFill>
+                  <a:schemeClr val="tx1"/>
+                </a:solidFill>
+                <a:effectLst/>
+                <a:cs typeface="Times New Roman" panose="02020603050405020304" pitchFamily="18" charset="0"/>
+              </a:rPr>
+              <a:t>):</a:t>
+            </a:r>
+            <a:r>
+              <a:rPr kumimoji="0" lang="el-GR" altLang="el-GR" sz="1400" b="0" i="0" u="none" strike="noStrike" cap="none" normalizeH="0" baseline="0" dirty="0">
+                <a:ln>
+                  <a:noFill/>
+                </a:ln>
+                <a:solidFill>
+                  <a:schemeClr val="tx1"/>
+                </a:solidFill>
+                <a:effectLst/>
+                <a:cs typeface="Times New Roman" panose="02020603050405020304" pitchFamily="18" charset="0"/>
+              </a:rPr>
+              <a:t> Υλοποίηση του συνόλου των υπηρεσιών μέσω </a:t>
+            </a:r>
+            <a:r>
+              <a:rPr kumimoji="0" lang="el-GR" altLang="el-GR" sz="1400" b="0" i="0" u="none" strike="noStrike" cap="none" normalizeH="0" baseline="0" dirty="0" err="1">
+                <a:ln>
+                  <a:noFill/>
+                </a:ln>
+                <a:solidFill>
+                  <a:schemeClr val="tx1"/>
+                </a:solidFill>
+                <a:effectLst/>
+                <a:cs typeface="Times New Roman" panose="02020603050405020304" pitchFamily="18" charset="0"/>
+              </a:rPr>
+              <a:t>Docker</a:t>
+            </a:r>
+            <a:r>
+              <a:rPr kumimoji="0" lang="el-GR" altLang="el-GR" sz="1400" b="0" i="0" u="none" strike="noStrike" cap="none" normalizeH="0" baseline="0" dirty="0">
+                <a:ln>
+                  <a:noFill/>
+                </a:ln>
+                <a:solidFill>
+                  <a:schemeClr val="tx1"/>
+                </a:solidFill>
+                <a:effectLst/>
+                <a:cs typeface="Times New Roman" panose="02020603050405020304" pitchFamily="18" charset="0"/>
+              </a:rPr>
+              <a:t> και </a:t>
+            </a:r>
+            <a:r>
+              <a:rPr kumimoji="0" lang="el-GR" altLang="el-GR" sz="1400" b="0" i="0" u="none" strike="noStrike" cap="none" normalizeH="0" baseline="0" dirty="0" err="1">
+                <a:ln>
+                  <a:noFill/>
+                </a:ln>
+                <a:solidFill>
+                  <a:schemeClr val="tx1"/>
+                </a:solidFill>
+                <a:effectLst/>
+                <a:cs typeface="Times New Roman" panose="02020603050405020304" pitchFamily="18" charset="0"/>
+              </a:rPr>
+              <a:t>Docker</a:t>
+            </a:r>
+            <a:r>
+              <a:rPr kumimoji="0" lang="el-GR" altLang="el-GR" sz="1400" b="0" i="0" u="none" strike="noStrike" cap="none" normalizeH="0" baseline="0" dirty="0">
+                <a:ln>
+                  <a:noFill/>
+                </a:ln>
+                <a:solidFill>
+                  <a:schemeClr val="tx1"/>
+                </a:solidFill>
+                <a:effectLst/>
+                <a:cs typeface="Times New Roman" panose="02020603050405020304" pitchFamily="18" charset="0"/>
+              </a:rPr>
+              <a:t> </a:t>
+            </a:r>
+            <a:r>
+              <a:rPr kumimoji="0" lang="el-GR" altLang="el-GR" sz="1400" b="0" i="0" u="none" strike="noStrike" cap="none" normalizeH="0" baseline="0" dirty="0" err="1">
+                <a:ln>
+                  <a:noFill/>
+                </a:ln>
+                <a:solidFill>
+                  <a:schemeClr val="tx1"/>
+                </a:solidFill>
+                <a:effectLst/>
+                <a:cs typeface="Times New Roman" panose="02020603050405020304" pitchFamily="18" charset="0"/>
+              </a:rPr>
+              <a:t>Compose</a:t>
+            </a:r>
+            <a:r>
+              <a:rPr kumimoji="0" lang="el-GR" altLang="el-GR" sz="1400" b="0" i="0" u="none" strike="noStrike" cap="none" normalizeH="0" baseline="0" dirty="0">
+                <a:ln>
+                  <a:noFill/>
+                </a:ln>
+                <a:solidFill>
+                  <a:schemeClr val="tx1"/>
+                </a:solidFill>
+                <a:effectLst/>
+                <a:cs typeface="Times New Roman" panose="02020603050405020304" pitchFamily="18" charset="0"/>
+              </a:rPr>
+              <a:t>.</a:t>
+            </a:r>
+            <a:endParaRPr kumimoji="0" lang="en-US" altLang="el-GR" sz="1400" b="0" i="0" u="none" strike="noStrike" cap="none" normalizeH="0" baseline="0" dirty="0">
+              <a:ln>
+                <a:noFill/>
+              </a:ln>
+              <a:solidFill>
+                <a:schemeClr val="tx1"/>
+              </a:solidFill>
+              <a:effectLst/>
+              <a:cs typeface="Times New Roman" panose="02020603050405020304" pitchFamily="18" charset="0"/>
+            </a:endParaRPr>
+          </a:p>
+          <a:p>
+            <a:pPr marL="0" marR="0" lvl="0" indent="0" algn="l" defTabSz="914400" rtl="0" eaLnBrk="0" fontAlgn="base" latinLnBrk="0" hangingPunct="0">
+              <a:lnSpc>
+                <a:spcPct val="100000"/>
+              </a:lnSpc>
+              <a:spcBef>
+                <a:spcPct val="0"/>
+              </a:spcBef>
+              <a:spcAft>
+                <a:spcPct val="0"/>
+              </a:spcAft>
+              <a:buClrTx/>
+              <a:buSzTx/>
+              <a:tabLst/>
+            </a:pPr>
+            <a:endParaRPr kumimoji="0" lang="en-US" altLang="el-GR" sz="1400" b="0" i="0" u="none" strike="noStrike" cap="none" normalizeH="0" baseline="0" dirty="0">
+              <a:ln>
+                <a:noFill/>
+              </a:ln>
+              <a:solidFill>
+                <a:schemeClr val="tx1"/>
+              </a:solidFill>
+              <a:effectLst/>
+              <a:cs typeface="Times New Roman" panose="02020603050405020304" pitchFamily="18" charset="0"/>
+            </a:endParaRPr>
+          </a:p>
+          <a:p>
+            <a:pPr marL="0" marR="0" lvl="0" indent="0" algn="l" defTabSz="914400" rtl="0" eaLnBrk="0" fontAlgn="base" latinLnBrk="0" hangingPunct="0">
+              <a:lnSpc>
+                <a:spcPct val="100000"/>
+              </a:lnSpc>
+              <a:spcBef>
+                <a:spcPct val="0"/>
+              </a:spcBef>
+              <a:spcAft>
+                <a:spcPct val="0"/>
+              </a:spcAft>
+              <a:buClrTx/>
+              <a:buSzTx/>
+              <a:tabLst/>
+            </a:pPr>
+            <a:endParaRPr kumimoji="0" lang="el-GR" altLang="el-GR" sz="1400" b="0" i="0" u="none" strike="noStrike" cap="none" normalizeH="0" baseline="0" dirty="0">
+              <a:ln>
+                <a:noFill/>
+              </a:ln>
+              <a:solidFill>
+                <a:schemeClr val="tx1"/>
+              </a:solidFill>
+              <a:effectLst/>
+              <a:cs typeface="Times New Roman" panose="02020603050405020304" pitchFamily="18" charset="0"/>
+            </a:endParaRPr>
+          </a:p>
+          <a:p>
+            <a:pPr marL="0" marR="0" lvl="0" indent="0" algn="l" defTabSz="914400" rtl="0" eaLnBrk="0" fontAlgn="base" latinLnBrk="0" hangingPunct="0">
+              <a:lnSpc>
+                <a:spcPct val="100000"/>
+              </a:lnSpc>
+              <a:spcBef>
+                <a:spcPct val="0"/>
+              </a:spcBef>
+              <a:spcAft>
+                <a:spcPct val="0"/>
+              </a:spcAft>
+              <a:buClrTx/>
+              <a:buSzTx/>
+              <a:buFontTx/>
+              <a:buChar char="•"/>
+              <a:tabLst/>
+            </a:pPr>
+            <a:r>
+              <a:rPr kumimoji="0" lang="el-GR" altLang="el-GR" sz="1400" b="1" i="0" u="none" strike="noStrike" cap="none" normalizeH="0" baseline="0" dirty="0">
+                <a:ln>
+                  <a:noFill/>
+                </a:ln>
+                <a:solidFill>
+                  <a:schemeClr val="tx1"/>
+                </a:solidFill>
+                <a:effectLst/>
+                <a:cs typeface="Times New Roman" panose="02020603050405020304" pitchFamily="18" charset="0"/>
+              </a:rPr>
+              <a:t>Απομόνωση &amp; Ανεξαρτησία:</a:t>
+            </a:r>
+            <a:r>
+              <a:rPr kumimoji="0" lang="el-GR" altLang="el-GR" sz="1400" b="0" i="0" u="none" strike="noStrike" cap="none" normalizeH="0" baseline="0" dirty="0">
+                <a:ln>
+                  <a:noFill/>
+                </a:ln>
+                <a:solidFill>
+                  <a:schemeClr val="tx1"/>
+                </a:solidFill>
+                <a:effectLst/>
+                <a:cs typeface="Times New Roman" panose="02020603050405020304" pitchFamily="18" charset="0"/>
+              </a:rPr>
+              <a:t> Πλήρης διαχωρισμός των διεργασιών από το υποκείμενο λειτουργικό σύστημα.</a:t>
+            </a:r>
+            <a:endParaRPr kumimoji="0" lang="en-US" altLang="el-GR" sz="1400" b="0" i="0" u="none" strike="noStrike" cap="none" normalizeH="0" baseline="0" dirty="0">
+              <a:ln>
+                <a:noFill/>
+              </a:ln>
+              <a:solidFill>
+                <a:schemeClr val="tx1"/>
+              </a:solidFill>
+              <a:effectLst/>
+              <a:cs typeface="Times New Roman" panose="02020603050405020304" pitchFamily="18" charset="0"/>
+            </a:endParaRPr>
+          </a:p>
+          <a:p>
+            <a:pPr marL="0" marR="0" lvl="0" indent="0" algn="l" defTabSz="914400" rtl="0" eaLnBrk="0" fontAlgn="base" latinLnBrk="0" hangingPunct="0">
+              <a:lnSpc>
+                <a:spcPct val="100000"/>
+              </a:lnSpc>
+              <a:spcBef>
+                <a:spcPct val="0"/>
+              </a:spcBef>
+              <a:spcAft>
+                <a:spcPct val="0"/>
+              </a:spcAft>
+              <a:buClrTx/>
+              <a:buSzTx/>
+              <a:buFontTx/>
+              <a:buChar char="•"/>
+              <a:tabLst/>
+            </a:pPr>
+            <a:endParaRPr kumimoji="0" lang="en-US" altLang="el-GR" sz="1400" b="0" i="0" u="none" strike="noStrike" cap="none" normalizeH="0" baseline="0" dirty="0">
+              <a:ln>
+                <a:noFill/>
+              </a:ln>
+              <a:solidFill>
+                <a:schemeClr val="tx1"/>
+              </a:solidFill>
+              <a:effectLst/>
+              <a:cs typeface="Times New Roman" panose="02020603050405020304" pitchFamily="18" charset="0"/>
+            </a:endParaRPr>
+          </a:p>
+          <a:p>
+            <a:pPr marL="0" marR="0" lvl="0" indent="0" algn="l" defTabSz="914400" rtl="0" eaLnBrk="0" fontAlgn="base" latinLnBrk="0" hangingPunct="0">
+              <a:lnSpc>
+                <a:spcPct val="100000"/>
+              </a:lnSpc>
+              <a:spcBef>
+                <a:spcPct val="0"/>
+              </a:spcBef>
+              <a:spcAft>
+                <a:spcPct val="0"/>
+              </a:spcAft>
+              <a:buClrTx/>
+              <a:buSzTx/>
+              <a:tabLst/>
+            </a:pPr>
+            <a:endParaRPr kumimoji="0" lang="el-GR" altLang="el-GR" sz="1400" b="0" i="0" u="none" strike="noStrike" cap="none" normalizeH="0" baseline="0" dirty="0">
+              <a:ln>
+                <a:noFill/>
+              </a:ln>
+              <a:solidFill>
+                <a:schemeClr val="tx1"/>
+              </a:solidFill>
+              <a:effectLst/>
+              <a:cs typeface="Times New Roman" panose="02020603050405020304" pitchFamily="18" charset="0"/>
+            </a:endParaRPr>
+          </a:p>
+          <a:p>
+            <a:pPr lvl="0" defTabSz="914400" eaLnBrk="0" fontAlgn="base" hangingPunct="0">
+              <a:spcBef>
+                <a:spcPct val="0"/>
+              </a:spcBef>
+              <a:spcAft>
+                <a:spcPct val="0"/>
+              </a:spcAft>
+              <a:buFontTx/>
+              <a:buChar char="•"/>
+            </a:pPr>
+            <a:r>
+              <a:rPr lang="el-GR" sz="1400" b="1" dirty="0">
+                <a:cs typeface="Times New Roman" panose="02020603050405020304" pitchFamily="18" charset="0"/>
+              </a:rPr>
+              <a:t>Υψηλή </a:t>
+            </a:r>
+            <a:r>
+              <a:rPr lang="el-GR" sz="1400" b="1" dirty="0" err="1">
+                <a:cs typeface="Times New Roman" panose="02020603050405020304" pitchFamily="18" charset="0"/>
+              </a:rPr>
+              <a:t>Μεταφερσιμότητα</a:t>
+            </a:r>
+            <a:r>
+              <a:rPr lang="el-GR" sz="1400" b="1" dirty="0">
+                <a:cs typeface="Times New Roman" panose="02020603050405020304" pitchFamily="18" charset="0"/>
+              </a:rPr>
+              <a:t> (</a:t>
+            </a:r>
+            <a:r>
+              <a:rPr lang="el-GR" sz="1400" b="1" dirty="0" err="1">
+                <a:cs typeface="Times New Roman" panose="02020603050405020304" pitchFamily="18" charset="0"/>
+              </a:rPr>
+              <a:t>Portability</a:t>
+            </a:r>
+            <a:r>
+              <a:rPr lang="el-GR" sz="1400" b="1" dirty="0">
+                <a:cs typeface="Times New Roman" panose="02020603050405020304" pitchFamily="18" charset="0"/>
+              </a:rPr>
+              <a:t>):</a:t>
+            </a:r>
+            <a:r>
+              <a:rPr lang="el-GR" sz="1400" dirty="0">
+                <a:cs typeface="Times New Roman" panose="02020603050405020304" pitchFamily="18" charset="0"/>
+              </a:rPr>
+              <a:t> Δυνατότητα απρόσκοπτης και άμεσης ανάπτυξης (</a:t>
+            </a:r>
+            <a:r>
+              <a:rPr lang="el-GR" sz="1400" dirty="0" err="1">
+                <a:cs typeface="Times New Roman" panose="02020603050405020304" pitchFamily="18" charset="0"/>
+              </a:rPr>
+              <a:t>deployment</a:t>
+            </a:r>
+            <a:r>
+              <a:rPr lang="el-GR" sz="1400" dirty="0">
+                <a:cs typeface="Times New Roman" panose="02020603050405020304" pitchFamily="18" charset="0"/>
+              </a:rPr>
+              <a:t>) του συστήματος σε οποιοδήποτε υπολογιστικό περιβάλλον (π.χ. </a:t>
+            </a:r>
+            <a:r>
+              <a:rPr lang="el-GR" sz="1400" dirty="0" err="1">
+                <a:cs typeface="Times New Roman" panose="02020603050405020304" pitchFamily="18" charset="0"/>
+              </a:rPr>
+              <a:t>edge</a:t>
+            </a:r>
+            <a:r>
+              <a:rPr lang="el-GR" sz="1400" dirty="0">
+                <a:cs typeface="Times New Roman" panose="02020603050405020304" pitchFamily="18" charset="0"/>
+              </a:rPr>
+              <a:t> συσκευές όπως το </a:t>
+            </a:r>
+            <a:r>
+              <a:rPr lang="el-GR" sz="1400" dirty="0" err="1">
+                <a:cs typeface="Times New Roman" panose="02020603050405020304" pitchFamily="18" charset="0"/>
+              </a:rPr>
+              <a:t>Raspberry</a:t>
+            </a:r>
+            <a:r>
+              <a:rPr lang="el-GR" sz="1400" dirty="0">
+                <a:cs typeface="Times New Roman" panose="02020603050405020304" pitchFamily="18" charset="0"/>
+              </a:rPr>
+              <a:t> </a:t>
+            </a:r>
+            <a:r>
+              <a:rPr lang="el-GR" sz="1400" dirty="0" err="1">
+                <a:cs typeface="Times New Roman" panose="02020603050405020304" pitchFamily="18" charset="0"/>
+              </a:rPr>
+              <a:t>Pi</a:t>
+            </a:r>
+            <a:r>
+              <a:rPr lang="el-GR" sz="1400" dirty="0">
+                <a:cs typeface="Times New Roman" panose="02020603050405020304" pitchFamily="18" charset="0"/>
+              </a:rPr>
+              <a:t>).</a:t>
+            </a:r>
+            <a:endParaRPr kumimoji="0" lang="el-GR" altLang="el-GR" sz="1400" i="0" u="none" strike="noStrike" cap="none" normalizeH="0" baseline="0" dirty="0">
+              <a:ln>
+                <a:noFill/>
+              </a:ln>
+              <a:solidFill>
+                <a:schemeClr val="tx1"/>
+              </a:solidFill>
+              <a:effectLst/>
+              <a:cs typeface="Times New Roman" panose="02020603050405020304" pitchFamily="18" charset="0"/>
+            </a:endParaRPr>
+          </a:p>
+        </p:txBody>
+      </p:sp>
     </p:spTree>
     <p:extLst>
       <p:ext uri="{BB962C8B-B14F-4D97-AF65-F5344CB8AC3E}">
-        <p14:creationId xmlns:p14="http://schemas.microsoft.com/office/powerpoint/2010/main" val="2709530144"/>
+        <p14:creationId xmlns:p14="http://schemas.microsoft.com/office/powerpoint/2010/main" val="397521647"/>
       </p:ext>
     </p:extLst>
   </p:cSld>
@@ -14091,7 +14623,7 @@
           <p:cNvPr id="2" name="Title 1">
             <a:extLst>
               <a:ext uri="{FF2B5EF4-FFF2-40B4-BE49-F238E27FC236}">
-                <a16:creationId xmlns:a16="http://schemas.microsoft.com/office/drawing/2014/main" id="{651ACB93-9078-0B9B-1D6B-10C5875730D6}"/>
+                <a16:creationId xmlns:a16="http://schemas.microsoft.com/office/drawing/2014/main" id="{20F09E6D-CAC4-AADE-7270-4CFA1434E312}"/>
               </a:ext>
             </a:extLst>
           </p:cNvPr>
@@ -14108,107 +14640,207 @@
           <a:lstStyle/>
           <a:p>
             <a:r>
-              <a:rPr lang="el-GR" dirty="0"/>
-              <a:t>Υλοποίηση</a:t>
-            </a:r>
-            <a:endParaRPr lang="en-GB" dirty="0"/>
-          </a:p>
-        </p:txBody>
-      </p:sp>
-      <p:sp>
-        <p:nvSpPr>
-          <p:cNvPr id="5" name="AutoShape 4">
-            <a:extLst>
-              <a:ext uri="{FF2B5EF4-FFF2-40B4-BE49-F238E27FC236}">
-                <a16:creationId xmlns:a16="http://schemas.microsoft.com/office/drawing/2014/main" id="{AE2F40B3-B1DF-FBB8-DB03-11855B141BCC}"/>
-              </a:ext>
-            </a:extLst>
-          </p:cNvPr>
-          <p:cNvSpPr>
-            <a:spLocks noGrp="1" noChangeAspect="1" noChangeArrowheads="1"/>
-          </p:cNvSpPr>
-          <p:nvPr>
-            <p:ph type="tbl" sz="quarter" idx="12"/>
-          </p:nvPr>
-        </p:nvSpPr>
-        <p:spPr bwMode="auto">
-          <a:prstGeom prst="rect">
-            <a:avLst/>
-          </a:prstGeom>
-          <a:noFill/>
-          <a:extLst>
-            <a:ext uri="{909E8E84-426E-40DD-AFC4-6F175D3DCCD1}">
-              <a14:hiddenFill xmlns:a14="http://schemas.microsoft.com/office/drawing/2010/main">
-                <a:solidFill>
-                  <a:srgbClr val="FFFFFF"/>
-                </a:solidFill>
-              </a14:hiddenFill>
-            </a:ext>
-          </a:extLst>
-        </p:spPr>
-        <p:txBody>
-          <a:bodyPr vert="horz" wrap="square" lIns="91440" tIns="45720" rIns="91440" bIns="45720" numCol="1" anchor="t" anchorCtr="0" compatLnSpc="1">
-            <a:prstTxWarp prst="textNoShape">
-              <a:avLst/>
-            </a:prstTxWarp>
-          </a:bodyPr>
-          <a:lstStyle/>
-          <a:p>
+              <a:rPr lang="en-US" dirty="0"/>
+              <a:t>MQTT Connections</a:t>
+            </a:r>
             <a:endParaRPr lang="en-GB" dirty="0"/>
           </a:p>
         </p:txBody>
       </p:sp>
       <p:pic>
         <p:nvPicPr>
-          <p:cNvPr id="1036" name="Picture 12">
+          <p:cNvPr id="8" name="Εικόνα 7">
             <a:extLst>
               <a:ext uri="{FF2B5EF4-FFF2-40B4-BE49-F238E27FC236}">
-                <a16:creationId xmlns:a16="http://schemas.microsoft.com/office/drawing/2014/main" id="{E786C696-602B-4AA9-9247-3E0EE6B702FC}"/>
+                <a16:creationId xmlns:a16="http://schemas.microsoft.com/office/drawing/2014/main" id="{9AF40EA4-378A-DB24-E664-D0933972A5CC}"/>
               </a:ext>
             </a:extLst>
           </p:cNvPr>
           <p:cNvPicPr>
-            <a:picLocks noChangeAspect="1" noChangeArrowheads="1"/>
+            <a:picLocks noChangeAspect="1"/>
           </p:cNvPicPr>
           <p:nvPr/>
         </p:nvPicPr>
         <p:blipFill>
-          <a:blip r:embed="rId3">
-            <a:extLst>
-              <a:ext uri="{28A0092B-C50C-407E-A947-70E740481C1C}">
-                <a14:useLocalDpi xmlns:a14="http://schemas.microsoft.com/office/drawing/2010/main" val="0"/>
-              </a:ext>
-            </a:extLst>
-          </a:blip>
-          <a:srcRect/>
+          <a:blip r:embed="rId2"/>
           <a:stretch>
             <a:fillRect/>
           </a:stretch>
         </p:blipFill>
-        <p:spPr bwMode="auto">
+        <p:spPr>
           <a:xfrm>
-            <a:off x="3451860" y="700324"/>
-            <a:ext cx="5574287" cy="5105164"/>
+            <a:off x="4494913" y="1975105"/>
+            <a:ext cx="7662290" cy="3702051"/>
+          </a:xfrm>
+          <a:prstGeom prst="rect">
+            <a:avLst/>
+          </a:prstGeom>
+        </p:spPr>
+      </p:pic>
+      <p:sp>
+        <p:nvSpPr>
+          <p:cNvPr id="11" name="TextBox 10">
+            <a:extLst>
+              <a:ext uri="{FF2B5EF4-FFF2-40B4-BE49-F238E27FC236}">
+                <a16:creationId xmlns:a16="http://schemas.microsoft.com/office/drawing/2014/main" id="{692BEFE9-4F51-08B4-C595-131DF76E08BC}"/>
+              </a:ext>
+            </a:extLst>
+          </p:cNvPr>
+          <p:cNvSpPr txBox="1"/>
+          <p:nvPr/>
+        </p:nvSpPr>
+        <p:spPr>
+          <a:xfrm>
+            <a:off x="567159" y="1645283"/>
+            <a:ext cx="3657599" cy="4247317"/>
           </a:xfrm>
           <a:prstGeom prst="rect">
             <a:avLst/>
           </a:prstGeom>
           <a:noFill/>
-          <a:extLst>
-            <a:ext uri="{909E8E84-426E-40DD-AFC4-6F175D3DCCD1}">
-              <a14:hiddenFill xmlns:a14="http://schemas.microsoft.com/office/drawing/2010/main">
-                <a:solidFill>
-                  <a:srgbClr val="FFFFFF"/>
-                </a:solidFill>
-              </a14:hiddenFill>
-            </a:ext>
-          </a:extLst>
         </p:spPr>
-      </p:pic>
+        <p:txBody>
+          <a:bodyPr wrap="square" rtlCol="0">
+            <a:spAutoFit/>
+          </a:bodyPr>
+          <a:lstStyle/>
+          <a:p>
+            <a:pPr marL="285750" indent="-285750">
+              <a:buFont typeface="Arial" panose="020B0604020202020204" pitchFamily="34" charset="0"/>
+              <a:buChar char="•"/>
+            </a:pPr>
+            <a:r>
+              <a:rPr lang="el-GR" sz="1400" b="1" dirty="0"/>
+              <a:t>Κεντρικός Άξονας Δικτύωσης:</a:t>
+            </a:r>
+            <a:r>
+              <a:rPr lang="el-GR" sz="1400" dirty="0"/>
+              <a:t> Το πρωτόκολλο MQTT λειτουργεί ως ο βασικός πυρήνας (</a:t>
+            </a:r>
+            <a:r>
+              <a:rPr lang="el-GR" sz="1400" dirty="0" err="1"/>
+              <a:t>backbone</a:t>
+            </a:r>
+            <a:r>
+              <a:rPr lang="el-GR" sz="1400" dirty="0"/>
+              <a:t>) για την ανταλλαγή δεδομένων του συστήματος.</a:t>
+            </a:r>
+          </a:p>
+          <a:p>
+            <a:pPr marL="285750" indent="-285750">
+              <a:buFont typeface="Arial" panose="020B0604020202020204" pitchFamily="34" charset="0"/>
+              <a:buChar char="•"/>
+            </a:pPr>
+            <a:endParaRPr lang="el-GR" sz="1400" dirty="0"/>
+          </a:p>
+          <a:p>
+            <a:pPr marL="285750" indent="-285750">
+              <a:buFont typeface="Arial" panose="020B0604020202020204" pitchFamily="34" charset="0"/>
+              <a:buChar char="•"/>
+            </a:pPr>
+            <a:r>
+              <a:rPr lang="el-GR" sz="1400" b="1" dirty="0"/>
+              <a:t>Μοντέλο </a:t>
+            </a:r>
+            <a:r>
+              <a:rPr lang="el-GR" sz="1400" b="1" dirty="0" err="1"/>
+              <a:t>Publish</a:t>
+            </a:r>
+            <a:r>
+              <a:rPr lang="el-GR" sz="1400" b="1" dirty="0"/>
+              <a:t>/</a:t>
+            </a:r>
+            <a:r>
+              <a:rPr lang="el-GR" sz="1400" b="1" dirty="0" err="1"/>
+              <a:t>Subscribe</a:t>
+            </a:r>
+            <a:r>
+              <a:rPr lang="el-GR" sz="1400" b="1" dirty="0"/>
+              <a:t>:</a:t>
+            </a:r>
+            <a:r>
+              <a:rPr lang="el-GR" sz="1400" dirty="0"/>
+              <a:t> Υιοθέτηση ασύγχρονης αρχιτεκτονικής επικοινωνίας που εξασφαλίζει την πλήρη αποσύνδεση (</a:t>
+            </a:r>
+            <a:r>
+              <a:rPr lang="el-GR" sz="1400" dirty="0" err="1"/>
+              <a:t>decoupling</a:t>
+            </a:r>
+            <a:r>
+              <a:rPr lang="el-GR" sz="1400" dirty="0"/>
+              <a:t>) των επιμέρους υποσυστημάτων.</a:t>
+            </a:r>
+          </a:p>
+          <a:p>
+            <a:pPr marL="285750" indent="-285750">
+              <a:buFont typeface="Arial" panose="020B0604020202020204" pitchFamily="34" charset="0"/>
+              <a:buChar char="•"/>
+            </a:pPr>
+            <a:endParaRPr lang="el-GR" sz="1400" dirty="0"/>
+          </a:p>
+          <a:p>
+            <a:pPr marL="285750" indent="-285750">
+              <a:buFont typeface="Arial" panose="020B0604020202020204" pitchFamily="34" charset="0"/>
+              <a:buChar char="•"/>
+            </a:pPr>
+            <a:r>
+              <a:rPr lang="el-GR" sz="1400" b="1" dirty="0"/>
+              <a:t>Τηλεμετρία Πραγματικού Χρόνου:</a:t>
+            </a:r>
+            <a:r>
+              <a:rPr lang="el-GR" sz="1400" dirty="0"/>
+              <a:t> Απρόσκοπτη δρομολόγηση των μηνυμάτων μεταξύ των παραγωγών (</a:t>
+            </a:r>
+            <a:r>
+              <a:rPr lang="el-GR" sz="1400" dirty="0" err="1"/>
+              <a:t>Producers</a:t>
+            </a:r>
+            <a:r>
+              <a:rPr lang="el-GR" sz="1400" dirty="0"/>
+              <a:t>) και των καταναλωτών (</a:t>
+            </a:r>
+            <a:r>
+              <a:rPr lang="el-GR" sz="1400" dirty="0" err="1"/>
+              <a:t>Consumers</a:t>
+            </a:r>
+            <a:r>
+              <a:rPr lang="el-GR" sz="1400" dirty="0"/>
+              <a:t>, </a:t>
+            </a:r>
+            <a:r>
+              <a:rPr lang="el-GR" sz="1400" dirty="0" err="1"/>
+              <a:t>Archivers</a:t>
+            </a:r>
+            <a:r>
+              <a:rPr lang="el-GR" sz="1400" dirty="0"/>
+              <a:t>) μέσω του κεντρικού διακομιστή (</a:t>
+            </a:r>
+            <a:r>
+              <a:rPr lang="el-GR" sz="1400" dirty="0" err="1"/>
+              <a:t>Mosquitto</a:t>
+            </a:r>
+            <a:r>
+              <a:rPr lang="el-GR" sz="1400" dirty="0"/>
+              <a:t> </a:t>
+            </a:r>
+            <a:r>
+              <a:rPr lang="el-GR" sz="1400" dirty="0" err="1"/>
+              <a:t>Broker</a:t>
+            </a:r>
+            <a:r>
+              <a:rPr lang="el-GR" sz="1400" dirty="0"/>
+              <a:t>).</a:t>
+            </a:r>
+          </a:p>
+          <a:p>
+            <a:endParaRPr lang="el-GR" dirty="0"/>
+          </a:p>
+        </p:txBody>
+      </p:sp>
     </p:spTree>
     <p:extLst>
       <p:ext uri="{BB962C8B-B14F-4D97-AF65-F5344CB8AC3E}">
-        <p14:creationId xmlns:p14="http://schemas.microsoft.com/office/powerpoint/2010/main" val="397521647"/>
+        <p14:creationId xmlns:p14="http://schemas.microsoft.com/office/powerpoint/2010/main" val="2709530144"/>
       </p:ext>
     </p:extLst>
   </p:cSld>
@@ -14256,32 +14888,533 @@
           <a:bodyPr/>
           <a:lstStyle/>
           <a:p>
-            <a:endParaRPr lang="en-GB"/>
+            <a:r>
+              <a:rPr lang="en-GB" dirty="0"/>
+              <a:t>Semantic </a:t>
+            </a:r>
+            <a:r>
+              <a:rPr lang="en-GB" dirty="0" err="1"/>
+              <a:t>Modeling</a:t>
+            </a:r>
+            <a:endParaRPr lang="en-GB" dirty="0"/>
           </a:p>
         </p:txBody>
       </p:sp>
+      <p:pic>
+        <p:nvPicPr>
+          <p:cNvPr id="5" name="Εικόνα 4">
+            <a:extLst>
+              <a:ext uri="{FF2B5EF4-FFF2-40B4-BE49-F238E27FC236}">
+                <a16:creationId xmlns:a16="http://schemas.microsoft.com/office/drawing/2014/main" id="{4CE94583-6A3C-74FB-87E3-33E3B7D71837}"/>
+              </a:ext>
+            </a:extLst>
+          </p:cNvPr>
+          <p:cNvPicPr>
+            <a:picLocks noChangeAspect="1"/>
+          </p:cNvPicPr>
+          <p:nvPr/>
+        </p:nvPicPr>
+        <p:blipFill>
+          <a:blip r:embed="rId2"/>
+          <a:stretch>
+            <a:fillRect/>
+          </a:stretch>
+        </p:blipFill>
+        <p:spPr>
+          <a:xfrm>
+            <a:off x="4571998" y="1749734"/>
+            <a:ext cx="7302851" cy="4238111"/>
+          </a:xfrm>
+          <a:prstGeom prst="rect">
+            <a:avLst/>
+          </a:prstGeom>
+        </p:spPr>
+      </p:pic>
       <p:sp>
         <p:nvSpPr>
-          <p:cNvPr id="3" name="Table Placeholder 2">
+          <p:cNvPr id="20" name="Rectangle 12">
             <a:extLst>
               <a:ext uri="{FF2B5EF4-FFF2-40B4-BE49-F238E27FC236}">
-                <a16:creationId xmlns:a16="http://schemas.microsoft.com/office/drawing/2014/main" id="{E47B5B90-76E5-6A46-1ACC-5E68AEC74856}"/>
+                <a16:creationId xmlns:a16="http://schemas.microsoft.com/office/drawing/2014/main" id="{C45C3A36-D454-47CA-354F-7D251F3B4438}"/>
               </a:ext>
             </a:extLst>
           </p:cNvPr>
           <p:cNvSpPr>
-            <a:spLocks noGrp="1"/>
+            <a:spLocks noChangeArrowheads="1"/>
           </p:cNvSpPr>
-          <p:nvPr>
-            <p:ph type="tbl" sz="quarter" idx="12"/>
-          </p:nvPr>
+          <p:nvPr/>
         </p:nvSpPr>
-        <p:spPr/>
+        <p:spPr bwMode="auto">
+          <a:xfrm>
+            <a:off x="255640" y="1549679"/>
+            <a:ext cx="4218038" cy="3539430"/>
+          </a:xfrm>
+          <a:prstGeom prst="rect">
+            <a:avLst/>
+          </a:prstGeom>
+          <a:noFill/>
+          <a:ln>
+            <a:noFill/>
+          </a:ln>
+          <a:effectLst/>
+          <a:extLst>
+            <a:ext uri="{909E8E84-426E-40DD-AFC4-6F175D3DCCD1}">
+              <a14:hiddenFill xmlns:a14="http://schemas.microsoft.com/office/drawing/2010/main">
+                <a:solidFill>
+                  <a:schemeClr val="accent1"/>
+                </a:solidFill>
+              </a14:hiddenFill>
+            </a:ext>
+            <a:ext uri="{91240B29-F687-4F45-9708-019B960494DF}">
+              <a14:hiddenLine xmlns:a14="http://schemas.microsoft.com/office/drawing/2010/main" w="9525">
+                <a:solidFill>
+                  <a:schemeClr val="tx1"/>
+                </a:solidFill>
+                <a:miter lim="800000"/>
+                <a:headEnd/>
+                <a:tailEnd/>
+              </a14:hiddenLine>
+            </a:ext>
+            <a:ext uri="{AF507438-7753-43E0-B8FC-AC1667EBCBE1}">
+              <a14:hiddenEffects xmlns:a14="http://schemas.microsoft.com/office/drawing/2010/main">
+                <a:effectLst>
+                  <a:outerShdw dist="35921" dir="2700000" algn="ctr" rotWithShape="0">
+                    <a:schemeClr val="bg2"/>
+                  </a:outerShdw>
+                </a:effectLst>
+              </a14:hiddenEffects>
+            </a:ext>
+          </a:extLst>
+        </p:spPr>
         <p:txBody>
-          <a:bodyPr/>
+          <a:bodyPr vert="horz" wrap="square" lIns="91440" tIns="45720" rIns="91440" bIns="45720" numCol="1" anchor="ctr" anchorCtr="0" compatLnSpc="1">
+            <a:prstTxWarp prst="textNoShape">
+              <a:avLst/>
+            </a:prstTxWarp>
+            <a:spAutoFit/>
+          </a:bodyPr>
           <a:lstStyle/>
           <a:p>
-            <a:endParaRPr lang="en-GB"/>
+            <a:pPr marL="0" marR="0" lvl="0" indent="0" algn="l" defTabSz="914400" rtl="0" eaLnBrk="0" fontAlgn="base" latinLnBrk="0" hangingPunct="0">
+              <a:lnSpc>
+                <a:spcPct val="100000"/>
+              </a:lnSpc>
+              <a:spcBef>
+                <a:spcPct val="0"/>
+              </a:spcBef>
+              <a:spcAft>
+                <a:spcPct val="0"/>
+              </a:spcAft>
+              <a:buClrTx/>
+              <a:buSzTx/>
+              <a:buFontTx/>
+              <a:buChar char="•"/>
+              <a:tabLst/>
+            </a:pPr>
+            <a:r>
+              <a:rPr kumimoji="0" lang="el-GR" altLang="el-GR" sz="1400" b="1" i="0" u="none" strike="noStrike" cap="none" normalizeH="0" baseline="0" dirty="0">
+                <a:ln>
+                  <a:noFill/>
+                </a:ln>
+                <a:solidFill>
+                  <a:schemeClr val="tx1"/>
+                </a:solidFill>
+                <a:effectLst/>
+              </a:rPr>
+              <a:t>Εννοιολογική Αναπαράσταση:</a:t>
+            </a:r>
+            <a:r>
+              <a:rPr kumimoji="0" lang="el-GR" altLang="el-GR" sz="1400" b="0" i="0" u="none" strike="noStrike" cap="none" normalizeH="0" baseline="0" dirty="0">
+                <a:ln>
+                  <a:noFill/>
+                </a:ln>
+                <a:solidFill>
+                  <a:schemeClr val="tx1"/>
+                </a:solidFill>
+                <a:effectLst/>
+              </a:rPr>
+              <a:t> Μετάβαση από την απλή αποστολή ακατέργαστων μετρήσεων (</a:t>
+            </a:r>
+            <a:r>
+              <a:rPr kumimoji="0" lang="el-GR" altLang="el-GR" sz="1400" b="0" i="0" u="none" strike="noStrike" cap="none" normalizeH="0" baseline="0" dirty="0" err="1">
+                <a:ln>
+                  <a:noFill/>
+                </a:ln>
+                <a:solidFill>
+                  <a:schemeClr val="tx1"/>
+                </a:solidFill>
+                <a:effectLst/>
+              </a:rPr>
+              <a:t>raw</a:t>
+            </a:r>
+            <a:r>
+              <a:rPr kumimoji="0" lang="el-GR" altLang="el-GR" sz="1400" b="0" i="0" u="none" strike="noStrike" cap="none" normalizeH="0" baseline="0" dirty="0">
+                <a:ln>
+                  <a:noFill/>
+                </a:ln>
+                <a:solidFill>
+                  <a:schemeClr val="tx1"/>
+                </a:solidFill>
+                <a:effectLst/>
+              </a:rPr>
+              <a:t> </a:t>
+            </a:r>
+            <a:r>
+              <a:rPr kumimoji="0" lang="el-GR" altLang="el-GR" sz="1400" b="0" i="0" u="none" strike="noStrike" cap="none" normalizeH="0" baseline="0" dirty="0" err="1">
+                <a:ln>
+                  <a:noFill/>
+                </a:ln>
+                <a:solidFill>
+                  <a:schemeClr val="tx1"/>
+                </a:solidFill>
+                <a:effectLst/>
+              </a:rPr>
+              <a:t>data</a:t>
+            </a:r>
+            <a:r>
+              <a:rPr kumimoji="0" lang="el-GR" altLang="el-GR" sz="1400" b="0" i="0" u="none" strike="noStrike" cap="none" normalizeH="0" baseline="0" dirty="0">
+                <a:ln>
+                  <a:noFill/>
+                </a:ln>
+                <a:solidFill>
+                  <a:schemeClr val="tx1"/>
+                </a:solidFill>
+                <a:effectLst/>
+              </a:rPr>
+              <a:t>) σε δομημένη πληροφορία με σαφές πλαίσιο (</a:t>
+            </a:r>
+            <a:r>
+              <a:rPr kumimoji="0" lang="el-GR" altLang="el-GR" sz="1400" b="0" i="0" u="none" strike="noStrike" cap="none" normalizeH="0" baseline="0" dirty="0" err="1">
+                <a:ln>
+                  <a:noFill/>
+                </a:ln>
+                <a:solidFill>
+                  <a:schemeClr val="tx1"/>
+                </a:solidFill>
+                <a:effectLst/>
+              </a:rPr>
+              <a:t>context</a:t>
+            </a:r>
+            <a:r>
+              <a:rPr kumimoji="0" lang="el-GR" altLang="el-GR" sz="1400" b="0" i="0" u="none" strike="noStrike" cap="none" normalizeH="0" baseline="0" dirty="0">
+                <a:ln>
+                  <a:noFill/>
+                </a:ln>
+                <a:solidFill>
+                  <a:schemeClr val="tx1"/>
+                </a:solidFill>
+                <a:effectLst/>
+              </a:rPr>
+              <a:t>).</a:t>
+            </a:r>
+            <a:endParaRPr kumimoji="0" lang="en-US" altLang="el-GR" sz="1400" b="0" i="0" u="none" strike="noStrike" cap="none" normalizeH="0" baseline="0" dirty="0">
+              <a:ln>
+                <a:noFill/>
+              </a:ln>
+              <a:solidFill>
+                <a:schemeClr val="tx1"/>
+              </a:solidFill>
+              <a:effectLst/>
+            </a:endParaRPr>
+          </a:p>
+          <a:p>
+            <a:pPr marL="0" marR="0" lvl="0" indent="0" algn="l" defTabSz="914400" rtl="0" eaLnBrk="0" fontAlgn="base" latinLnBrk="0" hangingPunct="0">
+              <a:lnSpc>
+                <a:spcPct val="100000"/>
+              </a:lnSpc>
+              <a:spcBef>
+                <a:spcPct val="0"/>
+              </a:spcBef>
+              <a:spcAft>
+                <a:spcPct val="0"/>
+              </a:spcAft>
+              <a:buClrTx/>
+              <a:buSzTx/>
+              <a:tabLst/>
+            </a:pPr>
+            <a:endParaRPr kumimoji="0" lang="el-GR" altLang="el-GR" sz="1400" b="0" i="0" u="none" strike="noStrike" cap="none" normalizeH="0" baseline="0" dirty="0">
+              <a:ln>
+                <a:noFill/>
+              </a:ln>
+              <a:solidFill>
+                <a:schemeClr val="tx1"/>
+              </a:solidFill>
+              <a:effectLst/>
+            </a:endParaRPr>
+          </a:p>
+          <a:p>
+            <a:pPr marL="0" marR="0" lvl="0" indent="0" algn="l" defTabSz="914400" rtl="0" eaLnBrk="0" fontAlgn="base" latinLnBrk="0" hangingPunct="0">
+              <a:lnSpc>
+                <a:spcPct val="100000"/>
+              </a:lnSpc>
+              <a:spcBef>
+                <a:spcPct val="0"/>
+              </a:spcBef>
+              <a:spcAft>
+                <a:spcPct val="0"/>
+              </a:spcAft>
+              <a:buClrTx/>
+              <a:buSzTx/>
+              <a:buFontTx/>
+              <a:buChar char="•"/>
+              <a:tabLst/>
+            </a:pPr>
+            <a:r>
+              <a:rPr kumimoji="0" lang="el-GR" altLang="el-GR" sz="1400" b="1" i="0" u="none" strike="noStrike" cap="none" normalizeH="0" baseline="0" dirty="0">
+                <a:ln>
+                  <a:noFill/>
+                </a:ln>
+                <a:solidFill>
+                  <a:schemeClr val="tx1"/>
+                </a:solidFill>
+                <a:effectLst/>
+              </a:rPr>
+              <a:t>Υιοθέτηση Διεθνών Προτύπων:</a:t>
+            </a:r>
+            <a:r>
+              <a:rPr kumimoji="0" lang="el-GR" altLang="el-GR" sz="1400" b="0" i="0" u="none" strike="noStrike" cap="none" normalizeH="0" baseline="0" dirty="0">
+                <a:ln>
+                  <a:noFill/>
+                </a:ln>
+                <a:solidFill>
+                  <a:schemeClr val="tx1"/>
+                </a:solidFill>
+                <a:effectLst/>
+              </a:rPr>
+              <a:t> Αξιοποίηση τεχνολογιών του Σημασιολογικού Ιστού (</a:t>
+            </a:r>
+            <a:r>
+              <a:rPr kumimoji="0" lang="el-GR" altLang="el-GR" sz="1400" b="0" i="0" u="none" strike="noStrike" cap="none" normalizeH="0" baseline="0" dirty="0" err="1">
+                <a:ln>
+                  <a:noFill/>
+                </a:ln>
+                <a:solidFill>
+                  <a:schemeClr val="tx1"/>
+                </a:solidFill>
+                <a:effectLst/>
+              </a:rPr>
+              <a:t>Semantic</a:t>
+            </a:r>
+            <a:r>
+              <a:rPr kumimoji="0" lang="el-GR" altLang="el-GR" sz="1400" b="0" i="0" u="none" strike="noStrike" cap="none" normalizeH="0" baseline="0" dirty="0">
+                <a:ln>
+                  <a:noFill/>
+                </a:ln>
+                <a:solidFill>
+                  <a:schemeClr val="tx1"/>
+                </a:solidFill>
+                <a:effectLst/>
+              </a:rPr>
+              <a:t> Web) και εξειδικευμένων οντολογιών, όπως </a:t>
+            </a:r>
+            <a:r>
+              <a:rPr kumimoji="0" lang="el-GR" altLang="el-GR" sz="1400" b="1" i="0" u="none" strike="noStrike" cap="none" normalizeH="0" baseline="0" dirty="0">
+                <a:ln>
+                  <a:noFill/>
+                </a:ln>
+                <a:solidFill>
+                  <a:schemeClr val="tx1"/>
+                </a:solidFill>
+                <a:effectLst/>
+              </a:rPr>
+              <a:t>SOSA</a:t>
+            </a:r>
+            <a:r>
+              <a:rPr kumimoji="0" lang="el-GR" altLang="el-GR" sz="1400" b="0" i="0" u="none" strike="noStrike" cap="none" normalizeH="0" baseline="0" dirty="0">
+                <a:ln>
+                  <a:noFill/>
+                </a:ln>
+                <a:solidFill>
+                  <a:schemeClr val="tx1"/>
+                </a:solidFill>
+                <a:effectLst/>
+              </a:rPr>
+              <a:t> (αισθητήρες/παρατηρήσεις) και </a:t>
+            </a:r>
+            <a:r>
+              <a:rPr kumimoji="0" lang="el-GR" altLang="el-GR" sz="1400" b="1" i="0" u="none" strike="noStrike" cap="none" normalizeH="0" baseline="0" dirty="0">
+                <a:ln>
+                  <a:noFill/>
+                </a:ln>
+                <a:solidFill>
+                  <a:schemeClr val="tx1"/>
+                </a:solidFill>
+                <a:effectLst/>
+              </a:rPr>
+              <a:t>SAREF</a:t>
+            </a:r>
+            <a:r>
+              <a:rPr kumimoji="0" lang="el-GR" altLang="el-GR" sz="1400" b="0" i="0" u="none" strike="noStrike" cap="none" normalizeH="0" baseline="0" dirty="0">
+                <a:ln>
+                  <a:noFill/>
+                </a:ln>
+                <a:solidFill>
+                  <a:schemeClr val="tx1"/>
+                </a:solidFill>
+                <a:effectLst/>
+              </a:rPr>
+              <a:t> (συσκευές), μέσω του </a:t>
+            </a:r>
+            <a:r>
+              <a:rPr kumimoji="0" lang="el-GR" altLang="el-GR" sz="1400" b="0" i="0" u="none" strike="noStrike" cap="none" normalizeH="0" baseline="0" dirty="0" err="1">
+                <a:ln>
+                  <a:noFill/>
+                </a:ln>
+                <a:solidFill>
+                  <a:schemeClr val="tx1"/>
+                </a:solidFill>
+                <a:effectLst/>
+              </a:rPr>
+              <a:t>μορφότυπου</a:t>
+            </a:r>
+            <a:r>
+              <a:rPr kumimoji="0" lang="el-GR" altLang="el-GR" sz="1400" b="0" i="0" u="none" strike="noStrike" cap="none" normalizeH="0" baseline="0" dirty="0">
+                <a:ln>
+                  <a:noFill/>
+                </a:ln>
+                <a:solidFill>
+                  <a:schemeClr val="tx1"/>
+                </a:solidFill>
+                <a:effectLst/>
+              </a:rPr>
+              <a:t> </a:t>
+            </a:r>
+            <a:r>
+              <a:rPr kumimoji="0" lang="el-GR" altLang="el-GR" sz="1400" b="1" i="0" u="none" strike="noStrike" cap="none" normalizeH="0" baseline="0" dirty="0">
+                <a:ln>
+                  <a:noFill/>
+                </a:ln>
+                <a:solidFill>
+                  <a:schemeClr val="tx1"/>
+                </a:solidFill>
+                <a:effectLst/>
+              </a:rPr>
+              <a:t>JSON-LD</a:t>
+            </a:r>
+            <a:r>
+              <a:rPr kumimoji="0" lang="el-GR" altLang="el-GR" sz="1400" b="0" i="0" u="none" strike="noStrike" cap="none" normalizeH="0" baseline="0" dirty="0">
+                <a:ln>
+                  <a:noFill/>
+                </a:ln>
+                <a:solidFill>
+                  <a:schemeClr val="tx1"/>
+                </a:solidFill>
+                <a:effectLst/>
+              </a:rPr>
+              <a:t>.</a:t>
+            </a:r>
+            <a:endParaRPr kumimoji="0" lang="en-US" altLang="el-GR" sz="1400" b="0" i="0" u="none" strike="noStrike" cap="none" normalizeH="0" baseline="0" dirty="0">
+              <a:ln>
+                <a:noFill/>
+              </a:ln>
+              <a:solidFill>
+                <a:schemeClr val="tx1"/>
+              </a:solidFill>
+              <a:effectLst/>
+            </a:endParaRPr>
+          </a:p>
+          <a:p>
+            <a:pPr marL="0" marR="0" lvl="0" indent="0" algn="l" defTabSz="914400" rtl="0" eaLnBrk="0" fontAlgn="base" latinLnBrk="0" hangingPunct="0">
+              <a:lnSpc>
+                <a:spcPct val="100000"/>
+              </a:lnSpc>
+              <a:spcBef>
+                <a:spcPct val="0"/>
+              </a:spcBef>
+              <a:spcAft>
+                <a:spcPct val="0"/>
+              </a:spcAft>
+              <a:buClrTx/>
+              <a:buSzTx/>
+              <a:tabLst/>
+            </a:pPr>
+            <a:endParaRPr kumimoji="0" lang="el-GR" altLang="el-GR" sz="1400" b="0" i="0" u="none" strike="noStrike" cap="none" normalizeH="0" baseline="0" dirty="0">
+              <a:ln>
+                <a:noFill/>
+              </a:ln>
+              <a:solidFill>
+                <a:schemeClr val="tx1"/>
+              </a:solidFill>
+              <a:effectLst/>
+            </a:endParaRPr>
+          </a:p>
+          <a:p>
+            <a:pPr marL="0" marR="0" lvl="0" indent="0" algn="l" defTabSz="914400" rtl="0" eaLnBrk="0" fontAlgn="base" latinLnBrk="0" hangingPunct="0">
+              <a:lnSpc>
+                <a:spcPct val="100000"/>
+              </a:lnSpc>
+              <a:spcBef>
+                <a:spcPct val="0"/>
+              </a:spcBef>
+              <a:spcAft>
+                <a:spcPct val="0"/>
+              </a:spcAft>
+              <a:buClrTx/>
+              <a:buSzTx/>
+              <a:buFontTx/>
+              <a:buChar char="•"/>
+              <a:tabLst/>
+            </a:pPr>
+            <a:r>
+              <a:rPr kumimoji="0" lang="el-GR" altLang="el-GR" sz="1400" b="1" i="0" u="none" strike="noStrike" cap="none" normalizeH="0" baseline="0" dirty="0" err="1">
+                <a:ln>
+                  <a:noFill/>
+                </a:ln>
+                <a:solidFill>
+                  <a:schemeClr val="tx1"/>
+                </a:solidFill>
+                <a:effectLst/>
+              </a:rPr>
+              <a:t>Διαλειτουργικότητα</a:t>
+            </a:r>
+            <a:r>
+              <a:rPr kumimoji="0" lang="el-GR" altLang="el-GR" sz="1400" b="1" i="0" u="none" strike="noStrike" cap="none" normalizeH="0" baseline="0" dirty="0">
+                <a:ln>
+                  <a:noFill/>
+                </a:ln>
+                <a:solidFill>
+                  <a:schemeClr val="tx1"/>
+                </a:solidFill>
+                <a:effectLst/>
+              </a:rPr>
+              <a:t> (</a:t>
+            </a:r>
+            <a:r>
+              <a:rPr kumimoji="0" lang="el-GR" altLang="el-GR" sz="1400" b="1" i="0" u="none" strike="noStrike" cap="none" normalizeH="0" baseline="0" dirty="0" err="1">
+                <a:ln>
+                  <a:noFill/>
+                </a:ln>
+                <a:solidFill>
+                  <a:schemeClr val="tx1"/>
+                </a:solidFill>
+                <a:effectLst/>
+              </a:rPr>
+              <a:t>Interoperability</a:t>
+            </a:r>
+            <a:r>
+              <a:rPr kumimoji="0" lang="el-GR" altLang="el-GR" sz="1400" b="1" i="0" u="none" strike="noStrike" cap="none" normalizeH="0" baseline="0" dirty="0">
+                <a:ln>
+                  <a:noFill/>
+                </a:ln>
+                <a:solidFill>
+                  <a:schemeClr val="tx1"/>
+                </a:solidFill>
+                <a:effectLst/>
+              </a:rPr>
+              <a:t>):</a:t>
+            </a:r>
+            <a:r>
+              <a:rPr kumimoji="0" lang="el-GR" altLang="el-GR" sz="1400" b="0" i="0" u="none" strike="noStrike" cap="none" normalizeH="0" baseline="0" dirty="0">
+                <a:ln>
+                  <a:noFill/>
+                </a:ln>
+                <a:solidFill>
+                  <a:schemeClr val="tx1"/>
+                </a:solidFill>
+                <a:effectLst/>
+              </a:rPr>
+              <a:t> Πλήρης μηχανική κατανόηση της τοπολογίας από το σύστημα (π.χ. συσχέτιση του αισθητήρα PIR με τον συγκεκριμένο κάδο και τον περιβάλλοντα χώρο του τμήματος)</a:t>
+            </a:r>
           </a:p>
         </p:txBody>
       </p:sp>
@@ -14336,35 +15469,45 @@
           <a:bodyPr/>
           <a:lstStyle/>
           <a:p>
-            <a:endParaRPr lang="en-GB"/>
+            <a:r>
+              <a:rPr lang="en-GB" dirty="0"/>
+              <a:t>REST + ASYNCAPI</a:t>
+            </a:r>
           </a:p>
         </p:txBody>
       </p:sp>
-      <p:sp>
-        <p:nvSpPr>
-          <p:cNvPr id="3" name="Content Placeholder 2">
+      <p:pic>
+        <p:nvPicPr>
+          <p:cNvPr id="6" name="Θέση περιεχομένου 5">
             <a:extLst>
               <a:ext uri="{FF2B5EF4-FFF2-40B4-BE49-F238E27FC236}">
-                <a16:creationId xmlns:a16="http://schemas.microsoft.com/office/drawing/2014/main" id="{1AB21E4A-306E-A089-D444-A59D8981EA5C}"/>
+                <a16:creationId xmlns:a16="http://schemas.microsoft.com/office/drawing/2014/main" id="{2570BF42-EBC2-E85C-129B-AEB82214157A}"/>
               </a:ext>
             </a:extLst>
           </p:cNvPr>
-          <p:cNvSpPr>
-            <a:spLocks noGrp="1"/>
-          </p:cNvSpPr>
+          <p:cNvPicPr>
+            <a:picLocks noGrp="1" noChangeAspect="1"/>
+          </p:cNvPicPr>
           <p:nvPr>
             <p:ph sz="quarter" idx="13"/>
           </p:nvPr>
-        </p:nvSpPr>
-        <p:spPr/>
-        <p:txBody>
-          <a:bodyPr/>
-          <a:lstStyle/>
-          <a:p>
-            <a:endParaRPr lang="en-GB"/>
-          </a:p>
-        </p:txBody>
-      </p:sp>
+        </p:nvPicPr>
+        <p:blipFill>
+          <a:blip r:embed="rId2"/>
+          <a:stretch>
+            <a:fillRect/>
+          </a:stretch>
+        </p:blipFill>
+        <p:spPr>
+          <a:xfrm>
+            <a:off x="687388" y="2544714"/>
+            <a:ext cx="3795712" cy="2687735"/>
+          </a:xfrm>
+          <a:prstGeom prst="rect">
+            <a:avLst/>
+          </a:prstGeom>
+        </p:spPr>
+      </p:pic>
       <p:sp>
         <p:nvSpPr>
           <p:cNvPr id="4" name="Table Placeholder 3">
@@ -14390,10 +15533,152 @@
           </a:p>
         </p:txBody>
       </p:sp>
+      <p:pic>
+        <p:nvPicPr>
+          <p:cNvPr id="8" name="Εικόνα 7">
+            <a:extLst>
+              <a:ext uri="{FF2B5EF4-FFF2-40B4-BE49-F238E27FC236}">
+                <a16:creationId xmlns:a16="http://schemas.microsoft.com/office/drawing/2014/main" id="{BCA4473D-CC30-D4B3-7473-09C0C9F5977D}"/>
+              </a:ext>
+            </a:extLst>
+          </p:cNvPr>
+          <p:cNvPicPr>
+            <a:picLocks noChangeAspect="1"/>
+          </p:cNvPicPr>
+          <p:nvPr/>
+        </p:nvPicPr>
+        <p:blipFill>
+          <a:blip r:embed="rId3"/>
+          <a:stretch>
+            <a:fillRect/>
+          </a:stretch>
+        </p:blipFill>
+        <p:spPr>
+          <a:xfrm>
+            <a:off x="5054600" y="1975105"/>
+            <a:ext cx="6595475" cy="3741174"/>
+          </a:xfrm>
+          <a:prstGeom prst="rect">
+            <a:avLst/>
+          </a:prstGeom>
+        </p:spPr>
+      </p:pic>
     </p:spTree>
     <p:extLst>
       <p:ext uri="{BB962C8B-B14F-4D97-AF65-F5344CB8AC3E}">
         <p14:creationId xmlns:p14="http://schemas.microsoft.com/office/powerpoint/2010/main" val="3049535112"/>
+      </p:ext>
+    </p:extLst>
+  </p:cSld>
+  <p:clrMapOvr>
+    <a:masterClrMapping/>
+  </p:clrMapOvr>
+</p:sld>
+</file>
+
+<file path=ppt/slides/slide7.xml><?xml version="1.0" encoding="utf-8"?>
+<p:sld xmlns:a="http://schemas.openxmlformats.org/drawingml/2006/main" xmlns:r="http://schemas.openxmlformats.org/officeDocument/2006/relationships" xmlns:p="http://schemas.openxmlformats.org/presentationml/2006/main">
+  <p:cSld>
+    <p:spTree>
+      <p:nvGrpSpPr>
+        <p:cNvPr id="1" name=""/>
+        <p:cNvGrpSpPr/>
+        <p:nvPr/>
+      </p:nvGrpSpPr>
+      <p:grpSpPr>
+        <a:xfrm>
+          <a:off x="0" y="0"/>
+          <a:ext cx="0" cy="0"/>
+          <a:chOff x="0" y="0"/>
+          <a:chExt cx="0" cy="0"/>
+        </a:xfrm>
+      </p:grpSpPr>
+      <p:sp>
+        <p:nvSpPr>
+          <p:cNvPr id="2" name="Τίτλος 1">
+            <a:extLst>
+              <a:ext uri="{FF2B5EF4-FFF2-40B4-BE49-F238E27FC236}">
+                <a16:creationId xmlns:a16="http://schemas.microsoft.com/office/drawing/2014/main" id="{B7F24CFB-8BB3-2631-1187-8E31A392C965}"/>
+              </a:ext>
+            </a:extLst>
+          </p:cNvPr>
+          <p:cNvSpPr>
+            <a:spLocks noGrp="1"/>
+          </p:cNvSpPr>
+          <p:nvPr>
+            <p:ph type="title"/>
+          </p:nvPr>
+        </p:nvSpPr>
+        <p:spPr/>
+        <p:txBody>
+          <a:bodyPr/>
+          <a:lstStyle/>
+          <a:p>
+            <a:r>
+              <a:rPr lang="en-US" dirty="0"/>
+              <a:t>Virtual Sensors, Home Assistant and Low Code Platforms</a:t>
+            </a:r>
+            <a:br>
+              <a:rPr lang="en-US" dirty="0"/>
+            </a:br>
+            <a:endParaRPr lang="el-GR" dirty="0"/>
+          </a:p>
+        </p:txBody>
+      </p:sp>
+      <p:sp>
+        <p:nvSpPr>
+          <p:cNvPr id="3" name="Θέση περιεχομένου 2">
+            <a:extLst>
+              <a:ext uri="{FF2B5EF4-FFF2-40B4-BE49-F238E27FC236}">
+                <a16:creationId xmlns:a16="http://schemas.microsoft.com/office/drawing/2014/main" id="{5B0CF87F-EEBF-755F-6DFB-9D2378C41314}"/>
+              </a:ext>
+            </a:extLst>
+          </p:cNvPr>
+          <p:cNvSpPr>
+            <a:spLocks noGrp="1"/>
+          </p:cNvSpPr>
+          <p:nvPr>
+            <p:ph sz="quarter" idx="13"/>
+          </p:nvPr>
+        </p:nvSpPr>
+        <p:spPr/>
+        <p:txBody>
+          <a:bodyPr/>
+          <a:lstStyle/>
+          <a:p>
+            <a:endParaRPr lang="el-GR" dirty="0"/>
+          </a:p>
+        </p:txBody>
+      </p:sp>
+      <p:sp>
+        <p:nvSpPr>
+          <p:cNvPr id="4" name="Θέση πίνακα 3">
+            <a:extLst>
+              <a:ext uri="{FF2B5EF4-FFF2-40B4-BE49-F238E27FC236}">
+                <a16:creationId xmlns:a16="http://schemas.microsoft.com/office/drawing/2014/main" id="{AC163FF2-1F85-07C3-ED3E-5E666B0CC72F}"/>
+              </a:ext>
+            </a:extLst>
+          </p:cNvPr>
+          <p:cNvSpPr>
+            <a:spLocks noGrp="1"/>
+          </p:cNvSpPr>
+          <p:nvPr>
+            <p:ph type="tbl" sz="quarter" idx="14"/>
+          </p:nvPr>
+        </p:nvSpPr>
+        <p:spPr/>
+        <p:txBody>
+          <a:bodyPr/>
+          <a:lstStyle/>
+          <a:p>
+            <a:endParaRPr lang="el-GR"/>
+          </a:p>
+        </p:txBody>
+      </p:sp>
+    </p:spTree>
+    <p:extLst>
+      <p:ext uri="{BB962C8B-B14F-4D97-AF65-F5344CB8AC3E}">
+        <p14:creationId xmlns:p14="http://schemas.microsoft.com/office/powerpoint/2010/main" val="889288063"/>
       </p:ext>
     </p:extLst>
   </p:cSld>
@@ -15306,6 +16591,15 @@
 </file>
 
 <file path=customXml/item1.xml><?xml version="1.0" encoding="utf-8"?>
+<?mso-contentType ?>
+<FormTemplates xmlns="http://schemas.microsoft.com/sharepoint/v3/contenttype/forms">
+  <Display>DocumentLibraryForm</Display>
+  <Edit>DocumentLibraryForm</Edit>
+  <New>DocumentLibraryForm</New>
+</FormTemplates>
+</file>
+
+<file path=customXml/item2.xml><?xml version="1.0" encoding="utf-8"?>
 <ct:contentTypeSchema xmlns:ct="http://schemas.microsoft.com/office/2006/metadata/contentType" xmlns:ma="http://schemas.microsoft.com/office/2006/metadata/properties/metaAttributes" ct:_="" ma:_="" ma:contentTypeName="Document" ma:contentTypeID="0x01010079F111ED35F8CC479449609E8A0923A6" ma:contentTypeVersion="28" ma:contentTypeDescription="Create a new document." ma:contentTypeScope="" ma:versionID="60f5a4f2d2b0abadcf532d48ebf9cb71">
   <xsd:schema xmlns:xsd="http://www.w3.org/2001/XMLSchema" xmlns:xs="http://www.w3.org/2001/XMLSchema" xmlns:p="http://schemas.microsoft.com/office/2006/metadata/properties" xmlns:ns1="http://schemas.microsoft.com/sharepoint/v3" xmlns:ns2="71af3243-3dd4-4a8d-8c0d-dd76da1f02a5" xmlns:ns3="16c05727-aa75-4e4a-9b5f-8a80a1165891" xmlns:ns4="230e9df3-be65-4c73-a93b-d1236ebd677e" targetNamespace="http://schemas.microsoft.com/office/2006/metadata/properties" ma:root="true" ma:fieldsID="7dd78129e6a1811f84807ad11c651531" ns1:_="" ns2:_="" ns3:_="" ns4:_="">
     <xsd:import namespace="http://schemas.microsoft.com/sharepoint/v3"/>
@@ -15617,7 +16911,7 @@
 </ct:contentTypeSchema>
 </file>
 
-<file path=customXml/item2.xml><?xml version="1.0" encoding="utf-8"?>
+<file path=customXml/item3.xml><?xml version="1.0" encoding="utf-8"?>
 <p:properties xmlns:p="http://schemas.microsoft.com/office/2006/metadata/properties" xmlns:xsi="http://www.w3.org/2001/XMLSchema-instance" xmlns:pc="http://schemas.microsoft.com/office/infopath/2007/PartnerControls">
   <documentManagement>
     <_ip_UnifiedCompliancePolicyUIAction xmlns="http://schemas.microsoft.com/sharepoint/v3" xsi:nil="true"/>
@@ -15637,16 +16931,15 @@
 </p:properties>
 </file>
 
-<file path=customXml/item3.xml><?xml version="1.0" encoding="utf-8"?>
-<?mso-contentType ?>
-<FormTemplates xmlns="http://schemas.microsoft.com/sharepoint/v3/contenttype/forms">
-  <Display>DocumentLibraryForm</Display>
-  <Edit>DocumentLibraryForm</Edit>
-  <New>DocumentLibraryForm</New>
-</FormTemplates>
+<file path=customXml/itemProps1.xml><?xml version="1.0" encoding="utf-8"?>
+<ds:datastoreItem xmlns:ds="http://schemas.openxmlformats.org/officeDocument/2006/customXml" ds:itemID="{060367E2-A4EF-4F83-9408-21F92ABD6937}">
+  <ds:schemaRefs>
+    <ds:schemaRef ds:uri="http://schemas.microsoft.com/sharepoint/v3/contenttype/forms"/>
+  </ds:schemaRefs>
+</ds:datastoreItem>
 </file>
 
-<file path=customXml/itemProps1.xml><?xml version="1.0" encoding="utf-8"?>
+<file path=customXml/itemProps2.xml><?xml version="1.0" encoding="utf-8"?>
 <ds:datastoreItem xmlns:ds="http://schemas.openxmlformats.org/officeDocument/2006/customXml" ds:itemID="{DA0F62E9-537D-4B86-A5A3-DCAED002D6F5}">
   <ds:schemaRefs>
     <ds:schemaRef ds:uri="http://schemas.microsoft.com/office/2006/metadata/contentType"/>
@@ -15667,7 +16960,7 @@
 </ds:datastoreItem>
 </file>
 
-<file path=customXml/itemProps2.xml><?xml version="1.0" encoding="utf-8"?>
+<file path=customXml/itemProps3.xml><?xml version="1.0" encoding="utf-8"?>
 <ds:datastoreItem xmlns:ds="http://schemas.openxmlformats.org/officeDocument/2006/customXml" ds:itemID="{E9E9A08A-3D48-4730-8B6D-01A15F4E9B00}">
   <ds:schemaRefs>
     <ds:schemaRef ds:uri="http://schemas.microsoft.com/office/2006/metadata/properties"/>
@@ -15679,14 +16972,6 @@
 </ds:datastoreItem>
 </file>
 
-<file path=customXml/itemProps3.xml><?xml version="1.0" encoding="utf-8"?>
-<ds:datastoreItem xmlns:ds="http://schemas.openxmlformats.org/officeDocument/2006/customXml" ds:itemID="{060367E2-A4EF-4F83-9408-21F92ABD6937}">
-  <ds:schemaRefs>
-    <ds:schemaRef ds:uri="http://schemas.microsoft.com/sharepoint/v3/contenttype/forms"/>
-  </ds:schemaRefs>
-</ds:datastoreItem>
-</file>
-
 <file path=docMetadata/LabelInfo.xml><?xml version="1.0" encoding="utf-8"?>
 <clbl:labelList xmlns:clbl="http://schemas.microsoft.com/office/2020/mipLabelMetadata"/>
 </file>
--- a/presentation/team05_presentation.pptx
+++ b/presentation/team05_presentation.pptx
@@ -5,10 +5,10 @@
     <p:sldMasterId id="2147483648" r:id="rId4"/>
   </p:sldMasterIdLst>
   <p:notesMasterIdLst>
-    <p:notesMasterId r:id="rId12"/>
+    <p:notesMasterId r:id="rId14"/>
   </p:notesMasterIdLst>
   <p:handoutMasterIdLst>
-    <p:handoutMasterId r:id="rId13"/>
+    <p:handoutMasterId r:id="rId15"/>
   </p:handoutMasterIdLst>
   <p:sldIdLst>
     <p:sldId id="268" r:id="rId5"/>
@@ -17,7 +17,9 @@
     <p:sldId id="334" r:id="rId8"/>
     <p:sldId id="336" r:id="rId9"/>
     <p:sldId id="333" r:id="rId10"/>
-    <p:sldId id="337" r:id="rId11"/>
+    <p:sldId id="339" r:id="rId11"/>
+    <p:sldId id="337" r:id="rId12"/>
+    <p:sldId id="340" r:id="rId13"/>
   </p:sldIdLst>
   <p:sldSz cx="12192000" cy="6858000"/>
   <p:notesSz cx="6858000" cy="9144000"/>
@@ -4341,7 +4343,7 @@
           <a:p>
             <a:fld id="{29AD50C4-F1A5-A448-9E63-11D939CA9B7B}" type="datetimeFigureOut">
               <a:rPr lang="en-US" smtClean="0"/>
-              <a:t>5/30/2026</a:t>
+              <a:t>5/31/2026</a:t>
             </a:fld>
             <a:endParaRPr lang="en-US" dirty="0"/>
           </a:p>
@@ -4518,7 +4520,7 @@
           <a:p>
             <a:fld id="{3AD818D7-DF4E-4C59-9BBA-548250DAC33A}" type="datetimeFigureOut">
               <a:rPr lang="en-US" smtClean="0"/>
-              <a:t>5/30/2026</a:t>
+              <a:t>5/31/2026</a:t>
             </a:fld>
             <a:endParaRPr lang="en-US" dirty="0"/>
           </a:p>
@@ -5799,7 +5801,7 @@
             <a:fld id="{88FD4BCE-35F6-425E-BEE7-07902E8BBFFC}" type="datetimeFigureOut">
               <a:rPr lang="en-US" smtClean="0"/>
               <a:pPr/>
-              <a:t>5/30/2026</a:t>
+              <a:t>5/31/2026</a:t>
             </a:fld>
             <a:endParaRPr lang="en-US" dirty="0"/>
           </a:p>
@@ -7342,7 +7344,7 @@
             <a:fld id="{88FD4BCE-35F6-425E-BEE7-07902E8BBFFC}" type="datetimeFigureOut">
               <a:rPr lang="en-US" smtClean="0"/>
               <a:pPr/>
-              <a:t>5/30/2026</a:t>
+              <a:t>5/31/2026</a:t>
             </a:fld>
             <a:endParaRPr lang="en-US" dirty="0"/>
           </a:p>
@@ -8287,7 +8289,7 @@
             <a:fld id="{88FD4BCE-35F6-425E-BEE7-07902E8BBFFC}" type="datetimeFigureOut">
               <a:rPr lang="en-US" smtClean="0"/>
               <a:pPr/>
-              <a:t>5/30/2026</a:t>
+              <a:t>5/31/2026</a:t>
             </a:fld>
             <a:endParaRPr lang="en-US" dirty="0"/>
           </a:p>
@@ -9838,7 +9840,7 @@
             <a:fld id="{88FD4BCE-35F6-425E-BEE7-07902E8BBFFC}" type="datetimeFigureOut">
               <a:rPr lang="en-US" smtClean="0"/>
               <a:pPr/>
-              <a:t>5/30/2026</a:t>
+              <a:t>5/31/2026</a:t>
             </a:fld>
             <a:endParaRPr lang="en-US" dirty="0"/>
           </a:p>
@@ -11468,7 +11470,7 @@
             <a:fld id="{88FD4BCE-35F6-425E-BEE7-07902E8BBFFC}" type="datetimeFigureOut">
               <a:rPr lang="en-US" smtClean="0"/>
               <a:pPr/>
-              <a:t>5/30/2026</a:t>
+              <a:t>5/31/2026</a:t>
             </a:fld>
             <a:endParaRPr lang="en-US" dirty="0"/>
           </a:p>
@@ -11928,7 +11930,7 @@
             <a:fld id="{88FD4BCE-35F6-425E-BEE7-07902E8BBFFC}" type="datetimeFigureOut">
               <a:rPr lang="en-US" smtClean="0"/>
               <a:pPr/>
-              <a:t>5/30/2026</a:t>
+              <a:t>5/31/2026</a:t>
             </a:fld>
             <a:endParaRPr lang="en-US" dirty="0"/>
           </a:p>
@@ -12414,7 +12416,7 @@
             <a:fld id="{88FD4BCE-35F6-425E-BEE7-07902E8BBFFC}" type="datetimeFigureOut">
               <a:rPr lang="en-US" smtClean="0"/>
               <a:pPr/>
-              <a:t>5/30/2026</a:t>
+              <a:t>5/31/2026</a:t>
             </a:fld>
             <a:endParaRPr lang="en-US" dirty="0"/>
           </a:p>
@@ -12755,7 +12757,7 @@
             <a:fld id="{88FD4BCE-35F6-425E-BEE7-07902E8BBFFC}" type="datetimeFigureOut">
               <a:rPr lang="en-US" smtClean="0"/>
               <a:pPr/>
-              <a:t>5/30/2026</a:t>
+              <a:t>5/31/2026</a:t>
             </a:fld>
             <a:endParaRPr lang="en-US" dirty="0"/>
           </a:p>
@@ -13212,7 +13214,7 @@
             <a:fld id="{88FD4BCE-35F6-425E-BEE7-07902E8BBFFC}" type="datetimeFigureOut">
               <a:rPr lang="en-US" smtClean="0"/>
               <a:pPr/>
-              <a:t>5/30/2026</a:t>
+              <a:t>5/31/2026</a:t>
             </a:fld>
             <a:endParaRPr lang="en-US" dirty="0"/>
           </a:p>
@@ -13772,8 +13774,8 @@
         </p:nvSpPr>
         <p:spPr>
           <a:xfrm>
-            <a:off x="822957" y="3438143"/>
-            <a:ext cx="7040880" cy="1015663"/>
+            <a:off x="1088427" y="3420069"/>
+            <a:ext cx="7040880" cy="1384995"/>
           </a:xfrm>
           <a:prstGeom prst="rect">
             <a:avLst/>
@@ -13787,22 +13789,28 @@
           <a:lstStyle/>
           <a:p>
             <a:r>
-              <a:rPr lang="en-US" sz="2000" dirty="0"/>
-              <a:t>Name 1</a:t>
-            </a:r>
-          </a:p>
-          <a:p>
-            <a:r>
-              <a:rPr lang="en-US" sz="2000" dirty="0"/>
-              <a:t>Name 2</a:t>
-            </a:r>
-          </a:p>
-          <a:p>
-            <a:r>
-              <a:rPr lang="en-US" sz="2000" dirty="0"/>
-              <a:t>Name 3</a:t>
-            </a:r>
-            <a:endParaRPr lang="en-GB" sz="2000" dirty="0"/>
+              <a:rPr lang="el-GR" sz="2800" dirty="0"/>
+              <a:t>Μήτσης Αθανάσιος</a:t>
+            </a:r>
+            <a:endParaRPr lang="en-US" sz="2800" dirty="0"/>
+          </a:p>
+          <a:p>
+            <a:r>
+              <a:rPr lang="el-GR" sz="2800" dirty="0"/>
+              <a:t>Ρούσσης Βασίλειος</a:t>
+            </a:r>
+            <a:endParaRPr lang="en-US" sz="2800" dirty="0"/>
+          </a:p>
+          <a:p>
+            <a:r>
+              <a:rPr lang="el-GR" sz="2800" dirty="0" err="1"/>
+              <a:t>Φιλόπουλος</a:t>
+            </a:r>
+            <a:r>
+              <a:rPr lang="el-GR" sz="2800" dirty="0"/>
+              <a:t> Δημήτριος</a:t>
+            </a:r>
+            <a:endParaRPr lang="en-GB" sz="2800" dirty="0"/>
           </a:p>
         </p:txBody>
       </p:sp>
@@ -14002,53 +14010,6 @@
           </a:p>
         </p:txBody>
       </p:sp>
-      <p:pic>
-        <p:nvPicPr>
-          <p:cNvPr id="1036" name="Picture 12">
-            <a:extLst>
-              <a:ext uri="{FF2B5EF4-FFF2-40B4-BE49-F238E27FC236}">
-                <a16:creationId xmlns:a16="http://schemas.microsoft.com/office/drawing/2014/main" id="{E786C696-602B-4AA9-9247-3E0EE6B702FC}"/>
-              </a:ext>
-            </a:extLst>
-          </p:cNvPr>
-          <p:cNvPicPr>
-            <a:picLocks noChangeAspect="1" noChangeArrowheads="1"/>
-          </p:cNvPicPr>
-          <p:nvPr/>
-        </p:nvPicPr>
-        <p:blipFill>
-          <a:blip r:embed="rId3">
-            <a:extLst>
-              <a:ext uri="{28A0092B-C50C-407E-A947-70E740481C1C}">
-                <a14:useLocalDpi xmlns:a14="http://schemas.microsoft.com/office/drawing/2010/main" val="0"/>
-              </a:ext>
-            </a:extLst>
-          </a:blip>
-          <a:srcRect/>
-          <a:stretch>
-            <a:fillRect/>
-          </a:stretch>
-        </p:blipFill>
-        <p:spPr bwMode="auto">
-          <a:xfrm>
-            <a:off x="6566722" y="1751358"/>
-            <a:ext cx="4169012" cy="3818155"/>
-          </a:xfrm>
-          <a:prstGeom prst="rect">
-            <a:avLst/>
-          </a:prstGeom>
-          <a:noFill/>
-          <a:extLst>
-            <a:ext uri="{909E8E84-426E-40DD-AFC4-6F175D3DCCD1}">
-              <a14:hiddenFill xmlns:a14="http://schemas.microsoft.com/office/drawing/2010/main">
-                <a:solidFill>
-                  <a:srgbClr val="FFFFFF"/>
-                </a:solidFill>
-              </a14:hiddenFill>
-            </a:ext>
-          </a:extLst>
-        </p:spPr>
-      </p:pic>
       <p:sp>
         <p:nvSpPr>
           <p:cNvPr id="7" name="Rectangle 4">
@@ -14065,8 +14026,8 @@
         </p:nvSpPr>
         <p:spPr bwMode="auto">
           <a:xfrm>
-            <a:off x="1006715" y="1650507"/>
-            <a:ext cx="4699819" cy="3323987"/>
+            <a:off x="1006715" y="1435064"/>
+            <a:ext cx="4699819" cy="3754874"/>
           </a:xfrm>
           <a:prstGeom prst="rect">
             <a:avLst/>
@@ -14163,7 +14124,7 @@
             </a:endParaRPr>
           </a:p>
           <a:p>
-            <a:pPr marL="0" marR="0" lvl="0" indent="0" algn="l" defTabSz="914400" rtl="0" eaLnBrk="0" fontAlgn="base" latinLnBrk="0" hangingPunct="0">
+            <a:pPr marL="0" marR="0" lvl="0" indent="0" algn="just" defTabSz="914400" rtl="0" eaLnBrk="0" fontAlgn="base" latinLnBrk="0" hangingPunct="0">
               <a:lnSpc>
                 <a:spcPct val="100000"/>
               </a:lnSpc>
@@ -14190,7 +14151,7 @@
                 <a:effectLst/>
                 <a:cs typeface="Times New Roman" panose="02020603050405020304" pitchFamily="18" charset="0"/>
               </a:rPr>
-              <a:t>Υιοθέτηση αρχιτεκτονικής υποδοχέων (</a:t>
+              <a:t>Υιοθέτηση αρχιτεκτονικής </a:t>
             </a:r>
             <a:r>
               <a:rPr kumimoji="0" lang="el-GR" altLang="el-GR" sz="1400" b="1" i="0" u="none" strike="noStrike" cap="none" normalizeH="0" baseline="0" dirty="0" err="1">
@@ -14203,7 +14164,13 @@
                 <a:effectLst/>
                 <a:cs typeface="Times New Roman" panose="02020603050405020304" pitchFamily="18" charset="0"/>
               </a:rPr>
-              <a:t>Containerization</a:t>
+              <a:t>Container</a:t>
+            </a:r>
+            <a:r>
+              <a:rPr lang="en-US" altLang="el-GR" sz="1400" b="1" dirty="0">
+                <a:cs typeface="Times New Roman" panose="02020603050405020304" pitchFamily="18" charset="0"/>
+              </a:rPr>
+              <a:t>s</a:t>
             </a:r>
             <a:r>
               <a:rPr kumimoji="0" lang="el-GR" altLang="el-GR" sz="1400" b="1" i="0" u="none" strike="noStrike" cap="none" normalizeH="0" baseline="0" dirty="0">
@@ -14216,7 +14183,7 @@
                 <a:effectLst/>
                 <a:cs typeface="Times New Roman" panose="02020603050405020304" pitchFamily="18" charset="0"/>
               </a:rPr>
-              <a:t>):</a:t>
+              <a:t>:</a:t>
             </a:r>
             <a:r>
               <a:rPr kumimoji="0" lang="el-GR" altLang="el-GR" sz="1400" b="0" i="0" u="none" strike="noStrike" cap="none" normalizeH="0" baseline="0" dirty="0">
@@ -14321,7 +14288,7 @@
             </a:endParaRPr>
           </a:p>
           <a:p>
-            <a:pPr marL="0" marR="0" lvl="0" indent="0" algn="l" defTabSz="914400" rtl="0" eaLnBrk="0" fontAlgn="base" latinLnBrk="0" hangingPunct="0">
+            <a:pPr marL="0" marR="0" lvl="0" indent="0" algn="just" defTabSz="914400" rtl="0" eaLnBrk="0" fontAlgn="base" latinLnBrk="0" hangingPunct="0">
               <a:lnSpc>
                 <a:spcPct val="100000"/>
               </a:lnSpc>
@@ -14347,7 +14314,7 @@
             </a:endParaRPr>
           </a:p>
           <a:p>
-            <a:pPr marL="0" marR="0" lvl="0" indent="0" algn="l" defTabSz="914400" rtl="0" eaLnBrk="0" fontAlgn="base" latinLnBrk="0" hangingPunct="0">
+            <a:pPr marL="0" marR="0" lvl="0" indent="0" algn="just" defTabSz="914400" rtl="0" eaLnBrk="0" fontAlgn="base" latinLnBrk="0" hangingPunct="0">
               <a:lnSpc>
                 <a:spcPct val="100000"/>
               </a:lnSpc>
@@ -14373,7 +14340,7 @@
             </a:endParaRPr>
           </a:p>
           <a:p>
-            <a:pPr marL="0" marR="0" lvl="0" indent="0" algn="l" defTabSz="914400" rtl="0" eaLnBrk="0" fontAlgn="base" latinLnBrk="0" hangingPunct="0">
+            <a:pPr marL="0" marR="0" lvl="0" indent="0" algn="just" defTabSz="914400" rtl="0" eaLnBrk="0" fontAlgn="base" latinLnBrk="0" hangingPunct="0">
               <a:lnSpc>
                 <a:spcPct val="100000"/>
               </a:lnSpc>
@@ -14413,7 +14380,7 @@
                 <a:effectLst/>
                 <a:cs typeface="Times New Roman" panose="02020603050405020304" pitchFamily="18" charset="0"/>
               </a:rPr>
-              <a:t> Πλήρης διαχωρισμός των διεργασιών από το υποκείμενο λειτουργικό σύστημα.</a:t>
+              <a:t> </a:t>
             </a:r>
             <a:endParaRPr kumimoji="0" lang="en-US" altLang="el-GR" sz="1400" b="0" i="0" u="none" strike="noStrike" cap="none" normalizeH="0" baseline="0" dirty="0">
               <a:ln>
@@ -14427,7 +14394,7 @@
             </a:endParaRPr>
           </a:p>
           <a:p>
-            <a:pPr marL="0" marR="0" lvl="0" indent="0" algn="l" defTabSz="914400" rtl="0" eaLnBrk="0" fontAlgn="base" latinLnBrk="0" hangingPunct="0">
+            <a:pPr marL="0" marR="0" lvl="0" indent="0" algn="just" defTabSz="914400" rtl="0" eaLnBrk="0" fontAlgn="base" latinLnBrk="0" hangingPunct="0">
               <a:lnSpc>
                 <a:spcPct val="100000"/>
               </a:lnSpc>
@@ -14439,8 +14406,45 @@
               </a:spcAft>
               <a:buClrTx/>
               <a:buSzTx/>
-              <a:buFontTx/>
-              <a:buChar char="•"/>
+              <a:tabLst/>
+            </a:pPr>
+            <a:r>
+              <a:rPr kumimoji="0" lang="el-GR" altLang="el-GR" sz="1400" b="0" i="0" u="none" strike="noStrike" cap="none" normalizeH="0" baseline="0" dirty="0">
+                <a:ln>
+                  <a:noFill/>
+                </a:ln>
+                <a:solidFill>
+                  <a:schemeClr val="tx1"/>
+                </a:solidFill>
+                <a:effectLst/>
+                <a:cs typeface="Times New Roman" panose="02020603050405020304" pitchFamily="18" charset="0"/>
+              </a:rPr>
+              <a:t>Πλήρης διαχωρισμός των διεργασιών από το υποκείμενο λειτουργικό σύστημα.</a:t>
+            </a:r>
+            <a:endParaRPr kumimoji="0" lang="en-US" altLang="el-GR" sz="1400" b="0" i="0" u="none" strike="noStrike" cap="none" normalizeH="0" baseline="0" dirty="0">
+              <a:ln>
+                <a:noFill/>
+              </a:ln>
+              <a:solidFill>
+                <a:schemeClr val="tx1"/>
+              </a:solidFill>
+              <a:effectLst/>
+              <a:cs typeface="Times New Roman" panose="02020603050405020304" pitchFamily="18" charset="0"/>
+            </a:endParaRPr>
+          </a:p>
+          <a:p>
+            <a:pPr marL="0" marR="0" lvl="0" indent="0" algn="just" defTabSz="914400" rtl="0" eaLnBrk="0" fontAlgn="base" latinLnBrk="0" hangingPunct="0">
+              <a:lnSpc>
+                <a:spcPct val="100000"/>
+              </a:lnSpc>
+              <a:spcBef>
+                <a:spcPct val="0"/>
+              </a:spcBef>
+              <a:spcAft>
+                <a:spcPct val="0"/>
+              </a:spcAft>
+              <a:buClrTx/>
+              <a:buSzTx/>
               <a:tabLst/>
             </a:pPr>
             <a:endParaRPr kumimoji="0" lang="en-US" altLang="el-GR" sz="1400" b="0" i="0" u="none" strike="noStrike" cap="none" normalizeH="0" baseline="0" dirty="0">
@@ -14455,7 +14459,7 @@
             </a:endParaRPr>
           </a:p>
           <a:p>
-            <a:pPr marL="0" marR="0" lvl="0" indent="0" algn="l" defTabSz="914400" rtl="0" eaLnBrk="0" fontAlgn="base" latinLnBrk="0" hangingPunct="0">
+            <a:pPr marL="0" marR="0" lvl="0" indent="0" algn="just" defTabSz="914400" rtl="0" eaLnBrk="0" fontAlgn="base" latinLnBrk="0" hangingPunct="0">
               <a:lnSpc>
                 <a:spcPct val="100000"/>
               </a:lnSpc>
@@ -14481,7 +14485,7 @@
             </a:endParaRPr>
           </a:p>
           <a:p>
-            <a:pPr lvl="0" defTabSz="914400" eaLnBrk="0" fontAlgn="base" hangingPunct="0">
+            <a:pPr lvl="0" algn="just" defTabSz="914400" eaLnBrk="0" fontAlgn="base" hangingPunct="0">
               <a:spcBef>
                 <a:spcPct val="0"/>
               </a:spcBef>
@@ -14525,7 +14529,26 @@
               <a:rPr lang="el-GR" sz="1400" dirty="0">
                 <a:cs typeface="Times New Roman" panose="02020603050405020304" pitchFamily="18" charset="0"/>
               </a:rPr>
-              <a:t> Δυνατότητα απρόσκοπτης και άμεσης ανάπτυξης (</a:t>
+              <a:t> </a:t>
+            </a:r>
+            <a:endParaRPr lang="en-US" sz="1400" dirty="0">
+              <a:cs typeface="Times New Roman" panose="02020603050405020304" pitchFamily="18" charset="0"/>
+            </a:endParaRPr>
+          </a:p>
+          <a:p>
+            <a:pPr lvl="0" algn="just" defTabSz="914400" eaLnBrk="0" fontAlgn="base" hangingPunct="0">
+              <a:spcBef>
+                <a:spcPct val="0"/>
+              </a:spcBef>
+              <a:spcAft>
+                <a:spcPct val="0"/>
+              </a:spcAft>
+            </a:pPr>
+            <a:r>
+              <a:rPr lang="el-GR" sz="1400" dirty="0">
+                <a:cs typeface="Times New Roman" panose="02020603050405020304" pitchFamily="18" charset="0"/>
+              </a:rPr>
+              <a:t>Δυνατότητα απρόσκοπτης και άμεσης ανάπτυξης (</a:t>
             </a:r>
             <a:r>
               <a:rPr lang="el-GR" sz="1400" dirty="0" err="1">
@@ -14588,6 +14611,36 @@
           </a:p>
         </p:txBody>
       </p:sp>
+      <p:pic>
+        <p:nvPicPr>
+          <p:cNvPr id="5" name="Εικόνα 4">
+            <a:extLst>
+              <a:ext uri="{FF2B5EF4-FFF2-40B4-BE49-F238E27FC236}">
+                <a16:creationId xmlns:a16="http://schemas.microsoft.com/office/drawing/2014/main" id="{E31C22A2-895F-B521-B4DE-6E13CB4FAE21}"/>
+              </a:ext>
+            </a:extLst>
+          </p:cNvPr>
+          <p:cNvPicPr>
+            <a:picLocks noChangeAspect="1"/>
+          </p:cNvPicPr>
+          <p:nvPr/>
+        </p:nvPicPr>
+        <p:blipFill>
+          <a:blip r:embed="rId3"/>
+          <a:stretch>
+            <a:fillRect/>
+          </a:stretch>
+        </p:blipFill>
+        <p:spPr>
+          <a:xfrm>
+            <a:off x="6353282" y="1431872"/>
+            <a:ext cx="4711833" cy="4301613"/>
+          </a:xfrm>
+          <a:prstGeom prst="rect">
+            <a:avLst/>
+          </a:prstGeom>
+        </p:spPr>
+      </p:pic>
     </p:spTree>
     <p:extLst>
       <p:ext uri="{BB962C8B-B14F-4D97-AF65-F5344CB8AC3E}">
@@ -14692,7 +14745,7 @@
         <p:spPr>
           <a:xfrm>
             <a:off x="567159" y="1645283"/>
-            <a:ext cx="3657599" cy="4247317"/>
+            <a:ext cx="3657599" cy="3816429"/>
           </a:xfrm>
           <a:prstGeom prst="rect">
             <a:avLst/>
@@ -14785,35 +14838,27 @@
             </a:pPr>
             <a:r>
               <a:rPr lang="el-GR" sz="1400" b="1" dirty="0"/>
-              <a:t>Τηλεμετρία Πραγματικού Χρόνου:</a:t>
+              <a:t>Επικοινωνία Πραγματικού Χρόνου:</a:t>
             </a:r>
             <a:r>
               <a:rPr lang="el-GR" sz="1400" dirty="0"/>
-              <a:t> Απρόσκοπτη δρομολόγηση των μηνυμάτων μεταξύ των παραγωγών (</a:t>
-            </a:r>
-            <a:r>
-              <a:rPr lang="el-GR" sz="1400" dirty="0" err="1"/>
-              <a:t>Producers</a:t>
+              <a:t> Απρόσκοπτη δρομολόγηση των μηνυμάτων μεταξύ των </a:t>
+            </a:r>
+            <a:r>
+              <a:rPr lang="en-US" sz="1400" dirty="0"/>
+              <a:t>publishers</a:t>
             </a:r>
             <a:r>
               <a:rPr lang="el-GR" sz="1400" dirty="0"/>
-              <a:t>) και των καταναλωτών (</a:t>
-            </a:r>
-            <a:r>
-              <a:rPr lang="el-GR" sz="1400" dirty="0" err="1"/>
-              <a:t>Consumers</a:t>
+              <a:t> και των </a:t>
+            </a:r>
+            <a:r>
+              <a:rPr lang="en-US" sz="1400" dirty="0"/>
+              <a:t>subscribers </a:t>
             </a:r>
             <a:r>
               <a:rPr lang="el-GR" sz="1400" dirty="0"/>
-              <a:t>, </a:t>
-            </a:r>
-            <a:r>
-              <a:rPr lang="el-GR" sz="1400" dirty="0" err="1"/>
-              <a:t>Archivers</a:t>
-            </a:r>
-            <a:r>
-              <a:rPr lang="el-GR" sz="1400" dirty="0"/>
-              <a:t>) μέσω του κεντρικού διακομιστή (</a:t>
+              <a:t>μέσω του </a:t>
             </a:r>
             <a:r>
               <a:rPr lang="el-GR" sz="1400" dirty="0" err="1"/>
@@ -14829,7 +14874,7 @@
             </a:r>
             <a:r>
               <a:rPr lang="el-GR" sz="1400" dirty="0"/>
-              <a:t>).</a:t>
+              <a:t>.</a:t>
             </a:r>
           </a:p>
           <a:p>
@@ -15021,10 +15066,10 @@
                 </a:solidFill>
                 <a:effectLst/>
               </a:rPr>
-              <a:t>Εννοιολογική Αναπαράσταση:</a:t>
-            </a:r>
-            <a:r>
-              <a:rPr kumimoji="0" lang="el-GR" altLang="el-GR" sz="1400" b="0" i="0" u="none" strike="noStrike" cap="none" normalizeH="0" baseline="0" dirty="0">
+              <a:t>Εννοιολογική Αναπαράσταση</a:t>
+            </a:r>
+            <a:r>
+              <a:rPr kumimoji="0" lang="el-GR" altLang="el-GR" sz="1400" i="0" u="none" strike="noStrike" cap="none" normalizeH="0" baseline="0" dirty="0">
                 <a:ln>
                   <a:noFill/>
                 </a:ln>
@@ -15033,10 +15078,10 @@
                 </a:solidFill>
                 <a:effectLst/>
               </a:rPr>
-              <a:t> Μετάβαση από την απλή αποστολή ακατέργαστων μετρήσεων (</a:t>
-            </a:r>
-            <a:r>
-              <a:rPr kumimoji="0" lang="el-GR" altLang="el-GR" sz="1400" b="0" i="0" u="none" strike="noStrike" cap="none" normalizeH="0" baseline="0" dirty="0" err="1">
+              <a:t>: Μετάβαση από την απλή αποστολή ακατέργαστων μετρήσεων (</a:t>
+            </a:r>
+            <a:r>
+              <a:rPr kumimoji="0" lang="el-GR" altLang="el-GR" sz="1400" i="0" u="none" strike="noStrike" cap="none" normalizeH="0" baseline="0" dirty="0" err="1">
                 <a:ln>
                   <a:noFill/>
                 </a:ln>
@@ -15048,7 +15093,7 @@
               <a:t>raw</a:t>
             </a:r>
             <a:r>
-              <a:rPr kumimoji="0" lang="el-GR" altLang="el-GR" sz="1400" b="0" i="0" u="none" strike="noStrike" cap="none" normalizeH="0" baseline="0" dirty="0">
+              <a:rPr kumimoji="0" lang="el-GR" altLang="el-GR" sz="1400" i="0" u="none" strike="noStrike" cap="none" normalizeH="0" baseline="0" dirty="0">
                 <a:ln>
                   <a:noFill/>
                 </a:ln>
@@ -15060,7 +15105,7 @@
               <a:t> </a:t>
             </a:r>
             <a:r>
-              <a:rPr kumimoji="0" lang="el-GR" altLang="el-GR" sz="1400" b="0" i="0" u="none" strike="noStrike" cap="none" normalizeH="0" baseline="0" dirty="0" err="1">
+              <a:rPr kumimoji="0" lang="el-GR" altLang="el-GR" sz="1400" i="0" u="none" strike="noStrike" cap="none" normalizeH="0" baseline="0" dirty="0" err="1">
                 <a:ln>
                   <a:noFill/>
                 </a:ln>
@@ -15072,7 +15117,7 @@
               <a:t>data</a:t>
             </a:r>
             <a:r>
-              <a:rPr kumimoji="0" lang="el-GR" altLang="el-GR" sz="1400" b="0" i="0" u="none" strike="noStrike" cap="none" normalizeH="0" baseline="0" dirty="0">
+              <a:rPr kumimoji="0" lang="el-GR" altLang="el-GR" sz="1400" i="0" u="none" strike="noStrike" cap="none" normalizeH="0" baseline="0" dirty="0">
                 <a:ln>
                   <a:noFill/>
                 </a:ln>
@@ -15084,7 +15129,7 @@
               <a:t>) σε δομημένη πληροφορία με σαφές πλαίσιο (</a:t>
             </a:r>
             <a:r>
-              <a:rPr kumimoji="0" lang="el-GR" altLang="el-GR" sz="1400" b="0" i="0" u="none" strike="noStrike" cap="none" normalizeH="0" baseline="0" dirty="0" err="1">
+              <a:rPr kumimoji="0" lang="el-GR" altLang="el-GR" sz="1400" i="0" u="none" strike="noStrike" cap="none" normalizeH="0" baseline="0" dirty="0" err="1">
                 <a:ln>
                   <a:noFill/>
                 </a:ln>
@@ -15096,7 +15141,7 @@
               <a:t>context</a:t>
             </a:r>
             <a:r>
-              <a:rPr kumimoji="0" lang="el-GR" altLang="el-GR" sz="1400" b="0" i="0" u="none" strike="noStrike" cap="none" normalizeH="0" baseline="0" dirty="0">
+              <a:rPr kumimoji="0" lang="el-GR" altLang="el-GR" sz="1400" i="0" u="none" strike="noStrike" cap="none" normalizeH="0" baseline="0" dirty="0">
                 <a:ln>
                   <a:noFill/>
                 </a:ln>
@@ -15107,7 +15152,7 @@
               </a:rPr>
               <a:t>).</a:t>
             </a:r>
-            <a:endParaRPr kumimoji="0" lang="en-US" altLang="el-GR" sz="1400" b="0" i="0" u="none" strike="noStrike" cap="none" normalizeH="0" baseline="0" dirty="0">
+            <a:endParaRPr kumimoji="0" lang="en-US" altLang="el-GR" sz="1400" i="0" u="none" strike="noStrike" cap="none" normalizeH="0" baseline="0" dirty="0">
               <a:ln>
                 <a:noFill/>
               </a:ln>
@@ -15132,7 +15177,7 @@
               <a:buSzTx/>
               <a:tabLst/>
             </a:pPr>
-            <a:endParaRPr kumimoji="0" lang="el-GR" altLang="el-GR" sz="1400" b="0" i="0" u="none" strike="noStrike" cap="none" normalizeH="0" baseline="0" dirty="0">
+            <a:endParaRPr kumimoji="0" lang="el-GR" altLang="el-GR" sz="1400" i="0" u="none" strike="noStrike" cap="none" normalizeH="0" baseline="0" dirty="0">
               <a:ln>
                 <a:noFill/>
               </a:ln>
@@ -15169,10 +15214,10 @@
                 </a:solidFill>
                 <a:effectLst/>
               </a:rPr>
-              <a:t>Υιοθέτηση Διεθνών Προτύπων:</a:t>
-            </a:r>
-            <a:r>
-              <a:rPr kumimoji="0" lang="el-GR" altLang="el-GR" sz="1400" b="0" i="0" u="none" strike="noStrike" cap="none" normalizeH="0" baseline="0" dirty="0">
+              <a:t>Υιοθέτηση Διεθνών Προτύπων</a:t>
+            </a:r>
+            <a:r>
+              <a:rPr kumimoji="0" lang="el-GR" altLang="el-GR" sz="1400" i="0" u="none" strike="noStrike" cap="none" normalizeH="0" baseline="0" dirty="0">
                 <a:ln>
                   <a:noFill/>
                 </a:ln>
@@ -15181,10 +15226,10 @@
                 </a:solidFill>
                 <a:effectLst/>
               </a:rPr>
-              <a:t> Αξιοποίηση τεχνολογιών του Σημασιολογικού Ιστού (</a:t>
-            </a:r>
-            <a:r>
-              <a:rPr kumimoji="0" lang="el-GR" altLang="el-GR" sz="1400" b="0" i="0" u="none" strike="noStrike" cap="none" normalizeH="0" baseline="0" dirty="0" err="1">
+              <a:t>: Αξιοποίηση τεχνολογιών του Σημασιολογικού Ιστού (</a:t>
+            </a:r>
+            <a:r>
+              <a:rPr kumimoji="0" lang="el-GR" altLang="el-GR" sz="1400" i="0" u="none" strike="noStrike" cap="none" normalizeH="0" baseline="0" dirty="0" err="1">
                 <a:ln>
                   <a:noFill/>
                 </a:ln>
@@ -15196,7 +15241,7 @@
               <a:t>Semantic</a:t>
             </a:r>
             <a:r>
-              <a:rPr kumimoji="0" lang="el-GR" altLang="el-GR" sz="1400" b="0" i="0" u="none" strike="noStrike" cap="none" normalizeH="0" baseline="0" dirty="0">
+              <a:rPr kumimoji="0" lang="el-GR" altLang="el-GR" sz="1400" i="0" u="none" strike="noStrike" cap="none" normalizeH="0" baseline="0" dirty="0">
                 <a:ln>
                   <a:noFill/>
                 </a:ln>
@@ -15205,58 +15250,10 @@
                 </a:solidFill>
                 <a:effectLst/>
               </a:rPr>
-              <a:t> Web) και εξειδικευμένων οντολογιών, όπως </a:t>
-            </a:r>
-            <a:r>
-              <a:rPr kumimoji="0" lang="el-GR" altLang="el-GR" sz="1400" b="1" i="0" u="none" strike="noStrike" cap="none" normalizeH="0" baseline="0" dirty="0">
-                <a:ln>
-                  <a:noFill/>
-                </a:ln>
-                <a:solidFill>
-                  <a:schemeClr val="tx1"/>
-                </a:solidFill>
-                <a:effectLst/>
-              </a:rPr>
-              <a:t>SOSA</a:t>
-            </a:r>
-            <a:r>
-              <a:rPr kumimoji="0" lang="el-GR" altLang="el-GR" sz="1400" b="0" i="0" u="none" strike="noStrike" cap="none" normalizeH="0" baseline="0" dirty="0">
-                <a:ln>
-                  <a:noFill/>
-                </a:ln>
-                <a:solidFill>
-                  <a:schemeClr val="tx1"/>
-                </a:solidFill>
-                <a:effectLst/>
-              </a:rPr>
-              <a:t> (αισθητήρες/παρατηρήσεις) και </a:t>
-            </a:r>
-            <a:r>
-              <a:rPr kumimoji="0" lang="el-GR" altLang="el-GR" sz="1400" b="1" i="0" u="none" strike="noStrike" cap="none" normalizeH="0" baseline="0" dirty="0">
-                <a:ln>
-                  <a:noFill/>
-                </a:ln>
-                <a:solidFill>
-                  <a:schemeClr val="tx1"/>
-                </a:solidFill>
-                <a:effectLst/>
-              </a:rPr>
-              <a:t>SAREF</a:t>
-            </a:r>
-            <a:r>
-              <a:rPr kumimoji="0" lang="el-GR" altLang="el-GR" sz="1400" b="0" i="0" u="none" strike="noStrike" cap="none" normalizeH="0" baseline="0" dirty="0">
-                <a:ln>
-                  <a:noFill/>
-                </a:ln>
-                <a:solidFill>
-                  <a:schemeClr val="tx1"/>
-                </a:solidFill>
-                <a:effectLst/>
-              </a:rPr>
-              <a:t> (συσκευές), μέσω του </a:t>
-            </a:r>
-            <a:r>
-              <a:rPr kumimoji="0" lang="el-GR" altLang="el-GR" sz="1400" b="0" i="0" u="none" strike="noStrike" cap="none" normalizeH="0" baseline="0" dirty="0" err="1">
+              <a:t> Web) και εξειδικευμένων οντολογιών, όπως SOSA (αισθητήρες/παρατηρήσεις) και SAREF (συσκευές), μέσω του </a:t>
+            </a:r>
+            <a:r>
+              <a:rPr kumimoji="0" lang="el-GR" altLang="el-GR" sz="1400" i="0" u="none" strike="noStrike" cap="none" normalizeH="0" baseline="0" dirty="0" err="1">
                 <a:ln>
                   <a:noFill/>
                 </a:ln>
@@ -15268,7 +15265,7 @@
               <a:t>μορφότυπου</a:t>
             </a:r>
             <a:r>
-              <a:rPr kumimoji="0" lang="el-GR" altLang="el-GR" sz="1400" b="0" i="0" u="none" strike="noStrike" cap="none" normalizeH="0" baseline="0" dirty="0">
+              <a:rPr kumimoji="0" lang="el-GR" altLang="el-GR" sz="1400" i="0" u="none" strike="noStrike" cap="none" normalizeH="0" baseline="0" dirty="0">
                 <a:ln>
                   <a:noFill/>
                 </a:ln>
@@ -15277,33 +15274,9 @@
                 </a:solidFill>
                 <a:effectLst/>
               </a:rPr>
-              <a:t> </a:t>
-            </a:r>
-            <a:r>
-              <a:rPr kumimoji="0" lang="el-GR" altLang="el-GR" sz="1400" b="1" i="0" u="none" strike="noStrike" cap="none" normalizeH="0" baseline="0" dirty="0">
-                <a:ln>
-                  <a:noFill/>
-                </a:ln>
-                <a:solidFill>
-                  <a:schemeClr val="tx1"/>
-                </a:solidFill>
-                <a:effectLst/>
-              </a:rPr>
-              <a:t>JSON-LD</a:t>
-            </a:r>
-            <a:r>
-              <a:rPr kumimoji="0" lang="el-GR" altLang="el-GR" sz="1400" b="0" i="0" u="none" strike="noStrike" cap="none" normalizeH="0" baseline="0" dirty="0">
-                <a:ln>
-                  <a:noFill/>
-                </a:ln>
-                <a:solidFill>
-                  <a:schemeClr val="tx1"/>
-                </a:solidFill>
-                <a:effectLst/>
-              </a:rPr>
-              <a:t>.</a:t>
-            </a:r>
-            <a:endParaRPr kumimoji="0" lang="en-US" altLang="el-GR" sz="1400" b="0" i="0" u="none" strike="noStrike" cap="none" normalizeH="0" baseline="0" dirty="0">
+              <a:t> JSON-LD.</a:t>
+            </a:r>
+            <a:endParaRPr kumimoji="0" lang="en-US" altLang="el-GR" sz="1400" i="0" u="none" strike="noStrike" cap="none" normalizeH="0" baseline="0" dirty="0">
               <a:ln>
                 <a:noFill/>
               </a:ln>
@@ -15328,7 +15301,7 @@
               <a:buSzTx/>
               <a:tabLst/>
             </a:pPr>
-            <a:endParaRPr kumimoji="0" lang="el-GR" altLang="el-GR" sz="1400" b="0" i="0" u="none" strike="noStrike" cap="none" normalizeH="0" baseline="0" dirty="0">
+            <a:endParaRPr kumimoji="0" lang="el-GR" altLang="el-GR" sz="1400" i="0" u="none" strike="noStrike" cap="none" normalizeH="0" baseline="0" dirty="0">
               <a:ln>
                 <a:noFill/>
               </a:ln>
@@ -15401,10 +15374,10 @@
                 </a:solidFill>
                 <a:effectLst/>
               </a:rPr>
-              <a:t>):</a:t>
-            </a:r>
-            <a:r>
-              <a:rPr kumimoji="0" lang="el-GR" altLang="el-GR" sz="1400" b="0" i="0" u="none" strike="noStrike" cap="none" normalizeH="0" baseline="0" dirty="0">
+              <a:t>): </a:t>
+            </a:r>
+            <a:r>
+              <a:rPr kumimoji="0" lang="el-GR" altLang="el-GR" sz="1400" i="0" u="none" strike="noStrike" cap="none" normalizeH="0" baseline="0" dirty="0">
                 <a:ln>
                   <a:noFill/>
                 </a:ln>
@@ -15413,7 +15386,7 @@
                 </a:solidFill>
                 <a:effectLst/>
               </a:rPr>
-              <a:t> Πλήρης μηχανική κατανόηση της τοπολογίας από το σύστημα (π.χ. συσχέτιση του αισθητήρα PIR με τον συγκεκριμένο κάδο και τον περιβάλλοντα χώρο του τμήματος)</a:t>
+              <a:t>Πλήρης μηχανική κατανόηση της τοπολογίας από το σύστημα (π.χ. συσχέτιση του αισθητήρα PIR με τον συγκεκριμένο κάδο και τον περιβάλλοντα χώρο του τμήματος)</a:t>
             </a:r>
           </a:p>
         </p:txBody>
@@ -15500,7 +15473,7 @@
         </p:blipFill>
         <p:spPr>
           <a:xfrm>
-            <a:off x="687388" y="2544714"/>
+            <a:off x="677334" y="2947890"/>
             <a:ext cx="3795712" cy="2687735"/>
           </a:xfrm>
           <a:prstGeom prst="rect">
@@ -15563,6 +15536,317 @@
           </a:prstGeom>
         </p:spPr>
       </p:pic>
+      <p:sp>
+        <p:nvSpPr>
+          <p:cNvPr id="3" name="Rectangle 1">
+            <a:extLst>
+              <a:ext uri="{FF2B5EF4-FFF2-40B4-BE49-F238E27FC236}">
+                <a16:creationId xmlns:a16="http://schemas.microsoft.com/office/drawing/2014/main" id="{24E01C09-160F-A529-6CAD-BECE72498E8F}"/>
+              </a:ext>
+            </a:extLst>
+          </p:cNvPr>
+          <p:cNvSpPr>
+            <a:spLocks noChangeArrowheads="1"/>
+          </p:cNvSpPr>
+          <p:nvPr/>
+        </p:nvSpPr>
+        <p:spPr bwMode="auto">
+          <a:xfrm>
+            <a:off x="541925" y="1498051"/>
+            <a:ext cx="4412086" cy="954107"/>
+          </a:xfrm>
+          <a:prstGeom prst="rect">
+            <a:avLst/>
+          </a:prstGeom>
+          <a:noFill/>
+          <a:ln>
+            <a:noFill/>
+          </a:ln>
+          <a:effectLst/>
+          <a:extLst>
+            <a:ext uri="{909E8E84-426E-40DD-AFC4-6F175D3DCCD1}">
+              <a14:hiddenFill xmlns:a14="http://schemas.microsoft.com/office/drawing/2010/main">
+                <a:solidFill>
+                  <a:schemeClr val="accent1"/>
+                </a:solidFill>
+              </a14:hiddenFill>
+            </a:ext>
+            <a:ext uri="{91240B29-F687-4F45-9708-019B960494DF}">
+              <a14:hiddenLine xmlns:a14="http://schemas.microsoft.com/office/drawing/2010/main" w="9525">
+                <a:solidFill>
+                  <a:schemeClr val="tx1"/>
+                </a:solidFill>
+                <a:miter lim="800000"/>
+                <a:headEnd/>
+                <a:tailEnd/>
+              </a14:hiddenLine>
+            </a:ext>
+            <a:ext uri="{AF507438-7753-43E0-B8FC-AC1667EBCBE1}">
+              <a14:hiddenEffects xmlns:a14="http://schemas.microsoft.com/office/drawing/2010/main">
+                <a:effectLst>
+                  <a:outerShdw dist="35921" dir="2700000" algn="ctr" rotWithShape="0">
+                    <a:schemeClr val="bg2"/>
+                  </a:outerShdw>
+                </a:effectLst>
+              </a14:hiddenEffects>
+            </a:ext>
+          </a:extLst>
+        </p:spPr>
+        <p:txBody>
+          <a:bodyPr vert="horz" wrap="square" lIns="91440" tIns="45720" rIns="91440" bIns="45720" numCol="1" anchor="ctr" anchorCtr="0" compatLnSpc="1">
+            <a:prstTxWarp prst="textNoShape">
+              <a:avLst/>
+            </a:prstTxWarp>
+            <a:spAutoFit/>
+          </a:bodyPr>
+          <a:lstStyle/>
+          <a:p>
+            <a:pPr marL="0" marR="0" lvl="0" indent="0" algn="l" defTabSz="914400" rtl="0" eaLnBrk="0" fontAlgn="base" latinLnBrk="0" hangingPunct="0">
+              <a:lnSpc>
+                <a:spcPct val="100000"/>
+              </a:lnSpc>
+              <a:spcBef>
+                <a:spcPct val="0"/>
+              </a:spcBef>
+              <a:spcAft>
+                <a:spcPct val="0"/>
+              </a:spcAft>
+              <a:buClrTx/>
+              <a:buSzTx/>
+              <a:buFontTx/>
+              <a:buChar char="•"/>
+              <a:tabLst/>
+            </a:pPr>
+            <a:r>
+              <a:rPr kumimoji="0" lang="el-GR" altLang="el-GR" sz="1400" b="1" u="none" strike="noStrike" cap="none" normalizeH="0" baseline="0" dirty="0" err="1">
+                <a:ln>
+                  <a:noFill/>
+                </a:ln>
+                <a:solidFill>
+                  <a:schemeClr val="tx1"/>
+                </a:solidFill>
+                <a:effectLst/>
+              </a:rPr>
+              <a:t>AsyncAPI</a:t>
+            </a:r>
+            <a:r>
+              <a:rPr kumimoji="0" lang="el-GR" altLang="el-GR" sz="1400" b="1" u="none" strike="noStrike" cap="none" normalizeH="0" baseline="0" dirty="0">
+                <a:ln>
+                  <a:noFill/>
+                </a:ln>
+                <a:solidFill>
+                  <a:schemeClr val="tx1"/>
+                </a:solidFill>
+                <a:effectLst/>
+              </a:rPr>
+              <a:t>:</a:t>
+            </a:r>
+            <a:r>
+              <a:rPr kumimoji="0" lang="el-GR" altLang="el-GR" sz="1400" b="0" u="none" strike="noStrike" cap="none" normalizeH="0" baseline="0" dirty="0">
+                <a:ln>
+                  <a:noFill/>
+                </a:ln>
+                <a:solidFill>
+                  <a:schemeClr val="tx1"/>
+                </a:solidFill>
+                <a:effectLst/>
+              </a:rPr>
+              <a:t> Ασύγχρονη (</a:t>
+            </a:r>
+            <a:r>
+              <a:rPr kumimoji="0" lang="el-GR" altLang="el-GR" sz="1400" b="0" u="none" strike="noStrike" cap="none" normalizeH="0" baseline="0" dirty="0" err="1">
+                <a:ln>
+                  <a:noFill/>
+                </a:ln>
+                <a:solidFill>
+                  <a:schemeClr val="tx1"/>
+                </a:solidFill>
+                <a:effectLst/>
+              </a:rPr>
+              <a:t>event-driven</a:t>
+            </a:r>
+            <a:r>
+              <a:rPr kumimoji="0" lang="el-GR" altLang="el-GR" sz="1400" b="0" u="none" strike="noStrike" cap="none" normalizeH="0" baseline="0" dirty="0">
+                <a:ln>
+                  <a:noFill/>
+                </a:ln>
+                <a:solidFill>
+                  <a:schemeClr val="tx1"/>
+                </a:solidFill>
+                <a:effectLst/>
+              </a:rPr>
+              <a:t>) επικοινωνία του συστήματος μέσω </a:t>
+            </a:r>
+            <a:r>
+              <a:rPr kumimoji="0" lang="el-GR" altLang="el-GR" sz="1400" b="1" u="none" strike="noStrike" cap="none" normalizeH="0" baseline="0" dirty="0">
+                <a:ln>
+                  <a:noFill/>
+                </a:ln>
+                <a:solidFill>
+                  <a:schemeClr val="tx1"/>
+                </a:solidFill>
+                <a:effectLst/>
+              </a:rPr>
+              <a:t>MQTT</a:t>
+            </a:r>
+            <a:r>
+              <a:rPr kumimoji="0" lang="el-GR" altLang="el-GR" sz="1400" b="0" u="none" strike="noStrike" cap="none" normalizeH="0" baseline="0" dirty="0">
+                <a:ln>
+                  <a:noFill/>
+                </a:ln>
+                <a:solidFill>
+                  <a:schemeClr val="tx1"/>
+                </a:solidFill>
+                <a:effectLst/>
+              </a:rPr>
+              <a:t> (όπως το πώς δημοσιεύονται και λαμβάνονται τα δεδομένα των αισθητήρων σε πραγματικό χρόνο).</a:t>
+            </a:r>
+          </a:p>
+        </p:txBody>
+      </p:sp>
+      <p:sp>
+        <p:nvSpPr>
+          <p:cNvPr id="7" name="TextBox 6">
+            <a:extLst>
+              <a:ext uri="{FF2B5EF4-FFF2-40B4-BE49-F238E27FC236}">
+                <a16:creationId xmlns:a16="http://schemas.microsoft.com/office/drawing/2014/main" id="{DD2C784A-C656-994E-A4B7-E8501CE7D805}"/>
+              </a:ext>
+            </a:extLst>
+          </p:cNvPr>
+          <p:cNvSpPr txBox="1"/>
+          <p:nvPr/>
+        </p:nvSpPr>
+        <p:spPr>
+          <a:xfrm>
+            <a:off x="4954011" y="857972"/>
+            <a:ext cx="6096000" cy="954107"/>
+          </a:xfrm>
+          <a:prstGeom prst="rect">
+            <a:avLst/>
+          </a:prstGeom>
+          <a:noFill/>
+        </p:spPr>
+        <p:txBody>
+          <a:bodyPr wrap="square">
+            <a:spAutoFit/>
+          </a:bodyPr>
+          <a:lstStyle/>
+          <a:p>
+            <a:pPr marL="0" marR="0" lvl="0" indent="0" algn="l" defTabSz="914400" rtl="0" eaLnBrk="0" fontAlgn="base" latinLnBrk="0" hangingPunct="0">
+              <a:lnSpc>
+                <a:spcPct val="100000"/>
+              </a:lnSpc>
+              <a:spcBef>
+                <a:spcPct val="0"/>
+              </a:spcBef>
+              <a:spcAft>
+                <a:spcPct val="0"/>
+              </a:spcAft>
+              <a:buClrTx/>
+              <a:buSzTx/>
+              <a:buFontTx/>
+              <a:buChar char="•"/>
+              <a:tabLst/>
+            </a:pPr>
+            <a:r>
+              <a:rPr kumimoji="0" lang="el-GR" altLang="el-GR" sz="1400" b="1" u="none" strike="noStrike" cap="none" normalizeH="0" baseline="0" dirty="0">
+                <a:ln>
+                  <a:noFill/>
+                </a:ln>
+                <a:solidFill>
+                  <a:schemeClr val="tx1"/>
+                </a:solidFill>
+                <a:effectLst/>
+              </a:rPr>
+              <a:t>REST / </a:t>
+            </a:r>
+            <a:r>
+              <a:rPr kumimoji="0" lang="el-GR" altLang="el-GR" sz="1400" b="1" u="none" strike="noStrike" cap="none" normalizeH="0" baseline="0" dirty="0" err="1">
+                <a:ln>
+                  <a:noFill/>
+                </a:ln>
+                <a:solidFill>
+                  <a:schemeClr val="tx1"/>
+                </a:solidFill>
+                <a:effectLst/>
+              </a:rPr>
+              <a:t>OpenAPI</a:t>
+            </a:r>
+            <a:r>
+              <a:rPr kumimoji="0" lang="el-GR" altLang="el-GR" sz="1400" b="1" u="none" strike="noStrike" cap="none" normalizeH="0" baseline="0" dirty="0">
+                <a:ln>
+                  <a:noFill/>
+                </a:ln>
+                <a:solidFill>
+                  <a:schemeClr val="tx1"/>
+                </a:solidFill>
+                <a:effectLst/>
+              </a:rPr>
+              <a:t> :</a:t>
+            </a:r>
+            <a:r>
+              <a:rPr kumimoji="0" lang="el-GR" altLang="el-GR" sz="1400" b="0" u="none" strike="noStrike" cap="none" normalizeH="0" baseline="0" dirty="0">
+                <a:ln>
+                  <a:noFill/>
+                </a:ln>
+                <a:solidFill>
+                  <a:schemeClr val="tx1"/>
+                </a:solidFill>
+                <a:effectLst/>
+              </a:rPr>
+              <a:t> Σύγχρονο </a:t>
+            </a:r>
+            <a:r>
+              <a:rPr kumimoji="0" lang="el-GR" altLang="el-GR" sz="1400" b="1" u="none" strike="noStrike" cap="none" normalizeH="0" baseline="0" dirty="0">
+                <a:ln>
+                  <a:noFill/>
+                </a:ln>
+                <a:solidFill>
+                  <a:schemeClr val="tx1"/>
+                </a:solidFill>
+                <a:effectLst/>
+              </a:rPr>
+              <a:t>REST API</a:t>
+            </a:r>
+            <a:r>
+              <a:rPr kumimoji="0" lang="el-GR" altLang="el-GR" sz="1400" b="0" u="none" strike="noStrike" cap="none" normalizeH="0" baseline="0" dirty="0">
+                <a:ln>
+                  <a:noFill/>
+                </a:ln>
+                <a:solidFill>
+                  <a:schemeClr val="tx1"/>
+                </a:solidFill>
+                <a:effectLst/>
+              </a:rPr>
+              <a:t> μέσω του </a:t>
+            </a:r>
+            <a:r>
+              <a:rPr kumimoji="0" lang="el-GR" altLang="el-GR" sz="1400" b="0" u="none" strike="noStrike" cap="none" normalizeH="0" baseline="0" dirty="0" err="1">
+                <a:ln>
+                  <a:noFill/>
+                </a:ln>
+                <a:solidFill>
+                  <a:schemeClr val="tx1"/>
+                </a:solidFill>
+                <a:effectLst/>
+              </a:rPr>
+              <a:t>Swagger</a:t>
+            </a:r>
+            <a:r>
+              <a:rPr kumimoji="0" lang="el-GR" altLang="el-GR" sz="1400" b="0" u="none" strike="noStrike" cap="none" normalizeH="0" baseline="0" dirty="0">
+                <a:ln>
+                  <a:noFill/>
+                </a:ln>
+                <a:solidFill>
+                  <a:schemeClr val="tx1"/>
+                </a:solidFill>
+                <a:effectLst/>
+              </a:rPr>
+              <a:t> UI, δείχνοντας τις διαθέσιμες κλήσεις (GET, POST) για την άμεση διαχείριση και αναζήτηση δεδομένων (π.χ. λήψη λίστας κάδων ή καταγραφή αδειάσματος).</a:t>
+            </a:r>
+          </a:p>
+        </p:txBody>
+      </p:sp>
     </p:spTree>
     <p:extLst>
       <p:ext uri="{BB962C8B-B14F-4D97-AF65-F5344CB8AC3E}">
@@ -15577,6 +15861,749 @@
 </file>
 
 <file path=ppt/slides/slide7.xml><?xml version="1.0" encoding="utf-8"?>
+<p:sld xmlns:a="http://schemas.openxmlformats.org/drawingml/2006/main" xmlns:r="http://schemas.openxmlformats.org/officeDocument/2006/relationships" xmlns:p="http://schemas.openxmlformats.org/presentationml/2006/main">
+  <p:cSld>
+    <p:spTree>
+      <p:nvGrpSpPr>
+        <p:cNvPr id="1" name="">
+          <a:extLst>
+            <a:ext uri="{FF2B5EF4-FFF2-40B4-BE49-F238E27FC236}">
+              <a16:creationId xmlns:a16="http://schemas.microsoft.com/office/drawing/2014/main" id="{BCD47FCC-52B4-9C83-1A16-93728457E4D7}"/>
+            </a:ext>
+          </a:extLst>
+        </p:cNvPr>
+        <p:cNvGrpSpPr/>
+        <p:nvPr/>
+      </p:nvGrpSpPr>
+      <p:grpSpPr>
+        <a:xfrm>
+          <a:off x="0" y="0"/>
+          <a:ext cx="0" cy="0"/>
+          <a:chOff x="0" y="0"/>
+          <a:chExt cx="0" cy="0"/>
+        </a:xfrm>
+      </p:grpSpPr>
+      <p:sp>
+        <p:nvSpPr>
+          <p:cNvPr id="2" name="Τίτλος 1">
+            <a:extLst>
+              <a:ext uri="{FF2B5EF4-FFF2-40B4-BE49-F238E27FC236}">
+                <a16:creationId xmlns:a16="http://schemas.microsoft.com/office/drawing/2014/main" id="{5E634425-E55A-9AD8-F498-E72126402A10}"/>
+              </a:ext>
+            </a:extLst>
+          </p:cNvPr>
+          <p:cNvSpPr>
+            <a:spLocks noGrp="1"/>
+          </p:cNvSpPr>
+          <p:nvPr>
+            <p:ph type="title"/>
+          </p:nvPr>
+        </p:nvSpPr>
+        <p:spPr/>
+        <p:txBody>
+          <a:bodyPr/>
+          <a:lstStyle/>
+          <a:p>
+            <a:r>
+              <a:rPr lang="en-US" dirty="0"/>
+              <a:t>Virtual Sensors, Home Assistant and Low Code Platforms (1)</a:t>
+            </a:r>
+            <a:br>
+              <a:rPr lang="en-US" dirty="0"/>
+            </a:br>
+            <a:endParaRPr lang="el-GR" dirty="0"/>
+          </a:p>
+        </p:txBody>
+      </p:sp>
+      <p:pic>
+        <p:nvPicPr>
+          <p:cNvPr id="4" name="Εικόνα 3">
+            <a:extLst>
+              <a:ext uri="{FF2B5EF4-FFF2-40B4-BE49-F238E27FC236}">
+                <a16:creationId xmlns:a16="http://schemas.microsoft.com/office/drawing/2014/main" id="{B9CF8794-6268-088A-29DC-747E344B3534}"/>
+              </a:ext>
+            </a:extLst>
+          </p:cNvPr>
+          <p:cNvPicPr>
+            <a:picLocks noChangeAspect="1"/>
+          </p:cNvPicPr>
+          <p:nvPr/>
+        </p:nvPicPr>
+        <p:blipFill>
+          <a:blip r:embed="rId2"/>
+          <a:stretch>
+            <a:fillRect/>
+          </a:stretch>
+        </p:blipFill>
+        <p:spPr>
+          <a:xfrm>
+            <a:off x="5996157" y="2626026"/>
+            <a:ext cx="5738357" cy="1767993"/>
+          </a:xfrm>
+          <a:prstGeom prst="rect">
+            <a:avLst/>
+          </a:prstGeom>
+        </p:spPr>
+      </p:pic>
+      <p:sp>
+        <p:nvSpPr>
+          <p:cNvPr id="9" name="Rectangle 3">
+            <a:extLst>
+              <a:ext uri="{FF2B5EF4-FFF2-40B4-BE49-F238E27FC236}">
+                <a16:creationId xmlns:a16="http://schemas.microsoft.com/office/drawing/2014/main" id="{41DEBFCF-E41A-365E-53CD-C57C213BBEAB}"/>
+              </a:ext>
+            </a:extLst>
+          </p:cNvPr>
+          <p:cNvSpPr>
+            <a:spLocks noChangeArrowheads="1"/>
+          </p:cNvSpPr>
+          <p:nvPr/>
+        </p:nvSpPr>
+        <p:spPr bwMode="auto">
+          <a:xfrm>
+            <a:off x="618719" y="2048140"/>
+            <a:ext cx="5087815" cy="3508653"/>
+          </a:xfrm>
+          <a:prstGeom prst="rect">
+            <a:avLst/>
+          </a:prstGeom>
+          <a:noFill/>
+          <a:ln>
+            <a:noFill/>
+          </a:ln>
+          <a:effectLst/>
+          <a:extLst>
+            <a:ext uri="{909E8E84-426E-40DD-AFC4-6F175D3DCCD1}">
+              <a14:hiddenFill xmlns:a14="http://schemas.microsoft.com/office/drawing/2010/main">
+                <a:solidFill>
+                  <a:schemeClr val="accent1"/>
+                </a:solidFill>
+              </a14:hiddenFill>
+            </a:ext>
+            <a:ext uri="{91240B29-F687-4F45-9708-019B960494DF}">
+              <a14:hiddenLine xmlns:a14="http://schemas.microsoft.com/office/drawing/2010/main" w="9525">
+                <a:solidFill>
+                  <a:schemeClr val="tx1"/>
+                </a:solidFill>
+                <a:miter lim="800000"/>
+                <a:headEnd/>
+                <a:tailEnd/>
+              </a14:hiddenLine>
+            </a:ext>
+            <a:ext uri="{AF507438-7753-43E0-B8FC-AC1667EBCBE1}">
+              <a14:hiddenEffects xmlns:a14="http://schemas.microsoft.com/office/drawing/2010/main">
+                <a:effectLst>
+                  <a:outerShdw dist="35921" dir="2700000" algn="ctr" rotWithShape="0">
+                    <a:schemeClr val="bg2"/>
+                  </a:outerShdw>
+                </a:effectLst>
+              </a14:hiddenEffects>
+            </a:ext>
+          </a:extLst>
+        </p:spPr>
+        <p:txBody>
+          <a:bodyPr vert="horz" wrap="square" lIns="91440" tIns="45720" rIns="91440" bIns="45720" numCol="1" anchor="ctr" anchorCtr="0" compatLnSpc="1">
+            <a:prstTxWarp prst="textNoShape">
+              <a:avLst/>
+            </a:prstTxWarp>
+            <a:spAutoFit/>
+          </a:bodyPr>
+          <a:lstStyle/>
+          <a:p>
+            <a:pPr lvl="0" algn="just" defTabSz="914400" eaLnBrk="0" fontAlgn="base" hangingPunct="0">
+              <a:spcBef>
+                <a:spcPct val="0"/>
+              </a:spcBef>
+              <a:spcAft>
+                <a:spcPct val="0"/>
+              </a:spcAft>
+              <a:buFontTx/>
+              <a:buChar char="•"/>
+            </a:pPr>
+            <a:r>
+              <a:rPr kumimoji="0" lang="el-GR" altLang="el-GR" sz="1200" b="1" i="0" u="none" strike="noStrike" cap="none" normalizeH="0" baseline="0" dirty="0">
+                <a:ln>
+                  <a:noFill/>
+                </a:ln>
+                <a:solidFill>
+                  <a:schemeClr val="tx1"/>
+                </a:solidFill>
+                <a:effectLst/>
+              </a:rPr>
+              <a:t>Εικονικοί Αισθητήρες (Επίπεδο Προσομοίωσης) / </a:t>
+            </a:r>
+            <a:r>
+              <a:rPr kumimoji="0" lang="el-GR" altLang="el-GR" sz="1200" b="1" i="0" u="none" strike="noStrike" cap="none" normalizeH="0" baseline="0" dirty="0" err="1">
+                <a:ln>
+                  <a:noFill/>
+                </a:ln>
+                <a:solidFill>
+                  <a:schemeClr val="tx1"/>
+                </a:solidFill>
+                <a:effectLst/>
+              </a:rPr>
+              <a:t>Mock</a:t>
+            </a:r>
+            <a:r>
+              <a:rPr kumimoji="0" lang="el-GR" altLang="el-GR" sz="1200" b="1" i="0" u="none" strike="noStrike" cap="none" normalizeH="0" baseline="0" dirty="0">
+                <a:ln>
+                  <a:noFill/>
+                </a:ln>
+                <a:solidFill>
+                  <a:schemeClr val="tx1"/>
+                </a:solidFill>
+                <a:effectLst/>
+              </a:rPr>
+              <a:t> </a:t>
+            </a:r>
+            <a:r>
+              <a:rPr kumimoji="0" lang="el-GR" altLang="el-GR" sz="1200" b="1" i="0" u="none" strike="noStrike" cap="none" normalizeH="0" baseline="0" dirty="0" err="1">
+                <a:ln>
+                  <a:noFill/>
+                </a:ln>
+                <a:solidFill>
+                  <a:schemeClr val="tx1"/>
+                </a:solidFill>
+                <a:effectLst/>
+              </a:rPr>
+              <a:t>Sensors</a:t>
+            </a:r>
+            <a:r>
+              <a:rPr kumimoji="0" lang="el-GR" altLang="el-GR" sz="1200" b="1" i="0" u="none" strike="noStrike" cap="none" normalizeH="0" baseline="0" dirty="0">
+                <a:ln>
+                  <a:noFill/>
+                </a:ln>
+                <a:solidFill>
+                  <a:schemeClr val="tx1"/>
+                </a:solidFill>
+                <a:effectLst/>
+              </a:rPr>
+              <a:t>:</a:t>
+            </a:r>
+            <a:r>
+              <a:rPr kumimoji="0" lang="el-GR" altLang="el-GR" sz="1200" b="0" i="0" u="none" strike="noStrike" cap="none" normalizeH="0" baseline="0" dirty="0">
+                <a:ln>
+                  <a:noFill/>
+                </a:ln>
+                <a:solidFill>
+                  <a:schemeClr val="tx1"/>
+                </a:solidFill>
+                <a:effectLst/>
+              </a:rPr>
+              <a:t> Αισθητήρες που δημιουργούνται μέσω λογισμικού (mocksensors.py) και μεταδίδουν (</a:t>
+            </a:r>
+            <a:r>
+              <a:rPr kumimoji="0" lang="el-GR" altLang="el-GR" sz="1200" b="0" i="0" u="none" strike="noStrike" cap="none" normalizeH="0" baseline="0" dirty="0" err="1">
+                <a:ln>
+                  <a:noFill/>
+                </a:ln>
+                <a:solidFill>
+                  <a:schemeClr val="tx1"/>
+                </a:solidFill>
+                <a:effectLst/>
+              </a:rPr>
+              <a:t>publish</a:t>
+            </a:r>
+            <a:r>
+              <a:rPr kumimoji="0" lang="el-GR" altLang="el-GR" sz="1200" b="0" i="0" u="none" strike="noStrike" cap="none" normalizeH="0" baseline="0" dirty="0">
+                <a:ln>
+                  <a:noFill/>
+                </a:ln>
+                <a:solidFill>
+                  <a:schemeClr val="tx1"/>
+                </a:solidFill>
+                <a:effectLst/>
+              </a:rPr>
+              <a:t>) συνεχώς δ</a:t>
+            </a:r>
+            <a:r>
+              <a:rPr lang="el-GR" sz="1200" dirty="0"/>
+              <a:t>εδομένα προσομοίωσης </a:t>
+            </a:r>
+            <a:r>
+              <a:rPr kumimoji="0" lang="el-GR" altLang="el-GR" sz="1200" b="0" i="0" u="none" strike="noStrike" cap="none" normalizeH="0" baseline="0" dirty="0">
+                <a:ln>
+                  <a:noFill/>
+                </a:ln>
+                <a:solidFill>
+                  <a:schemeClr val="tx1"/>
+                </a:solidFill>
+                <a:effectLst/>
+              </a:rPr>
+              <a:t>(επίπεδα πλήρωσης, βάρος, κ.λπ.). Υπάρχουν για πιθανή χρήση τους σε  </a:t>
+            </a:r>
+            <a:r>
+              <a:rPr kumimoji="0" lang="en-US" altLang="el-GR" sz="1200" b="1" i="0" u="none" strike="noStrike" cap="none" normalizeH="0" baseline="0" dirty="0">
+                <a:ln>
+                  <a:noFill/>
+                </a:ln>
+                <a:solidFill>
+                  <a:schemeClr val="tx1"/>
+                </a:solidFill>
+                <a:effectLst/>
+              </a:rPr>
+              <a:t>future implementations</a:t>
+            </a:r>
+            <a:r>
+              <a:rPr kumimoji="0" lang="en-US" altLang="el-GR" sz="1200" b="0" i="0" u="none" strike="noStrike" cap="none" normalizeH="0" baseline="0" dirty="0">
+                <a:ln>
+                  <a:noFill/>
+                </a:ln>
+                <a:solidFill>
+                  <a:schemeClr val="tx1"/>
+                </a:solidFill>
+                <a:effectLst/>
+              </a:rPr>
+              <a:t>.</a:t>
+            </a:r>
+          </a:p>
+          <a:p>
+            <a:pPr marL="0" marR="0" lvl="0" indent="0" algn="l" defTabSz="914400" rtl="0" eaLnBrk="0" fontAlgn="base" latinLnBrk="0" hangingPunct="0">
+              <a:lnSpc>
+                <a:spcPct val="100000"/>
+              </a:lnSpc>
+              <a:spcBef>
+                <a:spcPct val="0"/>
+              </a:spcBef>
+              <a:spcAft>
+                <a:spcPct val="0"/>
+              </a:spcAft>
+              <a:buClrTx/>
+              <a:buSzTx/>
+              <a:tabLst/>
+            </a:pPr>
+            <a:endParaRPr kumimoji="0" lang="el-GR" altLang="el-GR" sz="1200" b="0" i="0" u="none" strike="noStrike" cap="none" normalizeH="0" baseline="0" dirty="0">
+              <a:ln>
+                <a:noFill/>
+              </a:ln>
+              <a:solidFill>
+                <a:schemeClr val="tx1"/>
+              </a:solidFill>
+              <a:effectLst/>
+            </a:endParaRPr>
+          </a:p>
+          <a:p>
+            <a:pPr marL="0" marR="0" lvl="0" indent="0" algn="just" defTabSz="914400" rtl="0" eaLnBrk="0" fontAlgn="base" latinLnBrk="0" hangingPunct="0">
+              <a:lnSpc>
+                <a:spcPct val="100000"/>
+              </a:lnSpc>
+              <a:spcBef>
+                <a:spcPct val="0"/>
+              </a:spcBef>
+              <a:spcAft>
+                <a:spcPct val="0"/>
+              </a:spcAft>
+              <a:buClrTx/>
+              <a:buSzTx/>
+              <a:buFontTx/>
+              <a:buChar char="•"/>
+              <a:tabLst/>
+            </a:pPr>
+            <a:r>
+              <a:rPr kumimoji="0" lang="el-GR" altLang="el-GR" sz="1200" b="1" i="0" u="none" strike="noStrike" cap="none" normalizeH="0" baseline="0" dirty="0">
+                <a:ln>
+                  <a:noFill/>
+                </a:ln>
+                <a:solidFill>
+                  <a:schemeClr val="tx1"/>
+                </a:solidFill>
+                <a:effectLst/>
+              </a:rPr>
+              <a:t>Αισθητήρας Βασισμένος σε Κανόνες (Επίπεδο Λογικής) / </a:t>
+            </a:r>
+            <a:r>
+              <a:rPr kumimoji="0" lang="el-GR" altLang="el-GR" sz="1200" b="1" i="0" u="none" strike="noStrike" cap="none" normalizeH="0" baseline="0" dirty="0" err="1">
+                <a:ln>
+                  <a:noFill/>
+                </a:ln>
+                <a:solidFill>
+                  <a:schemeClr val="tx1"/>
+                </a:solidFill>
+                <a:effectLst/>
+              </a:rPr>
+              <a:t>Rule-Based</a:t>
+            </a:r>
+            <a:r>
+              <a:rPr kumimoji="0" lang="el-GR" altLang="el-GR" sz="1200" b="1" i="0" u="none" strike="noStrike" cap="none" normalizeH="0" baseline="0" dirty="0">
+                <a:ln>
+                  <a:noFill/>
+                </a:ln>
+                <a:solidFill>
+                  <a:schemeClr val="tx1"/>
+                </a:solidFill>
+                <a:effectLst/>
+              </a:rPr>
+              <a:t> </a:t>
+            </a:r>
+            <a:r>
+              <a:rPr kumimoji="0" lang="el-GR" altLang="el-GR" sz="1200" b="1" i="0" u="none" strike="noStrike" cap="none" normalizeH="0" baseline="0" dirty="0" err="1">
+                <a:ln>
+                  <a:noFill/>
+                </a:ln>
+                <a:solidFill>
+                  <a:schemeClr val="tx1"/>
+                </a:solidFill>
+                <a:effectLst/>
+              </a:rPr>
+              <a:t>Sensor</a:t>
+            </a:r>
+            <a:r>
+              <a:rPr kumimoji="0" lang="el-GR" altLang="el-GR" sz="1200" b="1" i="0" u="none" strike="noStrike" cap="none" normalizeH="0" baseline="0" dirty="0">
+                <a:ln>
+                  <a:noFill/>
+                </a:ln>
+                <a:solidFill>
+                  <a:schemeClr val="tx1"/>
+                </a:solidFill>
+                <a:effectLst/>
+              </a:rPr>
+              <a:t>:</a:t>
+            </a:r>
+            <a:r>
+              <a:rPr kumimoji="0" lang="el-GR" altLang="el-GR" sz="1200" b="0" i="0" u="none" strike="noStrike" cap="none" normalizeH="0" baseline="0" dirty="0">
+                <a:ln>
+                  <a:noFill/>
+                </a:ln>
+                <a:solidFill>
+                  <a:schemeClr val="tx1"/>
+                </a:solidFill>
+                <a:effectLst/>
+              </a:rPr>
+              <a:t> Αναλύει τις ροές δεδομένων σε πραγματικό χρόνο για τον υπολογισμό δυναμικών καταστάσεων, όπως η «Ένταση Χρήσης» (π.χ. ΥΨΗΛΗ, ΚΡΙΣΙΜΗ), ενεργοποιώντας άμεσα ειδοποιήσεις στο </a:t>
+            </a:r>
+            <a:r>
+              <a:rPr kumimoji="0" lang="el-GR" altLang="el-GR" sz="1200" b="0" i="0" u="none" strike="noStrike" cap="none" normalizeH="0" baseline="0" dirty="0" err="1">
+                <a:ln>
+                  <a:noFill/>
+                </a:ln>
+                <a:solidFill>
+                  <a:schemeClr val="tx1"/>
+                </a:solidFill>
+                <a:effectLst/>
+              </a:rPr>
+              <a:t>Node</a:t>
+            </a:r>
+            <a:r>
+              <a:rPr kumimoji="0" lang="el-GR" altLang="el-GR" sz="1200" b="0" i="0" u="none" strike="noStrike" cap="none" normalizeH="0" baseline="0" dirty="0">
+                <a:ln>
+                  <a:noFill/>
+                </a:ln>
+                <a:solidFill>
+                  <a:schemeClr val="tx1"/>
+                </a:solidFill>
+                <a:effectLst/>
+              </a:rPr>
+              <a:t>-RED όταν ξεπερνιούνται τα καθορισμένα όρια (</a:t>
+            </a:r>
+            <a:r>
+              <a:rPr kumimoji="0" lang="el-GR" altLang="el-GR" sz="1200" b="0" i="0" u="none" strike="noStrike" cap="none" normalizeH="0" baseline="0" dirty="0" err="1">
+                <a:ln>
+                  <a:noFill/>
+                </a:ln>
+                <a:solidFill>
+                  <a:schemeClr val="tx1"/>
+                </a:solidFill>
+                <a:effectLst/>
+              </a:rPr>
+              <a:t>thresholds</a:t>
+            </a:r>
+            <a:r>
+              <a:rPr kumimoji="0" lang="el-GR" altLang="el-GR" sz="1200" b="0" i="0" u="none" strike="noStrike" cap="none" normalizeH="0" baseline="0" dirty="0">
+                <a:ln>
+                  <a:noFill/>
+                </a:ln>
+                <a:solidFill>
+                  <a:schemeClr val="tx1"/>
+                </a:solidFill>
+                <a:effectLst/>
+              </a:rPr>
+              <a:t>).</a:t>
+            </a:r>
+            <a:endParaRPr kumimoji="0" lang="en-US" altLang="el-GR" sz="1200" b="0" i="0" u="none" strike="noStrike" cap="none" normalizeH="0" baseline="0" dirty="0">
+              <a:ln>
+                <a:noFill/>
+              </a:ln>
+              <a:solidFill>
+                <a:schemeClr val="tx1"/>
+              </a:solidFill>
+              <a:effectLst/>
+            </a:endParaRPr>
+          </a:p>
+          <a:p>
+            <a:pPr marL="0" marR="0" lvl="0" indent="0" algn="l" defTabSz="914400" rtl="0" eaLnBrk="0" fontAlgn="base" latinLnBrk="0" hangingPunct="0">
+              <a:lnSpc>
+                <a:spcPct val="100000"/>
+              </a:lnSpc>
+              <a:spcBef>
+                <a:spcPct val="0"/>
+              </a:spcBef>
+              <a:spcAft>
+                <a:spcPct val="0"/>
+              </a:spcAft>
+              <a:buClrTx/>
+              <a:buSzTx/>
+              <a:tabLst/>
+            </a:pPr>
+            <a:endParaRPr kumimoji="0" lang="el-GR" altLang="el-GR" sz="1200" b="0" i="0" u="none" strike="noStrike" cap="none" normalizeH="0" baseline="0" dirty="0">
+              <a:ln>
+                <a:noFill/>
+              </a:ln>
+              <a:solidFill>
+                <a:schemeClr val="tx1"/>
+              </a:solidFill>
+              <a:effectLst/>
+            </a:endParaRPr>
+          </a:p>
+          <a:p>
+            <a:pPr marL="0" marR="0" lvl="0" indent="0" algn="l" defTabSz="914400" rtl="0" eaLnBrk="0" fontAlgn="base" latinLnBrk="0" hangingPunct="0">
+              <a:lnSpc>
+                <a:spcPct val="100000"/>
+              </a:lnSpc>
+              <a:spcBef>
+                <a:spcPct val="0"/>
+              </a:spcBef>
+              <a:spcAft>
+                <a:spcPct val="0"/>
+              </a:spcAft>
+              <a:buClrTx/>
+              <a:buSzTx/>
+              <a:buFontTx/>
+              <a:buChar char="•"/>
+              <a:tabLst/>
+            </a:pPr>
+            <a:r>
+              <a:rPr kumimoji="0" lang="el-GR" altLang="el-GR" sz="1200" b="1" i="0" u="none" strike="noStrike" cap="none" normalizeH="0" baseline="0" dirty="0">
+                <a:ln>
+                  <a:noFill/>
+                </a:ln>
+                <a:solidFill>
+                  <a:schemeClr val="tx1"/>
+                </a:solidFill>
+                <a:effectLst/>
+              </a:rPr>
+              <a:t>Αισθητήρας Μηχανικής Μάθησης (Προγνωστικό Επίπεδο) / </a:t>
+            </a:r>
+            <a:r>
+              <a:rPr kumimoji="0" lang="el-GR" altLang="el-GR" sz="1200" b="1" i="0" u="none" strike="noStrike" cap="none" normalizeH="0" baseline="0" dirty="0" err="1">
+                <a:ln>
+                  <a:noFill/>
+                </a:ln>
+                <a:solidFill>
+                  <a:schemeClr val="tx1"/>
+                </a:solidFill>
+                <a:effectLst/>
+              </a:rPr>
+              <a:t>Machine</a:t>
+            </a:r>
+            <a:r>
+              <a:rPr kumimoji="0" lang="el-GR" altLang="el-GR" sz="1200" b="1" i="0" u="none" strike="noStrike" cap="none" normalizeH="0" baseline="0" dirty="0">
+                <a:ln>
+                  <a:noFill/>
+                </a:ln>
+                <a:solidFill>
+                  <a:schemeClr val="tx1"/>
+                </a:solidFill>
+                <a:effectLst/>
+              </a:rPr>
+              <a:t> </a:t>
+            </a:r>
+            <a:r>
+              <a:rPr kumimoji="0" lang="el-GR" altLang="el-GR" sz="1200" b="1" i="0" u="none" strike="noStrike" cap="none" normalizeH="0" baseline="0" dirty="0" err="1">
+                <a:ln>
+                  <a:noFill/>
+                </a:ln>
+                <a:solidFill>
+                  <a:schemeClr val="tx1"/>
+                </a:solidFill>
+                <a:effectLst/>
+              </a:rPr>
+              <a:t>Learning</a:t>
+            </a:r>
+            <a:r>
+              <a:rPr kumimoji="0" lang="el-GR" altLang="el-GR" sz="1200" b="1" i="0" u="none" strike="noStrike" cap="none" normalizeH="0" baseline="0" dirty="0">
+                <a:ln>
+                  <a:noFill/>
+                </a:ln>
+                <a:solidFill>
+                  <a:schemeClr val="tx1"/>
+                </a:solidFill>
+                <a:effectLst/>
+              </a:rPr>
+              <a:t> </a:t>
+            </a:r>
+            <a:r>
+              <a:rPr kumimoji="0" lang="el-GR" altLang="el-GR" sz="1200" b="1" i="0" u="none" strike="noStrike" cap="none" normalizeH="0" baseline="0" dirty="0" err="1">
+                <a:ln>
+                  <a:noFill/>
+                </a:ln>
+                <a:solidFill>
+                  <a:schemeClr val="tx1"/>
+                </a:solidFill>
+                <a:effectLst/>
+              </a:rPr>
+              <a:t>Sensor</a:t>
+            </a:r>
+            <a:r>
+              <a:rPr kumimoji="0" lang="el-GR" altLang="el-GR" sz="1200" b="1" i="0" u="none" strike="noStrike" cap="none" normalizeH="0" baseline="0" dirty="0">
+                <a:ln>
+                  <a:noFill/>
+                </a:ln>
+                <a:solidFill>
+                  <a:schemeClr val="tx1"/>
+                </a:solidFill>
+                <a:effectLst/>
+              </a:rPr>
+              <a:t>:</a:t>
+            </a:r>
+            <a:r>
+              <a:rPr kumimoji="0" lang="el-GR" altLang="el-GR" sz="1200" b="0" i="0" u="none" strike="noStrike" cap="none" normalizeH="0" baseline="0" dirty="0">
+                <a:ln>
+                  <a:noFill/>
+                </a:ln>
+                <a:solidFill>
+                  <a:schemeClr val="tx1"/>
+                </a:solidFill>
+                <a:effectLst/>
+              </a:rPr>
+              <a:t> Χρησιμοποιεί ιστορικά μοτίβα και δεδομένα πλαισίου (</a:t>
+            </a:r>
+            <a:r>
+              <a:rPr kumimoji="0" lang="el-GR" altLang="el-GR" sz="1200" b="0" i="0" u="none" strike="noStrike" cap="none" normalizeH="0" baseline="0" dirty="0" err="1">
+                <a:ln>
+                  <a:noFill/>
+                </a:ln>
+                <a:solidFill>
+                  <a:schemeClr val="tx1"/>
+                </a:solidFill>
+                <a:effectLst/>
+              </a:rPr>
+              <a:t>context</a:t>
+            </a:r>
+            <a:r>
+              <a:rPr kumimoji="0" lang="el-GR" altLang="el-GR" sz="1200" b="0" i="0" u="none" strike="noStrike" cap="none" normalizeH="0" baseline="0" dirty="0">
+                <a:ln>
+                  <a:noFill/>
+                </a:ln>
+                <a:solidFill>
+                  <a:schemeClr val="tx1"/>
+                </a:solidFill>
+                <a:effectLst/>
+              </a:rPr>
+              <a:t>, όπως ώρα και ημέρα της εβδομάδας) για να εξάγει ωριαίες προβλέψεις κίνησης («υψηλή/</a:t>
+            </a:r>
+            <a:r>
+              <a:rPr kumimoji="0" lang="el-GR" altLang="el-GR" sz="1200" b="0" i="0" u="none" strike="noStrike" cap="none" normalizeH="0" baseline="0" dirty="0" err="1">
+                <a:ln>
+                  <a:noFill/>
+                </a:ln>
+                <a:solidFill>
+                  <a:schemeClr val="tx1"/>
+                </a:solidFill>
+                <a:effectLst/>
+              </a:rPr>
+              <a:t>busy</a:t>
+            </a:r>
+            <a:r>
+              <a:rPr kumimoji="0" lang="el-GR" altLang="el-GR" sz="1200" b="0" i="0" u="none" strike="noStrike" cap="none" normalizeH="0" baseline="0" dirty="0">
+                <a:ln>
+                  <a:noFill/>
+                </a:ln>
+                <a:solidFill>
+                  <a:schemeClr val="tx1"/>
+                </a:solidFill>
+                <a:effectLst/>
+              </a:rPr>
+              <a:t>» ή «χαμηλή/</a:t>
+            </a:r>
+            <a:r>
+              <a:rPr kumimoji="0" lang="el-GR" altLang="el-GR" sz="1200" b="0" i="0" u="none" strike="noStrike" cap="none" normalizeH="0" baseline="0" dirty="0" err="1">
+                <a:ln>
+                  <a:noFill/>
+                </a:ln>
+                <a:solidFill>
+                  <a:schemeClr val="tx1"/>
+                </a:solidFill>
+                <a:effectLst/>
+              </a:rPr>
+              <a:t>quiet</a:t>
+            </a:r>
+            <a:r>
+              <a:rPr kumimoji="0" lang="el-GR" altLang="el-GR" sz="1200" b="0" i="0" u="none" strike="noStrike" cap="none" normalizeH="0" baseline="0" dirty="0">
+                <a:ln>
+                  <a:noFill/>
+                </a:ln>
+                <a:solidFill>
+                  <a:schemeClr val="tx1"/>
+                </a:solidFill>
+                <a:effectLst/>
+              </a:rPr>
+              <a:t>») μαζί με έναν δείκτη βεβαιότητας (</a:t>
+            </a:r>
+            <a:r>
+              <a:rPr kumimoji="0" lang="el-GR" altLang="el-GR" sz="1200" b="0" i="0" u="none" strike="noStrike" cap="none" normalizeH="0" baseline="0" dirty="0" err="1">
+                <a:ln>
+                  <a:noFill/>
+                </a:ln>
+                <a:solidFill>
+                  <a:schemeClr val="tx1"/>
+                </a:solidFill>
+                <a:effectLst/>
+              </a:rPr>
+              <a:t>confidence</a:t>
+            </a:r>
+            <a:r>
+              <a:rPr kumimoji="0" lang="el-GR" altLang="el-GR" sz="1200" b="0" i="0" u="none" strike="noStrike" cap="none" normalizeH="0" baseline="0" dirty="0">
+                <a:ln>
+                  <a:noFill/>
+                </a:ln>
+                <a:solidFill>
+                  <a:schemeClr val="tx1"/>
+                </a:solidFill>
+                <a:effectLst/>
+              </a:rPr>
+              <a:t> </a:t>
+            </a:r>
+            <a:r>
+              <a:rPr kumimoji="0" lang="el-GR" altLang="el-GR" sz="1200" b="0" i="0" u="none" strike="noStrike" cap="none" normalizeH="0" baseline="0" dirty="0" err="1">
+                <a:ln>
+                  <a:noFill/>
+                </a:ln>
+                <a:solidFill>
+                  <a:schemeClr val="tx1"/>
+                </a:solidFill>
+                <a:effectLst/>
+              </a:rPr>
+              <a:t>score</a:t>
+            </a:r>
+            <a:r>
+              <a:rPr kumimoji="0" lang="el-GR" altLang="el-GR" sz="1200" b="0" i="0" u="none" strike="noStrike" cap="none" normalizeH="0" baseline="0" dirty="0">
+                <a:ln>
+                  <a:noFill/>
+                </a:ln>
+                <a:solidFill>
+                  <a:schemeClr val="tx1"/>
+                </a:solidFill>
+                <a:effectLst/>
+              </a:rPr>
+              <a:t>), επιτρέποντας την προληπτική διαχείριση των απορριμμάτων.</a:t>
+            </a:r>
+          </a:p>
+        </p:txBody>
+      </p:sp>
+    </p:spTree>
+    <p:extLst>
+      <p:ext uri="{BB962C8B-B14F-4D97-AF65-F5344CB8AC3E}">
+        <p14:creationId xmlns:p14="http://schemas.microsoft.com/office/powerpoint/2010/main" val="3927520262"/>
+      </p:ext>
+    </p:extLst>
+  </p:cSld>
+  <p:clrMapOvr>
+    <a:masterClrMapping/>
+  </p:clrMapOvr>
+</p:sld>
+</file>
+
+<file path=ppt/slides/slide8.xml><?xml version="1.0" encoding="utf-8"?>
 <p:sld xmlns:a="http://schemas.openxmlformats.org/drawingml/2006/main" xmlns:r="http://schemas.openxmlformats.org/officeDocument/2006/relationships" xmlns:p="http://schemas.openxmlformats.org/presentationml/2006/main">
   <p:cSld>
     <p:spTree>
@@ -15616,7 +16643,7 @@
           <a:p>
             <a:r>
               <a:rPr lang="en-US" dirty="0"/>
-              <a:t>Virtual Sensors, Home Assistant and Low Code Platforms</a:t>
+              <a:t>Virtual Sensors, Home Assistant and Low Code Platforms (2)</a:t>
             </a:r>
             <a:br>
               <a:rPr lang="en-US" dirty="0"/>
@@ -15625,12 +16652,78 @@
           </a:p>
         </p:txBody>
       </p:sp>
+      <p:pic>
+        <p:nvPicPr>
+          <p:cNvPr id="6" name="Εικόνα 5">
+            <a:extLst>
+              <a:ext uri="{FF2B5EF4-FFF2-40B4-BE49-F238E27FC236}">
+                <a16:creationId xmlns:a16="http://schemas.microsoft.com/office/drawing/2014/main" id="{457BD6C9-0DB9-5999-5D36-FD523159AE3F}"/>
+              </a:ext>
+            </a:extLst>
+          </p:cNvPr>
+          <p:cNvPicPr>
+            <a:picLocks noChangeAspect="1"/>
+          </p:cNvPicPr>
+          <p:nvPr/>
+        </p:nvPicPr>
+        <p:blipFill>
+          <a:blip r:embed="rId2"/>
+          <a:stretch>
+            <a:fillRect/>
+          </a:stretch>
+        </p:blipFill>
+        <p:spPr>
+          <a:xfrm>
+            <a:off x="1996044" y="1975105"/>
+            <a:ext cx="7639568" cy="4026838"/>
+          </a:xfrm>
+          <a:prstGeom prst="rect">
+            <a:avLst/>
+          </a:prstGeom>
+        </p:spPr>
+      </p:pic>
+    </p:spTree>
+    <p:extLst>
+      <p:ext uri="{BB962C8B-B14F-4D97-AF65-F5344CB8AC3E}">
+        <p14:creationId xmlns:p14="http://schemas.microsoft.com/office/powerpoint/2010/main" val="889288063"/>
+      </p:ext>
+    </p:extLst>
+  </p:cSld>
+  <p:clrMapOvr>
+    <a:masterClrMapping/>
+  </p:clrMapOvr>
+</p:sld>
+</file>
+
+<file path=ppt/slides/slide9.xml><?xml version="1.0" encoding="utf-8"?>
+<p:sld xmlns:a="http://schemas.openxmlformats.org/drawingml/2006/main" xmlns:r="http://schemas.openxmlformats.org/officeDocument/2006/relationships" xmlns:p="http://schemas.openxmlformats.org/presentationml/2006/main">
+  <p:cSld>
+    <p:spTree>
+      <p:nvGrpSpPr>
+        <p:cNvPr id="1" name="">
+          <a:extLst>
+            <a:ext uri="{FF2B5EF4-FFF2-40B4-BE49-F238E27FC236}">
+              <a16:creationId xmlns:a16="http://schemas.microsoft.com/office/drawing/2014/main" id="{22C72D67-D87C-E20C-B16E-B79DE996CCD5}"/>
+            </a:ext>
+          </a:extLst>
+        </p:cNvPr>
+        <p:cNvGrpSpPr/>
+        <p:nvPr/>
+      </p:nvGrpSpPr>
+      <p:grpSpPr>
+        <a:xfrm>
+          <a:off x="0" y="0"/>
+          <a:ext cx="0" cy="0"/>
+          <a:chOff x="0" y="0"/>
+          <a:chExt cx="0" cy="0"/>
+        </a:xfrm>
+      </p:grpSpPr>
       <p:sp>
         <p:nvSpPr>
-          <p:cNvPr id="3" name="Θέση περιεχομένου 2">
+          <p:cNvPr id="2" name="Τίτλος 1">
             <a:extLst>
               <a:ext uri="{FF2B5EF4-FFF2-40B4-BE49-F238E27FC236}">
-                <a16:creationId xmlns:a16="http://schemas.microsoft.com/office/drawing/2014/main" id="{5B0CF87F-EEBF-755F-6DFB-9D2378C41314}"/>
+                <a16:creationId xmlns:a16="http://schemas.microsoft.com/office/drawing/2014/main" id="{38E0467B-2D19-D982-044F-036B9A718F7A}"/>
               </a:ext>
             </a:extLst>
           </p:cNvPr>
@@ -15638,7 +16731,7 @@
             <a:spLocks noGrp="1"/>
           </p:cNvSpPr>
           <p:nvPr>
-            <p:ph sz="quarter" idx="13"/>
+            <p:ph type="title"/>
           </p:nvPr>
         </p:nvSpPr>
         <p:spPr/>
@@ -15646,39 +16739,51 @@
           <a:bodyPr/>
           <a:lstStyle/>
           <a:p>
+            <a:r>
+              <a:rPr lang="en-US" dirty="0"/>
+              <a:t>Virtual Sensors, Home Assistant and Low Code Platforms (3)</a:t>
+            </a:r>
+            <a:br>
+              <a:rPr lang="en-US" dirty="0"/>
+            </a:br>
             <a:endParaRPr lang="el-GR" dirty="0"/>
           </a:p>
         </p:txBody>
       </p:sp>
-      <p:sp>
-        <p:nvSpPr>
-          <p:cNvPr id="4" name="Θέση πίνακα 3">
+      <p:pic>
+        <p:nvPicPr>
+          <p:cNvPr id="4" name="Εικόνα 3">
             <a:extLst>
               <a:ext uri="{FF2B5EF4-FFF2-40B4-BE49-F238E27FC236}">
-                <a16:creationId xmlns:a16="http://schemas.microsoft.com/office/drawing/2014/main" id="{AC163FF2-1F85-07C3-ED3E-5E666B0CC72F}"/>
+                <a16:creationId xmlns:a16="http://schemas.microsoft.com/office/drawing/2014/main" id="{47C3BCC6-2737-8F47-C94A-09B731F9A51D}"/>
               </a:ext>
             </a:extLst>
           </p:cNvPr>
-          <p:cNvSpPr>
-            <a:spLocks noGrp="1"/>
-          </p:cNvSpPr>
-          <p:nvPr>
-            <p:ph type="tbl" sz="quarter" idx="14"/>
-          </p:nvPr>
-        </p:nvSpPr>
-        <p:spPr/>
-        <p:txBody>
-          <a:bodyPr/>
-          <a:lstStyle/>
-          <a:p>
-            <a:endParaRPr lang="el-GR"/>
-          </a:p>
-        </p:txBody>
-      </p:sp>
+          <p:cNvPicPr>
+            <a:picLocks noChangeAspect="1"/>
+          </p:cNvPicPr>
+          <p:nvPr/>
+        </p:nvPicPr>
+        <p:blipFill>
+          <a:blip r:embed="rId2"/>
+          <a:stretch>
+            <a:fillRect/>
+          </a:stretch>
+        </p:blipFill>
+        <p:spPr>
+          <a:xfrm>
+            <a:off x="3430687" y="2352882"/>
+            <a:ext cx="5946245" cy="1959792"/>
+          </a:xfrm>
+          <a:prstGeom prst="rect">
+            <a:avLst/>
+          </a:prstGeom>
+        </p:spPr>
+      </p:pic>
     </p:spTree>
     <p:extLst>
       <p:ext uri="{BB962C8B-B14F-4D97-AF65-F5344CB8AC3E}">
-        <p14:creationId xmlns:p14="http://schemas.microsoft.com/office/powerpoint/2010/main" val="889288063"/>
+        <p14:creationId xmlns:p14="http://schemas.microsoft.com/office/powerpoint/2010/main" val="67935216"/>
       </p:ext>
     </p:extLst>
   </p:cSld>
@@ -16591,15 +17696,6 @@
 </file>
 
 <file path=customXml/item1.xml><?xml version="1.0" encoding="utf-8"?>
-<?mso-contentType ?>
-<FormTemplates xmlns="http://schemas.microsoft.com/sharepoint/v3/contenttype/forms">
-  <Display>DocumentLibraryForm</Display>
-  <Edit>DocumentLibraryForm</Edit>
-  <New>DocumentLibraryForm</New>
-</FormTemplates>
-</file>
-
-<file path=customXml/item2.xml><?xml version="1.0" encoding="utf-8"?>
 <ct:contentTypeSchema xmlns:ct="http://schemas.microsoft.com/office/2006/metadata/contentType" xmlns:ma="http://schemas.microsoft.com/office/2006/metadata/properties/metaAttributes" ct:_="" ma:_="" ma:contentTypeName="Document" ma:contentTypeID="0x01010079F111ED35F8CC479449609E8A0923A6" ma:contentTypeVersion="28" ma:contentTypeDescription="Create a new document." ma:contentTypeScope="" ma:versionID="60f5a4f2d2b0abadcf532d48ebf9cb71">
   <xsd:schema xmlns:xsd="http://www.w3.org/2001/XMLSchema" xmlns:xs="http://www.w3.org/2001/XMLSchema" xmlns:p="http://schemas.microsoft.com/office/2006/metadata/properties" xmlns:ns1="http://schemas.microsoft.com/sharepoint/v3" xmlns:ns2="71af3243-3dd4-4a8d-8c0d-dd76da1f02a5" xmlns:ns3="16c05727-aa75-4e4a-9b5f-8a80a1165891" xmlns:ns4="230e9df3-be65-4c73-a93b-d1236ebd677e" targetNamespace="http://schemas.microsoft.com/office/2006/metadata/properties" ma:root="true" ma:fieldsID="7dd78129e6a1811f84807ad11c651531" ns1:_="" ns2:_="" ns3:_="" ns4:_="">
     <xsd:import namespace="http://schemas.microsoft.com/sharepoint/v3"/>
@@ -16911,6 +18007,15 @@
 </ct:contentTypeSchema>
 </file>
 
+<file path=customXml/item2.xml><?xml version="1.0" encoding="utf-8"?>
+<?mso-contentType ?>
+<FormTemplates xmlns="http://schemas.microsoft.com/sharepoint/v3/contenttype/forms">
+  <Display>DocumentLibraryForm</Display>
+  <Edit>DocumentLibraryForm</Edit>
+  <New>DocumentLibraryForm</New>
+</FormTemplates>
+</file>
+
 <file path=customXml/item3.xml><?xml version="1.0" encoding="utf-8"?>
 <p:properties xmlns:p="http://schemas.microsoft.com/office/2006/metadata/properties" xmlns:xsi="http://www.w3.org/2001/XMLSchema-instance" xmlns:pc="http://schemas.microsoft.com/office/infopath/2007/PartnerControls">
   <documentManagement>
@@ -16932,14 +18037,6 @@
 </file>
 
 <file path=customXml/itemProps1.xml><?xml version="1.0" encoding="utf-8"?>
-<ds:datastoreItem xmlns:ds="http://schemas.openxmlformats.org/officeDocument/2006/customXml" ds:itemID="{060367E2-A4EF-4F83-9408-21F92ABD6937}">
-  <ds:schemaRefs>
-    <ds:schemaRef ds:uri="http://schemas.microsoft.com/sharepoint/v3/contenttype/forms"/>
-  </ds:schemaRefs>
-</ds:datastoreItem>
-</file>
-
-<file path=customXml/itemProps2.xml><?xml version="1.0" encoding="utf-8"?>
 <ds:datastoreItem xmlns:ds="http://schemas.openxmlformats.org/officeDocument/2006/customXml" ds:itemID="{DA0F62E9-537D-4B86-A5A3-DCAED002D6F5}">
   <ds:schemaRefs>
     <ds:schemaRef ds:uri="http://schemas.microsoft.com/office/2006/metadata/contentType"/>
@@ -16960,6 +18057,14 @@
 </ds:datastoreItem>
 </file>
 
+<file path=customXml/itemProps2.xml><?xml version="1.0" encoding="utf-8"?>
+<ds:datastoreItem xmlns:ds="http://schemas.openxmlformats.org/officeDocument/2006/customXml" ds:itemID="{060367E2-A4EF-4F83-9408-21F92ABD6937}">
+  <ds:schemaRefs>
+    <ds:schemaRef ds:uri="http://schemas.microsoft.com/sharepoint/v3/contenttype/forms"/>
+  </ds:schemaRefs>
+</ds:datastoreItem>
+</file>
+
 <file path=customXml/itemProps3.xml><?xml version="1.0" encoding="utf-8"?>
 <ds:datastoreItem xmlns:ds="http://schemas.openxmlformats.org/officeDocument/2006/customXml" ds:itemID="{E9E9A08A-3D48-4730-8B6D-01A15F4E9B00}">
   <ds:schemaRefs>

--- a/presentation/team05_presentation.pptx
+++ b/presentation/team05_presentation.pptx
@@ -14700,36 +14700,6 @@
           </a:p>
         </p:txBody>
       </p:sp>
-      <p:pic>
-        <p:nvPicPr>
-          <p:cNvPr id="8" name="Εικόνα 7">
-            <a:extLst>
-              <a:ext uri="{FF2B5EF4-FFF2-40B4-BE49-F238E27FC236}">
-                <a16:creationId xmlns:a16="http://schemas.microsoft.com/office/drawing/2014/main" id="{9AF40EA4-378A-DB24-E664-D0933972A5CC}"/>
-              </a:ext>
-            </a:extLst>
-          </p:cNvPr>
-          <p:cNvPicPr>
-            <a:picLocks noChangeAspect="1"/>
-          </p:cNvPicPr>
-          <p:nvPr/>
-        </p:nvPicPr>
-        <p:blipFill>
-          <a:blip r:embed="rId2"/>
-          <a:stretch>
-            <a:fillRect/>
-          </a:stretch>
-        </p:blipFill>
-        <p:spPr>
-          <a:xfrm>
-            <a:off x="4494913" y="1975105"/>
-            <a:ext cx="7662290" cy="3702051"/>
-          </a:xfrm>
-          <a:prstGeom prst="rect">
-            <a:avLst/>
-          </a:prstGeom>
-        </p:spPr>
-      </p:pic>
       <p:sp>
         <p:nvSpPr>
           <p:cNvPr id="11" name="TextBox 10">
@@ -14882,6 +14852,36 @@
           </a:p>
         </p:txBody>
       </p:sp>
+      <p:pic>
+        <p:nvPicPr>
+          <p:cNvPr id="4" name="Εικόνα 3">
+            <a:extLst>
+              <a:ext uri="{FF2B5EF4-FFF2-40B4-BE49-F238E27FC236}">
+                <a16:creationId xmlns:a16="http://schemas.microsoft.com/office/drawing/2014/main" id="{BE76BA12-A908-78F0-A2F7-61C12C044098}"/>
+              </a:ext>
+            </a:extLst>
+          </p:cNvPr>
+          <p:cNvPicPr>
+            <a:picLocks noChangeAspect="1"/>
+          </p:cNvPicPr>
+          <p:nvPr/>
+        </p:nvPicPr>
+        <p:blipFill>
+          <a:blip r:embed="rId2"/>
+          <a:stretch>
+            <a:fillRect/>
+          </a:stretch>
+        </p:blipFill>
+        <p:spPr>
+          <a:xfrm>
+            <a:off x="4224758" y="1645283"/>
+            <a:ext cx="7769122" cy="3103712"/>
+          </a:xfrm>
+          <a:prstGeom prst="rect">
+            <a:avLst/>
+          </a:prstGeom>
+        </p:spPr>
+      </p:pic>
     </p:spTree>
     <p:extLst>
       <p:ext uri="{BB962C8B-B14F-4D97-AF65-F5344CB8AC3E}">
@@ -16590,6 +16590,46 @@
           </a:p>
         </p:txBody>
       </p:sp>
+      <p:sp>
+        <p:nvSpPr>
+          <p:cNvPr id="11" name="TextBox 10">
+            <a:extLst>
+              <a:ext uri="{FF2B5EF4-FFF2-40B4-BE49-F238E27FC236}">
+                <a16:creationId xmlns:a16="http://schemas.microsoft.com/office/drawing/2014/main" id="{F5BA520F-3A9E-AA3C-03C5-375D509CEE43}"/>
+              </a:ext>
+            </a:extLst>
+          </p:cNvPr>
+          <p:cNvSpPr txBox="1"/>
+          <p:nvPr/>
+        </p:nvSpPr>
+        <p:spPr>
+          <a:xfrm>
+            <a:off x="7383780" y="4394019"/>
+            <a:ext cx="5087815" cy="261610"/>
+          </a:xfrm>
+          <a:prstGeom prst="rect">
+            <a:avLst/>
+          </a:prstGeom>
+          <a:noFill/>
+        </p:spPr>
+        <p:txBody>
+          <a:bodyPr wrap="square" rtlCol="0">
+            <a:spAutoFit/>
+          </a:bodyPr>
+          <a:lstStyle/>
+          <a:p>
+            <a:r>
+              <a:rPr lang="el-GR" sz="1100" b="1" i="1" dirty="0"/>
+              <a:t>Πηγή:</a:t>
+            </a:r>
+            <a:r>
+              <a:rPr lang="el-GR" sz="1100" i="1" dirty="0"/>
+              <a:t> Σημειώσεις διαλέξεων, Διάλεξη 8</a:t>
+            </a:r>
+            <a:endParaRPr lang="en-US" sz="1100" i="1" dirty="0"/>
+          </a:p>
+        </p:txBody>
+      </p:sp>
     </p:spTree>
     <p:extLst>
       <p:ext uri="{BB962C8B-B14F-4D97-AF65-F5344CB8AC3E}">
@@ -16750,36 +16790,6 @@
           </a:p>
         </p:txBody>
       </p:sp>
-      <p:pic>
-        <p:nvPicPr>
-          <p:cNvPr id="4" name="Εικόνα 3">
-            <a:extLst>
-              <a:ext uri="{FF2B5EF4-FFF2-40B4-BE49-F238E27FC236}">
-                <a16:creationId xmlns:a16="http://schemas.microsoft.com/office/drawing/2014/main" id="{47C3BCC6-2737-8F47-C94A-09B731F9A51D}"/>
-              </a:ext>
-            </a:extLst>
-          </p:cNvPr>
-          <p:cNvPicPr>
-            <a:picLocks noChangeAspect="1"/>
-          </p:cNvPicPr>
-          <p:nvPr/>
-        </p:nvPicPr>
-        <p:blipFill>
-          <a:blip r:embed="rId2"/>
-          <a:stretch>
-            <a:fillRect/>
-          </a:stretch>
-        </p:blipFill>
-        <p:spPr>
-          <a:xfrm>
-            <a:off x="3430687" y="2352882"/>
-            <a:ext cx="5946245" cy="1959792"/>
-          </a:xfrm>
-          <a:prstGeom prst="rect">
-            <a:avLst/>
-          </a:prstGeom>
-        </p:spPr>
-      </p:pic>
     </p:spTree>
     <p:extLst>
       <p:ext uri="{BB962C8B-B14F-4D97-AF65-F5344CB8AC3E}">

--- a/presentation/team05_presentation.pptx
+++ b/presentation/team05_presentation.pptx
@@ -16714,14 +16714,436 @@
         </p:blipFill>
         <p:spPr>
           <a:xfrm>
-            <a:off x="1996044" y="1975105"/>
-            <a:ext cx="7639568" cy="4026838"/>
+            <a:off x="4262614" y="1975105"/>
+            <a:ext cx="6775078" cy="3571163"/>
           </a:xfrm>
           <a:prstGeom prst="rect">
             <a:avLst/>
           </a:prstGeom>
         </p:spPr>
       </p:pic>
+      <p:sp>
+        <p:nvSpPr>
+          <p:cNvPr id="7" name="Rectangle 1">
+            <a:extLst>
+              <a:ext uri="{FF2B5EF4-FFF2-40B4-BE49-F238E27FC236}">
+                <a16:creationId xmlns:a16="http://schemas.microsoft.com/office/drawing/2014/main" id="{CB7AADE1-41A7-016A-C018-09FC28E6B02F}"/>
+              </a:ext>
+            </a:extLst>
+          </p:cNvPr>
+          <p:cNvSpPr>
+            <a:spLocks noChangeArrowheads="1"/>
+          </p:cNvSpPr>
+          <p:nvPr/>
+        </p:nvSpPr>
+        <p:spPr bwMode="auto">
+          <a:xfrm>
+            <a:off x="216311" y="2308940"/>
+            <a:ext cx="3588773" cy="2677656"/>
+          </a:xfrm>
+          <a:prstGeom prst="rect">
+            <a:avLst/>
+          </a:prstGeom>
+          <a:noFill/>
+          <a:ln>
+            <a:noFill/>
+          </a:ln>
+          <a:effectLst/>
+          <a:extLst>
+            <a:ext uri="{909E8E84-426E-40DD-AFC4-6F175D3DCCD1}">
+              <a14:hiddenFill xmlns:a14="http://schemas.microsoft.com/office/drawing/2010/main">
+                <a:solidFill>
+                  <a:schemeClr val="accent1"/>
+                </a:solidFill>
+              </a14:hiddenFill>
+            </a:ext>
+            <a:ext uri="{91240B29-F687-4F45-9708-019B960494DF}">
+              <a14:hiddenLine xmlns:a14="http://schemas.microsoft.com/office/drawing/2010/main" w="9525">
+                <a:solidFill>
+                  <a:schemeClr val="tx1"/>
+                </a:solidFill>
+                <a:miter lim="800000"/>
+                <a:headEnd/>
+                <a:tailEnd/>
+              </a14:hiddenLine>
+            </a:ext>
+            <a:ext uri="{AF507438-7753-43E0-B8FC-AC1667EBCBE1}">
+              <a14:hiddenEffects xmlns:a14="http://schemas.microsoft.com/office/drawing/2010/main">
+                <a:effectLst>
+                  <a:outerShdw dist="35921" dir="2700000" algn="ctr" rotWithShape="0">
+                    <a:schemeClr val="bg2"/>
+                  </a:outerShdw>
+                </a:effectLst>
+              </a14:hiddenEffects>
+            </a:ext>
+          </a:extLst>
+        </p:spPr>
+        <p:txBody>
+          <a:bodyPr vert="horz" wrap="square" lIns="91440" tIns="45720" rIns="91440" bIns="45720" numCol="1" anchor="ctr" anchorCtr="0" compatLnSpc="1">
+            <a:prstTxWarp prst="textNoShape">
+              <a:avLst/>
+            </a:prstTxWarp>
+            <a:spAutoFit/>
+          </a:bodyPr>
+          <a:lstStyle/>
+          <a:p>
+            <a:pPr marL="0" marR="0" lvl="0" indent="0" algn="l" defTabSz="914400" rtl="0" eaLnBrk="0" fontAlgn="base" latinLnBrk="0" hangingPunct="0">
+              <a:lnSpc>
+                <a:spcPct val="100000"/>
+              </a:lnSpc>
+              <a:spcBef>
+                <a:spcPct val="0"/>
+              </a:spcBef>
+              <a:spcAft>
+                <a:spcPct val="0"/>
+              </a:spcAft>
+              <a:buClrTx/>
+              <a:buSzTx/>
+              <a:buFontTx/>
+              <a:buChar char="•"/>
+              <a:tabLst/>
+            </a:pPr>
+            <a:r>
+              <a:rPr kumimoji="0" lang="el-GR" altLang="el-GR" sz="1400" b="1" i="0" u="none" strike="noStrike" cap="none" normalizeH="0" baseline="0" dirty="0">
+                <a:ln>
+                  <a:noFill/>
+                </a:ln>
+                <a:solidFill>
+                  <a:schemeClr val="tx1"/>
+                </a:solidFill>
+                <a:effectLst/>
+              </a:rPr>
+              <a:t>Τηλεμετρία Ζωντανά:</a:t>
+            </a:r>
+            <a:r>
+              <a:rPr kumimoji="0" lang="el-GR" altLang="el-GR" sz="1400" b="0" i="0" u="none" strike="noStrike" cap="none" normalizeH="0" baseline="0" dirty="0">
+                <a:ln>
+                  <a:noFill/>
+                </a:ln>
+                <a:solidFill>
+                  <a:schemeClr val="tx1"/>
+                </a:solidFill>
+                <a:effectLst/>
+              </a:rPr>
+              <a:t> Απεικόνιση κατάστασης κάδου και δεδομένων από εικονικούς (</a:t>
+            </a:r>
+            <a:r>
+              <a:rPr kumimoji="0" lang="el-GR" altLang="el-GR" sz="1400" b="0" i="0" u="none" strike="noStrike" cap="none" normalizeH="0" baseline="0" dirty="0" err="1">
+                <a:ln>
+                  <a:noFill/>
+                </a:ln>
+                <a:solidFill>
+                  <a:schemeClr val="tx1"/>
+                </a:solidFill>
+                <a:effectLst/>
+              </a:rPr>
+              <a:t>mock</a:t>
+            </a:r>
+            <a:r>
+              <a:rPr kumimoji="0" lang="el-GR" altLang="el-GR" sz="1400" b="0" i="0" u="none" strike="noStrike" cap="none" normalizeH="0" baseline="0" dirty="0">
+                <a:ln>
+                  <a:noFill/>
+                </a:ln>
+                <a:solidFill>
+                  <a:schemeClr val="tx1"/>
+                </a:solidFill>
+                <a:effectLst/>
+              </a:rPr>
+              <a:t>) αισθητήρες.</a:t>
+            </a:r>
+          </a:p>
+          <a:p>
+            <a:pPr marL="0" marR="0" lvl="0" indent="0" algn="l" defTabSz="914400" rtl="0" eaLnBrk="0" fontAlgn="base" latinLnBrk="0" hangingPunct="0">
+              <a:lnSpc>
+                <a:spcPct val="100000"/>
+              </a:lnSpc>
+              <a:spcBef>
+                <a:spcPct val="0"/>
+              </a:spcBef>
+              <a:spcAft>
+                <a:spcPct val="0"/>
+              </a:spcAft>
+              <a:buClrTx/>
+              <a:buSzTx/>
+              <a:tabLst/>
+            </a:pPr>
+            <a:endParaRPr kumimoji="0" lang="el-GR" altLang="el-GR" sz="1400" b="0" i="0" u="none" strike="noStrike" cap="none" normalizeH="0" baseline="0" dirty="0">
+              <a:ln>
+                <a:noFill/>
+              </a:ln>
+              <a:solidFill>
+                <a:schemeClr val="tx1"/>
+              </a:solidFill>
+              <a:effectLst/>
+            </a:endParaRPr>
+          </a:p>
+          <a:p>
+            <a:pPr marL="0" marR="0" lvl="0" indent="0" algn="l" defTabSz="914400" rtl="0" eaLnBrk="0" fontAlgn="base" latinLnBrk="0" hangingPunct="0">
+              <a:lnSpc>
+                <a:spcPct val="100000"/>
+              </a:lnSpc>
+              <a:spcBef>
+                <a:spcPct val="0"/>
+              </a:spcBef>
+              <a:spcAft>
+                <a:spcPct val="0"/>
+              </a:spcAft>
+              <a:buClrTx/>
+              <a:buSzTx/>
+              <a:buFontTx/>
+              <a:buChar char="•"/>
+              <a:tabLst/>
+            </a:pPr>
+            <a:r>
+              <a:rPr kumimoji="0" lang="el-GR" altLang="el-GR" sz="1400" b="1" i="0" u="none" strike="noStrike" cap="none" normalizeH="0" baseline="0" dirty="0" err="1">
+                <a:ln>
+                  <a:noFill/>
+                </a:ln>
+                <a:solidFill>
+                  <a:schemeClr val="tx1"/>
+                </a:solidFill>
+                <a:effectLst/>
+              </a:rPr>
+              <a:t>Edge</a:t>
+            </a:r>
+            <a:r>
+              <a:rPr kumimoji="0" lang="el-GR" altLang="el-GR" sz="1400" b="1" i="0" u="none" strike="noStrike" cap="none" normalizeH="0" baseline="0" dirty="0">
+                <a:ln>
+                  <a:noFill/>
+                </a:ln>
+                <a:solidFill>
+                  <a:schemeClr val="tx1"/>
+                </a:solidFill>
+                <a:effectLst/>
+              </a:rPr>
+              <a:t> AI </a:t>
+            </a:r>
+            <a:r>
+              <a:rPr kumimoji="0" lang="el-GR" altLang="el-GR" sz="1400" b="1" i="0" u="none" strike="noStrike" cap="none" normalizeH="0" baseline="0" dirty="0" err="1">
+                <a:ln>
+                  <a:noFill/>
+                </a:ln>
+                <a:solidFill>
+                  <a:schemeClr val="tx1"/>
+                </a:solidFill>
+                <a:effectLst/>
+              </a:rPr>
+              <a:t>Diagnostics</a:t>
+            </a:r>
+            <a:r>
+              <a:rPr kumimoji="0" lang="el-GR" altLang="el-GR" sz="1400" b="1" i="0" u="none" strike="noStrike" cap="none" normalizeH="0" baseline="0" dirty="0">
+                <a:ln>
+                  <a:noFill/>
+                </a:ln>
+                <a:solidFill>
+                  <a:schemeClr val="tx1"/>
+                </a:solidFill>
+                <a:effectLst/>
+              </a:rPr>
+              <a:t>:</a:t>
+            </a:r>
+            <a:r>
+              <a:rPr kumimoji="0" lang="el-GR" altLang="el-GR" sz="1400" b="0" i="0" u="none" strike="noStrike" cap="none" normalizeH="0" baseline="0" dirty="0">
+                <a:ln>
+                  <a:noFill/>
+                </a:ln>
+                <a:solidFill>
+                  <a:schemeClr val="tx1"/>
+                </a:solidFill>
+                <a:effectLst/>
+              </a:rPr>
+              <a:t> Άμεση προβολή προβλέψεων κίνησης και δεικτών βεβαιότητας (</a:t>
+            </a:r>
+            <a:r>
+              <a:rPr kumimoji="0" lang="el-GR" altLang="el-GR" sz="1400" b="0" i="0" u="none" strike="noStrike" cap="none" normalizeH="0" baseline="0" dirty="0" err="1">
+                <a:ln>
+                  <a:noFill/>
+                </a:ln>
+                <a:solidFill>
+                  <a:schemeClr val="tx1"/>
+                </a:solidFill>
+                <a:effectLst/>
+              </a:rPr>
+              <a:t>confidence</a:t>
+            </a:r>
+            <a:r>
+              <a:rPr kumimoji="0" lang="el-GR" altLang="el-GR" sz="1400" b="0" i="0" u="none" strike="noStrike" cap="none" normalizeH="0" baseline="0" dirty="0">
+                <a:ln>
+                  <a:noFill/>
+                </a:ln>
+                <a:solidFill>
+                  <a:schemeClr val="tx1"/>
+                </a:solidFill>
+                <a:effectLst/>
+              </a:rPr>
+              <a:t>).</a:t>
+            </a:r>
+          </a:p>
+          <a:p>
+            <a:pPr marL="0" marR="0" lvl="0" indent="0" algn="l" defTabSz="914400" rtl="0" eaLnBrk="0" fontAlgn="base" latinLnBrk="0" hangingPunct="0">
+              <a:lnSpc>
+                <a:spcPct val="100000"/>
+              </a:lnSpc>
+              <a:spcBef>
+                <a:spcPct val="0"/>
+              </a:spcBef>
+              <a:spcAft>
+                <a:spcPct val="0"/>
+              </a:spcAft>
+              <a:buClrTx/>
+              <a:buSzTx/>
+              <a:tabLst/>
+            </a:pPr>
+            <a:endParaRPr kumimoji="0" lang="el-GR" altLang="el-GR" sz="1400" b="0" i="0" u="none" strike="noStrike" cap="none" normalizeH="0" baseline="0" dirty="0">
+              <a:ln>
+                <a:noFill/>
+              </a:ln>
+              <a:solidFill>
+                <a:schemeClr val="tx1"/>
+              </a:solidFill>
+              <a:effectLst/>
+            </a:endParaRPr>
+          </a:p>
+          <a:p>
+            <a:pPr marL="0" marR="0" lvl="0" indent="0" algn="l" defTabSz="914400" rtl="0" eaLnBrk="0" fontAlgn="base" latinLnBrk="0" hangingPunct="0">
+              <a:lnSpc>
+                <a:spcPct val="100000"/>
+              </a:lnSpc>
+              <a:spcBef>
+                <a:spcPct val="0"/>
+              </a:spcBef>
+              <a:spcAft>
+                <a:spcPct val="0"/>
+              </a:spcAft>
+              <a:buClrTx/>
+              <a:buSzTx/>
+              <a:buFontTx/>
+              <a:buChar char="•"/>
+              <a:tabLst/>
+            </a:pPr>
+            <a:r>
+              <a:rPr kumimoji="0" lang="el-GR" altLang="el-GR" sz="1400" b="1" i="0" u="none" strike="noStrike" cap="none" normalizeH="0" baseline="0" dirty="0">
+                <a:ln>
+                  <a:noFill/>
+                </a:ln>
+                <a:solidFill>
+                  <a:schemeClr val="tx1"/>
+                </a:solidFill>
+                <a:effectLst/>
+              </a:rPr>
+              <a:t>Διαχείριση Ειδοποιήσεων:</a:t>
+            </a:r>
+            <a:r>
+              <a:rPr kumimoji="0" lang="el-GR" altLang="el-GR" sz="1400" b="0" i="0" u="none" strike="noStrike" cap="none" normalizeH="0" baseline="0" dirty="0">
+                <a:ln>
+                  <a:noFill/>
+                </a:ln>
+                <a:solidFill>
+                  <a:schemeClr val="tx1"/>
+                </a:solidFill>
+                <a:effectLst/>
+              </a:rPr>
+              <a:t> Κεντρικός έλεγχος και δυνατότητα άμεσης επίλυσης κρίσιμων συμβάντων (</a:t>
+            </a:r>
+            <a:r>
+              <a:rPr kumimoji="0" lang="el-GR" altLang="el-GR" sz="1400" b="0" i="0" u="none" strike="noStrike" cap="none" normalizeH="0" baseline="0" dirty="0" err="1">
+                <a:ln>
+                  <a:noFill/>
+                </a:ln>
+                <a:solidFill>
+                  <a:schemeClr val="tx1"/>
+                </a:solidFill>
+                <a:effectLst/>
+              </a:rPr>
+              <a:t>Active</a:t>
+            </a:r>
+            <a:r>
+              <a:rPr kumimoji="0" lang="el-GR" altLang="el-GR" sz="1400" b="0" i="0" u="none" strike="noStrike" cap="none" normalizeH="0" baseline="0" dirty="0">
+                <a:ln>
+                  <a:noFill/>
+                </a:ln>
+                <a:solidFill>
+                  <a:schemeClr val="tx1"/>
+                </a:solidFill>
+                <a:effectLst/>
+              </a:rPr>
+              <a:t> </a:t>
+            </a:r>
+            <a:r>
+              <a:rPr kumimoji="0" lang="el-GR" altLang="el-GR" sz="1400" b="0" i="0" u="none" strike="noStrike" cap="none" normalizeH="0" baseline="0" dirty="0" err="1">
+                <a:ln>
+                  <a:noFill/>
+                </a:ln>
+                <a:solidFill>
+                  <a:schemeClr val="tx1"/>
+                </a:solidFill>
+                <a:effectLst/>
+              </a:rPr>
+              <a:t>Alerts</a:t>
+            </a:r>
+            <a:r>
+              <a:rPr kumimoji="0" lang="el-GR" altLang="el-GR" sz="1400" b="0" i="0" u="none" strike="noStrike" cap="none" normalizeH="0" baseline="0" dirty="0">
+                <a:ln>
+                  <a:noFill/>
+                </a:ln>
+                <a:solidFill>
+                  <a:schemeClr val="tx1"/>
+                </a:solidFill>
+                <a:effectLst/>
+              </a:rPr>
+              <a:t> &amp; </a:t>
+            </a:r>
+            <a:r>
+              <a:rPr kumimoji="0" lang="el-GR" altLang="el-GR" sz="1400" b="0" i="0" u="none" strike="noStrike" cap="none" normalizeH="0" baseline="0" dirty="0" err="1">
+                <a:ln>
+                  <a:noFill/>
+                </a:ln>
+                <a:solidFill>
+                  <a:schemeClr val="tx1"/>
+                </a:solidFill>
+                <a:effectLst/>
+              </a:rPr>
+              <a:t>Action</a:t>
+            </a:r>
+            <a:r>
+              <a:rPr kumimoji="0" lang="el-GR" altLang="el-GR" sz="1400" b="0" i="0" u="none" strike="noStrike" cap="none" normalizeH="0" baseline="0" dirty="0">
+                <a:ln>
+                  <a:noFill/>
+                </a:ln>
+                <a:solidFill>
+                  <a:schemeClr val="tx1"/>
+                </a:solidFill>
+                <a:effectLst/>
+              </a:rPr>
+              <a:t> </a:t>
+            </a:r>
+            <a:r>
+              <a:rPr kumimoji="0" lang="el-GR" altLang="el-GR" sz="1400" b="0" i="0" u="none" strike="noStrike" cap="none" normalizeH="0" baseline="0" dirty="0" err="1">
+                <a:ln>
+                  <a:noFill/>
+                </a:ln>
+                <a:solidFill>
+                  <a:schemeClr val="tx1"/>
+                </a:solidFill>
+                <a:effectLst/>
+              </a:rPr>
+              <a:t>Controls</a:t>
+            </a:r>
+            <a:r>
+              <a:rPr kumimoji="0" lang="el-GR" altLang="el-GR" sz="1400" b="0" i="0" u="none" strike="noStrike" cap="none" normalizeH="0" baseline="0" dirty="0">
+                <a:ln>
+                  <a:noFill/>
+                </a:ln>
+                <a:solidFill>
+                  <a:schemeClr val="tx1"/>
+                </a:solidFill>
+                <a:effectLst/>
+              </a:rPr>
+              <a:t>).</a:t>
+            </a:r>
+          </a:p>
+        </p:txBody>
+      </p:sp>
     </p:spTree>
     <p:extLst>
       <p:ext uri="{BB962C8B-B14F-4D97-AF65-F5344CB8AC3E}">
@@ -16787,6 +17209,91 @@
               <a:rPr lang="en-US" dirty="0"/>
             </a:br>
             <a:endParaRPr lang="el-GR" dirty="0"/>
+          </a:p>
+        </p:txBody>
+      </p:sp>
+      <p:pic>
+        <p:nvPicPr>
+          <p:cNvPr id="9" name="Εικόνα 8">
+            <a:extLst>
+              <a:ext uri="{FF2B5EF4-FFF2-40B4-BE49-F238E27FC236}">
+                <a16:creationId xmlns:a16="http://schemas.microsoft.com/office/drawing/2014/main" id="{2A0EDA79-8DFE-9CE6-CD9D-04B9A6CD89FB}"/>
+              </a:ext>
+            </a:extLst>
+          </p:cNvPr>
+          <p:cNvPicPr>
+            <a:picLocks noChangeAspect="1"/>
+          </p:cNvPicPr>
+          <p:nvPr/>
+        </p:nvPicPr>
+        <p:blipFill>
+          <a:blip r:embed="rId2"/>
+          <a:stretch>
+            <a:fillRect/>
+          </a:stretch>
+        </p:blipFill>
+        <p:spPr>
+          <a:xfrm>
+            <a:off x="4754335" y="2556387"/>
+            <a:ext cx="6478405" cy="2750266"/>
+          </a:xfrm>
+          <a:prstGeom prst="rect">
+            <a:avLst/>
+          </a:prstGeom>
+        </p:spPr>
+      </p:pic>
+      <p:sp>
+        <p:nvSpPr>
+          <p:cNvPr id="12" name="TextBox 11">
+            <a:extLst>
+              <a:ext uri="{FF2B5EF4-FFF2-40B4-BE49-F238E27FC236}">
+                <a16:creationId xmlns:a16="http://schemas.microsoft.com/office/drawing/2014/main" id="{17432334-6DD0-A083-016B-2FA2094D9403}"/>
+              </a:ext>
+            </a:extLst>
+          </p:cNvPr>
+          <p:cNvSpPr txBox="1"/>
+          <p:nvPr/>
+        </p:nvSpPr>
+        <p:spPr>
+          <a:xfrm>
+            <a:off x="491612" y="2373839"/>
+            <a:ext cx="3903407" cy="2585323"/>
+          </a:xfrm>
+          <a:prstGeom prst="rect">
+            <a:avLst/>
+          </a:prstGeom>
+          <a:noFill/>
+        </p:spPr>
+        <p:txBody>
+          <a:bodyPr wrap="square">
+            <a:spAutoFit/>
+          </a:bodyPr>
+          <a:lstStyle/>
+          <a:p>
+            <a:r>
+              <a:rPr lang="el-GR" b="1" dirty="0"/>
+              <a:t>Επιχειρησιακός Έλεγχος (Smart </a:t>
+            </a:r>
+            <a:r>
+              <a:rPr lang="el-GR" b="1" dirty="0" err="1"/>
+              <a:t>Bin</a:t>
+            </a:r>
+            <a:r>
+              <a:rPr lang="el-GR" b="1" dirty="0"/>
+              <a:t> </a:t>
+            </a:r>
+            <a:r>
+              <a:rPr lang="el-GR" b="1" dirty="0" err="1"/>
+              <a:t>Ops</a:t>
+            </a:r>
+            <a:r>
+              <a:rPr lang="el-GR" b="1" dirty="0"/>
+              <a:t>):</a:t>
+            </a:r>
+            <a:r>
+              <a:rPr lang="el-GR" dirty="0"/>
+              <a:t> Προσφέρει άμεση εποπτεία της φυσικής κατάστασης του κάδου (επίπεδο πλήρωσης, βάρος) και καταγράφει σε πραγματικό χρόνο τον πλήρη κύκλο ζωής των ειδοποιήσεων (εμφάνιση, αναγνώριση, επίλυση) μέσω του REST API</a:t>
+            </a:r>
           </a:p>
         </p:txBody>
       </p:sp>
